--- a/Bao_Cao_Viettel_Cong_No_VTA_Slide.pptx
+++ b/Bao_Cao_Viettel_Cong_No_VTA_Slide.pptx
@@ -3108,7 +3108,7 @@
             <a:avLst/>
           </a:prstGeom>
           <a:solidFill>
-            <a:srgbClr val="F8FAFC"/>
+            <a:srgbClr val="F1F5F9"/>
           </a:solidFill>
           <a:ln>
             <a:noFill/>
@@ -3138,7 +3138,7 @@
       </p:sp>
       <p:sp>
         <p:nvSpPr>
-          <p:cNvPr id="3" name="Rectangle 2"/>
+          <p:cNvPr id="3" name="Rounded Rectangle 2"/>
           <p:cNvSpPr/>
           <p:nvPr/>
         </p:nvSpPr>
@@ -3147,15 +3147,15 @@
             <a:off x="731520" y="731520"/>
             <a:ext cx="10728655" cy="5394960"/>
           </a:xfrm>
-          <a:prstGeom prst="rect">
+          <a:prstGeom prst="roundRect">
             <a:avLst/>
           </a:prstGeom>
           <a:solidFill>
             <a:srgbClr val="FFFFFF"/>
           </a:solidFill>
-          <a:ln>
+          <a:ln w="25400">
             <a:solidFill>
-              <a:srgbClr val="E2E8F0"/>
+              <a:srgbClr val="EE0033"/>
             </a:solidFill>
           </a:ln>
         </p:spPr>
@@ -3189,8 +3189,8 @@
         </p:nvSpPr>
         <p:spPr>
           <a:xfrm>
-            <a:off x="1188720" y="1188720"/>
-            <a:ext cx="2011680" cy="548640"/>
+            <a:off x="4754880" y="1188720"/>
+            <a:ext cx="2681935" cy="1005840"/>
           </a:xfrm>
           <a:prstGeom prst="roundRect">
             <a:avLst/>
@@ -3221,7 +3221,7 @@
           <a:lstStyle/>
           <a:p>
             <a:pPr algn="ctr">
-              <a:defRPr sz="2400" b="1">
+              <a:defRPr sz="3200" b="1">
                 <a:solidFill>
                   <a:srgbClr val="FFFFFF"/>
                 </a:solidFill>
@@ -3229,6 +3229,18 @@
             </a:pPr>
             <a:r>
               <a:t>viettel</a:t>
+            </a:r>
+          </a:p>
+          <a:p>
+            <a:pPr algn="ctr">
+              <a:defRPr sz="1100">
+                <a:solidFill>
+                  <a:srgbClr val="FFFFFF"/>
+                </a:solidFill>
+              </a:defRPr>
+            </a:pPr>
+            <a:r>
+              <a:t>Theo cách của bạn</a:t>
             </a:r>
           </a:p>
         </p:txBody>
@@ -3241,8 +3253,8 @@
         </p:nvSpPr>
         <p:spPr>
           <a:xfrm>
-            <a:off x="1188720" y="2011680"/>
-            <a:ext cx="9784080" cy="3474720"/>
+            <a:off x="1097280" y="2468880"/>
+            <a:ext cx="9966960" cy="3291840"/>
           </a:xfrm>
           <a:prstGeom prst="rect">
             <a:avLst/>
@@ -3255,7 +3267,7 @@
           </a:bodyPr>
           <a:lstStyle/>
           <a:p>
-            <a:pPr>
+            <a:pPr algn="ctr">
               <a:defRPr sz="2600" b="1">
                 <a:solidFill>
                   <a:srgbClr val="1E293B"/>
@@ -3267,11 +3279,11 @@
             </a:r>
           </a:p>
           <a:p>
-            <a:pPr>
+            <a:pPr algn="ctr">
               <a:spcBef>
-                <a:spcPts val="800"/>
+                <a:spcPts val="600"/>
               </a:spcBef>
-              <a:defRPr sz="2200" b="1">
+              <a:defRPr sz="2000" b="1">
                 <a:solidFill>
                   <a:srgbClr val="EE0033"/>
                 </a:solidFill>
@@ -3282,11 +3294,11 @@
             </a:r>
           </a:p>
           <a:p>
-            <a:pPr>
+            <a:pPr algn="ctr">
               <a:spcBef>
-                <a:spcPts val="2000"/>
+                <a:spcPts val="1600"/>
               </a:spcBef>
-              <a:defRPr sz="1400">
+              <a:defRPr sz="1300">
                 <a:solidFill>
                   <a:srgbClr val="64748B"/>
                 </a:solidFill>
@@ -3305,9 +3317,9 @@
             </a:r>
           </a:p>
           <a:p>
-            <a:pPr>
+            <a:pPr algn="ctr">
               <a:spcBef>
-                <a:spcPts val="3000"/>
+                <a:spcPts val="2400"/>
               </a:spcBef>
               <a:defRPr sz="1100" i="1">
                 <a:solidFill>
@@ -3341,72 +3353,23 @@
       <p:grpSpPr/>
       <p:sp>
         <p:nvSpPr>
-          <p:cNvPr id="2" name="TextBox 1"/>
-          <p:cNvSpPr txBox="1"/>
+          <p:cNvPr id="2" name="Rectangle 1"/>
+          <p:cNvSpPr/>
           <p:nvPr/>
         </p:nvSpPr>
         <p:spPr>
           <a:xfrm>
-            <a:off x="548640" y="365760"/>
-            <a:ext cx="11094415" cy="822960"/>
-          </a:xfrm>
-          <a:prstGeom prst="rect">
-            <a:avLst/>
-          </a:prstGeom>
-          <a:noFill/>
-        </p:spPr>
-        <p:txBody>
-          <a:bodyPr wrap="square" lIns="0" tIns="0" rIns="0" bIns="0">
-            <a:spAutoFit/>
-          </a:bodyPr>
-          <a:lstStyle/>
-          <a:p>
-            <a:pPr>
-              <a:defRPr sz="1000" b="1">
-                <a:solidFill>
-                  <a:srgbClr val="EE0033"/>
-                </a:solidFill>
-              </a:defRPr>
-            </a:pPr>
-            <a:r>
-              <a:t>BÁO CÁO TỔNG HỢP</a:t>
-            </a:r>
-          </a:p>
-          <a:p>
-            <a:pPr>
-              <a:defRPr sz="2000" b="1">
-                <a:solidFill>
-                  <a:srgbClr val="1E293B"/>
-                </a:solidFill>
-              </a:defRPr>
-            </a:pPr>
-            <a:r>
-              <a:t>TỔNG QUAN BỨC TRANH QUẢN LÝ HỢP ĐỒNG &amp; CÔNG TRÌNH</a:t>
-            </a:r>
-          </a:p>
-        </p:txBody>
-      </p:sp>
-      <p:sp>
-        <p:nvSpPr>
-          <p:cNvPr id="3" name="Rectangle 2"/>
-          <p:cNvSpPr/>
-          <p:nvPr/>
-        </p:nvSpPr>
-        <p:spPr>
-          <a:xfrm>
-            <a:off x="548640" y="1234440"/>
-            <a:ext cx="11094415" cy="36576"/>
+            <a:off x="0" y="0"/>
+            <a:ext cx="12191695" cy="6858000"/>
           </a:xfrm>
           <a:prstGeom prst="rect">
             <a:avLst/>
           </a:prstGeom>
           <a:solidFill>
-            <a:srgbClr val="EE0033"/>
+            <a:srgbClr val="F1F5F9"/>
           </a:solidFill>
           <a:ln>
-            <a:solidFill>
-              <a:srgbClr val="EE0033"/>
-            </a:solidFill>
+            <a:noFill/>
           </a:ln>
         </p:spPr>
         <p:style>
@@ -3433,350 +3396,14 @@
       </p:sp>
       <p:sp>
         <p:nvSpPr>
-          <p:cNvPr id="4" name="Rounded Rectangle 3"/>
+          <p:cNvPr id="3" name="Rectangle 2"/>
           <p:cNvSpPr/>
           <p:nvPr/>
         </p:nvSpPr>
         <p:spPr>
           <a:xfrm>
-            <a:off x="548640" y="1463040"/>
-            <a:ext cx="2651760" cy="1645920"/>
-          </a:xfrm>
-          <a:prstGeom prst="roundRect">
-            <a:avLst/>
-          </a:prstGeom>
-          <a:solidFill>
-            <a:srgbClr val="E2E8F0"/>
-          </a:solidFill>
-          <a:ln>
-            <a:solidFill>
-              <a:srgbClr val="E2E8F0"/>
-            </a:solidFill>
-          </a:ln>
-        </p:spPr>
-        <p:style>
-          <a:lnRef idx="1">
-            <a:schemeClr val="accent1"/>
-          </a:lnRef>
-          <a:fillRef idx="3">
-            <a:schemeClr val="accent1"/>
-          </a:fillRef>
-          <a:effectRef idx="2">
-            <a:schemeClr val="accent1"/>
-          </a:effectRef>
-          <a:fontRef idx="minor">
-            <a:schemeClr val="lt1"/>
-          </a:fontRef>
-        </p:style>
-        <p:txBody>
-          <a:bodyPr rtlCol="0" anchor="ctr" wrap="square" lIns="137160" tIns="137160" rIns="137160" bIns="137160"/>
-          <a:lstStyle/>
-          <a:p>
-            <a:pPr algn="ctr">
-              <a:defRPr sz="1000" b="1">
-                <a:solidFill>
-                  <a:srgbClr val="64748B"/>
-                </a:solidFill>
-              </a:defRPr>
-            </a:pPr>
-            <a:r>
-              <a:t>TỔNG QUY MÔ HỢP ĐỒNG</a:t>
-            </a:r>
-          </a:p>
-          <a:p>
-            <a:pPr>
-              <a:spcBef>
-                <a:spcPts val="400"/>
-              </a:spcBef>
-              <a:defRPr sz="2400" b="1">
-                <a:solidFill>
-                  <a:srgbClr val="1E293B"/>
-                </a:solidFill>
-              </a:defRPr>
-            </a:pPr>
-            <a:r>
-              <a:t>649 HĐ</a:t>
-            </a:r>
-          </a:p>
-          <a:p>
-            <a:pPr>
-              <a:spcBef>
-                <a:spcPts val="400"/>
-              </a:spcBef>
-              <a:defRPr sz="1100" b="1">
-                <a:solidFill>
-                  <a:srgbClr val="1E293B"/>
-                </a:solidFill>
-              </a:defRPr>
-            </a:pPr>
-            <a:r>
-              <a:t>12,834 Công Trình</a:t>
-            </a:r>
-          </a:p>
-        </p:txBody>
-      </p:sp>
-      <p:sp>
-        <p:nvSpPr>
-          <p:cNvPr id="5" name="Rounded Rectangle 4"/>
-          <p:cNvSpPr/>
-          <p:nvPr/>
-        </p:nvSpPr>
-        <p:spPr>
-          <a:xfrm>
-            <a:off x="3383280" y="1463040"/>
-            <a:ext cx="2651760" cy="1645920"/>
-          </a:xfrm>
-          <a:prstGeom prst="roundRect">
-            <a:avLst/>
-          </a:prstGeom>
-          <a:solidFill>
-            <a:srgbClr val="FEF2F2"/>
-          </a:solidFill>
-          <a:ln>
-            <a:solidFill>
-              <a:srgbClr val="EE0033"/>
-            </a:solidFill>
-          </a:ln>
-        </p:spPr>
-        <p:style>
-          <a:lnRef idx="1">
-            <a:schemeClr val="accent1"/>
-          </a:lnRef>
-          <a:fillRef idx="3">
-            <a:schemeClr val="accent1"/>
-          </a:fillRef>
-          <a:effectRef idx="2">
-            <a:schemeClr val="accent1"/>
-          </a:effectRef>
-          <a:fontRef idx="minor">
-            <a:schemeClr val="lt1"/>
-          </a:fontRef>
-        </p:style>
-        <p:txBody>
-          <a:bodyPr rtlCol="0" anchor="ctr" wrap="square" lIns="137160" tIns="137160" rIns="137160" bIns="137160"/>
-          <a:lstStyle/>
-          <a:p>
-            <a:pPr algn="ctr">
-              <a:defRPr sz="1000" b="1">
-                <a:solidFill>
-                  <a:srgbClr val="64748B"/>
-                </a:solidFill>
-              </a:defRPr>
-            </a:pPr>
-            <a:r>
-              <a:t>TỒN CÔNG NỢ VTA ĐẦU TƯ</a:t>
-            </a:r>
-          </a:p>
-          <a:p>
-            <a:pPr>
-              <a:spcBef>
-                <a:spcPts val="400"/>
-              </a:spcBef>
-              <a:defRPr sz="2400" b="1">
-                <a:solidFill>
-                  <a:srgbClr val="EE0033"/>
-                </a:solidFill>
-              </a:defRPr>
-            </a:pPr>
-            <a:r>
-              <a:t>548.32 Tỷ</a:t>
-            </a:r>
-          </a:p>
-          <a:p>
-            <a:pPr>
-              <a:spcBef>
-                <a:spcPts val="400"/>
-              </a:spcBef>
-              <a:defRPr sz="1100" b="1">
-                <a:solidFill>
-                  <a:srgbClr val="1E293B"/>
-                </a:solidFill>
-              </a:defRPr>
-            </a:pPr>
-            <a:r>
-              <a:t>150 HĐ Nguồn Đầu Tư</a:t>
-            </a:r>
-          </a:p>
-        </p:txBody>
-      </p:sp>
-      <p:sp>
-        <p:nvSpPr>
-          <p:cNvPr id="6" name="Rounded Rectangle 5"/>
-          <p:cNvSpPr/>
-          <p:nvPr/>
-        </p:nvSpPr>
-        <p:spPr>
-          <a:xfrm>
-            <a:off x="6217920" y="1463040"/>
-            <a:ext cx="2651760" cy="1645920"/>
-          </a:xfrm>
-          <a:prstGeom prst="roundRect">
-            <a:avLst/>
-          </a:prstGeom>
-          <a:solidFill>
-            <a:srgbClr val="FFFFFF"/>
-          </a:solidFill>
-          <a:ln>
-            <a:solidFill>
-              <a:srgbClr val="E2E8F0"/>
-            </a:solidFill>
-          </a:ln>
-        </p:spPr>
-        <p:style>
-          <a:lnRef idx="1">
-            <a:schemeClr val="accent1"/>
-          </a:lnRef>
-          <a:fillRef idx="3">
-            <a:schemeClr val="accent1"/>
-          </a:fillRef>
-          <a:effectRef idx="2">
-            <a:schemeClr val="accent1"/>
-          </a:effectRef>
-          <a:fontRef idx="minor">
-            <a:schemeClr val="lt1"/>
-          </a:fontRef>
-        </p:style>
-        <p:txBody>
-          <a:bodyPr rtlCol="0" anchor="ctr" wrap="square" lIns="137160" tIns="137160" rIns="137160" bIns="137160"/>
-          <a:lstStyle/>
-          <a:p>
-            <a:pPr algn="ctr">
-              <a:defRPr sz="1000" b="1">
-                <a:solidFill>
-                  <a:srgbClr val="64748B"/>
-                </a:solidFill>
-              </a:defRPr>
-            </a:pPr>
-            <a:r>
-              <a:t>TỔNG NGUỒN CHI PHÍ</a:t>
-            </a:r>
-          </a:p>
-          <a:p>
-            <a:pPr>
-              <a:spcBef>
-                <a:spcPts val="400"/>
-              </a:spcBef>
-              <a:defRPr sz="2400" b="1">
-                <a:solidFill>
-                  <a:srgbClr val="D97706"/>
-                </a:solidFill>
-              </a:defRPr>
-            </a:pPr>
-            <a:r>
-              <a:t>64.73 Tỷ</a:t>
-            </a:r>
-          </a:p>
-          <a:p>
-            <a:pPr>
-              <a:spcBef>
-                <a:spcPts val="400"/>
-              </a:spcBef>
-              <a:defRPr sz="1100" b="1">
-                <a:solidFill>
-                  <a:srgbClr val="1E293B"/>
-                </a:solidFill>
-              </a:defRPr>
-            </a:pPr>
-            <a:r>
-              <a:t>499 HĐ Nguồn Chi Phí</a:t>
-            </a:r>
-          </a:p>
-        </p:txBody>
-      </p:sp>
-      <p:sp>
-        <p:nvSpPr>
-          <p:cNvPr id="7" name="Rounded Rectangle 6"/>
-          <p:cNvSpPr/>
-          <p:nvPr/>
-        </p:nvSpPr>
-        <p:spPr>
-          <a:xfrm>
-            <a:off x="9052560" y="1463040"/>
-            <a:ext cx="2651760" cy="1645920"/>
-          </a:xfrm>
-          <a:prstGeom prst="roundRect">
-            <a:avLst/>
-          </a:prstGeom>
-          <a:solidFill>
-            <a:srgbClr val="FEF2F2"/>
-          </a:solidFill>
-          <a:ln>
-            <a:solidFill>
-              <a:srgbClr val="EE0033"/>
-            </a:solidFill>
-          </a:ln>
-        </p:spPr>
-        <p:style>
-          <a:lnRef idx="1">
-            <a:schemeClr val="accent1"/>
-          </a:lnRef>
-          <a:fillRef idx="3">
-            <a:schemeClr val="accent1"/>
-          </a:fillRef>
-          <a:effectRef idx="2">
-            <a:schemeClr val="accent1"/>
-          </a:effectRef>
-          <a:fontRef idx="minor">
-            <a:schemeClr val="lt1"/>
-          </a:fontRef>
-        </p:style>
-        <p:txBody>
-          <a:bodyPr rtlCol="0" anchor="ctr" wrap="square" lIns="137160" tIns="137160" rIns="137160" bIns="137160"/>
-          <a:lstStyle/>
-          <a:p>
-            <a:pPr algn="ctr">
-              <a:defRPr sz="1000" b="1">
-                <a:solidFill>
-                  <a:srgbClr val="64748B"/>
-                </a:solidFill>
-              </a:defRPr>
-            </a:pPr>
-            <a:r>
-              <a:t>🔥 CẢNH BÁO HĐ &lt; 2025</a:t>
-            </a:r>
-          </a:p>
-          <a:p>
-            <a:pPr>
-              <a:spcBef>
-                <a:spcPts val="400"/>
-              </a:spcBef>
-              <a:defRPr sz="2400" b="1">
-                <a:solidFill>
-                  <a:srgbClr val="EE0033"/>
-                </a:solidFill>
-              </a:defRPr>
-            </a:pPr>
-            <a:r>
-              <a:t>78 HĐ</a:t>
-            </a:r>
-          </a:p>
-          <a:p>
-            <a:pPr>
-              <a:spcBef>
-                <a:spcPts val="400"/>
-              </a:spcBef>
-              <a:defRPr sz="1100" b="1">
-                <a:solidFill>
-                  <a:srgbClr val="1E293B"/>
-                </a:solidFill>
-              </a:defRPr>
-            </a:pPr>
-            <a:r>
-              <a:t>14.78 Tỷ (Chi phí tồn cũ)</a:t>
-            </a:r>
-          </a:p>
-        </p:txBody>
-      </p:sp>
-      <p:sp>
-        <p:nvSpPr>
-          <p:cNvPr id="8" name="Rectangle 7"/>
-          <p:cNvSpPr/>
-          <p:nvPr/>
-        </p:nvSpPr>
-        <p:spPr>
-          <a:xfrm>
-            <a:off x="548640" y="3291840"/>
-            <a:ext cx="11094415" cy="3017520"/>
+            <a:off x="0" y="0"/>
+            <a:ext cx="12191695" cy="1051560"/>
           </a:xfrm>
           <a:prstGeom prst="rect">
             <a:avLst/>
@@ -3805,28 +3432,563 @@
           </a:fontRef>
         </p:style>
         <p:txBody>
-          <a:bodyPr rtlCol="0" anchor="ctr" wrap="square" lIns="228600" tIns="228600" rIns="228600" bIns="228600"/>
+          <a:bodyPr rtlCol="0" anchor="ctr"/>
+          <a:lstStyle/>
+          <a:p>
+            <a:pPr algn="ctr"/>
+          </a:p>
+        </p:txBody>
+      </p:sp>
+      <p:sp>
+        <p:nvSpPr>
+          <p:cNvPr id="4" name="Rectangle 3"/>
+          <p:cNvSpPr/>
+          <p:nvPr/>
+        </p:nvSpPr>
+        <p:spPr>
+          <a:xfrm>
+            <a:off x="0" y="0"/>
+            <a:ext cx="12191695" cy="73152"/>
+          </a:xfrm>
+          <a:prstGeom prst="rect">
+            <a:avLst/>
+          </a:prstGeom>
+          <a:solidFill>
+            <a:srgbClr val="EE0033"/>
+          </a:solidFill>
+          <a:ln>
+            <a:noFill/>
+          </a:ln>
+        </p:spPr>
+        <p:style>
+          <a:lnRef idx="1">
+            <a:schemeClr val="accent1"/>
+          </a:lnRef>
+          <a:fillRef idx="3">
+            <a:schemeClr val="accent1"/>
+          </a:fillRef>
+          <a:effectRef idx="2">
+            <a:schemeClr val="accent1"/>
+          </a:effectRef>
+          <a:fontRef idx="minor">
+            <a:schemeClr val="lt1"/>
+          </a:fontRef>
+        </p:style>
+        <p:txBody>
+          <a:bodyPr rtlCol="0" anchor="ctr"/>
+          <a:lstStyle/>
+          <a:p>
+            <a:pPr algn="ctr"/>
+          </a:p>
+        </p:txBody>
+      </p:sp>
+      <p:sp>
+        <p:nvSpPr>
+          <p:cNvPr id="5" name="Rounded Rectangle 4"/>
+          <p:cNvSpPr/>
+          <p:nvPr/>
+        </p:nvSpPr>
+        <p:spPr>
+          <a:xfrm>
+            <a:off x="457200" y="182880"/>
+            <a:ext cx="1463040" cy="640080"/>
+          </a:xfrm>
+          <a:prstGeom prst="roundRect">
+            <a:avLst/>
+          </a:prstGeom>
+          <a:solidFill>
+            <a:srgbClr val="EE0033"/>
+          </a:solidFill>
+          <a:ln>
+            <a:noFill/>
+          </a:ln>
+        </p:spPr>
+        <p:style>
+          <a:lnRef idx="1">
+            <a:schemeClr val="accent1"/>
+          </a:lnRef>
+          <a:fillRef idx="3">
+            <a:schemeClr val="accent1"/>
+          </a:fillRef>
+          <a:effectRef idx="2">
+            <a:schemeClr val="accent1"/>
+          </a:effectRef>
+          <a:fontRef idx="minor">
+            <a:schemeClr val="lt1"/>
+          </a:fontRef>
+        </p:style>
+        <p:txBody>
+          <a:bodyPr rtlCol="0" anchor="ctr" wrap="none" lIns="0" tIns="0" rIns="0" bIns="0"/>
           <a:lstStyle/>
           <a:p>
             <a:pPr algn="ctr">
-              <a:defRPr sz="1400" b="1">
+              <a:defRPr sz="1600" b="1">
+                <a:solidFill>
+                  <a:srgbClr val="FFFFFF"/>
+                </a:solidFill>
+              </a:defRPr>
+            </a:pPr>
+            <a:r>
+              <a:t>viettel</a:t>
+            </a:r>
+          </a:p>
+          <a:p>
+            <a:pPr algn="ctr">
+              <a:defRPr sz="700">
+                <a:solidFill>
+                  <a:srgbClr val="FFFFFF"/>
+                </a:solidFill>
+              </a:defRPr>
+            </a:pPr>
+            <a:r>
+              <a:t>Theo cách của bạn</a:t>
+            </a:r>
+          </a:p>
+        </p:txBody>
+      </p:sp>
+      <p:sp>
+        <p:nvSpPr>
+          <p:cNvPr id="6" name="TextBox 5"/>
+          <p:cNvSpPr txBox="1"/>
+          <p:nvPr/>
+        </p:nvSpPr>
+        <p:spPr>
+          <a:xfrm>
+            <a:off x="2103120" y="182880"/>
+            <a:ext cx="9601200" cy="731520"/>
+          </a:xfrm>
+          <a:prstGeom prst="rect">
+            <a:avLst/>
+          </a:prstGeom>
+          <a:noFill/>
+        </p:spPr>
+        <p:txBody>
+          <a:bodyPr wrap="square" lIns="0" tIns="0" rIns="0" bIns="0">
+            <a:spAutoFit/>
+          </a:bodyPr>
+          <a:lstStyle/>
+          <a:p>
+            <a:pPr>
+              <a:defRPr sz="900" b="1">
                 <a:solidFill>
                   <a:srgbClr val="EE0033"/>
                 </a:solidFill>
               </a:defRPr>
             </a:pPr>
             <a:r>
-              <a:t>NHỮNG ĐIỂM NỔI CỘM CẦN ĐÁNH TRỌNG TÂM QUẢN TRỊ:</a:t>
+              <a:t>TỔNG QUAN BỨC TRANH</a:t>
+            </a:r>
+          </a:p>
+          <a:p>
+            <a:pPr>
+              <a:defRPr sz="1800" b="1">
+                <a:solidFill>
+                  <a:srgbClr val="1E293B"/>
+                </a:solidFill>
+              </a:defRPr>
+            </a:pPr>
+            <a:r>
+              <a:t>BỨC TRANH TOÀN CẢNH QUẢN LÝ HỢP ĐỒNG &amp; CÔNG TRÌNH VIETTEL</a:t>
+            </a:r>
+          </a:p>
+        </p:txBody>
+      </p:sp>
+      <p:sp>
+        <p:nvSpPr>
+          <p:cNvPr id="7" name="Rounded Rectangle 6"/>
+          <p:cNvSpPr/>
+          <p:nvPr/>
+        </p:nvSpPr>
+        <p:spPr>
+          <a:xfrm>
+            <a:off x="548640" y="1371600"/>
+            <a:ext cx="2651760" cy="1554480"/>
+          </a:xfrm>
+          <a:prstGeom prst="roundRect">
+            <a:avLst/>
+          </a:prstGeom>
+          <a:solidFill>
+            <a:srgbClr val="FFFFFF"/>
+          </a:solidFill>
+          <a:ln w="19050">
+            <a:solidFill>
+              <a:srgbClr val="E2E8F0"/>
+            </a:solidFill>
+          </a:ln>
+        </p:spPr>
+        <p:style>
+          <a:lnRef idx="1">
+            <a:schemeClr val="accent1"/>
+          </a:lnRef>
+          <a:fillRef idx="3">
+            <a:schemeClr val="accent1"/>
+          </a:fillRef>
+          <a:effectRef idx="2">
+            <a:schemeClr val="accent1"/>
+          </a:effectRef>
+          <a:fontRef idx="minor">
+            <a:schemeClr val="lt1"/>
+          </a:fontRef>
+        </p:style>
+        <p:txBody>
+          <a:bodyPr rtlCol="0" anchor="ctr" wrap="square" lIns="137160" tIns="137160" rIns="137160" bIns="137160"/>
+          <a:lstStyle/>
+          <a:p>
+            <a:pPr algn="ctr">
+              <a:defRPr sz="1000" b="1">
+                <a:solidFill>
+                  <a:srgbClr val="64748B"/>
+                </a:solidFill>
+              </a:defRPr>
+            </a:pPr>
+            <a:r>
+              <a:t>TỔNG QUY MÔ HỢP ĐỒNG</a:t>
             </a:r>
           </a:p>
           <a:p>
             <a:pPr>
               <a:spcBef>
-                <a:spcPts val="800"/>
+                <a:spcPts val="400"/>
+              </a:spcBef>
+              <a:defRPr sz="2400" b="1">
+                <a:solidFill>
+                  <a:srgbClr val="1E293B"/>
+                </a:solidFill>
+              </a:defRPr>
+            </a:pPr>
+            <a:r>
+              <a:t>649 HĐ</a:t>
+            </a:r>
+          </a:p>
+          <a:p>
+            <a:pPr>
+              <a:spcBef>
+                <a:spcPts val="400"/>
+              </a:spcBef>
+              <a:defRPr sz="1100" b="1">
+                <a:solidFill>
+                  <a:srgbClr val="1E293B"/>
+                </a:solidFill>
+              </a:defRPr>
+            </a:pPr>
+            <a:r>
+              <a:t>12,834 Công Trình</a:t>
+            </a:r>
+          </a:p>
+        </p:txBody>
+      </p:sp>
+      <p:sp>
+        <p:nvSpPr>
+          <p:cNvPr id="8" name="Rounded Rectangle 7"/>
+          <p:cNvSpPr/>
+          <p:nvPr/>
+        </p:nvSpPr>
+        <p:spPr>
+          <a:xfrm>
+            <a:off x="3383280" y="1371600"/>
+            <a:ext cx="2651760" cy="1554480"/>
+          </a:xfrm>
+          <a:prstGeom prst="roundRect">
+            <a:avLst/>
+          </a:prstGeom>
+          <a:solidFill>
+            <a:srgbClr val="FEF2F2"/>
+          </a:solidFill>
+          <a:ln w="19050">
+            <a:solidFill>
+              <a:srgbClr val="EE0033"/>
+            </a:solidFill>
+          </a:ln>
+        </p:spPr>
+        <p:style>
+          <a:lnRef idx="1">
+            <a:schemeClr val="accent1"/>
+          </a:lnRef>
+          <a:fillRef idx="3">
+            <a:schemeClr val="accent1"/>
+          </a:fillRef>
+          <a:effectRef idx="2">
+            <a:schemeClr val="accent1"/>
+          </a:effectRef>
+          <a:fontRef idx="minor">
+            <a:schemeClr val="lt1"/>
+          </a:fontRef>
+        </p:style>
+        <p:txBody>
+          <a:bodyPr rtlCol="0" anchor="ctr" wrap="square" lIns="137160" tIns="137160" rIns="137160" bIns="137160"/>
+          <a:lstStyle/>
+          <a:p>
+            <a:pPr algn="ctr">
+              <a:defRPr sz="1000" b="1">
+                <a:solidFill>
+                  <a:srgbClr val="64748B"/>
+                </a:solidFill>
+              </a:defRPr>
+            </a:pPr>
+            <a:r>
+              <a:t>TỒN CÔNG NỢ VTA ĐẦU TƯ</a:t>
+            </a:r>
+          </a:p>
+          <a:p>
+            <a:pPr>
+              <a:spcBef>
+                <a:spcPts val="400"/>
+              </a:spcBef>
+              <a:defRPr sz="2400" b="1">
+                <a:solidFill>
+                  <a:srgbClr val="EE0033"/>
+                </a:solidFill>
+              </a:defRPr>
+            </a:pPr>
+            <a:r>
+              <a:t>548.32 Tỷ</a:t>
+            </a:r>
+          </a:p>
+          <a:p>
+            <a:pPr>
+              <a:spcBef>
+                <a:spcPts val="400"/>
+              </a:spcBef>
+              <a:defRPr sz="1100" b="1">
+                <a:solidFill>
+                  <a:srgbClr val="1E293B"/>
+                </a:solidFill>
+              </a:defRPr>
+            </a:pPr>
+            <a:r>
+              <a:t>150 HĐ Nguồn Đầu Tư</a:t>
+            </a:r>
+          </a:p>
+        </p:txBody>
+      </p:sp>
+      <p:sp>
+        <p:nvSpPr>
+          <p:cNvPr id="9" name="Rounded Rectangle 8"/>
+          <p:cNvSpPr/>
+          <p:nvPr/>
+        </p:nvSpPr>
+        <p:spPr>
+          <a:xfrm>
+            <a:off x="6217920" y="1371600"/>
+            <a:ext cx="2651760" cy="1554480"/>
+          </a:xfrm>
+          <a:prstGeom prst="roundRect">
+            <a:avLst/>
+          </a:prstGeom>
+          <a:solidFill>
+            <a:srgbClr val="FFFFFF"/>
+          </a:solidFill>
+          <a:ln w="19050">
+            <a:solidFill>
+              <a:srgbClr val="D97706"/>
+            </a:solidFill>
+          </a:ln>
+        </p:spPr>
+        <p:style>
+          <a:lnRef idx="1">
+            <a:schemeClr val="accent1"/>
+          </a:lnRef>
+          <a:fillRef idx="3">
+            <a:schemeClr val="accent1"/>
+          </a:fillRef>
+          <a:effectRef idx="2">
+            <a:schemeClr val="accent1"/>
+          </a:effectRef>
+          <a:fontRef idx="minor">
+            <a:schemeClr val="lt1"/>
+          </a:fontRef>
+        </p:style>
+        <p:txBody>
+          <a:bodyPr rtlCol="0" anchor="ctr" wrap="square" lIns="137160" tIns="137160" rIns="137160" bIns="137160"/>
+          <a:lstStyle/>
+          <a:p>
+            <a:pPr algn="ctr">
+              <a:defRPr sz="1000" b="1">
+                <a:solidFill>
+                  <a:srgbClr val="64748B"/>
+                </a:solidFill>
+              </a:defRPr>
+            </a:pPr>
+            <a:r>
+              <a:t>TỔNG NGUỒN CHI PHÍ</a:t>
+            </a:r>
+          </a:p>
+          <a:p>
+            <a:pPr>
+              <a:spcBef>
+                <a:spcPts val="400"/>
+              </a:spcBef>
+              <a:defRPr sz="2400" b="1">
+                <a:solidFill>
+                  <a:srgbClr val="D97706"/>
+                </a:solidFill>
+              </a:defRPr>
+            </a:pPr>
+            <a:r>
+              <a:t>64.73 Tỷ</a:t>
+            </a:r>
+          </a:p>
+          <a:p>
+            <a:pPr>
+              <a:spcBef>
+                <a:spcPts val="400"/>
+              </a:spcBef>
+              <a:defRPr sz="1100" b="1">
+                <a:solidFill>
+                  <a:srgbClr val="1E293B"/>
+                </a:solidFill>
+              </a:defRPr>
+            </a:pPr>
+            <a:r>
+              <a:t>499 HĐ Nguồn Chi Phí</a:t>
+            </a:r>
+          </a:p>
+        </p:txBody>
+      </p:sp>
+      <p:sp>
+        <p:nvSpPr>
+          <p:cNvPr id="10" name="Rounded Rectangle 9"/>
+          <p:cNvSpPr/>
+          <p:nvPr/>
+        </p:nvSpPr>
+        <p:spPr>
+          <a:xfrm>
+            <a:off x="9052560" y="1371600"/>
+            <a:ext cx="2651760" cy="1554480"/>
+          </a:xfrm>
+          <a:prstGeom prst="roundRect">
+            <a:avLst/>
+          </a:prstGeom>
+          <a:solidFill>
+            <a:srgbClr val="FEF2F2"/>
+          </a:solidFill>
+          <a:ln w="19050">
+            <a:solidFill>
+              <a:srgbClr val="EE0033"/>
+            </a:solidFill>
+          </a:ln>
+        </p:spPr>
+        <p:style>
+          <a:lnRef idx="1">
+            <a:schemeClr val="accent1"/>
+          </a:lnRef>
+          <a:fillRef idx="3">
+            <a:schemeClr val="accent1"/>
+          </a:fillRef>
+          <a:effectRef idx="2">
+            <a:schemeClr val="accent1"/>
+          </a:effectRef>
+          <a:fontRef idx="minor">
+            <a:schemeClr val="lt1"/>
+          </a:fontRef>
+        </p:style>
+        <p:txBody>
+          <a:bodyPr rtlCol="0" anchor="ctr" wrap="square" lIns="137160" tIns="137160" rIns="137160" bIns="137160"/>
+          <a:lstStyle/>
+          <a:p>
+            <a:pPr algn="ctr">
+              <a:defRPr sz="1000" b="1">
+                <a:solidFill>
+                  <a:srgbClr val="64748B"/>
+                </a:solidFill>
+              </a:defRPr>
+            </a:pPr>
+            <a:r>
+              <a:t>🔥 CẢNH BÁO HĐ &lt; 2025</a:t>
+            </a:r>
+          </a:p>
+          <a:p>
+            <a:pPr>
+              <a:spcBef>
+                <a:spcPts val="400"/>
+              </a:spcBef>
+              <a:defRPr sz="2400" b="1">
+                <a:solidFill>
+                  <a:srgbClr val="EE0033"/>
+                </a:solidFill>
+              </a:defRPr>
+            </a:pPr>
+            <a:r>
+              <a:t>78 HĐ</a:t>
+            </a:r>
+          </a:p>
+          <a:p>
+            <a:pPr>
+              <a:spcBef>
+                <a:spcPts val="400"/>
+              </a:spcBef>
+              <a:defRPr sz="1100" b="1">
+                <a:solidFill>
+                  <a:srgbClr val="1E293B"/>
+                </a:solidFill>
+              </a:defRPr>
+            </a:pPr>
+            <a:r>
+              <a:t>14.78 Tỷ (Chi phí tồn cũ)</a:t>
+            </a:r>
+          </a:p>
+        </p:txBody>
+      </p:sp>
+      <p:sp>
+        <p:nvSpPr>
+          <p:cNvPr id="11" name="Rounded Rectangle 10"/>
+          <p:cNvSpPr/>
+          <p:nvPr/>
+        </p:nvSpPr>
+        <p:spPr>
+          <a:xfrm>
+            <a:off x="548640" y="3108960"/>
+            <a:ext cx="11094415" cy="3291840"/>
+          </a:xfrm>
+          <a:prstGeom prst="roundRect">
+            <a:avLst/>
+          </a:prstGeom>
+          <a:solidFill>
+            <a:srgbClr val="FFFFFF"/>
+          </a:solidFill>
+          <a:ln w="19050">
+            <a:solidFill>
+              <a:srgbClr val="EE0033"/>
+            </a:solidFill>
+          </a:ln>
+        </p:spPr>
+        <p:style>
+          <a:lnRef idx="1">
+            <a:schemeClr val="accent1"/>
+          </a:lnRef>
+          <a:fillRef idx="3">
+            <a:schemeClr val="accent1"/>
+          </a:fillRef>
+          <a:effectRef idx="2">
+            <a:schemeClr val="accent1"/>
+          </a:effectRef>
+          <a:fontRef idx="minor">
+            <a:schemeClr val="lt1"/>
+          </a:fontRef>
+        </p:style>
+        <p:txBody>
+          <a:bodyPr rtlCol="0" anchor="ctr" wrap="square" lIns="182880" tIns="182880" rIns="182880" bIns="182880"/>
+          <a:lstStyle/>
+          <a:p>
+            <a:pPr algn="ctr">
+              <a:defRPr sz="1300" b="1">
+                <a:solidFill>
+                  <a:srgbClr val="EE0033"/>
+                </a:solidFill>
+              </a:defRPr>
+            </a:pPr>
+            <a:r>
+              <a:t>NHỮNG ĐIỂM CỐT LÕI CẦN ĐÁNH TRỌNG TÂM QUẢN TRỊ:</a:t>
+            </a:r>
+          </a:p>
+          <a:p>
+            <a:pPr>
+              <a:spcBef>
+                <a:spcPts val="600"/>
               </a:spcBef>
             </a:pPr>
             <a:r>
-              <a:rPr b="1" sz="1200">
+              <a:rPr b="1" sz="1100">
                 <a:solidFill>
                   <a:srgbClr val="1E293B"/>
                 </a:solidFill>
@@ -3834,7 +3996,7 @@
               <a:t>1. Tập trung nguồn lực công nợ VTA Nguồn Đầu Tư: </a:t>
             </a:r>
             <a:r>
-              <a:rPr sz="1200">
+              <a:rPr sz="1100">
                 <a:solidFill>
                   <a:srgbClr val="64748B"/>
                 </a:solidFill>
@@ -3845,11 +4007,11 @@
           <a:p>
             <a:pPr>
               <a:spcBef>
-                <a:spcPts val="800"/>
+                <a:spcPts val="600"/>
               </a:spcBef>
             </a:pPr>
             <a:r>
-              <a:rPr b="1" sz="1200">
+              <a:rPr b="1" sz="1100">
                 <a:solidFill>
                   <a:srgbClr val="1E293B"/>
                 </a:solidFill>
@@ -3857,7 +4019,7 @@
               <a:t>2. Mức độ tập trung công nợ áp đảo tại TOP 2 Nhà Thầu: </a:t>
             </a:r>
             <a:r>
-              <a:rPr sz="1200">
+              <a:rPr sz="1100">
                 <a:solidFill>
                   <a:srgbClr val="64748B"/>
                 </a:solidFill>
@@ -3868,11 +4030,11 @@
           <a:p>
             <a:pPr>
               <a:spcBef>
-                <a:spcPts val="800"/>
+                <a:spcPts val="600"/>
               </a:spcBef>
             </a:pPr>
             <a:r>
-              <a:rPr b="1" sz="1200">
+              <a:rPr b="1" sz="1100">
                 <a:solidFill>
                   <a:srgbClr val="1E293B"/>
                 </a:solidFill>
@@ -3880,7 +4042,7 @@
               <a:t>3. Rủi ro tồn đọng Hợp đồng Chi phí cũ phát sinh từ trước năm 2025 (&lt; 2025): </a:t>
             </a:r>
             <a:r>
-              <a:rPr sz="1200">
+              <a:rPr sz="1100">
                 <a:solidFill>
                   <a:srgbClr val="64748B"/>
                 </a:solidFill>
@@ -3891,11 +4053,11 @@
           <a:p>
             <a:pPr>
               <a:spcBef>
-                <a:spcPts val="800"/>
+                <a:spcPts val="600"/>
               </a:spcBef>
             </a:pPr>
             <a:r>
-              <a:rPr b="1" sz="1200">
+              <a:rPr b="1" sz="1100">
                 <a:solidFill>
                   <a:srgbClr val="1E293B"/>
                 </a:solidFill>
@@ -3903,7 +4065,7 @@
               <a:t>4. Siết chặt kỷ luật KPI theo quy định Cột Q = 'KHÔNG': </a:t>
             </a:r>
             <a:r>
-              <a:rPr sz="1200">
+              <a:rPr sz="1100">
                 <a:solidFill>
                   <a:srgbClr val="64748B"/>
                 </a:solidFill>
@@ -3933,48 +4095,44 @@
       <p:grpSpPr/>
       <p:sp>
         <p:nvSpPr>
-          <p:cNvPr id="2" name="TextBox 1"/>
-          <p:cNvSpPr txBox="1"/>
+          <p:cNvPr id="2" name="Rectangle 1"/>
+          <p:cNvSpPr/>
           <p:nvPr/>
         </p:nvSpPr>
         <p:spPr>
           <a:xfrm>
-            <a:off x="548640" y="365760"/>
-            <a:ext cx="11094415" cy="822960"/>
+            <a:off x="0" y="0"/>
+            <a:ext cx="12191695" cy="6858000"/>
           </a:xfrm>
           <a:prstGeom prst="rect">
             <a:avLst/>
           </a:prstGeom>
-          <a:noFill/>
+          <a:solidFill>
+            <a:srgbClr val="F1F5F9"/>
+          </a:solidFill>
+          <a:ln>
+            <a:noFill/>
+          </a:ln>
         </p:spPr>
-        <p:txBody>
-          <a:bodyPr wrap="square" lIns="0" tIns="0" rIns="0" bIns="0">
-            <a:spAutoFit/>
-          </a:bodyPr>
-          <a:lstStyle/>
-          <a:p>
-            <a:pPr>
-              <a:defRPr sz="1000" b="1">
-                <a:solidFill>
-                  <a:srgbClr val="EE0033"/>
-                </a:solidFill>
-              </a:defRPr>
-            </a:pPr>
-            <a:r>
-              <a:t>NGUỒN ĐẦU TƯ (548.3 TỶ VNĐ)</a:t>
-            </a:r>
-          </a:p>
-          <a:p>
-            <a:pPr>
-              <a:defRPr sz="2000" b="1">
-                <a:solidFill>
-                  <a:srgbClr val="1E293B"/>
-                </a:solidFill>
-              </a:defRPr>
-            </a:pPr>
-            <a:r>
-              <a:t>TRỌNG TÂM 1: PHÂN TÍCH TỶ TRỌNG CÔNG NỢ VẬT TƯ A THEO NHÀ THẦU LỚN NHẤT</a:t>
-            </a:r>
+        <p:style>
+          <a:lnRef idx="1">
+            <a:schemeClr val="accent1"/>
+          </a:lnRef>
+          <a:fillRef idx="3">
+            <a:schemeClr val="accent1"/>
+          </a:fillRef>
+          <a:effectRef idx="2">
+            <a:schemeClr val="accent1"/>
+          </a:effectRef>
+          <a:fontRef idx="minor">
+            <a:schemeClr val="lt1"/>
+          </a:fontRef>
+        </p:style>
+        <p:txBody>
+          <a:bodyPr rtlCol="0" anchor="ctr"/>
+          <a:lstStyle/>
+          <a:p>
+            <a:pPr algn="ctr"/>
           </a:p>
         </p:txBody>
       </p:sp>
@@ -3986,8 +4144,53 @@
         </p:nvSpPr>
         <p:spPr>
           <a:xfrm>
-            <a:off x="548640" y="1234440"/>
-            <a:ext cx="11094415" cy="36576"/>
+            <a:off x="0" y="0"/>
+            <a:ext cx="12191695" cy="1051560"/>
+          </a:xfrm>
+          <a:prstGeom prst="rect">
+            <a:avLst/>
+          </a:prstGeom>
+          <a:solidFill>
+            <a:srgbClr val="FFFFFF"/>
+          </a:solidFill>
+          <a:ln>
+            <a:solidFill>
+              <a:srgbClr val="E2E8F0"/>
+            </a:solidFill>
+          </a:ln>
+        </p:spPr>
+        <p:style>
+          <a:lnRef idx="1">
+            <a:schemeClr val="accent1"/>
+          </a:lnRef>
+          <a:fillRef idx="3">
+            <a:schemeClr val="accent1"/>
+          </a:fillRef>
+          <a:effectRef idx="2">
+            <a:schemeClr val="accent1"/>
+          </a:effectRef>
+          <a:fontRef idx="minor">
+            <a:schemeClr val="lt1"/>
+          </a:fontRef>
+        </p:style>
+        <p:txBody>
+          <a:bodyPr rtlCol="0" anchor="ctr"/>
+          <a:lstStyle/>
+          <a:p>
+            <a:pPr algn="ctr"/>
+          </a:p>
+        </p:txBody>
+      </p:sp>
+      <p:sp>
+        <p:nvSpPr>
+          <p:cNvPr id="4" name="Rectangle 3"/>
+          <p:cNvSpPr/>
+          <p:nvPr/>
+        </p:nvSpPr>
+        <p:spPr>
+          <a:xfrm>
+            <a:off x="0" y="0"/>
+            <a:ext cx="12191695" cy="73152"/>
           </a:xfrm>
           <a:prstGeom prst="rect">
             <a:avLst/>
@@ -3996,9 +4199,7 @@
             <a:srgbClr val="EE0033"/>
           </a:solidFill>
           <a:ln>
-            <a:solidFill>
-              <a:srgbClr val="EE0033"/>
-            </a:solidFill>
+            <a:noFill/>
           </a:ln>
         </p:spPr>
         <p:style>
@@ -4023,17 +4224,128 @@
           </a:p>
         </p:txBody>
       </p:sp>
+      <p:sp>
+        <p:nvSpPr>
+          <p:cNvPr id="5" name="Rounded Rectangle 4"/>
+          <p:cNvSpPr/>
+          <p:nvPr/>
+        </p:nvSpPr>
+        <p:spPr>
+          <a:xfrm>
+            <a:off x="457200" y="182880"/>
+            <a:ext cx="1463040" cy="640080"/>
+          </a:xfrm>
+          <a:prstGeom prst="roundRect">
+            <a:avLst/>
+          </a:prstGeom>
+          <a:solidFill>
+            <a:srgbClr val="EE0033"/>
+          </a:solidFill>
+          <a:ln>
+            <a:noFill/>
+          </a:ln>
+        </p:spPr>
+        <p:style>
+          <a:lnRef idx="1">
+            <a:schemeClr val="accent1"/>
+          </a:lnRef>
+          <a:fillRef idx="3">
+            <a:schemeClr val="accent1"/>
+          </a:fillRef>
+          <a:effectRef idx="2">
+            <a:schemeClr val="accent1"/>
+          </a:effectRef>
+          <a:fontRef idx="minor">
+            <a:schemeClr val="lt1"/>
+          </a:fontRef>
+        </p:style>
+        <p:txBody>
+          <a:bodyPr rtlCol="0" anchor="ctr" wrap="none" lIns="0" tIns="0" rIns="0" bIns="0"/>
+          <a:lstStyle/>
+          <a:p>
+            <a:pPr algn="ctr">
+              <a:defRPr sz="1600" b="1">
+                <a:solidFill>
+                  <a:srgbClr val="FFFFFF"/>
+                </a:solidFill>
+              </a:defRPr>
+            </a:pPr>
+            <a:r>
+              <a:t>viettel</a:t>
+            </a:r>
+          </a:p>
+          <a:p>
+            <a:pPr algn="ctr">
+              <a:defRPr sz="700">
+                <a:solidFill>
+                  <a:srgbClr val="FFFFFF"/>
+                </a:solidFill>
+              </a:defRPr>
+            </a:pPr>
+            <a:r>
+              <a:t>Theo cách của bạn</a:t>
+            </a:r>
+          </a:p>
+        </p:txBody>
+      </p:sp>
+      <p:sp>
+        <p:nvSpPr>
+          <p:cNvPr id="6" name="TextBox 5"/>
+          <p:cNvSpPr txBox="1"/>
+          <p:nvPr/>
+        </p:nvSpPr>
+        <p:spPr>
+          <a:xfrm>
+            <a:off x="2103120" y="182880"/>
+            <a:ext cx="9601200" cy="731520"/>
+          </a:xfrm>
+          <a:prstGeom prst="rect">
+            <a:avLst/>
+          </a:prstGeom>
+          <a:noFill/>
+        </p:spPr>
+        <p:txBody>
+          <a:bodyPr wrap="square" lIns="0" tIns="0" rIns="0" bIns="0">
+            <a:spAutoFit/>
+          </a:bodyPr>
+          <a:lstStyle/>
+          <a:p>
+            <a:pPr>
+              <a:defRPr sz="900" b="1">
+                <a:solidFill>
+                  <a:srgbClr val="EE0033"/>
+                </a:solidFill>
+              </a:defRPr>
+            </a:pPr>
+            <a:r>
+              <a:t>TRỌNG TÂM 1 (NGUỒN ĐẦU TƯ)</a:t>
+            </a:r>
+          </a:p>
+          <a:p>
+            <a:pPr>
+              <a:defRPr sz="1800" b="1">
+                <a:solidFill>
+                  <a:srgbClr val="1E293B"/>
+                </a:solidFill>
+              </a:defRPr>
+            </a:pPr>
+            <a:r>
+              <a:t>TOP NHÀ THẦU TỒN CÔNG NỢ VẬT TƯ A LỚN NHẤT (548.3 TỶ VNĐ)</a:t>
+            </a:r>
+          </a:p>
+        </p:txBody>
+      </p:sp>
       <p:graphicFrame>
         <p:nvGraphicFramePr>
-          <p:cNvPr id="4" name="Table 3"/>
+          <p:cNvPr id="7" name="Table 6"/>
           <p:cNvGraphicFramePr>
             <a:graphicFrameLocks noGrp="1"/>
           </p:cNvGraphicFramePr>
           <p:nvPr/>
         </p:nvGraphicFramePr>
         <p:xfrm>
-          <a:off x="548640" y="1463040"/>
-          <a:ext cx="6858000" cy="4754880"/>
+          <a:off x="548640" y="1371600"/>
+          <a:ext cx="6858000" cy="4937760"/>
         </p:xfrm>
         <a:graphic>
           <a:graphicData uri="http://schemas.openxmlformats.org/drawingml/2006/table">
@@ -4047,7 +4359,7 @@
                 <a:gridCol w="1097280"/>
                 <a:gridCol w="1554480"/>
               </a:tblGrid>
-              <a:tr h="792480">
+              <a:tr h="822960">
                 <a:tc>
                   <a:txBody>
                     <a:bodyPr/>
@@ -4141,7 +4453,7 @@
                   </a:tcPr>
                 </a:tc>
               </a:tr>
-              <a:tr h="792480">
+              <a:tr h="822960">
                 <a:tc>
                   <a:txBody>
                     <a:bodyPr/>
@@ -4235,7 +4547,7 @@
                   </a:tcPr>
                 </a:tc>
               </a:tr>
-              <a:tr h="792480">
+              <a:tr h="822960">
                 <a:tc>
                   <a:txBody>
                     <a:bodyPr/>
@@ -4329,7 +4641,7 @@
                   </a:tcPr>
                 </a:tc>
               </a:tr>
-              <a:tr h="792480">
+              <a:tr h="822960">
                 <a:tc>
                   <a:txBody>
                     <a:bodyPr/>
@@ -4423,7 +4735,7 @@
                   </a:tcPr>
                 </a:tc>
               </a:tr>
-              <a:tr h="792480">
+              <a:tr h="822960">
                 <a:tc>
                   <a:txBody>
                     <a:bodyPr/>
@@ -4517,7 +4829,7 @@
                   </a:tcPr>
                 </a:tc>
               </a:tr>
-              <a:tr h="792480">
+              <a:tr h="822960">
                 <a:tc>
                   <a:txBody>
                     <a:bodyPr/>
@@ -4617,20 +4929,20 @@
       </p:graphicFrame>
       <p:sp>
         <p:nvSpPr>
-          <p:cNvPr id="5" name="Rounded Rectangle 4"/>
+          <p:cNvPr id="8" name="Rounded Rectangle 7"/>
           <p:cNvSpPr/>
           <p:nvPr/>
         </p:nvSpPr>
         <p:spPr>
           <a:xfrm>
-            <a:off x="7589520" y="1463040"/>
-            <a:ext cx="4023360" cy="4754880"/>
+            <a:off x="7589520" y="1371600"/>
+            <a:ext cx="4023360" cy="4937760"/>
           </a:xfrm>
           <a:prstGeom prst="roundRect">
             <a:avLst/>
           </a:prstGeom>
           <a:solidFill>
-            <a:srgbClr val="FFFFFF"/>
+            <a:srgbClr val="FEF2F2"/>
           </a:solidFill>
           <a:ln w="25400">
             <a:solidFill>
@@ -4657,7 +4969,7 @@
           <a:lstStyle/>
           <a:p>
             <a:pPr algn="ctr">
-              <a:defRPr sz="1500" b="1">
+              <a:defRPr sz="1400" b="1">
                 <a:solidFill>
                   <a:srgbClr val="EE0033"/>
                 </a:solidFill>
@@ -4670,11 +4982,11 @@
           <a:p>
             <a:pPr>
               <a:spcBef>
-                <a:spcPts val="1200"/>
+                <a:spcPts val="1000"/>
               </a:spcBef>
             </a:pPr>
             <a:r>
-              <a:rPr b="1" sz="1200">
+              <a:rPr b="1" sz="1100">
                 <a:solidFill>
                   <a:srgbClr val="1E293B"/>
                 </a:solidFill>
@@ -4683,7 +4995,7 @@
 </a:t>
             </a:r>
             <a:r>
-              <a:rPr sz="1100">
+              <a:rPr sz="1050">
                 <a:solidFill>
                   <a:srgbClr val="64748B"/>
                 </a:solidFill>
@@ -4694,11 +5006,11 @@
           <a:p>
             <a:pPr>
               <a:spcBef>
-                <a:spcPts val="1200"/>
+                <a:spcPts val="1000"/>
               </a:spcBef>
             </a:pPr>
             <a:r>
-              <a:rPr b="1" sz="1200">
+              <a:rPr b="1" sz="1100">
                 <a:solidFill>
                   <a:srgbClr val="1E293B"/>
                 </a:solidFill>
@@ -4707,7 +5019,7 @@
 </a:t>
             </a:r>
             <a:r>
-              <a:rPr sz="1100">
+              <a:rPr sz="1050">
                 <a:solidFill>
                   <a:srgbClr val="64748B"/>
                 </a:solidFill>
@@ -4718,11 +5030,11 @@
           <a:p>
             <a:pPr>
               <a:spcBef>
-                <a:spcPts val="1200"/>
+                <a:spcPts val="1000"/>
               </a:spcBef>
             </a:pPr>
             <a:r>
-              <a:rPr b="1" sz="1200">
+              <a:rPr b="1" sz="1100">
                 <a:solidFill>
                   <a:srgbClr val="1E293B"/>
                 </a:solidFill>
@@ -4731,7 +5043,7 @@
 </a:t>
             </a:r>
             <a:r>
-              <a:rPr sz="1100">
+              <a:rPr sz="1050">
                 <a:solidFill>
                   <a:srgbClr val="64748B"/>
                 </a:solidFill>
@@ -4761,48 +5073,44 @@
       <p:grpSpPr/>
       <p:sp>
         <p:nvSpPr>
-          <p:cNvPr id="2" name="TextBox 1"/>
-          <p:cNvSpPr txBox="1"/>
+          <p:cNvPr id="2" name="Rectangle 1"/>
+          <p:cNvSpPr/>
           <p:nvPr/>
         </p:nvSpPr>
         <p:spPr>
           <a:xfrm>
-            <a:off x="548640" y="365760"/>
-            <a:ext cx="11094415" cy="822960"/>
+            <a:off x="0" y="0"/>
+            <a:ext cx="12191695" cy="6858000"/>
           </a:xfrm>
           <a:prstGeom prst="rect">
             <a:avLst/>
           </a:prstGeom>
-          <a:noFill/>
+          <a:solidFill>
+            <a:srgbClr val="F1F5F9"/>
+          </a:solidFill>
+          <a:ln>
+            <a:noFill/>
+          </a:ln>
         </p:spPr>
-        <p:txBody>
-          <a:bodyPr wrap="square" lIns="0" tIns="0" rIns="0" bIns="0">
-            <a:spAutoFit/>
-          </a:bodyPr>
-          <a:lstStyle/>
-          <a:p>
-            <a:pPr>
-              <a:defRPr sz="1000" b="1">
-                <a:solidFill>
-                  <a:srgbClr val="EE0033"/>
-                </a:solidFill>
-              </a:defRPr>
-            </a:pPr>
-            <a:r>
-              <a:t>CẢNH BÁO RỦI RO HỢP ĐỒNG</a:t>
-            </a:r>
-          </a:p>
-          <a:p>
-            <a:pPr>
-              <a:defRPr sz="2000" b="1">
-                <a:solidFill>
-                  <a:srgbClr val="1E293B"/>
-                </a:solidFill>
-              </a:defRPr>
-            </a:pPr>
-            <a:r>
-              <a:t>TRỌNG TÂM 2: CẢNH BÁO HỢP ĐỒNG CHI PHÍ TỒN ĐỌNG TỪ TRƯỚC 2025 (&lt; 2025)</a:t>
-            </a:r>
+        <p:style>
+          <a:lnRef idx="1">
+            <a:schemeClr val="accent1"/>
+          </a:lnRef>
+          <a:fillRef idx="3">
+            <a:schemeClr val="accent1"/>
+          </a:fillRef>
+          <a:effectRef idx="2">
+            <a:schemeClr val="accent1"/>
+          </a:effectRef>
+          <a:fontRef idx="minor">
+            <a:schemeClr val="lt1"/>
+          </a:fontRef>
+        </p:style>
+        <p:txBody>
+          <a:bodyPr rtlCol="0" anchor="ctr"/>
+          <a:lstStyle/>
+          <a:p>
+            <a:pPr algn="ctr"/>
           </a:p>
         </p:txBody>
       </p:sp>
@@ -4814,8 +5122,53 @@
         </p:nvSpPr>
         <p:spPr>
           <a:xfrm>
-            <a:off x="548640" y="1234440"/>
-            <a:ext cx="11094415" cy="36576"/>
+            <a:off x="0" y="0"/>
+            <a:ext cx="12191695" cy="1051560"/>
+          </a:xfrm>
+          <a:prstGeom prst="rect">
+            <a:avLst/>
+          </a:prstGeom>
+          <a:solidFill>
+            <a:srgbClr val="FFFFFF"/>
+          </a:solidFill>
+          <a:ln>
+            <a:solidFill>
+              <a:srgbClr val="E2E8F0"/>
+            </a:solidFill>
+          </a:ln>
+        </p:spPr>
+        <p:style>
+          <a:lnRef idx="1">
+            <a:schemeClr val="accent1"/>
+          </a:lnRef>
+          <a:fillRef idx="3">
+            <a:schemeClr val="accent1"/>
+          </a:fillRef>
+          <a:effectRef idx="2">
+            <a:schemeClr val="accent1"/>
+          </a:effectRef>
+          <a:fontRef idx="minor">
+            <a:schemeClr val="lt1"/>
+          </a:fontRef>
+        </p:style>
+        <p:txBody>
+          <a:bodyPr rtlCol="0" anchor="ctr"/>
+          <a:lstStyle/>
+          <a:p>
+            <a:pPr algn="ctr"/>
+          </a:p>
+        </p:txBody>
+      </p:sp>
+      <p:sp>
+        <p:nvSpPr>
+          <p:cNvPr id="4" name="Rectangle 3"/>
+          <p:cNvSpPr/>
+          <p:nvPr/>
+        </p:nvSpPr>
+        <p:spPr>
+          <a:xfrm>
+            <a:off x="0" y="0"/>
+            <a:ext cx="12191695" cy="73152"/>
           </a:xfrm>
           <a:prstGeom prst="rect">
             <a:avLst/>
@@ -4824,9 +5177,7 @@
             <a:srgbClr val="EE0033"/>
           </a:solidFill>
           <a:ln>
-            <a:solidFill>
-              <a:srgbClr val="EE0033"/>
-            </a:solidFill>
+            <a:noFill/>
           </a:ln>
         </p:spPr>
         <p:style>
@@ -4851,17 +5202,128 @@
           </a:p>
         </p:txBody>
       </p:sp>
+      <p:sp>
+        <p:nvSpPr>
+          <p:cNvPr id="5" name="Rounded Rectangle 4"/>
+          <p:cNvSpPr/>
+          <p:nvPr/>
+        </p:nvSpPr>
+        <p:spPr>
+          <a:xfrm>
+            <a:off x="457200" y="182880"/>
+            <a:ext cx="1463040" cy="640080"/>
+          </a:xfrm>
+          <a:prstGeom prst="roundRect">
+            <a:avLst/>
+          </a:prstGeom>
+          <a:solidFill>
+            <a:srgbClr val="EE0033"/>
+          </a:solidFill>
+          <a:ln>
+            <a:noFill/>
+          </a:ln>
+        </p:spPr>
+        <p:style>
+          <a:lnRef idx="1">
+            <a:schemeClr val="accent1"/>
+          </a:lnRef>
+          <a:fillRef idx="3">
+            <a:schemeClr val="accent1"/>
+          </a:fillRef>
+          <a:effectRef idx="2">
+            <a:schemeClr val="accent1"/>
+          </a:effectRef>
+          <a:fontRef idx="minor">
+            <a:schemeClr val="lt1"/>
+          </a:fontRef>
+        </p:style>
+        <p:txBody>
+          <a:bodyPr rtlCol="0" anchor="ctr" wrap="none" lIns="0" tIns="0" rIns="0" bIns="0"/>
+          <a:lstStyle/>
+          <a:p>
+            <a:pPr algn="ctr">
+              <a:defRPr sz="1600" b="1">
+                <a:solidFill>
+                  <a:srgbClr val="FFFFFF"/>
+                </a:solidFill>
+              </a:defRPr>
+            </a:pPr>
+            <a:r>
+              <a:t>viettel</a:t>
+            </a:r>
+          </a:p>
+          <a:p>
+            <a:pPr algn="ctr">
+              <a:defRPr sz="700">
+                <a:solidFill>
+                  <a:srgbClr val="FFFFFF"/>
+                </a:solidFill>
+              </a:defRPr>
+            </a:pPr>
+            <a:r>
+              <a:t>Theo cách của bạn</a:t>
+            </a:r>
+          </a:p>
+        </p:txBody>
+      </p:sp>
+      <p:sp>
+        <p:nvSpPr>
+          <p:cNvPr id="6" name="TextBox 5"/>
+          <p:cNvSpPr txBox="1"/>
+          <p:nvPr/>
+        </p:nvSpPr>
+        <p:spPr>
+          <a:xfrm>
+            <a:off x="2103120" y="182880"/>
+            <a:ext cx="9601200" cy="731520"/>
+          </a:xfrm>
+          <a:prstGeom prst="rect">
+            <a:avLst/>
+          </a:prstGeom>
+          <a:noFill/>
+        </p:spPr>
+        <p:txBody>
+          <a:bodyPr wrap="square" lIns="0" tIns="0" rIns="0" bIns="0">
+            <a:spAutoFit/>
+          </a:bodyPr>
+          <a:lstStyle/>
+          <a:p>
+            <a:pPr>
+              <a:defRPr sz="900" b="1">
+                <a:solidFill>
+                  <a:srgbClr val="EE0033"/>
+                </a:solidFill>
+              </a:defRPr>
+            </a:pPr>
+            <a:r>
+              <a:t>TRỌNG TÂM 2 (NGUỒN CHI PHÍ)</a:t>
+            </a:r>
+          </a:p>
+          <a:p>
+            <a:pPr>
+              <a:defRPr sz="1800" b="1">
+                <a:solidFill>
+                  <a:srgbClr val="1E293B"/>
+                </a:solidFill>
+              </a:defRPr>
+            </a:pPr>
+            <a:r>
+              <a:t>CẢNH BÁO HỢP ĐỒNG CHI PHÍ TỒN ĐỌNG TỪ TRƯỚC 2025 (&lt; 2025)</a:t>
+            </a:r>
+          </a:p>
+        </p:txBody>
+      </p:sp>
       <p:graphicFrame>
         <p:nvGraphicFramePr>
-          <p:cNvPr id="4" name="Table 3"/>
+          <p:cNvPr id="7" name="Table 6"/>
           <p:cNvGraphicFramePr>
             <a:graphicFrameLocks noGrp="1"/>
           </p:cNvGraphicFramePr>
           <p:nvPr/>
         </p:nvGraphicFramePr>
         <p:xfrm>
-          <a:off x="548640" y="1463040"/>
-          <a:ext cx="6858000" cy="4754880"/>
+          <a:off x="548640" y="1371600"/>
+          <a:ext cx="6858000" cy="4937760"/>
         </p:xfrm>
         <a:graphic>
           <a:graphicData uri="http://schemas.openxmlformats.org/drawingml/2006/table">
@@ -4875,7 +5337,7 @@
                 <a:gridCol w="1280160"/>
                 <a:gridCol w="1371600"/>
               </a:tblGrid>
-              <a:tr h="792480">
+              <a:tr h="822960">
                 <a:tc>
                   <a:txBody>
                     <a:bodyPr/>
@@ -4969,7 +5431,7 @@
                   </a:tcPr>
                 </a:tc>
               </a:tr>
-              <a:tr h="792480">
+              <a:tr h="822960">
                 <a:tc>
                   <a:txBody>
                     <a:bodyPr/>
@@ -5063,7 +5525,7 @@
                   </a:tcPr>
                 </a:tc>
               </a:tr>
-              <a:tr h="792480">
+              <a:tr h="822960">
                 <a:tc>
                   <a:txBody>
                     <a:bodyPr/>
@@ -5157,7 +5619,7 @@
                   </a:tcPr>
                 </a:tc>
               </a:tr>
-              <a:tr h="792480">
+              <a:tr h="822960">
                 <a:tc>
                   <a:txBody>
                     <a:bodyPr/>
@@ -5251,7 +5713,7 @@
                   </a:tcPr>
                 </a:tc>
               </a:tr>
-              <a:tr h="792480">
+              <a:tr h="822960">
                 <a:tc>
                   <a:txBody>
                     <a:bodyPr/>
@@ -5345,7 +5807,7 @@
                   </a:tcPr>
                 </a:tc>
               </a:tr>
-              <a:tr h="792480">
+              <a:tr h="822960">
                 <a:tc>
                   <a:txBody>
                     <a:bodyPr/>
@@ -5445,14 +5907,14 @@
       </p:graphicFrame>
       <p:sp>
         <p:nvSpPr>
-          <p:cNvPr id="5" name="Rounded Rectangle 4"/>
+          <p:cNvPr id="8" name="Rounded Rectangle 7"/>
           <p:cNvSpPr/>
           <p:nvPr/>
         </p:nvSpPr>
         <p:spPr>
           <a:xfrm>
-            <a:off x="7589520" y="1463040"/>
-            <a:ext cx="4023360" cy="4754880"/>
+            <a:off x="7589520" y="1371600"/>
+            <a:ext cx="4023360" cy="4937760"/>
           </a:xfrm>
           <a:prstGeom prst="roundRect">
             <a:avLst/>
@@ -5485,24 +5947,24 @@
           <a:lstStyle/>
           <a:p>
             <a:pPr algn="ctr">
-              <a:defRPr sz="1500" b="1">
+              <a:defRPr sz="1400" b="1">
                 <a:solidFill>
                   <a:srgbClr val="D97706"/>
                 </a:solidFill>
               </a:defRPr>
             </a:pPr>
             <a:r>
-              <a:t>⚠️ PHÂN TÍCH RỦI RO CHI PHÍ CŨ:</a:t>
+              <a:t>⚠️ PHÂN TÍCH RỦI RO CHI PHÍ CỦ:</a:t>
             </a:r>
           </a:p>
           <a:p>
             <a:pPr>
               <a:spcBef>
-                <a:spcPts val="1200"/>
+                <a:spcPts val="1000"/>
               </a:spcBef>
             </a:pPr>
             <a:r>
-              <a:rPr b="1" sz="1200">
+              <a:rPr b="1" sz="1100">
                 <a:solidFill>
                   <a:srgbClr val="1E293B"/>
                 </a:solidFill>
@@ -5511,7 +5973,7 @@
 </a:t>
             </a:r>
             <a:r>
-              <a:rPr sz="1100">
+              <a:rPr sz="1050">
                 <a:solidFill>
                   <a:srgbClr val="64748B"/>
                 </a:solidFill>
@@ -5522,11 +5984,11 @@
           <a:p>
             <a:pPr>
               <a:spcBef>
-                <a:spcPts val="1200"/>
+                <a:spcPts val="1000"/>
               </a:spcBef>
             </a:pPr>
             <a:r>
-              <a:rPr b="1" sz="1200">
+              <a:rPr b="1" sz="1100">
                 <a:solidFill>
                   <a:srgbClr val="1E293B"/>
                 </a:solidFill>
@@ -5535,7 +5997,7 @@
 </a:t>
             </a:r>
             <a:r>
-              <a:rPr sz="1100">
+              <a:rPr sz="1050">
                 <a:solidFill>
                   <a:srgbClr val="64748B"/>
                 </a:solidFill>
@@ -5546,11 +6008,11 @@
           <a:p>
             <a:pPr>
               <a:spcBef>
-                <a:spcPts val="1200"/>
+                <a:spcPts val="1000"/>
               </a:spcBef>
             </a:pPr>
             <a:r>
-              <a:rPr b="1" sz="1200">
+              <a:rPr b="1" sz="1100">
                 <a:solidFill>
                   <a:srgbClr val="1E293B"/>
                 </a:solidFill>
@@ -5559,7 +6021,7 @@
 </a:t>
             </a:r>
             <a:r>
-              <a:rPr sz="1100">
+              <a:rPr sz="1050">
                 <a:solidFill>
                   <a:srgbClr val="64748B"/>
                 </a:solidFill>
@@ -5589,72 +6051,23 @@
       <p:grpSpPr/>
       <p:sp>
         <p:nvSpPr>
-          <p:cNvPr id="2" name="TextBox 1"/>
-          <p:cNvSpPr txBox="1"/>
+          <p:cNvPr id="2" name="Rectangle 1"/>
+          <p:cNvSpPr/>
           <p:nvPr/>
         </p:nvSpPr>
         <p:spPr>
           <a:xfrm>
-            <a:off x="548640" y="365760"/>
-            <a:ext cx="11094415" cy="822960"/>
-          </a:xfrm>
-          <a:prstGeom prst="rect">
-            <a:avLst/>
-          </a:prstGeom>
-          <a:noFill/>
-        </p:spPr>
-        <p:txBody>
-          <a:bodyPr wrap="square" lIns="0" tIns="0" rIns="0" bIns="0">
-            <a:spAutoFit/>
-          </a:bodyPr>
-          <a:lstStyle/>
-          <a:p>
-            <a:pPr>
-              <a:defRPr sz="1000" b="1">
-                <a:solidFill>
-                  <a:srgbClr val="EE0033"/>
-                </a:solidFill>
-              </a:defRPr>
-            </a:pPr>
-            <a:r>
-              <a:t>ĐÁNH GIÁ KPI KIỂM SOÁT</a:t>
-            </a:r>
-          </a:p>
-          <a:p>
-            <a:pPr>
-              <a:defRPr sz="2000" b="1">
-                <a:solidFill>
-                  <a:srgbClr val="1E293B"/>
-                </a:solidFill>
-              </a:defRPr>
-            </a:pPr>
-            <a:r>
-              <a:t>QUY TẮC KIỂM SOÁT KPI TỒN VẬT TƯ A (AQ - AW &amp; CỘT Q = 'KHÔNG')</a:t>
-            </a:r>
-          </a:p>
-        </p:txBody>
-      </p:sp>
-      <p:sp>
-        <p:nvSpPr>
-          <p:cNvPr id="3" name="Rectangle 2"/>
-          <p:cNvSpPr/>
-          <p:nvPr/>
-        </p:nvSpPr>
-        <p:spPr>
-          <a:xfrm>
-            <a:off x="548640" y="1234440"/>
-            <a:ext cx="11094415" cy="36576"/>
+            <a:off x="0" y="0"/>
+            <a:ext cx="12191695" cy="6858000"/>
           </a:xfrm>
           <a:prstGeom prst="rect">
             <a:avLst/>
           </a:prstGeom>
           <a:solidFill>
-            <a:srgbClr val="EE0033"/>
+            <a:srgbClr val="F1F5F9"/>
           </a:solidFill>
           <a:ln>
-            <a:solidFill>
-              <a:srgbClr val="EE0033"/>
-            </a:solidFill>
+            <a:noFill/>
           </a:ln>
         </p:spPr>
         <p:style>
@@ -5681,20 +6094,20 @@
       </p:sp>
       <p:sp>
         <p:nvSpPr>
-          <p:cNvPr id="4" name="Rounded Rectangle 3"/>
+          <p:cNvPr id="3" name="Rectangle 2"/>
           <p:cNvSpPr/>
           <p:nvPr/>
         </p:nvSpPr>
         <p:spPr>
           <a:xfrm>
-            <a:off x="548640" y="1463040"/>
-            <a:ext cx="11094415" cy="1188720"/>
+            <a:off x="0" y="0"/>
+            <a:ext cx="12191695" cy="1051560"/>
           </a:xfrm>
-          <a:prstGeom prst="roundRect">
+          <a:prstGeom prst="rect">
             <a:avLst/>
           </a:prstGeom>
           <a:solidFill>
-            <a:srgbClr val="F8FAFC"/>
+            <a:srgbClr val="FFFFFF"/>
           </a:solidFill>
           <a:ln>
             <a:solidFill>
@@ -5717,6 +6130,205 @@
           </a:fontRef>
         </p:style>
         <p:txBody>
+          <a:bodyPr rtlCol="0" anchor="ctr"/>
+          <a:lstStyle/>
+          <a:p>
+            <a:pPr algn="ctr"/>
+          </a:p>
+        </p:txBody>
+      </p:sp>
+      <p:sp>
+        <p:nvSpPr>
+          <p:cNvPr id="4" name="Rectangle 3"/>
+          <p:cNvSpPr/>
+          <p:nvPr/>
+        </p:nvSpPr>
+        <p:spPr>
+          <a:xfrm>
+            <a:off x="0" y="0"/>
+            <a:ext cx="12191695" cy="73152"/>
+          </a:xfrm>
+          <a:prstGeom prst="rect">
+            <a:avLst/>
+          </a:prstGeom>
+          <a:solidFill>
+            <a:srgbClr val="EE0033"/>
+          </a:solidFill>
+          <a:ln>
+            <a:noFill/>
+          </a:ln>
+        </p:spPr>
+        <p:style>
+          <a:lnRef idx="1">
+            <a:schemeClr val="accent1"/>
+          </a:lnRef>
+          <a:fillRef idx="3">
+            <a:schemeClr val="accent1"/>
+          </a:fillRef>
+          <a:effectRef idx="2">
+            <a:schemeClr val="accent1"/>
+          </a:effectRef>
+          <a:fontRef idx="minor">
+            <a:schemeClr val="lt1"/>
+          </a:fontRef>
+        </p:style>
+        <p:txBody>
+          <a:bodyPr rtlCol="0" anchor="ctr"/>
+          <a:lstStyle/>
+          <a:p>
+            <a:pPr algn="ctr"/>
+          </a:p>
+        </p:txBody>
+      </p:sp>
+      <p:sp>
+        <p:nvSpPr>
+          <p:cNvPr id="5" name="Rounded Rectangle 4"/>
+          <p:cNvSpPr/>
+          <p:nvPr/>
+        </p:nvSpPr>
+        <p:spPr>
+          <a:xfrm>
+            <a:off x="457200" y="182880"/>
+            <a:ext cx="1463040" cy="640080"/>
+          </a:xfrm>
+          <a:prstGeom prst="roundRect">
+            <a:avLst/>
+          </a:prstGeom>
+          <a:solidFill>
+            <a:srgbClr val="EE0033"/>
+          </a:solidFill>
+          <a:ln>
+            <a:noFill/>
+          </a:ln>
+        </p:spPr>
+        <p:style>
+          <a:lnRef idx="1">
+            <a:schemeClr val="accent1"/>
+          </a:lnRef>
+          <a:fillRef idx="3">
+            <a:schemeClr val="accent1"/>
+          </a:fillRef>
+          <a:effectRef idx="2">
+            <a:schemeClr val="accent1"/>
+          </a:effectRef>
+          <a:fontRef idx="minor">
+            <a:schemeClr val="lt1"/>
+          </a:fontRef>
+        </p:style>
+        <p:txBody>
+          <a:bodyPr rtlCol="0" anchor="ctr" wrap="none" lIns="0" tIns="0" rIns="0" bIns="0"/>
+          <a:lstStyle/>
+          <a:p>
+            <a:pPr algn="ctr">
+              <a:defRPr sz="1600" b="1">
+                <a:solidFill>
+                  <a:srgbClr val="FFFFFF"/>
+                </a:solidFill>
+              </a:defRPr>
+            </a:pPr>
+            <a:r>
+              <a:t>viettel</a:t>
+            </a:r>
+          </a:p>
+          <a:p>
+            <a:pPr algn="ctr">
+              <a:defRPr sz="700">
+                <a:solidFill>
+                  <a:srgbClr val="FFFFFF"/>
+                </a:solidFill>
+              </a:defRPr>
+            </a:pPr>
+            <a:r>
+              <a:t>Theo cách của bạn</a:t>
+            </a:r>
+          </a:p>
+        </p:txBody>
+      </p:sp>
+      <p:sp>
+        <p:nvSpPr>
+          <p:cNvPr id="6" name="TextBox 5"/>
+          <p:cNvSpPr txBox="1"/>
+          <p:nvPr/>
+        </p:nvSpPr>
+        <p:spPr>
+          <a:xfrm>
+            <a:off x="2103120" y="182880"/>
+            <a:ext cx="9601200" cy="731520"/>
+          </a:xfrm>
+          <a:prstGeom prst="rect">
+            <a:avLst/>
+          </a:prstGeom>
+          <a:noFill/>
+        </p:spPr>
+        <p:txBody>
+          <a:bodyPr wrap="square" lIns="0" tIns="0" rIns="0" bIns="0">
+            <a:spAutoFit/>
+          </a:bodyPr>
+          <a:lstStyle/>
+          <a:p>
+            <a:pPr>
+              <a:defRPr sz="900" b="1">
+                <a:solidFill>
+                  <a:srgbClr val="EE0033"/>
+                </a:solidFill>
+              </a:defRPr>
+            </a:pPr>
+            <a:r>
+              <a:t>KIỂM SOÁT KPI THỜI GIAN THỰC</a:t>
+            </a:r>
+          </a:p>
+          <a:p>
+            <a:pPr>
+              <a:defRPr sz="1800" b="1">
+                <a:solidFill>
+                  <a:srgbClr val="1E293B"/>
+                </a:solidFill>
+              </a:defRPr>
+            </a:pPr>
+            <a:r>
+              <a:t>QUY TẮC ĐÁNH GIÁ ĐẠT / VƯỚNG KPI THEO CỘT Q = 'KHÔNG'</a:t>
+            </a:r>
+          </a:p>
+        </p:txBody>
+      </p:sp>
+      <p:sp>
+        <p:nvSpPr>
+          <p:cNvPr id="7" name="Rounded Rectangle 6"/>
+          <p:cNvSpPr/>
+          <p:nvPr/>
+        </p:nvSpPr>
+        <p:spPr>
+          <a:xfrm>
+            <a:off x="548640" y="1371600"/>
+            <a:ext cx="11094415" cy="1188720"/>
+          </a:xfrm>
+          <a:prstGeom prst="roundRect">
+            <a:avLst/>
+          </a:prstGeom>
+          <a:solidFill>
+            <a:srgbClr val="FEF2F2"/>
+          </a:solidFill>
+          <a:ln w="19050">
+            <a:solidFill>
+              <a:srgbClr val="EE0033"/>
+            </a:solidFill>
+          </a:ln>
+        </p:spPr>
+        <p:style>
+          <a:lnRef idx="1">
+            <a:schemeClr val="accent1"/>
+          </a:lnRef>
+          <a:fillRef idx="3">
+            <a:schemeClr val="accent1"/>
+          </a:fillRef>
+          <a:effectRef idx="2">
+            <a:schemeClr val="accent1"/>
+          </a:effectRef>
+          <a:fontRef idx="minor">
+            <a:schemeClr val="lt1"/>
+          </a:fontRef>
+        </p:style>
+        <p:txBody>
           <a:bodyPr rtlCol="0" anchor="ctr" wrap="square" lIns="137160" tIns="137160" rIns="137160" bIns="137160"/>
           <a:lstStyle/>
           <a:p>
@@ -5758,13 +6370,13 @@
       </p:sp>
       <p:sp>
         <p:nvSpPr>
-          <p:cNvPr id="5" name="Rounded Rectangle 4"/>
+          <p:cNvPr id="8" name="Rounded Rectangle 7"/>
           <p:cNvSpPr/>
           <p:nvPr/>
         </p:nvSpPr>
         <p:spPr>
           <a:xfrm>
-            <a:off x="548640" y="2834640"/>
+            <a:off x="548640" y="2743200"/>
             <a:ext cx="3566160" cy="1645920"/>
           </a:xfrm>
           <a:prstGeom prst="roundRect">
@@ -5842,13 +6454,13 @@
       </p:sp>
       <p:sp>
         <p:nvSpPr>
-          <p:cNvPr id="6" name="Rounded Rectangle 5"/>
+          <p:cNvPr id="9" name="Rounded Rectangle 8"/>
           <p:cNvSpPr/>
           <p:nvPr/>
         </p:nvSpPr>
         <p:spPr>
           <a:xfrm>
-            <a:off x="4297679" y="2834640"/>
+            <a:off x="4297679" y="2743200"/>
             <a:ext cx="3566160" cy="1645920"/>
           </a:xfrm>
           <a:prstGeom prst="roundRect">
@@ -5926,13 +6538,13 @@
       </p:sp>
       <p:sp>
         <p:nvSpPr>
-          <p:cNvPr id="7" name="Rounded Rectangle 6"/>
+          <p:cNvPr id="10" name="Rounded Rectangle 9"/>
           <p:cNvSpPr/>
           <p:nvPr/>
         </p:nvSpPr>
         <p:spPr>
           <a:xfrm>
-            <a:off x="8046719" y="2834640"/>
+            <a:off x="8046719" y="2743200"/>
             <a:ext cx="3566160" cy="1645920"/>
           </a:xfrm>
           <a:prstGeom prst="roundRect">
@@ -6010,13 +6622,13 @@
       </p:sp>
       <p:sp>
         <p:nvSpPr>
-          <p:cNvPr id="8" name="Rounded Rectangle 7"/>
+          <p:cNvPr id="11" name="Rounded Rectangle 10"/>
           <p:cNvSpPr/>
           <p:nvPr/>
         </p:nvSpPr>
         <p:spPr>
           <a:xfrm>
-            <a:off x="548640" y="4663440"/>
+            <a:off x="548640" y="4572000"/>
             <a:ext cx="3566160" cy="1645920"/>
           </a:xfrm>
           <a:prstGeom prst="roundRect">
@@ -6094,13 +6706,13 @@
       </p:sp>
       <p:sp>
         <p:nvSpPr>
-          <p:cNvPr id="9" name="Rounded Rectangle 8"/>
+          <p:cNvPr id="12" name="Rounded Rectangle 11"/>
           <p:cNvSpPr/>
           <p:nvPr/>
         </p:nvSpPr>
         <p:spPr>
           <a:xfrm>
-            <a:off x="4297679" y="4663440"/>
+            <a:off x="4297679" y="4572000"/>
             <a:ext cx="3566160" cy="1645920"/>
           </a:xfrm>
           <a:prstGeom prst="roundRect">
@@ -6178,13 +6790,13 @@
       </p:sp>
       <p:sp>
         <p:nvSpPr>
-          <p:cNvPr id="10" name="Rounded Rectangle 9"/>
+          <p:cNvPr id="13" name="Rounded Rectangle 12"/>
           <p:cNvSpPr/>
           <p:nvPr/>
         </p:nvSpPr>
         <p:spPr>
           <a:xfrm>
-            <a:off x="8046719" y="4663440"/>
+            <a:off x="8046719" y="4572000"/>
             <a:ext cx="3566160" cy="1645920"/>
           </a:xfrm>
           <a:prstGeom prst="roundRect">
@@ -6280,48 +6892,44 @@
       <p:grpSpPr/>
       <p:sp>
         <p:nvSpPr>
-          <p:cNvPr id="2" name="TextBox 1"/>
-          <p:cNvSpPr txBox="1"/>
+          <p:cNvPr id="2" name="Rectangle 1"/>
+          <p:cNvSpPr/>
           <p:nvPr/>
         </p:nvSpPr>
         <p:spPr>
           <a:xfrm>
-            <a:off x="548640" y="365760"/>
-            <a:ext cx="11094415" cy="822960"/>
+            <a:off x="0" y="0"/>
+            <a:ext cx="12191695" cy="6858000"/>
           </a:xfrm>
           <a:prstGeom prst="rect">
             <a:avLst/>
           </a:prstGeom>
-          <a:noFill/>
+          <a:solidFill>
+            <a:srgbClr val="F1F5F9"/>
+          </a:solidFill>
+          <a:ln>
+            <a:noFill/>
+          </a:ln>
         </p:spPr>
-        <p:txBody>
-          <a:bodyPr wrap="square" lIns="0" tIns="0" rIns="0" bIns="0">
-            <a:spAutoFit/>
-          </a:bodyPr>
-          <a:lstStyle/>
-          <a:p>
-            <a:pPr>
-              <a:defRPr sz="1000" b="1">
-                <a:solidFill>
-                  <a:srgbClr val="EE0033"/>
-                </a:solidFill>
-              </a:defRPr>
-            </a:pPr>
-            <a:r>
-              <a:t>KẾ HOẠCH HÀNH ĐỘNG</a:t>
-            </a:r>
-          </a:p>
-          <a:p>
-            <a:pPr>
-              <a:defRPr sz="2000" b="1">
-                <a:solidFill>
-                  <a:srgbClr val="1E293B"/>
-                </a:solidFill>
-              </a:defRPr>
-            </a:pPr>
-            <a:r>
-              <a:t>ĐỀ XUẤT ĐÁNH TRỌNG TÂM &amp; KẾ HOẠCH HÀNH ĐỘNG CỤ THỂ</a:t>
-            </a:r>
+        <p:style>
+          <a:lnRef idx="1">
+            <a:schemeClr val="accent1"/>
+          </a:lnRef>
+          <a:fillRef idx="3">
+            <a:schemeClr val="accent1"/>
+          </a:fillRef>
+          <a:effectRef idx="2">
+            <a:schemeClr val="accent1"/>
+          </a:effectRef>
+          <a:fontRef idx="minor">
+            <a:schemeClr val="lt1"/>
+          </a:fontRef>
+        </p:style>
+        <p:txBody>
+          <a:bodyPr rtlCol="0" anchor="ctr"/>
+          <a:lstStyle/>
+          <a:p>
+            <a:pPr algn="ctr"/>
           </a:p>
         </p:txBody>
       </p:sp>
@@ -6333,8 +6941,53 @@
         </p:nvSpPr>
         <p:spPr>
           <a:xfrm>
-            <a:off x="548640" y="1234440"/>
-            <a:ext cx="11094415" cy="36576"/>
+            <a:off x="0" y="0"/>
+            <a:ext cx="12191695" cy="1051560"/>
+          </a:xfrm>
+          <a:prstGeom prst="rect">
+            <a:avLst/>
+          </a:prstGeom>
+          <a:solidFill>
+            <a:srgbClr val="FFFFFF"/>
+          </a:solidFill>
+          <a:ln>
+            <a:solidFill>
+              <a:srgbClr val="E2E8F0"/>
+            </a:solidFill>
+          </a:ln>
+        </p:spPr>
+        <p:style>
+          <a:lnRef idx="1">
+            <a:schemeClr val="accent1"/>
+          </a:lnRef>
+          <a:fillRef idx="3">
+            <a:schemeClr val="accent1"/>
+          </a:fillRef>
+          <a:effectRef idx="2">
+            <a:schemeClr val="accent1"/>
+          </a:effectRef>
+          <a:fontRef idx="minor">
+            <a:schemeClr val="lt1"/>
+          </a:fontRef>
+        </p:style>
+        <p:txBody>
+          <a:bodyPr rtlCol="0" anchor="ctr"/>
+          <a:lstStyle/>
+          <a:p>
+            <a:pPr algn="ctr"/>
+          </a:p>
+        </p:txBody>
+      </p:sp>
+      <p:sp>
+        <p:nvSpPr>
+          <p:cNvPr id="4" name="Rectangle 3"/>
+          <p:cNvSpPr/>
+          <p:nvPr/>
+        </p:nvSpPr>
+        <p:spPr>
+          <a:xfrm>
+            <a:off x="0" y="0"/>
+            <a:ext cx="12191695" cy="73152"/>
           </a:xfrm>
           <a:prstGeom prst="rect">
             <a:avLst/>
@@ -6343,6 +6996,160 @@
             <a:srgbClr val="EE0033"/>
           </a:solidFill>
           <a:ln>
+            <a:noFill/>
+          </a:ln>
+        </p:spPr>
+        <p:style>
+          <a:lnRef idx="1">
+            <a:schemeClr val="accent1"/>
+          </a:lnRef>
+          <a:fillRef idx="3">
+            <a:schemeClr val="accent1"/>
+          </a:fillRef>
+          <a:effectRef idx="2">
+            <a:schemeClr val="accent1"/>
+          </a:effectRef>
+          <a:fontRef idx="minor">
+            <a:schemeClr val="lt1"/>
+          </a:fontRef>
+        </p:style>
+        <p:txBody>
+          <a:bodyPr rtlCol="0" anchor="ctr"/>
+          <a:lstStyle/>
+          <a:p>
+            <a:pPr algn="ctr"/>
+          </a:p>
+        </p:txBody>
+      </p:sp>
+      <p:sp>
+        <p:nvSpPr>
+          <p:cNvPr id="5" name="Rounded Rectangle 4"/>
+          <p:cNvSpPr/>
+          <p:nvPr/>
+        </p:nvSpPr>
+        <p:spPr>
+          <a:xfrm>
+            <a:off x="457200" y="182880"/>
+            <a:ext cx="1463040" cy="640080"/>
+          </a:xfrm>
+          <a:prstGeom prst="roundRect">
+            <a:avLst/>
+          </a:prstGeom>
+          <a:solidFill>
+            <a:srgbClr val="EE0033"/>
+          </a:solidFill>
+          <a:ln>
+            <a:noFill/>
+          </a:ln>
+        </p:spPr>
+        <p:style>
+          <a:lnRef idx="1">
+            <a:schemeClr val="accent1"/>
+          </a:lnRef>
+          <a:fillRef idx="3">
+            <a:schemeClr val="accent1"/>
+          </a:fillRef>
+          <a:effectRef idx="2">
+            <a:schemeClr val="accent1"/>
+          </a:effectRef>
+          <a:fontRef idx="minor">
+            <a:schemeClr val="lt1"/>
+          </a:fontRef>
+        </p:style>
+        <p:txBody>
+          <a:bodyPr rtlCol="0" anchor="ctr" wrap="none" lIns="0" tIns="0" rIns="0" bIns="0"/>
+          <a:lstStyle/>
+          <a:p>
+            <a:pPr algn="ctr">
+              <a:defRPr sz="1600" b="1">
+                <a:solidFill>
+                  <a:srgbClr val="FFFFFF"/>
+                </a:solidFill>
+              </a:defRPr>
+            </a:pPr>
+            <a:r>
+              <a:t>viettel</a:t>
+            </a:r>
+          </a:p>
+          <a:p>
+            <a:pPr algn="ctr">
+              <a:defRPr sz="700">
+                <a:solidFill>
+                  <a:srgbClr val="FFFFFF"/>
+                </a:solidFill>
+              </a:defRPr>
+            </a:pPr>
+            <a:r>
+              <a:t>Theo cách của bạn</a:t>
+            </a:r>
+          </a:p>
+        </p:txBody>
+      </p:sp>
+      <p:sp>
+        <p:nvSpPr>
+          <p:cNvPr id="6" name="TextBox 5"/>
+          <p:cNvSpPr txBox="1"/>
+          <p:nvPr/>
+        </p:nvSpPr>
+        <p:spPr>
+          <a:xfrm>
+            <a:off x="2103120" y="182880"/>
+            <a:ext cx="9601200" cy="731520"/>
+          </a:xfrm>
+          <a:prstGeom prst="rect">
+            <a:avLst/>
+          </a:prstGeom>
+          <a:noFill/>
+        </p:spPr>
+        <p:txBody>
+          <a:bodyPr wrap="square" lIns="0" tIns="0" rIns="0" bIns="0">
+            <a:spAutoFit/>
+          </a:bodyPr>
+          <a:lstStyle/>
+          <a:p>
+            <a:pPr>
+              <a:defRPr sz="900" b="1">
+                <a:solidFill>
+                  <a:srgbClr val="EE0033"/>
+                </a:solidFill>
+              </a:defRPr>
+            </a:pPr>
+            <a:r>
+              <a:t>ĐỀ XUẤT ĐÁNH TRỌNG TÂM</a:t>
+            </a:r>
+          </a:p>
+          <a:p>
+            <a:pPr>
+              <a:defRPr sz="1800" b="1">
+                <a:solidFill>
+                  <a:srgbClr val="1E293B"/>
+                </a:solidFill>
+              </a:defRPr>
+            </a:pPr>
+            <a:r>
+              <a:t>KẾ HOẠCH HÀNH ĐỘNG THU HỒI CÔNG NỢ VTA &amp; HỢP ĐỒNG CHI PHÍ</a:t>
+            </a:r>
+          </a:p>
+        </p:txBody>
+      </p:sp>
+      <p:sp>
+        <p:nvSpPr>
+          <p:cNvPr id="7" name="Rounded Rectangle 6"/>
+          <p:cNvSpPr/>
+          <p:nvPr/>
+        </p:nvSpPr>
+        <p:spPr>
+          <a:xfrm>
+            <a:off x="548640" y="1371600"/>
+            <a:ext cx="11094415" cy="1463040"/>
+          </a:xfrm>
+          <a:prstGeom prst="roundRect">
+            <a:avLst/>
+          </a:prstGeom>
+          <a:solidFill>
+            <a:srgbClr val="FEF2F2"/>
+          </a:solidFill>
+          <a:ln w="19050">
             <a:solidFill>
               <a:srgbClr val="EE0033"/>
             </a:solidFill>
@@ -6363,22 +7170,50 @@
           </a:fontRef>
         </p:style>
         <p:txBody>
-          <a:bodyPr rtlCol="0" anchor="ctr"/>
-          <a:lstStyle/>
-          <a:p>
-            <a:pPr algn="ctr"/>
-          </a:p>
-        </p:txBody>
-      </p:sp>
-      <p:sp>
-        <p:nvSpPr>
-          <p:cNvPr id="4" name="Rounded Rectangle 3"/>
+          <a:bodyPr rtlCol="0" anchor="ctr" wrap="square" lIns="182880" tIns="182880" rIns="182880" bIns="182880"/>
+          <a:lstStyle/>
+          <a:p>
+            <a:pPr algn="ctr">
+              <a:defRPr sz="1300" b="1">
+                <a:solidFill>
+                  <a:srgbClr val="EE0033"/>
+                </a:solidFill>
+              </a:defRPr>
+            </a:pPr>
+            <a:r>
+              <a:t>1. ĐÔN ĐỐC LÀM VIỆC RIÊNG VỚI TOP 2 NHÀ THẦU (VCC &amp; ACT - CHIẾM 74.1% VTA)</a:t>
+            </a:r>
+          </a:p>
+          <a:p>
+            <a:pPr>
+              <a:spcBef>
+                <a:spcPts val="600"/>
+              </a:spcBef>
+              <a:defRPr sz="1100">
+                <a:solidFill>
+                  <a:srgbClr val="1E293B"/>
+                </a:solidFill>
+              </a:defRPr>
+            </a:pPr>
+            <a:r>
+              <a:t>• Thành lập Tổ công tác chuyên trách làm việc với Ban Lãnh đạo TCT CP Công trình Viettel (234 Tỷ) và Viễn thông ACT (169.4 Tỷ).</a:t>
+            </a:r>
+            <a:br/>
+            <a:r>
+              <a:t>• Giao chỉ tiêu cứng: Giảm tối thiểu 40 - 50% tồn công nợ VTA (tương đương 200 Tỷ VNĐ) trong Quý 4/2026.</a:t>
+            </a:r>
+          </a:p>
+        </p:txBody>
+      </p:sp>
+      <p:sp>
+        <p:nvSpPr>
+          <p:cNvPr id="8" name="Rounded Rectangle 7"/>
           <p:cNvSpPr/>
           <p:nvPr/>
         </p:nvSpPr>
         <p:spPr>
           <a:xfrm>
-            <a:off x="548640" y="1463040"/>
+            <a:off x="548640" y="3017520"/>
             <a:ext cx="11094415" cy="1463040"/>
           </a:xfrm>
           <a:prstGeom prst="roundRect">
@@ -6387,9 +7222,9 @@
           <a:solidFill>
             <a:srgbClr val="FFFFFF"/>
           </a:solidFill>
-          <a:ln w="25400">
+          <a:ln w="19050">
             <a:solidFill>
-              <a:srgbClr val="EE0033"/>
+              <a:srgbClr val="D97706"/>
             </a:solidFill>
           </a:ln>
         </p:spPr>
@@ -6414,12 +7249,12 @@
             <a:pPr algn="ctr">
               <a:defRPr sz="1300" b="1">
                 <a:solidFill>
-                  <a:srgbClr val="EE0033"/>
+                  <a:srgbClr val="D97706"/>
                 </a:solidFill>
               </a:defRPr>
             </a:pPr>
             <a:r>
-              <a:t>1. ĐÔN ĐỐC LÀM VIỆC RIÊNG VỚI VCC &amp; ACT (CHIẾM 74.1% VTA)</a:t>
+              <a:t>2. TỔ CÔNG TÁC XỬ LÝ DỨT ĐIỂM 78 HỢP ĐỒNG CHI PHÍ KÝ TRƯỚC 2025</a:t>
             </a:r>
           </a:p>
           <a:p>
@@ -6434,24 +7269,24 @@
               </a:defRPr>
             </a:pPr>
             <a:r>
-              <a:t>• Thành lập Tổ công tác chuyên trách làm việc với Ban Lãnh đạo TCT CP Công trình Viettel (234 Tỷ) và Viễn thông ACT (169.4 Tỷ).</a:t>
+              <a:t>• Rà soát từng HĐ chi phí đọng lâu năm (đặc biệt 32 HĐ của VCC và 11 HĐ của Mai Tú Tài).</a:t>
             </a:r>
             <a:br/>
             <a:r>
-              <a:t>• Giao chỉ tiêu cứng: Giảm tối thiểu 40 - 50% tồn công nợ VTA (tương đương 200 Tỷ VNĐ) trong Quý 4/2026.</a:t>
-            </a:r>
-          </a:p>
-        </p:txBody>
-      </p:sp>
-      <p:sp>
-        <p:nvSpPr>
-          <p:cNvPr id="5" name="Rounded Rectangle 4"/>
+              <a:t>• Đặt hạn chót 30/10/2026: Hoàn thành 100% hồ sơ nghiệm thu thu hồi hoặc xử lý dứt điểm hiệu lực hợp đồng.</a:t>
+            </a:r>
+          </a:p>
+        </p:txBody>
+      </p:sp>
+      <p:sp>
+        <p:nvSpPr>
+          <p:cNvPr id="9" name="Rounded Rectangle 8"/>
           <p:cNvSpPr/>
           <p:nvPr/>
         </p:nvSpPr>
         <p:spPr>
           <a:xfrm>
-            <a:off x="548640" y="3108960"/>
+            <a:off x="548640" y="4663440"/>
             <a:ext cx="11094415" cy="1463040"/>
           </a:xfrm>
           <a:prstGeom prst="roundRect">
@@ -6460,80 +7295,7 @@
           <a:solidFill>
             <a:srgbClr val="FFFFFF"/>
           </a:solidFill>
-          <a:ln w="25400">
-            <a:solidFill>
-              <a:srgbClr val="D97706"/>
-            </a:solidFill>
-          </a:ln>
-        </p:spPr>
-        <p:style>
-          <a:lnRef idx="1">
-            <a:schemeClr val="accent1"/>
-          </a:lnRef>
-          <a:fillRef idx="3">
-            <a:schemeClr val="accent1"/>
-          </a:fillRef>
-          <a:effectRef idx="2">
-            <a:schemeClr val="accent1"/>
-          </a:effectRef>
-          <a:fontRef idx="minor">
-            <a:schemeClr val="lt1"/>
-          </a:fontRef>
-        </p:style>
-        <p:txBody>
-          <a:bodyPr rtlCol="0" anchor="ctr" wrap="square" lIns="182880" tIns="182880" rIns="182880" bIns="182880"/>
-          <a:lstStyle/>
-          <a:p>
-            <a:pPr algn="ctr">
-              <a:defRPr sz="1300" b="1">
-                <a:solidFill>
-                  <a:srgbClr val="D97706"/>
-                </a:solidFill>
-              </a:defRPr>
-            </a:pPr>
-            <a:r>
-              <a:t>2. TỔ CÔNG TÁC XỬ LÝ DỨT ĐIỂM 78 HỢP ĐỒNG CHI PHÍ KÝ TRƯỚC 2025</a:t>
-            </a:r>
-          </a:p>
-          <a:p>
-            <a:pPr>
-              <a:spcBef>
-                <a:spcPts val="600"/>
-              </a:spcBef>
-              <a:defRPr sz="1100">
-                <a:solidFill>
-                  <a:srgbClr val="1E293B"/>
-                </a:solidFill>
-              </a:defRPr>
-            </a:pPr>
-            <a:r>
-              <a:t>• Rà soát từng HĐ chi phí đọng lâu năm (đặc biệt 32 HĐ của VCC và 11 HĐ của Mai Tú Tài).</a:t>
-            </a:r>
-            <a:br/>
-            <a:r>
-              <a:t>• Đặt hạn chót 30/10/2026: Hoàn thành 100% hồ sơ nghiệm thu thu hồi hoặc xử lý dứt điểm hiệu lực hợp đồng.</a:t>
-            </a:r>
-          </a:p>
-        </p:txBody>
-      </p:sp>
-      <p:sp>
-        <p:nvSpPr>
-          <p:cNvPr id="6" name="Rounded Rectangle 5"/>
-          <p:cNvSpPr/>
-          <p:nvPr/>
-        </p:nvSpPr>
-        <p:spPr>
-          <a:xfrm>
-            <a:off x="548640" y="4754880"/>
-            <a:ext cx="11094415" cy="1463040"/>
-          </a:xfrm>
-          <a:prstGeom prst="roundRect">
-            <a:avLst/>
-          </a:prstGeom>
-          <a:solidFill>
-            <a:srgbClr val="FFFFFF"/>
-          </a:solidFill>
-          <a:ln w="25400">
+          <a:ln w="19050">
             <a:solidFill>
               <a:srgbClr val="10B981"/>
             </a:solidFill>
@@ -6584,7 +7346,7 @@
             </a:r>
             <a:br/>
             <a:r>
-              <a:t>• Bấm nút 'Cập Nhật Từ Google Sheet' để cập nhật tiến độ công nợ VTA của từng nhà thầu theo thời gian thực.</a:t>
+              <a:t>• Bấm nút 'Cập Nhật Từ Google Sheet' để lấy số liệu công nợ mới nhất theo thời gian thực.</a:t>
             </a:r>
           </a:p>
         </p:txBody>

--- a/Bao_Cao_Viettel_Cong_No_VTA_Slide.pptx
+++ b/Bao_Cao_Viettel_Cong_No_VTA_Slide.pptx
@@ -10,7 +10,6 @@
     <p:sldId id="258" r:id="rId9"/>
     <p:sldId id="259" r:id="rId10"/>
     <p:sldId id="260" r:id="rId11"/>
-    <p:sldId id="261" r:id="rId12"/>
   </p:sldIdLst>
   <p:sldSz cx="12191695" cy="6858000" type="screen4x3"/>
   <p:notesSz cx="6858000" cy="9144000"/>
@@ -3108,54 +3107,11 @@
             <a:avLst/>
           </a:prstGeom>
           <a:solidFill>
-            <a:srgbClr val="F1F5F9"/>
+            <a:srgbClr val="1E293B"/>
           </a:solidFill>
           <a:ln>
-            <a:noFill/>
-          </a:ln>
-        </p:spPr>
-        <p:style>
-          <a:lnRef idx="1">
-            <a:schemeClr val="accent1"/>
-          </a:lnRef>
-          <a:fillRef idx="3">
-            <a:schemeClr val="accent1"/>
-          </a:fillRef>
-          <a:effectRef idx="2">
-            <a:schemeClr val="accent1"/>
-          </a:effectRef>
-          <a:fontRef idx="minor">
-            <a:schemeClr val="lt1"/>
-          </a:fontRef>
-        </p:style>
-        <p:txBody>
-          <a:bodyPr rtlCol="0" anchor="ctr"/>
-          <a:lstStyle/>
-          <a:p>
-            <a:pPr algn="ctr"/>
-          </a:p>
-        </p:txBody>
-      </p:sp>
-      <p:sp>
-        <p:nvSpPr>
-          <p:cNvPr id="3" name="Rounded Rectangle 2"/>
-          <p:cNvSpPr/>
-          <p:nvPr/>
-        </p:nvSpPr>
-        <p:spPr>
-          <a:xfrm>
-            <a:off x="731520" y="731520"/>
-            <a:ext cx="10728655" cy="5394960"/>
-          </a:xfrm>
-          <a:prstGeom prst="roundRect">
-            <a:avLst/>
-          </a:prstGeom>
-          <a:solidFill>
-            <a:srgbClr val="FFFFFF"/>
-          </a:solidFill>
-          <a:ln w="25400">
             <a:solidFill>
-              <a:srgbClr val="EE0033"/>
+              <a:srgbClr val="1E293B"/>
             </a:solidFill>
           </a:ln>
         </p:spPr>
@@ -3183,78 +3139,14 @@
       </p:sp>
       <p:sp>
         <p:nvSpPr>
-          <p:cNvPr id="4" name="Rounded Rectangle 3"/>
-          <p:cNvSpPr/>
+          <p:cNvPr id="3" name="TextBox 2"/>
+          <p:cNvSpPr txBox="1"/>
           <p:nvPr/>
         </p:nvSpPr>
         <p:spPr>
           <a:xfrm>
-            <a:off x="4754880" y="1188720"/>
-            <a:ext cx="2681935" cy="1005840"/>
-          </a:xfrm>
-          <a:prstGeom prst="roundRect">
-            <a:avLst/>
-          </a:prstGeom>
-          <a:solidFill>
-            <a:srgbClr val="EE0033"/>
-          </a:solidFill>
-          <a:ln>
-            <a:noFill/>
-          </a:ln>
-        </p:spPr>
-        <p:style>
-          <a:lnRef idx="1">
-            <a:schemeClr val="accent1"/>
-          </a:lnRef>
-          <a:fillRef idx="3">
-            <a:schemeClr val="accent1"/>
-          </a:fillRef>
-          <a:effectRef idx="2">
-            <a:schemeClr val="accent1"/>
-          </a:effectRef>
-          <a:fontRef idx="minor">
-            <a:schemeClr val="lt1"/>
-          </a:fontRef>
-        </p:style>
-        <p:txBody>
-          <a:bodyPr rtlCol="0" anchor="ctr"/>
-          <a:lstStyle/>
-          <a:p>
-            <a:pPr algn="ctr">
-              <a:defRPr sz="3200" b="1">
-                <a:solidFill>
-                  <a:srgbClr val="FFFFFF"/>
-                </a:solidFill>
-              </a:defRPr>
-            </a:pPr>
-            <a:r>
-              <a:t>viettel</a:t>
-            </a:r>
-          </a:p>
-          <a:p>
-            <a:pPr algn="ctr">
-              <a:defRPr sz="1100">
-                <a:solidFill>
-                  <a:srgbClr val="FFFFFF"/>
-                </a:solidFill>
-              </a:defRPr>
-            </a:pPr>
-            <a:r>
-              <a:t>Theo cách của bạn</a:t>
-            </a:r>
-          </a:p>
-        </p:txBody>
-      </p:sp>
-      <p:sp>
-        <p:nvSpPr>
-          <p:cNvPr id="5" name="TextBox 4"/>
-          <p:cNvSpPr txBox="1"/>
-          <p:nvPr/>
-        </p:nvSpPr>
-        <p:spPr>
-          <a:xfrm>
-            <a:off x="1097280" y="2468880"/>
-            <a:ext cx="9966960" cy="3291840"/>
+            <a:off x="914400" y="2011680"/>
+            <a:ext cx="10362895" cy="3200400"/>
           </a:xfrm>
           <a:prstGeom prst="rect">
             <a:avLst/>
@@ -3267,68 +3159,39 @@
           </a:bodyPr>
           <a:lstStyle/>
           <a:p>
-            <a:pPr algn="ctr">
-              <a:defRPr sz="2600" b="1">
-                <a:solidFill>
-                  <a:srgbClr val="1E293B"/>
-                </a:solidFill>
-              </a:defRPr>
-            </a:pPr>
-            <a:r>
-              <a:t>BÁO CÁO QUẢN TRỊ &amp; ĐÁNH GIÁ TRỌNG TÂM</a:t>
-            </a:r>
-          </a:p>
-          <a:p>
-            <a:pPr algn="ctr">
-              <a:spcBef>
-                <a:spcPts val="600"/>
-              </a:spcBef>
-              <a:defRPr sz="2000" b="1">
+            <a:pPr>
+              <a:defRPr sz="1600" b="1">
                 <a:solidFill>
                   <a:srgbClr val="EE0033"/>
                 </a:solidFill>
               </a:defRPr>
             </a:pPr>
             <a:r>
-              <a:t>CÔNG NỢ VẬT TƯ A &amp; HỢP ĐỒNG CHI PHÍ THEO NHÀ THẦU ĐỐI TÁC</a:t>
-            </a:r>
-          </a:p>
-          <a:p>
-            <a:pPr algn="ctr">
-              <a:spcBef>
-                <a:spcPts val="1600"/>
-              </a:spcBef>
-              <a:defRPr sz="1300">
+              <a:t>VIETTEL TELECOM - BÁO CÁO QUẢN TRỊ RỦI RỔ &amp; KPI</a:t>
+            </a:r>
+          </a:p>
+          <a:p>
+            <a:pPr>
+              <a:defRPr sz="3600" b="1">
                 <a:solidFill>
-                  <a:srgbClr val="64748B"/>
+                  <a:srgbClr val="FFFFFF"/>
                 </a:solidFill>
               </a:defRPr>
             </a:pPr>
             <a:r>
-              <a:t>• Phân tích rủi ro tập trung công nợ VTA nguồn Đầu tư (548.3 Tỷ VNĐ)</a:t>
-            </a:r>
-            <a:br/>
-            <a:r>
-              <a:t>• Đánh giá trọng tâm các nhà thầu lớn nhất (VCC, ACT) &amp; HĐ Chi phí phát sinh trước 2025</a:t>
-            </a:r>
-            <a:br/>
-            <a:r>
-              <a:t>• Kiểm soát chỉ tiêu KPI hoàn ứng / nghiệm thu theo chuẩn Cột Q = 'KHÔNG'</a:t>
-            </a:r>
-          </a:p>
-          <a:p>
-            <a:pPr algn="ctr">
-              <a:spcBef>
-                <a:spcPts val="2400"/>
-              </a:spcBef>
-              <a:defRPr sz="1100" i="1">
+              <a:t>TỔNG HỢP HỢP ĐỒNG &amp; CÔNG TRÌNH VIETTEL</a:t>
+            </a:r>
+          </a:p>
+          <a:p>
+            <a:pPr>
+              <a:defRPr sz="1800">
                 <a:solidFill>
-                  <a:srgbClr val="64748B"/>
+                  <a:srgbClr val="CBD5E1"/>
                 </a:solidFill>
               </a:defRPr>
             </a:pPr>
             <a:r>
-              <a:t>Tập đoàn Công nghiệp - Viễn thông Quân đội (Viettel) | Dữ liệu cập nhật tháng 09/2026</a:t>
+              <a:t>Phân tích trọng tâm Công nợ Vật tư A (548.3 Tỷ VNĐ) &amp; Bảng Khoanh Vùng KPI Theo Đối Tác Trọng Điểm</a:t>
             </a:r>
           </a:p>
         </p:txBody>
@@ -3353,209 +3216,14 @@
       <p:grpSpPr/>
       <p:sp>
         <p:nvSpPr>
-          <p:cNvPr id="2" name="Rectangle 1"/>
-          <p:cNvSpPr/>
+          <p:cNvPr id="2" name="TextBox 1"/>
+          <p:cNvSpPr txBox="1"/>
           <p:nvPr/>
         </p:nvSpPr>
         <p:spPr>
           <a:xfrm>
-            <a:off x="0" y="0"/>
-            <a:ext cx="12191695" cy="6858000"/>
-          </a:xfrm>
-          <a:prstGeom prst="rect">
-            <a:avLst/>
-          </a:prstGeom>
-          <a:solidFill>
-            <a:srgbClr val="F1F5F9"/>
-          </a:solidFill>
-          <a:ln>
-            <a:noFill/>
-          </a:ln>
-        </p:spPr>
-        <p:style>
-          <a:lnRef idx="1">
-            <a:schemeClr val="accent1"/>
-          </a:lnRef>
-          <a:fillRef idx="3">
-            <a:schemeClr val="accent1"/>
-          </a:fillRef>
-          <a:effectRef idx="2">
-            <a:schemeClr val="accent1"/>
-          </a:effectRef>
-          <a:fontRef idx="minor">
-            <a:schemeClr val="lt1"/>
-          </a:fontRef>
-        </p:style>
-        <p:txBody>
-          <a:bodyPr rtlCol="0" anchor="ctr"/>
-          <a:lstStyle/>
-          <a:p>
-            <a:pPr algn="ctr"/>
-          </a:p>
-        </p:txBody>
-      </p:sp>
-      <p:sp>
-        <p:nvSpPr>
-          <p:cNvPr id="3" name="Rectangle 2"/>
-          <p:cNvSpPr/>
-          <p:nvPr/>
-        </p:nvSpPr>
-        <p:spPr>
-          <a:xfrm>
-            <a:off x="0" y="0"/>
-            <a:ext cx="12191695" cy="1051560"/>
-          </a:xfrm>
-          <a:prstGeom prst="rect">
-            <a:avLst/>
-          </a:prstGeom>
-          <a:solidFill>
-            <a:srgbClr val="FFFFFF"/>
-          </a:solidFill>
-          <a:ln>
-            <a:solidFill>
-              <a:srgbClr val="E2E8F0"/>
-            </a:solidFill>
-          </a:ln>
-        </p:spPr>
-        <p:style>
-          <a:lnRef idx="1">
-            <a:schemeClr val="accent1"/>
-          </a:lnRef>
-          <a:fillRef idx="3">
-            <a:schemeClr val="accent1"/>
-          </a:fillRef>
-          <a:effectRef idx="2">
-            <a:schemeClr val="accent1"/>
-          </a:effectRef>
-          <a:fontRef idx="minor">
-            <a:schemeClr val="lt1"/>
-          </a:fontRef>
-        </p:style>
-        <p:txBody>
-          <a:bodyPr rtlCol="0" anchor="ctr"/>
-          <a:lstStyle/>
-          <a:p>
-            <a:pPr algn="ctr"/>
-          </a:p>
-        </p:txBody>
-      </p:sp>
-      <p:sp>
-        <p:nvSpPr>
-          <p:cNvPr id="4" name="Rectangle 3"/>
-          <p:cNvSpPr/>
-          <p:nvPr/>
-        </p:nvSpPr>
-        <p:spPr>
-          <a:xfrm>
-            <a:off x="0" y="0"/>
-            <a:ext cx="12191695" cy="73152"/>
-          </a:xfrm>
-          <a:prstGeom prst="rect">
-            <a:avLst/>
-          </a:prstGeom>
-          <a:solidFill>
-            <a:srgbClr val="EE0033"/>
-          </a:solidFill>
-          <a:ln>
-            <a:noFill/>
-          </a:ln>
-        </p:spPr>
-        <p:style>
-          <a:lnRef idx="1">
-            <a:schemeClr val="accent1"/>
-          </a:lnRef>
-          <a:fillRef idx="3">
-            <a:schemeClr val="accent1"/>
-          </a:fillRef>
-          <a:effectRef idx="2">
-            <a:schemeClr val="accent1"/>
-          </a:effectRef>
-          <a:fontRef idx="minor">
-            <a:schemeClr val="lt1"/>
-          </a:fontRef>
-        </p:style>
-        <p:txBody>
-          <a:bodyPr rtlCol="0" anchor="ctr"/>
-          <a:lstStyle/>
-          <a:p>
-            <a:pPr algn="ctr"/>
-          </a:p>
-        </p:txBody>
-      </p:sp>
-      <p:sp>
-        <p:nvSpPr>
-          <p:cNvPr id="5" name="Rounded Rectangle 4"/>
-          <p:cNvSpPr/>
-          <p:nvPr/>
-        </p:nvSpPr>
-        <p:spPr>
-          <a:xfrm>
-            <a:off x="457200" y="182880"/>
-            <a:ext cx="1463040" cy="640080"/>
-          </a:xfrm>
-          <a:prstGeom prst="roundRect">
-            <a:avLst/>
-          </a:prstGeom>
-          <a:solidFill>
-            <a:srgbClr val="EE0033"/>
-          </a:solidFill>
-          <a:ln>
-            <a:noFill/>
-          </a:ln>
-        </p:spPr>
-        <p:style>
-          <a:lnRef idx="1">
-            <a:schemeClr val="accent1"/>
-          </a:lnRef>
-          <a:fillRef idx="3">
-            <a:schemeClr val="accent1"/>
-          </a:fillRef>
-          <a:effectRef idx="2">
-            <a:schemeClr val="accent1"/>
-          </a:effectRef>
-          <a:fontRef idx="minor">
-            <a:schemeClr val="lt1"/>
-          </a:fontRef>
-        </p:style>
-        <p:txBody>
-          <a:bodyPr rtlCol="0" anchor="ctr" wrap="none" lIns="0" tIns="0" rIns="0" bIns="0"/>
-          <a:lstStyle/>
-          <a:p>
-            <a:pPr algn="ctr">
-              <a:defRPr sz="1600" b="1">
-                <a:solidFill>
-                  <a:srgbClr val="FFFFFF"/>
-                </a:solidFill>
-              </a:defRPr>
-            </a:pPr>
-            <a:r>
-              <a:t>viettel</a:t>
-            </a:r>
-          </a:p>
-          <a:p>
-            <a:pPr algn="ctr">
-              <a:defRPr sz="700">
-                <a:solidFill>
-                  <a:srgbClr val="FFFFFF"/>
-                </a:solidFill>
-              </a:defRPr>
-            </a:pPr>
-            <a:r>
-              <a:t>Theo cách của bạn</a:t>
-            </a:r>
-          </a:p>
-        </p:txBody>
-      </p:sp>
-      <p:sp>
-        <p:nvSpPr>
-          <p:cNvPr id="6" name="TextBox 5"/>
-          <p:cNvSpPr txBox="1"/>
-          <p:nvPr/>
-        </p:nvSpPr>
-        <p:spPr>
-          <a:xfrm>
-            <a:off x="2103120" y="182880"/>
-            <a:ext cx="9601200" cy="731520"/>
+            <a:off x="731520" y="457200"/>
+            <a:ext cx="10728655" cy="914400"/>
           </a:xfrm>
           <a:prstGeom prst="rect">
             <a:avLst/>
@@ -3563,518 +3231,674 @@
           <a:noFill/>
         </p:spPr>
         <p:txBody>
-          <a:bodyPr wrap="square" lIns="0" tIns="0" rIns="0" bIns="0">
+          <a:bodyPr wrap="none">
             <a:spAutoFit/>
           </a:bodyPr>
           <a:lstStyle/>
           <a:p>
             <a:pPr>
-              <a:defRPr sz="900" b="1">
+              <a:defRPr sz="2200" b="1">
                 <a:solidFill>
                   <a:srgbClr val="EE0033"/>
                 </a:solidFill>
               </a:defRPr>
             </a:pPr>
             <a:r>
-              <a:t>TỔNG QUAN BỨC TRANH</a:t>
-            </a:r>
-          </a:p>
-          <a:p>
-            <a:pPr>
-              <a:defRPr sz="1800" b="1">
-                <a:solidFill>
-                  <a:srgbClr val="1E293B"/>
-                </a:solidFill>
-              </a:defRPr>
-            </a:pPr>
-            <a:r>
-              <a:t>BỨC TRANH TOÀN CẢNH QUẢN LÝ HỢP ĐỒNG &amp; CÔNG TRÌNH VIETTEL</a:t>
-            </a:r>
-          </a:p>
-        </p:txBody>
-      </p:sp>
-      <p:sp>
-        <p:nvSpPr>
-          <p:cNvPr id="7" name="Rounded Rectangle 6"/>
-          <p:cNvSpPr/>
+              <a:t>SLIDE 2: TOP NHÀ THẦU TỒN CÔNG NỢ VẬT TƯ A LỚN NHẤT (548.3 TỶ VNĐ)</a:t>
+            </a:r>
+          </a:p>
+        </p:txBody>
+      </p:sp>
+      <p:graphicFrame>
+        <p:nvGraphicFramePr>
+          <p:cNvPr id="3" name="Table 2"/>
+          <p:cNvGraphicFramePr>
+            <a:graphicFrameLocks noGrp="1"/>
+          </p:cNvGraphicFramePr>
           <p:nvPr/>
-        </p:nvSpPr>
-        <p:spPr>
-          <a:xfrm>
-            <a:off x="548640" y="1371600"/>
-            <a:ext cx="2651760" cy="1554480"/>
-          </a:xfrm>
-          <a:prstGeom prst="roundRect">
-            <a:avLst/>
-          </a:prstGeom>
-          <a:solidFill>
-            <a:srgbClr val="FFFFFF"/>
-          </a:solidFill>
-          <a:ln w="19050">
-            <a:solidFill>
-              <a:srgbClr val="E2E8F0"/>
-            </a:solidFill>
-          </a:ln>
-        </p:spPr>
-        <p:style>
-          <a:lnRef idx="1">
-            <a:schemeClr val="accent1"/>
-          </a:lnRef>
-          <a:fillRef idx="3">
-            <a:schemeClr val="accent1"/>
-          </a:fillRef>
-          <a:effectRef idx="2">
-            <a:schemeClr val="accent1"/>
-          </a:effectRef>
-          <a:fontRef idx="minor">
-            <a:schemeClr val="lt1"/>
-          </a:fontRef>
-        </p:style>
-        <p:txBody>
-          <a:bodyPr rtlCol="0" anchor="ctr" wrap="square" lIns="137160" tIns="137160" rIns="137160" bIns="137160"/>
-          <a:lstStyle/>
-          <a:p>
-            <a:pPr algn="ctr">
-              <a:defRPr sz="1000" b="1">
-                <a:solidFill>
-                  <a:srgbClr val="64748B"/>
-                </a:solidFill>
-              </a:defRPr>
-            </a:pPr>
-            <a:r>
-              <a:t>TỔNG QUY MÔ HỢP ĐỒNG</a:t>
-            </a:r>
-          </a:p>
-          <a:p>
-            <a:pPr>
-              <a:spcBef>
-                <a:spcPts val="400"/>
-              </a:spcBef>
-              <a:defRPr sz="2400" b="1">
-                <a:solidFill>
-                  <a:srgbClr val="1E293B"/>
-                </a:solidFill>
-              </a:defRPr>
-            </a:pPr>
-            <a:r>
-              <a:t>649 HĐ</a:t>
-            </a:r>
-          </a:p>
-          <a:p>
-            <a:pPr>
-              <a:spcBef>
-                <a:spcPts val="400"/>
-              </a:spcBef>
-              <a:defRPr sz="1100" b="1">
-                <a:solidFill>
-                  <a:srgbClr val="1E293B"/>
-                </a:solidFill>
-              </a:defRPr>
-            </a:pPr>
-            <a:r>
-              <a:t>12,834 Công Trình</a:t>
-            </a:r>
-          </a:p>
-        </p:txBody>
-      </p:sp>
-      <p:sp>
-        <p:nvSpPr>
-          <p:cNvPr id="8" name="Rounded Rectangle 7"/>
-          <p:cNvSpPr/>
-          <p:nvPr/>
-        </p:nvSpPr>
-        <p:spPr>
-          <a:xfrm>
-            <a:off x="3383280" y="1371600"/>
-            <a:ext cx="2651760" cy="1554480"/>
-          </a:xfrm>
-          <a:prstGeom prst="roundRect">
-            <a:avLst/>
-          </a:prstGeom>
-          <a:solidFill>
-            <a:srgbClr val="FEF2F2"/>
-          </a:solidFill>
-          <a:ln w="19050">
-            <a:solidFill>
-              <a:srgbClr val="EE0033"/>
-            </a:solidFill>
-          </a:ln>
-        </p:spPr>
-        <p:style>
-          <a:lnRef idx="1">
-            <a:schemeClr val="accent1"/>
-          </a:lnRef>
-          <a:fillRef idx="3">
-            <a:schemeClr val="accent1"/>
-          </a:fillRef>
-          <a:effectRef idx="2">
-            <a:schemeClr val="accent1"/>
-          </a:effectRef>
-          <a:fontRef idx="minor">
-            <a:schemeClr val="lt1"/>
-          </a:fontRef>
-        </p:style>
-        <p:txBody>
-          <a:bodyPr rtlCol="0" anchor="ctr" wrap="square" lIns="137160" tIns="137160" rIns="137160" bIns="137160"/>
-          <a:lstStyle/>
-          <a:p>
-            <a:pPr algn="ctr">
-              <a:defRPr sz="1000" b="1">
-                <a:solidFill>
-                  <a:srgbClr val="64748B"/>
-                </a:solidFill>
-              </a:defRPr>
-            </a:pPr>
-            <a:r>
-              <a:t>TỒN CÔNG NỢ VTA ĐẦU TƯ</a:t>
-            </a:r>
-          </a:p>
-          <a:p>
-            <a:pPr>
-              <a:spcBef>
-                <a:spcPts val="400"/>
-              </a:spcBef>
-              <a:defRPr sz="2400" b="1">
-                <a:solidFill>
-                  <a:srgbClr val="EE0033"/>
-                </a:solidFill>
-              </a:defRPr>
-            </a:pPr>
-            <a:r>
-              <a:t>548.32 Tỷ</a:t>
-            </a:r>
-          </a:p>
-          <a:p>
-            <a:pPr>
-              <a:spcBef>
-                <a:spcPts val="400"/>
-              </a:spcBef>
-              <a:defRPr sz="1100" b="1">
-                <a:solidFill>
-                  <a:srgbClr val="1E293B"/>
-                </a:solidFill>
-              </a:defRPr>
-            </a:pPr>
-            <a:r>
-              <a:t>150 HĐ Nguồn Đầu Tư</a:t>
-            </a:r>
-          </a:p>
-        </p:txBody>
-      </p:sp>
-      <p:sp>
-        <p:nvSpPr>
-          <p:cNvPr id="9" name="Rounded Rectangle 8"/>
-          <p:cNvSpPr/>
-          <p:nvPr/>
-        </p:nvSpPr>
-        <p:spPr>
-          <a:xfrm>
-            <a:off x="6217920" y="1371600"/>
-            <a:ext cx="2651760" cy="1554480"/>
-          </a:xfrm>
-          <a:prstGeom prst="roundRect">
-            <a:avLst/>
-          </a:prstGeom>
-          <a:solidFill>
-            <a:srgbClr val="FFFFFF"/>
-          </a:solidFill>
-          <a:ln w="19050">
-            <a:solidFill>
-              <a:srgbClr val="D97706"/>
-            </a:solidFill>
-          </a:ln>
-        </p:spPr>
-        <p:style>
-          <a:lnRef idx="1">
-            <a:schemeClr val="accent1"/>
-          </a:lnRef>
-          <a:fillRef idx="3">
-            <a:schemeClr val="accent1"/>
-          </a:fillRef>
-          <a:effectRef idx="2">
-            <a:schemeClr val="accent1"/>
-          </a:effectRef>
-          <a:fontRef idx="minor">
-            <a:schemeClr val="lt1"/>
-          </a:fontRef>
-        </p:style>
-        <p:txBody>
-          <a:bodyPr rtlCol="0" anchor="ctr" wrap="square" lIns="137160" tIns="137160" rIns="137160" bIns="137160"/>
-          <a:lstStyle/>
-          <a:p>
-            <a:pPr algn="ctr">
-              <a:defRPr sz="1000" b="1">
-                <a:solidFill>
-                  <a:srgbClr val="64748B"/>
-                </a:solidFill>
-              </a:defRPr>
-            </a:pPr>
-            <a:r>
-              <a:t>TỔNG NGUỒN CHI PHÍ</a:t>
-            </a:r>
-          </a:p>
-          <a:p>
-            <a:pPr>
-              <a:spcBef>
-                <a:spcPts val="400"/>
-              </a:spcBef>
-              <a:defRPr sz="2400" b="1">
-                <a:solidFill>
-                  <a:srgbClr val="D97706"/>
-                </a:solidFill>
-              </a:defRPr>
-            </a:pPr>
-            <a:r>
-              <a:t>64.73 Tỷ</a:t>
-            </a:r>
-          </a:p>
-          <a:p>
-            <a:pPr>
-              <a:spcBef>
-                <a:spcPts val="400"/>
-              </a:spcBef>
-              <a:defRPr sz="1100" b="1">
-                <a:solidFill>
-                  <a:srgbClr val="1E293B"/>
-                </a:solidFill>
-              </a:defRPr>
-            </a:pPr>
-            <a:r>
-              <a:t>499 HĐ Nguồn Chi Phí</a:t>
-            </a:r>
-          </a:p>
-        </p:txBody>
-      </p:sp>
-      <p:sp>
-        <p:nvSpPr>
-          <p:cNvPr id="10" name="Rounded Rectangle 9"/>
-          <p:cNvSpPr/>
-          <p:nvPr/>
-        </p:nvSpPr>
-        <p:spPr>
-          <a:xfrm>
-            <a:off x="9052560" y="1371600"/>
-            <a:ext cx="2651760" cy="1554480"/>
-          </a:xfrm>
-          <a:prstGeom prst="roundRect">
-            <a:avLst/>
-          </a:prstGeom>
-          <a:solidFill>
-            <a:srgbClr val="FEF2F2"/>
-          </a:solidFill>
-          <a:ln w="19050">
-            <a:solidFill>
-              <a:srgbClr val="EE0033"/>
-            </a:solidFill>
-          </a:ln>
-        </p:spPr>
-        <p:style>
-          <a:lnRef idx="1">
-            <a:schemeClr val="accent1"/>
-          </a:lnRef>
-          <a:fillRef idx="3">
-            <a:schemeClr val="accent1"/>
-          </a:fillRef>
-          <a:effectRef idx="2">
-            <a:schemeClr val="accent1"/>
-          </a:effectRef>
-          <a:fontRef idx="minor">
-            <a:schemeClr val="lt1"/>
-          </a:fontRef>
-        </p:style>
-        <p:txBody>
-          <a:bodyPr rtlCol="0" anchor="ctr" wrap="square" lIns="137160" tIns="137160" rIns="137160" bIns="137160"/>
-          <a:lstStyle/>
-          <a:p>
-            <a:pPr algn="ctr">
-              <a:defRPr sz="1000" b="1">
-                <a:solidFill>
-                  <a:srgbClr val="64748B"/>
-                </a:solidFill>
-              </a:defRPr>
-            </a:pPr>
-            <a:r>
-              <a:t>🔥 CẢNH BÁO HĐ &lt; 2025</a:t>
-            </a:r>
-          </a:p>
-          <a:p>
-            <a:pPr>
-              <a:spcBef>
-                <a:spcPts val="400"/>
-              </a:spcBef>
-              <a:defRPr sz="2400" b="1">
-                <a:solidFill>
-                  <a:srgbClr val="EE0033"/>
-                </a:solidFill>
-              </a:defRPr>
-            </a:pPr>
-            <a:r>
-              <a:t>78 HĐ</a:t>
-            </a:r>
-          </a:p>
-          <a:p>
-            <a:pPr>
-              <a:spcBef>
-                <a:spcPts val="400"/>
-              </a:spcBef>
-              <a:defRPr sz="1100" b="1">
-                <a:solidFill>
-                  <a:srgbClr val="1E293B"/>
-                </a:solidFill>
-              </a:defRPr>
-            </a:pPr>
-            <a:r>
-              <a:t>14.78 Tỷ (Chi phí tồn cũ)</a:t>
-            </a:r>
-          </a:p>
-        </p:txBody>
-      </p:sp>
-      <p:sp>
-        <p:nvSpPr>
-          <p:cNvPr id="11" name="Rounded Rectangle 10"/>
-          <p:cNvSpPr/>
-          <p:nvPr/>
-        </p:nvSpPr>
-        <p:spPr>
-          <a:xfrm>
-            <a:off x="548640" y="3108960"/>
-            <a:ext cx="11094415" cy="3291840"/>
-          </a:xfrm>
-          <a:prstGeom prst="roundRect">
-            <a:avLst/>
-          </a:prstGeom>
-          <a:solidFill>
-            <a:srgbClr val="FFFFFF"/>
-          </a:solidFill>
-          <a:ln w="19050">
-            <a:solidFill>
-              <a:srgbClr val="EE0033"/>
-            </a:solidFill>
-          </a:ln>
-        </p:spPr>
-        <p:style>
-          <a:lnRef idx="1">
-            <a:schemeClr val="accent1"/>
-          </a:lnRef>
-          <a:fillRef idx="3">
-            <a:schemeClr val="accent1"/>
-          </a:fillRef>
-          <a:effectRef idx="2">
-            <a:schemeClr val="accent1"/>
-          </a:effectRef>
-          <a:fontRef idx="minor">
-            <a:schemeClr val="lt1"/>
-          </a:fontRef>
-        </p:style>
-        <p:txBody>
-          <a:bodyPr rtlCol="0" anchor="ctr" wrap="square" lIns="182880" tIns="182880" rIns="182880" bIns="182880"/>
-          <a:lstStyle/>
-          <a:p>
-            <a:pPr algn="ctr">
-              <a:defRPr sz="1300" b="1">
-                <a:solidFill>
-                  <a:srgbClr val="EE0033"/>
-                </a:solidFill>
-              </a:defRPr>
-            </a:pPr>
-            <a:r>
-              <a:t>NHỮNG ĐIỂM CỐT LÕI CẦN ĐÁNH TRỌNG TÂM QUẢN TRỊ:</a:t>
-            </a:r>
-          </a:p>
-          <a:p>
-            <a:pPr>
-              <a:spcBef>
-                <a:spcPts val="600"/>
-              </a:spcBef>
-            </a:pPr>
-            <a:r>
-              <a:rPr b="1" sz="1100">
-                <a:solidFill>
-                  <a:srgbClr val="1E293B"/>
-                </a:solidFill>
-              </a:rPr>
-              <a:t>1. Tập trung nguồn lực công nợ VTA Nguồn Đầu Tư: </a:t>
-            </a:r>
-            <a:r>
-              <a:rPr sz="1100">
-                <a:solidFill>
-                  <a:srgbClr val="64748B"/>
-                </a:solidFill>
-              </a:rPr>
-              <a:t>Tổng tồn công nợ VTA Nguồn Đầu tư lên tới 548.32 Tỷ VNĐ (150 HĐ, 9,916 CT). Công nợ này quy mô cực kỳ lớn và tập trung chủ yếu vào 2 đối tác chính.</a:t>
-            </a:r>
-          </a:p>
-          <a:p>
-            <a:pPr>
-              <a:spcBef>
-                <a:spcPts val="600"/>
-              </a:spcBef>
-            </a:pPr>
-            <a:r>
-              <a:rPr b="1" sz="1100">
-                <a:solidFill>
-                  <a:srgbClr val="1E293B"/>
-                </a:solidFill>
-              </a:rPr>
-              <a:t>2. Mức độ tập trung công nợ áp đảo tại TOP 2 Nhà Thầu: </a:t>
-            </a:r>
-            <a:r>
-              <a:rPr sz="1100">
-                <a:solidFill>
-                  <a:srgbClr val="64748B"/>
-                </a:solidFill>
-              </a:rPr>
-              <a:t>TCT CP Công trình Viettel (234 Tỷ) và Công ty CP Viễn thông ACT (169.4 Tỷ) chiếm tới 74.1% tổng công nợ VTA toàn bộ Nguồn Đầu tư của tập đoàn.</a:t>
-            </a:r>
-          </a:p>
-          <a:p>
-            <a:pPr>
-              <a:spcBef>
-                <a:spcPts val="600"/>
-              </a:spcBef>
-            </a:pPr>
-            <a:r>
-              <a:rPr b="1" sz="1100">
-                <a:solidFill>
-                  <a:srgbClr val="1E293B"/>
-                </a:solidFill>
-              </a:rPr>
-              <a:t>3. Rủi ro tồn đọng Hợp đồng Chi phí cũ phát sinh từ trước năm 2025 (&lt; 2025): </a:t>
-            </a:r>
-            <a:r>
-              <a:rPr sz="1100">
-                <a:solidFill>
-                  <a:srgbClr val="64748B"/>
-                </a:solidFill>
-              </a:rPr>
-              <a:t>Hiện còn tồn 78 Hợp đồng nguồn Chi phí ký trước 2025 (tương ứng 582 công trình, 14.78 Tỷ VNĐ). Các HĐ này đọng nhiều năm chưa hoàn thành quyết toán/thu hồi.</a:t>
-            </a:r>
-          </a:p>
-          <a:p>
-            <a:pPr>
-              <a:spcBef>
-                <a:spcPts val="600"/>
-              </a:spcBef>
-            </a:pPr>
-            <a:r>
-              <a:rPr b="1" sz="1100">
-                <a:solidFill>
-                  <a:srgbClr val="1E293B"/>
-                </a:solidFill>
-              </a:rPr>
-              <a:t>4. Siết chặt kỷ luật KPI theo quy định Cột Q = 'KHÔNG': </a:t>
-            </a:r>
-            <a:r>
-              <a:rPr sz="1100">
-                <a:solidFill>
-                  <a:srgbClr val="64748B"/>
-                </a:solidFill>
-              </a:rPr>
-              <a:t>Hệ thống kiểm soát 6 chỉ tiêu KPI (KH VTT, NT/BGTS BQLDA, SAP, VHKT). Bất kỳ công trình nào còn tồn Vật tư A (Cột Q = CÓ) sẽ lập tức bị tính VƯỚNG KPI.</a:t>
-            </a:r>
-          </a:p>
-        </p:txBody>
-      </p:sp>
+        </p:nvGraphicFramePr>
+        <p:xfrm>
+          <a:off x="731520" y="1463040"/>
+          <a:ext cx="10728655" cy="4572000"/>
+        </p:xfrm>
+        <a:graphic>
+          <a:graphicData uri="http://schemas.openxmlformats.org/drawingml/2006/table">
+            <a:tbl>
+              <a:tblPr firstRow="1" bandRow="1">
+                <a:tableStyleId>{5C22544A-7EE6-4342-B048-85BDC9FD1C3A}</a:tableStyleId>
+              </a:tblPr>
+              <a:tblGrid>
+                <a:gridCol w="1788109"/>
+                <a:gridCol w="1788109"/>
+                <a:gridCol w="1788109"/>
+                <a:gridCol w="1788109"/>
+                <a:gridCol w="1788109"/>
+                <a:gridCol w="1788110"/>
+              </a:tblGrid>
+              <a:tr h="762000">
+                <a:tc>
+                  <a:txBody>
+                    <a:bodyPr/>
+                    <a:lstStyle/>
+                    <a:p>
+                      <a:pPr algn="ctr">
+                        <a:defRPr b="1" sz="1300">
+                          <a:solidFill>
+                            <a:srgbClr val="FFFFFF"/>
+                          </a:solidFill>
+                        </a:defRPr>
+                      </a:pPr>
+                      <a:r>
+                        <a:t>Nhà Thầu Đối Tác</a:t>
+                      </a:r>
+                    </a:p>
+                  </a:txBody>
+                  <a:tcPr>
+                    <a:solidFill>
+                      <a:srgbClr val="EE0033"/>
+                    </a:solidFill>
+                  </a:tcPr>
+                </a:tc>
+                <a:tc>
+                  <a:txBody>
+                    <a:bodyPr/>
+                    <a:lstStyle/>
+                    <a:p>
+                      <a:pPr algn="ctr">
+                        <a:defRPr b="1" sz="1300">
+                          <a:solidFill>
+                            <a:srgbClr val="FFFFFF"/>
+                          </a:solidFill>
+                        </a:defRPr>
+                      </a:pPr>
+                      <a:r>
+                        <a:t>Số HĐ</a:t>
+                      </a:r>
+                    </a:p>
+                  </a:txBody>
+                  <a:tcPr>
+                    <a:solidFill>
+                      <a:srgbClr val="EE0033"/>
+                    </a:solidFill>
+                  </a:tcPr>
+                </a:tc>
+                <a:tc>
+                  <a:txBody>
+                    <a:bodyPr/>
+                    <a:lstStyle/>
+                    <a:p>
+                      <a:pPr algn="ctr">
+                        <a:defRPr b="1" sz="1300">
+                          <a:solidFill>
+                            <a:srgbClr val="FFFFFF"/>
+                          </a:solidFill>
+                        </a:defRPr>
+                      </a:pPr>
+                      <a:r>
+                        <a:t>Số CT Tồn VTA</a:t>
+                      </a:r>
+                    </a:p>
+                  </a:txBody>
+                  <a:tcPr>
+                    <a:solidFill>
+                      <a:srgbClr val="EE0033"/>
+                    </a:solidFill>
+                  </a:tcPr>
+                </a:tc>
+                <a:tc>
+                  <a:txBody>
+                    <a:bodyPr/>
+                    <a:lstStyle/>
+                    <a:p>
+                      <a:pPr algn="ctr">
+                        <a:defRPr b="1" sz="1300">
+                          <a:solidFill>
+                            <a:srgbClr val="FFFFFF"/>
+                          </a:solidFill>
+                        </a:defRPr>
+                      </a:pPr>
+                      <a:r>
+                        <a:t>Tiền Tồn VTA (Tỷ)</a:t>
+                      </a:r>
+                    </a:p>
+                  </a:txBody>
+                  <a:tcPr>
+                    <a:solidFill>
+                      <a:srgbClr val="EE0033"/>
+                    </a:solidFill>
+                  </a:tcPr>
+                </a:tc>
+                <a:tc>
+                  <a:txBody>
+                    <a:bodyPr/>
+                    <a:lstStyle/>
+                    <a:p>
+                      <a:pPr algn="ctr">
+                        <a:defRPr b="1" sz="1300">
+                          <a:solidFill>
+                            <a:srgbClr val="FFFFFF"/>
+                          </a:solidFill>
+                        </a:defRPr>
+                      </a:pPr>
+                      <a:r>
+                        <a:t>Tỷ Trọng (%)</a:t>
+                      </a:r>
+                    </a:p>
+                  </a:txBody>
+                  <a:tcPr>
+                    <a:solidFill>
+                      <a:srgbClr val="EE0033"/>
+                    </a:solidFill>
+                  </a:tcPr>
+                </a:tc>
+                <a:tc>
+                  <a:txBody>
+                    <a:bodyPr/>
+                    <a:lstStyle/>
+                    <a:p>
+                      <a:pPr algn="ctr">
+                        <a:defRPr b="1" sz="1300">
+                          <a:solidFill>
+                            <a:srgbClr val="FFFFFF"/>
+                          </a:solidFill>
+                        </a:defRPr>
+                      </a:pPr>
+                      <a:r>
+                        <a:t>Tỷ Lệ Tích Lũy</a:t>
+                      </a:r>
+                    </a:p>
+                  </a:txBody>
+                  <a:tcPr>
+                    <a:solidFill>
+                      <a:srgbClr val="EE0033"/>
+                    </a:solidFill>
+                  </a:tcPr>
+                </a:tc>
+              </a:tr>
+              <a:tr h="762000">
+                <a:tc>
+                  <a:txBody>
+                    <a:bodyPr/>
+                    <a:lstStyle/>
+                    <a:p>
+                      <a:pPr>
+                        <a:defRPr sz="1200"/>
+                      </a:pPr>
+                      <a:r>
+                        <a:t>Tổng công ty CP Công trình Viettel (VCC)</a:t>
+                      </a:r>
+                    </a:p>
+                  </a:txBody>
+                  <a:tcPr/>
+                </a:tc>
+                <a:tc>
+                  <a:txBody>
+                    <a:bodyPr/>
+                    <a:lstStyle/>
+                    <a:p>
+                      <a:pPr algn="ctr">
+                        <a:defRPr sz="1200"/>
+                      </a:pPr>
+                      <a:r>
+                        <a:t>201</a:t>
+                      </a:r>
+                    </a:p>
+                  </a:txBody>
+                  <a:tcPr/>
+                </a:tc>
+                <a:tc>
+                  <a:txBody>
+                    <a:bodyPr/>
+                    <a:lstStyle/>
+                    <a:p>
+                      <a:pPr algn="ctr">
+                        <a:defRPr sz="1200"/>
+                      </a:pPr>
+                      <a:r>
+                        <a:t>3,806 CT</a:t>
+                      </a:r>
+                    </a:p>
+                  </a:txBody>
+                  <a:tcPr/>
+                </a:tc>
+                <a:tc>
+                  <a:txBody>
+                    <a:bodyPr/>
+                    <a:lstStyle/>
+                    <a:p>
+                      <a:pPr algn="ctr">
+                        <a:defRPr sz="1200" b="1">
+                          <a:solidFill>
+                            <a:srgbClr val="EE0033"/>
+                          </a:solidFill>
+                        </a:defRPr>
+                      </a:pPr>
+                      <a:r>
+                        <a:t>256.18 Tỷ</a:t>
+                      </a:r>
+                    </a:p>
+                  </a:txBody>
+                  <a:tcPr/>
+                </a:tc>
+                <a:tc>
+                  <a:txBody>
+                    <a:bodyPr/>
+                    <a:lstStyle/>
+                    <a:p>
+                      <a:pPr algn="ctr">
+                        <a:defRPr sz="1200"/>
+                      </a:pPr>
+                      <a:r>
+                        <a:t>46.7%</a:t>
+                      </a:r>
+                    </a:p>
+                  </a:txBody>
+                  <a:tcPr/>
+                </a:tc>
+                <a:tc>
+                  <a:txBody>
+                    <a:bodyPr/>
+                    <a:lstStyle/>
+                    <a:p>
+                      <a:pPr algn="ctr">
+                        <a:defRPr sz="1200"/>
+                      </a:pPr>
+                      <a:r>
+                        <a:t>46.7%</a:t>
+                      </a:r>
+                    </a:p>
+                  </a:txBody>
+                  <a:tcPr/>
+                </a:tc>
+              </a:tr>
+              <a:tr h="762000">
+                <a:tc>
+                  <a:txBody>
+                    <a:bodyPr/>
+                    <a:lstStyle/>
+                    <a:p>
+                      <a:pPr>
+                        <a:defRPr sz="1200"/>
+                      </a:pPr>
+                      <a:r>
+                        <a:t>Công ty CP Viễn thông ACT</a:t>
+                      </a:r>
+                    </a:p>
+                  </a:txBody>
+                  <a:tcPr/>
+                </a:tc>
+                <a:tc>
+                  <a:txBody>
+                    <a:bodyPr/>
+                    <a:lstStyle/>
+                    <a:p>
+                      <a:pPr algn="ctr">
+                        <a:defRPr sz="1200"/>
+                      </a:pPr>
+                      <a:r>
+                        <a:t>109</a:t>
+                      </a:r>
+                    </a:p>
+                  </a:txBody>
+                  <a:tcPr/>
+                </a:tc>
+                <a:tc>
+                  <a:txBody>
+                    <a:bodyPr/>
+                    <a:lstStyle/>
+                    <a:p>
+                      <a:pPr algn="ctr">
+                        <a:defRPr sz="1200"/>
+                      </a:pPr>
+                      <a:r>
+                        <a:t>3,499 CT</a:t>
+                      </a:r>
+                    </a:p>
+                  </a:txBody>
+                  <a:tcPr/>
+                </a:tc>
+                <a:tc>
+                  <a:txBody>
+                    <a:bodyPr/>
+                    <a:lstStyle/>
+                    <a:p>
+                      <a:pPr algn="ctr">
+                        <a:defRPr sz="1200" b="1">
+                          <a:solidFill>
+                            <a:srgbClr val="EE0033"/>
+                          </a:solidFill>
+                        </a:defRPr>
+                      </a:pPr>
+                      <a:r>
+                        <a:t>176.92 Tỷ</a:t>
+                      </a:r>
+                    </a:p>
+                  </a:txBody>
+                  <a:tcPr/>
+                </a:tc>
+                <a:tc>
+                  <a:txBody>
+                    <a:bodyPr/>
+                    <a:lstStyle/>
+                    <a:p>
+                      <a:pPr algn="ctr">
+                        <a:defRPr sz="1200"/>
+                      </a:pPr>
+                      <a:r>
+                        <a:t>32.3%</a:t>
+                      </a:r>
+                    </a:p>
+                  </a:txBody>
+                  <a:tcPr/>
+                </a:tc>
+                <a:tc>
+                  <a:txBody>
+                    <a:bodyPr/>
+                    <a:lstStyle/>
+                    <a:p>
+                      <a:pPr algn="ctr">
+                        <a:defRPr sz="1200"/>
+                      </a:pPr>
+                      <a:r>
+                        <a:t>79.0%</a:t>
+                      </a:r>
+                    </a:p>
+                  </a:txBody>
+                  <a:tcPr/>
+                </a:tc>
+              </a:tr>
+              <a:tr h="762000">
+                <a:tc>
+                  <a:txBody>
+                    <a:bodyPr/>
+                    <a:lstStyle/>
+                    <a:p>
+                      <a:pPr>
+                        <a:defRPr sz="1200"/>
+                      </a:pPr>
+                      <a:r>
+                        <a:t>Công ty CP PT DV TLI</a:t>
+                      </a:r>
+                    </a:p>
+                  </a:txBody>
+                  <a:tcPr/>
+                </a:tc>
+                <a:tc>
+                  <a:txBody>
+                    <a:bodyPr/>
+                    <a:lstStyle/>
+                    <a:p>
+                      <a:pPr algn="ctr">
+                        <a:defRPr sz="1200"/>
+                      </a:pPr>
+                      <a:r>
+                        <a:t>1</a:t>
+                      </a:r>
+                    </a:p>
+                  </a:txBody>
+                  <a:tcPr/>
+                </a:tc>
+                <a:tc>
+                  <a:txBody>
+                    <a:bodyPr/>
+                    <a:lstStyle/>
+                    <a:p>
+                      <a:pPr algn="ctr">
+                        <a:defRPr sz="1200"/>
+                      </a:pPr>
+                      <a:r>
+                        <a:t>137 CT</a:t>
+                      </a:r>
+                    </a:p>
+                  </a:txBody>
+                  <a:tcPr/>
+                </a:tc>
+                <a:tc>
+                  <a:txBody>
+                    <a:bodyPr/>
+                    <a:lstStyle/>
+                    <a:p>
+                      <a:pPr algn="ctr">
+                        <a:defRPr sz="1200" b="1">
+                          <a:solidFill>
+                            <a:srgbClr val="EE0033"/>
+                          </a:solidFill>
+                        </a:defRPr>
+                      </a:pPr>
+                      <a:r>
+                        <a:t>43.77 Tỷ</a:t>
+                      </a:r>
+                    </a:p>
+                  </a:txBody>
+                  <a:tcPr/>
+                </a:tc>
+                <a:tc>
+                  <a:txBody>
+                    <a:bodyPr/>
+                    <a:lstStyle/>
+                    <a:p>
+                      <a:pPr algn="ctr">
+                        <a:defRPr sz="1200"/>
+                      </a:pPr>
+                      <a:r>
+                        <a:t>8.0%</a:t>
+                      </a:r>
+                    </a:p>
+                  </a:txBody>
+                  <a:tcPr/>
+                </a:tc>
+                <a:tc>
+                  <a:txBody>
+                    <a:bodyPr/>
+                    <a:lstStyle/>
+                    <a:p>
+                      <a:pPr algn="ctr">
+                        <a:defRPr sz="1200"/>
+                      </a:pPr>
+                      <a:r>
+                        <a:t>87.0%</a:t>
+                      </a:r>
+                    </a:p>
+                  </a:txBody>
+                  <a:tcPr/>
+                </a:tc>
+              </a:tr>
+              <a:tr h="762000">
+                <a:tc>
+                  <a:txBody>
+                    <a:bodyPr/>
+                    <a:lstStyle/>
+                    <a:p>
+                      <a:pPr>
+                        <a:defRPr sz="1200"/>
+                      </a:pPr>
+                      <a:r>
+                        <a:t>Công ty TNHH Samaki Đông Dương</a:t>
+                      </a:r>
+                    </a:p>
+                  </a:txBody>
+                  <a:tcPr/>
+                </a:tc>
+                <a:tc>
+                  <a:txBody>
+                    <a:bodyPr/>
+                    <a:lstStyle/>
+                    <a:p>
+                      <a:pPr algn="ctr">
+                        <a:defRPr sz="1200"/>
+                      </a:pPr>
+                      <a:r>
+                        <a:t>1</a:t>
+                      </a:r>
+                    </a:p>
+                  </a:txBody>
+                  <a:tcPr/>
+                </a:tc>
+                <a:tc>
+                  <a:txBody>
+                    <a:bodyPr/>
+                    <a:lstStyle/>
+                    <a:p>
+                      <a:pPr algn="ctr">
+                        <a:defRPr sz="1200"/>
+                      </a:pPr>
+                      <a:r>
+                        <a:t>72 CT</a:t>
+                      </a:r>
+                    </a:p>
+                  </a:txBody>
+                  <a:tcPr/>
+                </a:tc>
+                <a:tc>
+                  <a:txBody>
+                    <a:bodyPr/>
+                    <a:lstStyle/>
+                    <a:p>
+                      <a:pPr algn="ctr">
+                        <a:defRPr sz="1200" b="1">
+                          <a:solidFill>
+                            <a:srgbClr val="EE0033"/>
+                          </a:solidFill>
+                        </a:defRPr>
+                      </a:pPr>
+                      <a:r>
+                        <a:t>28.21 Tỷ</a:t>
+                      </a:r>
+                    </a:p>
+                  </a:txBody>
+                  <a:tcPr/>
+                </a:tc>
+                <a:tc>
+                  <a:txBody>
+                    <a:bodyPr/>
+                    <a:lstStyle/>
+                    <a:p>
+                      <a:pPr algn="ctr">
+                        <a:defRPr sz="1200"/>
+                      </a:pPr>
+                      <a:r>
+                        <a:t>5.1%</a:t>
+                      </a:r>
+                    </a:p>
+                  </a:txBody>
+                  <a:tcPr/>
+                </a:tc>
+                <a:tc>
+                  <a:txBody>
+                    <a:bodyPr/>
+                    <a:lstStyle/>
+                    <a:p>
+                      <a:pPr algn="ctr">
+                        <a:defRPr sz="1200"/>
+                      </a:pPr>
+                      <a:r>
+                        <a:t>92.1%</a:t>
+                      </a:r>
+                    </a:p>
+                  </a:txBody>
+                  <a:tcPr/>
+                </a:tc>
+              </a:tr>
+              <a:tr h="762000">
+                <a:tc>
+                  <a:txBody>
+                    <a:bodyPr/>
+                    <a:lstStyle/>
+                    <a:p>
+                      <a:pPr>
+                        <a:defRPr sz="1200"/>
+                      </a:pPr>
+                      <a:r>
+                        <a:t>CÔNG TY TNHH TMDV KT VT AN PHÁT</a:t>
+                      </a:r>
+                    </a:p>
+                  </a:txBody>
+                  <a:tcPr/>
+                </a:tc>
+                <a:tc>
+                  <a:txBody>
+                    <a:bodyPr/>
+                    <a:lstStyle/>
+                    <a:p>
+                      <a:pPr algn="ctr">
+                        <a:defRPr sz="1200"/>
+                      </a:pPr>
+                      <a:r>
+                        <a:t>12</a:t>
+                      </a:r>
+                    </a:p>
+                  </a:txBody>
+                  <a:tcPr/>
+                </a:tc>
+                <a:tc>
+                  <a:txBody>
+                    <a:bodyPr/>
+                    <a:lstStyle/>
+                    <a:p>
+                      <a:pPr algn="ctr">
+                        <a:defRPr sz="1200"/>
+                      </a:pPr>
+                      <a:r>
+                        <a:t>1,868 CT</a:t>
+                      </a:r>
+                    </a:p>
+                  </a:txBody>
+                  <a:tcPr/>
+                </a:tc>
+                <a:tc>
+                  <a:txBody>
+                    <a:bodyPr/>
+                    <a:lstStyle/>
+                    <a:p>
+                      <a:pPr algn="ctr">
+                        <a:defRPr sz="1200" b="1">
+                          <a:solidFill>
+                            <a:srgbClr val="EE0033"/>
+                          </a:solidFill>
+                        </a:defRPr>
+                      </a:pPr>
+                      <a:r>
+                        <a:t>18.35 Tỷ</a:t>
+                      </a:r>
+                    </a:p>
+                  </a:txBody>
+                  <a:tcPr/>
+                </a:tc>
+                <a:tc>
+                  <a:txBody>
+                    <a:bodyPr/>
+                    <a:lstStyle/>
+                    <a:p>
+                      <a:pPr algn="ctr">
+                        <a:defRPr sz="1200"/>
+                      </a:pPr>
+                      <a:r>
+                        <a:t>3.3%</a:t>
+                      </a:r>
+                    </a:p>
+                  </a:txBody>
+                  <a:tcPr/>
+                </a:tc>
+                <a:tc>
+                  <a:txBody>
+                    <a:bodyPr/>
+                    <a:lstStyle/>
+                    <a:p>
+                      <a:pPr algn="ctr">
+                        <a:defRPr sz="1200"/>
+                      </a:pPr>
+                      <a:r>
+                        <a:t>95.4%</a:t>
+                      </a:r>
+                    </a:p>
+                  </a:txBody>
+                  <a:tcPr/>
+                </a:tc>
+              </a:tr>
+            </a:tbl>
+          </a:graphicData>
+        </a:graphic>
+      </p:graphicFrame>
     </p:spTree>
   </p:cSld>
   <p:clrMapOvr>
@@ -4095,209 +3919,14 @@
       <p:grpSpPr/>
       <p:sp>
         <p:nvSpPr>
-          <p:cNvPr id="2" name="Rectangle 1"/>
-          <p:cNvSpPr/>
+          <p:cNvPr id="2" name="TextBox 1"/>
+          <p:cNvSpPr txBox="1"/>
           <p:nvPr/>
         </p:nvSpPr>
         <p:spPr>
           <a:xfrm>
-            <a:off x="0" y="0"/>
-            <a:ext cx="12191695" cy="6858000"/>
-          </a:xfrm>
-          <a:prstGeom prst="rect">
-            <a:avLst/>
-          </a:prstGeom>
-          <a:solidFill>
-            <a:srgbClr val="F1F5F9"/>
-          </a:solidFill>
-          <a:ln>
-            <a:noFill/>
-          </a:ln>
-        </p:spPr>
-        <p:style>
-          <a:lnRef idx="1">
-            <a:schemeClr val="accent1"/>
-          </a:lnRef>
-          <a:fillRef idx="3">
-            <a:schemeClr val="accent1"/>
-          </a:fillRef>
-          <a:effectRef idx="2">
-            <a:schemeClr val="accent1"/>
-          </a:effectRef>
-          <a:fontRef idx="minor">
-            <a:schemeClr val="lt1"/>
-          </a:fontRef>
-        </p:style>
-        <p:txBody>
-          <a:bodyPr rtlCol="0" anchor="ctr"/>
-          <a:lstStyle/>
-          <a:p>
-            <a:pPr algn="ctr"/>
-          </a:p>
-        </p:txBody>
-      </p:sp>
-      <p:sp>
-        <p:nvSpPr>
-          <p:cNvPr id="3" name="Rectangle 2"/>
-          <p:cNvSpPr/>
-          <p:nvPr/>
-        </p:nvSpPr>
-        <p:spPr>
-          <a:xfrm>
-            <a:off x="0" y="0"/>
-            <a:ext cx="12191695" cy="1051560"/>
-          </a:xfrm>
-          <a:prstGeom prst="rect">
-            <a:avLst/>
-          </a:prstGeom>
-          <a:solidFill>
-            <a:srgbClr val="FFFFFF"/>
-          </a:solidFill>
-          <a:ln>
-            <a:solidFill>
-              <a:srgbClr val="E2E8F0"/>
-            </a:solidFill>
-          </a:ln>
-        </p:spPr>
-        <p:style>
-          <a:lnRef idx="1">
-            <a:schemeClr val="accent1"/>
-          </a:lnRef>
-          <a:fillRef idx="3">
-            <a:schemeClr val="accent1"/>
-          </a:fillRef>
-          <a:effectRef idx="2">
-            <a:schemeClr val="accent1"/>
-          </a:effectRef>
-          <a:fontRef idx="minor">
-            <a:schemeClr val="lt1"/>
-          </a:fontRef>
-        </p:style>
-        <p:txBody>
-          <a:bodyPr rtlCol="0" anchor="ctr"/>
-          <a:lstStyle/>
-          <a:p>
-            <a:pPr algn="ctr"/>
-          </a:p>
-        </p:txBody>
-      </p:sp>
-      <p:sp>
-        <p:nvSpPr>
-          <p:cNvPr id="4" name="Rectangle 3"/>
-          <p:cNvSpPr/>
-          <p:nvPr/>
-        </p:nvSpPr>
-        <p:spPr>
-          <a:xfrm>
-            <a:off x="0" y="0"/>
-            <a:ext cx="12191695" cy="73152"/>
-          </a:xfrm>
-          <a:prstGeom prst="rect">
-            <a:avLst/>
-          </a:prstGeom>
-          <a:solidFill>
-            <a:srgbClr val="EE0033"/>
-          </a:solidFill>
-          <a:ln>
-            <a:noFill/>
-          </a:ln>
-        </p:spPr>
-        <p:style>
-          <a:lnRef idx="1">
-            <a:schemeClr val="accent1"/>
-          </a:lnRef>
-          <a:fillRef idx="3">
-            <a:schemeClr val="accent1"/>
-          </a:fillRef>
-          <a:effectRef idx="2">
-            <a:schemeClr val="accent1"/>
-          </a:effectRef>
-          <a:fontRef idx="minor">
-            <a:schemeClr val="lt1"/>
-          </a:fontRef>
-        </p:style>
-        <p:txBody>
-          <a:bodyPr rtlCol="0" anchor="ctr"/>
-          <a:lstStyle/>
-          <a:p>
-            <a:pPr algn="ctr"/>
-          </a:p>
-        </p:txBody>
-      </p:sp>
-      <p:sp>
-        <p:nvSpPr>
-          <p:cNvPr id="5" name="Rounded Rectangle 4"/>
-          <p:cNvSpPr/>
-          <p:nvPr/>
-        </p:nvSpPr>
-        <p:spPr>
-          <a:xfrm>
-            <a:off x="457200" y="182880"/>
-            <a:ext cx="1463040" cy="640080"/>
-          </a:xfrm>
-          <a:prstGeom prst="roundRect">
-            <a:avLst/>
-          </a:prstGeom>
-          <a:solidFill>
-            <a:srgbClr val="EE0033"/>
-          </a:solidFill>
-          <a:ln>
-            <a:noFill/>
-          </a:ln>
-        </p:spPr>
-        <p:style>
-          <a:lnRef idx="1">
-            <a:schemeClr val="accent1"/>
-          </a:lnRef>
-          <a:fillRef idx="3">
-            <a:schemeClr val="accent1"/>
-          </a:fillRef>
-          <a:effectRef idx="2">
-            <a:schemeClr val="accent1"/>
-          </a:effectRef>
-          <a:fontRef idx="minor">
-            <a:schemeClr val="lt1"/>
-          </a:fontRef>
-        </p:style>
-        <p:txBody>
-          <a:bodyPr rtlCol="0" anchor="ctr" wrap="none" lIns="0" tIns="0" rIns="0" bIns="0"/>
-          <a:lstStyle/>
-          <a:p>
-            <a:pPr algn="ctr">
-              <a:defRPr sz="1600" b="1">
-                <a:solidFill>
-                  <a:srgbClr val="FFFFFF"/>
-                </a:solidFill>
-              </a:defRPr>
-            </a:pPr>
-            <a:r>
-              <a:t>viettel</a:t>
-            </a:r>
-          </a:p>
-          <a:p>
-            <a:pPr algn="ctr">
-              <a:defRPr sz="700">
-                <a:solidFill>
-                  <a:srgbClr val="FFFFFF"/>
-                </a:solidFill>
-              </a:defRPr>
-            </a:pPr>
-            <a:r>
-              <a:t>Theo cách của bạn</a:t>
-            </a:r>
-          </a:p>
-        </p:txBody>
-      </p:sp>
-      <p:sp>
-        <p:nvSpPr>
-          <p:cNvPr id="6" name="TextBox 5"/>
-          <p:cNvSpPr txBox="1"/>
-          <p:nvPr/>
-        </p:nvSpPr>
-        <p:spPr>
-          <a:xfrm>
-            <a:off x="2103120" y="182880"/>
-            <a:ext cx="9601200" cy="731520"/>
+            <a:off x="731520" y="457200"/>
+            <a:ext cx="10728655" cy="914400"/>
           </a:xfrm>
           <a:prstGeom prst="rect">
             <a:avLst/>
@@ -4305,47 +3934,35 @@
           <a:noFill/>
         </p:spPr>
         <p:txBody>
-          <a:bodyPr wrap="square" lIns="0" tIns="0" rIns="0" bIns="0">
+          <a:bodyPr wrap="none">
             <a:spAutoFit/>
           </a:bodyPr>
           <a:lstStyle/>
           <a:p>
             <a:pPr>
-              <a:defRPr sz="900" b="1">
+              <a:defRPr sz="2200" b="1">
                 <a:solidFill>
                   <a:srgbClr val="EE0033"/>
                 </a:solidFill>
               </a:defRPr>
             </a:pPr>
             <a:r>
-              <a:t>TRỌNG TÂM 1 (NGUỒN ĐẦU TƯ)</a:t>
-            </a:r>
-          </a:p>
-          <a:p>
-            <a:pPr>
-              <a:defRPr sz="1800" b="1">
-                <a:solidFill>
-                  <a:srgbClr val="1E293B"/>
-                </a:solidFill>
-              </a:defRPr>
-            </a:pPr>
-            <a:r>
-              <a:t>TOP NHÀ THẦU TỒN CÔNG NỢ VẬT TƯ A LỚN NHẤT (548.3 TỶ VNĐ)</a:t>
+              <a:t>SLIDE 3: CẢNH BÁO HỢP ĐỒNG CHI PHÍ KÝ TRƯỚC 2025 (&lt; 2025)</a:t>
             </a:r>
           </a:p>
         </p:txBody>
       </p:sp>
       <p:graphicFrame>
         <p:nvGraphicFramePr>
-          <p:cNvPr id="7" name="Table 6"/>
+          <p:cNvPr id="3" name="Table 2"/>
           <p:cNvGraphicFramePr>
             <a:graphicFrameLocks noGrp="1"/>
           </p:cNvGraphicFramePr>
           <p:nvPr/>
         </p:nvGraphicFramePr>
         <p:xfrm>
-          <a:off x="548640" y="1371600"/>
-          <a:ext cx="6858000" cy="4937760"/>
+          <a:off x="731520" y="1463040"/>
+          <a:ext cx="10728655" cy="4114800"/>
         </p:xfrm>
         <a:graphic>
           <a:graphicData uri="http://schemas.openxmlformats.org/drawingml/2006/table">
@@ -4354,10 +3971,11 @@
                 <a:tableStyleId>{5C22544A-7EE6-4342-B048-85BDC9FD1C3A}</a:tableStyleId>
               </a:tblPr>
               <a:tblGrid>
-                <a:gridCol w="2926080"/>
-                <a:gridCol w="1280160"/>
-                <a:gridCol w="1097280"/>
-                <a:gridCol w="1554480"/>
+                <a:gridCol w="2145731"/>
+                <a:gridCol w="2145731"/>
+                <a:gridCol w="2145731"/>
+                <a:gridCol w="2145731"/>
+                <a:gridCol w="2145731"/>
               </a:tblGrid>
               <a:tr h="822960">
                 <a:tc>
@@ -4365,15 +3983,15 @@
                     <a:bodyPr/>
                     <a:lstStyle/>
                     <a:p>
-                      <a:pPr algn="l">
-                        <a:defRPr b="1" sz="1100">
+                      <a:pPr algn="ctr">
+                        <a:defRPr b="1" sz="1300">
                           <a:solidFill>
                             <a:srgbClr val="FFFFFF"/>
                           </a:solidFill>
                         </a:defRPr>
                       </a:pPr>
                       <a:r>
-                        <a:t>Nhà Thầu / Đối Tác</a:t>
+                        <a:t>Nhà Thầu Đối Tác</a:t>
                       </a:r>
                     </a:p>
                   </a:txBody>
@@ -4389,14 +4007,14 @@
                     <a:lstStyle/>
                     <a:p>
                       <a:pPr algn="ctr">
-                        <a:defRPr b="1" sz="1100">
+                        <a:defRPr b="1" sz="1300">
                           <a:solidFill>
                             <a:srgbClr val="FFFFFF"/>
                           </a:solidFill>
                         </a:defRPr>
                       </a:pPr>
                       <a:r>
-                        <a:t>Công Nợ VTA</a:t>
+                        <a:t>Số HĐ Chi Phí &lt; 2025</a:t>
                       </a:r>
                     </a:p>
                   </a:txBody>
@@ -4412,14 +4030,14 @@
                     <a:lstStyle/>
                     <a:p>
                       <a:pPr algn="ctr">
-                        <a:defRPr b="1" sz="1100">
+                        <a:defRPr b="1" sz="1300">
                           <a:solidFill>
                             <a:srgbClr val="FFFFFF"/>
                           </a:solidFill>
                         </a:defRPr>
                       </a:pPr>
                       <a:r>
-                        <a:t>Tỷ Trọng %</a:t>
+                        <a:t>Tổng Giá Trị HĐ (Tỷ)</a:t>
                       </a:r>
                     </a:p>
                   </a:txBody>
@@ -4435,14 +4053,14 @@
                     <a:lstStyle/>
                     <a:p>
                       <a:pPr algn="ctr">
-                        <a:defRPr b="1" sz="1100">
+                        <a:defRPr b="1" sz="1300">
                           <a:solidFill>
                             <a:srgbClr val="FFFFFF"/>
                           </a:solidFill>
                         </a:defRPr>
                       </a:pPr>
                       <a:r>
-                        <a:t>Đánh Giá</a:t>
+                        <a:t>Tổng Giá Trị Tồn (Tỷ)</a:t>
                       </a:r>
                     </a:p>
                   </a:txBody>
@@ -4452,6 +4070,29 @@
                     </a:solidFill>
                   </a:tcPr>
                 </a:tc>
+                <a:tc>
+                  <a:txBody>
+                    <a:bodyPr/>
+                    <a:lstStyle/>
+                    <a:p>
+                      <a:pPr algn="ctr">
+                        <a:defRPr b="1" sz="1300">
+                          <a:solidFill>
+                            <a:srgbClr val="FFFFFF"/>
+                          </a:solidFill>
+                        </a:defRPr>
+                      </a:pPr>
+                      <a:r>
+                        <a:t>Đánh Giá Rủi Rổ</a:t>
+                      </a:r>
+                    </a:p>
+                  </a:txBody>
+                  <a:tcPr>
+                    <a:solidFill>
+                      <a:srgbClr val="1E293B"/>
+                    </a:solidFill>
+                  </a:tcPr>
+                </a:tc>
               </a:tr>
               <a:tr h="822960">
                 <a:tc>
@@ -4460,599 +4101,327 @@
                     <a:lstStyle/>
                     <a:p>
                       <a:pPr>
-                        <a:defRPr sz="1100" b="1">
+                        <a:defRPr sz="1200"/>
+                      </a:pPr>
+                      <a:r>
+                        <a:t>Công ty CP Viễn thông ACT</a:t>
+                      </a:r>
+                    </a:p>
+                  </a:txBody>
+                  <a:tcPr/>
+                </a:tc>
+                <a:tc>
+                  <a:txBody>
+                    <a:bodyPr/>
+                    <a:lstStyle/>
+                    <a:p>
+                      <a:pPr algn="ctr">
+                        <a:defRPr sz="1200"/>
+                      </a:pPr>
+                      <a:r>
+                        <a:t>31 HĐ</a:t>
+                      </a:r>
+                    </a:p>
+                  </a:txBody>
+                  <a:tcPr/>
+                </a:tc>
+                <a:tc>
+                  <a:txBody>
+                    <a:bodyPr/>
+                    <a:lstStyle/>
+                    <a:p>
+                      <a:pPr algn="ctr">
+                        <a:defRPr sz="1200"/>
+                      </a:pPr>
+                      <a:r>
+                        <a:t>10.45 Tỷ</a:t>
+                      </a:r>
+                    </a:p>
+                  </a:txBody>
+                  <a:tcPr/>
+                </a:tc>
+                <a:tc>
+                  <a:txBody>
+                    <a:bodyPr/>
+                    <a:lstStyle/>
+                    <a:p>
+                      <a:pPr algn="ctr">
+                        <a:defRPr sz="1200"/>
+                      </a:pPr>
+                      <a:r>
+                        <a:t>6.82 Tỷ</a:t>
+                      </a:r>
+                    </a:p>
+                  </a:txBody>
+                  <a:tcPr/>
+                </a:tc>
+                <a:tc>
+                  <a:txBody>
+                    <a:bodyPr/>
+                    <a:lstStyle/>
+                    <a:p>
+                      <a:pPr>
+                        <a:defRPr sz="1200" b="1">
                           <a:solidFill>
-                            <a:srgbClr val="EE0033"/>
+                            <a:srgbClr val="E11D48"/>
                           </a:solidFill>
                         </a:defRPr>
                       </a:pPr>
                       <a:r>
-                        <a:t>TCT CP Công trình Viettel (VCC)</a:t>
-                      </a:r>
-                    </a:p>
-                  </a:txBody>
-                  <a:tcPr>
-                    <a:solidFill>
-                      <a:srgbClr val="FEF2F2"/>
-                    </a:solidFill>
-                  </a:tcPr>
-                </a:tc>
-                <a:tc>
-                  <a:txBody>
-                    <a:bodyPr/>
-                    <a:lstStyle/>
-                    <a:p>
-                      <a:pPr algn="r">
-                        <a:defRPr sz="1100" b="1">
+                        <a:t>Rủi rổ rất cao (Tồn đọng kéo dài)</a:t>
+                      </a:r>
+                    </a:p>
+                  </a:txBody>
+                  <a:tcPr/>
+                </a:tc>
+              </a:tr>
+              <a:tr h="822960">
+                <a:tc>
+                  <a:txBody>
+                    <a:bodyPr/>
+                    <a:lstStyle/>
+                    <a:p>
+                      <a:pPr>
+                        <a:defRPr sz="1200"/>
+                      </a:pPr>
+                      <a:r>
+                        <a:t>Công ty CP Công Nghệ &amp; Truyền Thông Sài Gòn</a:t>
+                      </a:r>
+                    </a:p>
+                  </a:txBody>
+                  <a:tcPr/>
+                </a:tc>
+                <a:tc>
+                  <a:txBody>
+                    <a:bodyPr/>
+                    <a:lstStyle/>
+                    <a:p>
+                      <a:pPr algn="ctr">
+                        <a:defRPr sz="1200"/>
+                      </a:pPr>
+                      <a:r>
+                        <a:t>22 HĐ</a:t>
+                      </a:r>
+                    </a:p>
+                  </a:txBody>
+                  <a:tcPr/>
+                </a:tc>
+                <a:tc>
+                  <a:txBody>
+                    <a:bodyPr/>
+                    <a:lstStyle/>
+                    <a:p>
+                      <a:pPr algn="ctr">
+                        <a:defRPr sz="1200"/>
+                      </a:pPr>
+                      <a:r>
+                        <a:t>4.12 Tỷ</a:t>
+                      </a:r>
+                    </a:p>
+                  </a:txBody>
+                  <a:tcPr/>
+                </a:tc>
+                <a:tc>
+                  <a:txBody>
+                    <a:bodyPr/>
+                    <a:lstStyle/>
+                    <a:p>
+                      <a:pPr algn="ctr">
+                        <a:defRPr sz="1200"/>
+                      </a:pPr>
+                      <a:r>
+                        <a:t>2.95 Tỷ</a:t>
+                      </a:r>
+                    </a:p>
+                  </a:txBody>
+                  <a:tcPr/>
+                </a:tc>
+                <a:tc>
+                  <a:txBody>
+                    <a:bodyPr/>
+                    <a:lstStyle/>
+                    <a:p>
+                      <a:pPr>
+                        <a:defRPr sz="1200" b="1">
                           <a:solidFill>
-                            <a:srgbClr val="EE0033"/>
+                            <a:srgbClr val="E11D48"/>
                           </a:solidFill>
                         </a:defRPr>
                       </a:pPr>
                       <a:r>
-                        <a:t>234.00 Tỷ</a:t>
-                      </a:r>
-                    </a:p>
-                  </a:txBody>
-                  <a:tcPr>
-                    <a:solidFill>
-                      <a:srgbClr val="FEF2F2"/>
-                    </a:solidFill>
-                  </a:tcPr>
-                </a:tc>
-                <a:tc>
-                  <a:txBody>
-                    <a:bodyPr/>
-                    <a:lstStyle/>
-                    <a:p>
-                      <a:pPr algn="r">
-                        <a:defRPr sz="1100" b="1">
+                        <a:t>Rủi rổ cao</a:t>
+                      </a:r>
+                    </a:p>
+                  </a:txBody>
+                  <a:tcPr/>
+                </a:tc>
+              </a:tr>
+              <a:tr h="822960">
+                <a:tc>
+                  <a:txBody>
+                    <a:bodyPr/>
+                    <a:lstStyle/>
+                    <a:p>
+                      <a:pPr>
+                        <a:defRPr sz="1200"/>
+                      </a:pPr>
+                      <a:r>
+                        <a:t>Tổng công ty CP Công trình Viettel (VCC)</a:t>
+                      </a:r>
+                    </a:p>
+                  </a:txBody>
+                  <a:tcPr/>
+                </a:tc>
+                <a:tc>
+                  <a:txBody>
+                    <a:bodyPr/>
+                    <a:lstStyle/>
+                    <a:p>
+                      <a:pPr algn="ctr">
+                        <a:defRPr sz="1200"/>
+                      </a:pPr>
+                      <a:r>
+                        <a:t>12 HĐ</a:t>
+                      </a:r>
+                    </a:p>
+                  </a:txBody>
+                  <a:tcPr/>
+                </a:tc>
+                <a:tc>
+                  <a:txBody>
+                    <a:bodyPr/>
+                    <a:lstStyle/>
+                    <a:p>
+                      <a:pPr algn="ctr">
+                        <a:defRPr sz="1200"/>
+                      </a:pPr>
+                      <a:r>
+                        <a:t>3.20 Tỷ</a:t>
+                      </a:r>
+                    </a:p>
+                  </a:txBody>
+                  <a:tcPr/>
+                </a:tc>
+                <a:tc>
+                  <a:txBody>
+                    <a:bodyPr/>
+                    <a:lstStyle/>
+                    <a:p>
+                      <a:pPr algn="ctr">
+                        <a:defRPr sz="1200"/>
+                      </a:pPr>
+                      <a:r>
+                        <a:t>2.10 Tỷ</a:t>
+                      </a:r>
+                    </a:p>
+                  </a:txBody>
+                  <a:tcPr/>
+                </a:tc>
+                <a:tc>
+                  <a:txBody>
+                    <a:bodyPr/>
+                    <a:lstStyle/>
+                    <a:p>
+                      <a:pPr>
+                        <a:defRPr sz="1200" b="1">
                           <a:solidFill>
-                            <a:srgbClr val="EE0033"/>
+                            <a:srgbClr val="E11D48"/>
                           </a:solidFill>
                         </a:defRPr>
                       </a:pPr>
                       <a:r>
-                        <a:t>43.0%</a:t>
-                      </a:r>
-                    </a:p>
-                  </a:txBody>
-                  <a:tcPr>
-                    <a:solidFill>
-                      <a:srgbClr val="FEF2F2"/>
-                    </a:solidFill>
-                  </a:tcPr>
-                </a:tc>
-                <a:tc>
-                  <a:txBody>
-                    <a:bodyPr/>
-                    <a:lstStyle/>
-                    <a:p>
-                      <a:pPr algn="ctr">
-                        <a:defRPr sz="1100" b="1">
+                        <a:t>Rủi rổ trung bình</a:t>
+                      </a:r>
+                    </a:p>
+                  </a:txBody>
+                  <a:tcPr/>
+                </a:tc>
+              </a:tr>
+              <a:tr h="822960">
+                <a:tc>
+                  <a:txBody>
+                    <a:bodyPr/>
+                    <a:lstStyle/>
+                    <a:p>
+                      <a:pPr>
+                        <a:defRPr sz="1200"/>
+                      </a:pPr>
+                      <a:r>
+                        <a:t>Công ty Cổ Phần Xây Dựng Vũng Tàu</a:t>
+                      </a:r>
+                    </a:p>
+                  </a:txBody>
+                  <a:tcPr/>
+                </a:tc>
+                <a:tc>
+                  <a:txBody>
+                    <a:bodyPr/>
+                    <a:lstStyle/>
+                    <a:p>
+                      <a:pPr algn="ctr">
+                        <a:defRPr sz="1200"/>
+                      </a:pPr>
+                      <a:r>
+                        <a:t>8 HĐ</a:t>
+                      </a:r>
+                    </a:p>
+                  </a:txBody>
+                  <a:tcPr/>
+                </a:tc>
+                <a:tc>
+                  <a:txBody>
+                    <a:bodyPr/>
+                    <a:lstStyle/>
+                    <a:p>
+                      <a:pPr algn="ctr">
+                        <a:defRPr sz="1200"/>
+                      </a:pPr>
+                      <a:r>
+                        <a:t>1.85 Tỷ</a:t>
+                      </a:r>
+                    </a:p>
+                  </a:txBody>
+                  <a:tcPr/>
+                </a:tc>
+                <a:tc>
+                  <a:txBody>
+                    <a:bodyPr/>
+                    <a:lstStyle/>
+                    <a:p>
+                      <a:pPr algn="ctr">
+                        <a:defRPr sz="1200"/>
+                      </a:pPr>
+                      <a:r>
+                        <a:t>1.12 Tỷ</a:t>
+                      </a:r>
+                    </a:p>
+                  </a:txBody>
+                  <a:tcPr/>
+                </a:tc>
+                <a:tc>
+                  <a:txBody>
+                    <a:bodyPr/>
+                    <a:lstStyle/>
+                    <a:p>
+                      <a:pPr>
+                        <a:defRPr sz="1200" b="1">
                           <a:solidFill>
-                            <a:srgbClr val="EE0033"/>
+                            <a:srgbClr val="E11D48"/>
                           </a:solidFill>
                         </a:defRPr>
                       </a:pPr>
                       <a:r>
-                        <a:t>🔥 RẤT CAO (TOP 1)</a:t>
-                      </a:r>
-                    </a:p>
-                  </a:txBody>
-                  <a:tcPr>
-                    <a:solidFill>
-                      <a:srgbClr val="FEF2F2"/>
-                    </a:solidFill>
-                  </a:tcPr>
-                </a:tc>
-              </a:tr>
-              <a:tr h="822960">
-                <a:tc>
-                  <a:txBody>
-                    <a:bodyPr/>
-                    <a:lstStyle/>
-                    <a:p>
-                      <a:pPr>
-                        <a:defRPr sz="1100" b="1">
-                          <a:solidFill>
-                            <a:srgbClr val="EE0033"/>
-                          </a:solidFill>
-                        </a:defRPr>
-                      </a:pPr>
-                      <a:r>
-                        <a:t>Công ty CP Viễn thông ACT</a:t>
-                      </a:r>
-                    </a:p>
-                  </a:txBody>
-                  <a:tcPr>
-                    <a:solidFill>
-                      <a:srgbClr val="FEF2F2"/>
-                    </a:solidFill>
-                  </a:tcPr>
-                </a:tc>
-                <a:tc>
-                  <a:txBody>
-                    <a:bodyPr/>
-                    <a:lstStyle/>
-                    <a:p>
-                      <a:pPr algn="r">
-                        <a:defRPr sz="1100" b="1">
-                          <a:solidFill>
-                            <a:srgbClr val="EE0033"/>
-                          </a:solidFill>
-                        </a:defRPr>
-                      </a:pPr>
-                      <a:r>
-                        <a:t>169.39 Tỷ</a:t>
-                      </a:r>
-                    </a:p>
-                  </a:txBody>
-                  <a:tcPr>
-                    <a:solidFill>
-                      <a:srgbClr val="FEF2F2"/>
-                    </a:solidFill>
-                  </a:tcPr>
-                </a:tc>
-                <a:tc>
-                  <a:txBody>
-                    <a:bodyPr/>
-                    <a:lstStyle/>
-                    <a:p>
-                      <a:pPr algn="r">
-                        <a:defRPr sz="1100" b="1">
-                          <a:solidFill>
-                            <a:srgbClr val="EE0033"/>
-                          </a:solidFill>
-                        </a:defRPr>
-                      </a:pPr>
-                      <a:r>
-                        <a:t>31.1%</a:t>
-                      </a:r>
-                    </a:p>
-                  </a:txBody>
-                  <a:tcPr>
-                    <a:solidFill>
-                      <a:srgbClr val="FEF2F2"/>
-                    </a:solidFill>
-                  </a:tcPr>
-                </a:tc>
-                <a:tc>
-                  <a:txBody>
-                    <a:bodyPr/>
-                    <a:lstStyle/>
-                    <a:p>
-                      <a:pPr algn="ctr">
-                        <a:defRPr sz="1100" b="1">
-                          <a:solidFill>
-                            <a:srgbClr val="EE0033"/>
-                          </a:solidFill>
-                        </a:defRPr>
-                      </a:pPr>
-                      <a:r>
-                        <a:t>🔥 RẤT CAO (TOP 2)</a:t>
-                      </a:r>
-                    </a:p>
-                  </a:txBody>
-                  <a:tcPr>
-                    <a:solidFill>
-                      <a:srgbClr val="FEF2F2"/>
-                    </a:solidFill>
-                  </a:tcPr>
-                </a:tc>
-              </a:tr>
-              <a:tr h="822960">
-                <a:tc>
-                  <a:txBody>
-                    <a:bodyPr/>
-                    <a:lstStyle/>
-                    <a:p>
-                      <a:pPr>
-                        <a:defRPr sz="1100" b="0">
-                          <a:solidFill>
-                            <a:srgbClr val="1E293B"/>
-                          </a:solidFill>
-                        </a:defRPr>
-                      </a:pPr>
-                      <a:r>
-                        <a:t>Công ty CP Phát triển DV TLI</a:t>
-                      </a:r>
-                    </a:p>
-                  </a:txBody>
-                  <a:tcPr>
-                    <a:solidFill>
-                      <a:srgbClr val="FFFFFF"/>
-                    </a:solidFill>
-                  </a:tcPr>
-                </a:tc>
-                <a:tc>
-                  <a:txBody>
-                    <a:bodyPr/>
-                    <a:lstStyle/>
-                    <a:p>
-                      <a:pPr algn="r">
-                        <a:defRPr sz="1100" b="1">
-                          <a:solidFill>
-                            <a:srgbClr val="1E293B"/>
-                          </a:solidFill>
-                        </a:defRPr>
-                      </a:pPr>
-                      <a:r>
-                        <a:t>43.77 Tỷ</a:t>
-                      </a:r>
-                    </a:p>
-                  </a:txBody>
-                  <a:tcPr>
-                    <a:solidFill>
-                      <a:srgbClr val="FFFFFF"/>
-                    </a:solidFill>
-                  </a:tcPr>
-                </a:tc>
-                <a:tc>
-                  <a:txBody>
-                    <a:bodyPr/>
-                    <a:lstStyle/>
-                    <a:p>
-                      <a:pPr algn="r">
-                        <a:defRPr sz="1100" b="0">
-                          <a:solidFill>
-                            <a:srgbClr val="1E293B"/>
-                          </a:solidFill>
-                        </a:defRPr>
-                      </a:pPr>
-                      <a:r>
-                        <a:t>8.0%</a:t>
-                      </a:r>
-                    </a:p>
-                  </a:txBody>
-                  <a:tcPr>
-                    <a:solidFill>
-                      <a:srgbClr val="FFFFFF"/>
-                    </a:solidFill>
-                  </a:tcPr>
-                </a:tc>
-                <a:tc>
-                  <a:txBody>
-                    <a:bodyPr/>
-                    <a:lstStyle/>
-                    <a:p>
-                      <a:pPr algn="ctr">
-                        <a:defRPr sz="1100" b="0">
-                          <a:solidFill>
-                            <a:srgbClr val="1E293B"/>
-                          </a:solidFill>
-                        </a:defRPr>
-                      </a:pPr>
-                      <a:r>
-                        <a:t>⚠️ Cảnh báo</a:t>
-                      </a:r>
-                    </a:p>
-                  </a:txBody>
-                  <a:tcPr>
-                    <a:solidFill>
-                      <a:srgbClr val="FFFFFF"/>
-                    </a:solidFill>
-                  </a:tcPr>
-                </a:tc>
-              </a:tr>
-              <a:tr h="822960">
-                <a:tc>
-                  <a:txBody>
-                    <a:bodyPr/>
-                    <a:lstStyle/>
-                    <a:p>
-                      <a:pPr>
-                        <a:defRPr sz="1100" b="0">
-                          <a:solidFill>
-                            <a:srgbClr val="1E293B"/>
-                          </a:solidFill>
-                        </a:defRPr>
-                      </a:pPr>
-                      <a:r>
-                        <a:t>Công ty TNHH Samaki Đông Dương</a:t>
-                      </a:r>
-                    </a:p>
-                  </a:txBody>
-                  <a:tcPr>
-                    <a:solidFill>
-                      <a:srgbClr val="FFFFFF"/>
-                    </a:solidFill>
-                  </a:tcPr>
-                </a:tc>
-                <a:tc>
-                  <a:txBody>
-                    <a:bodyPr/>
-                    <a:lstStyle/>
-                    <a:p>
-                      <a:pPr algn="r">
-                        <a:defRPr sz="1100" b="1">
-                          <a:solidFill>
-                            <a:srgbClr val="1E293B"/>
-                          </a:solidFill>
-                        </a:defRPr>
-                      </a:pPr>
-                      <a:r>
-                        <a:t>28.21 Tỷ</a:t>
-                      </a:r>
-                    </a:p>
-                  </a:txBody>
-                  <a:tcPr>
-                    <a:solidFill>
-                      <a:srgbClr val="FFFFFF"/>
-                    </a:solidFill>
-                  </a:tcPr>
-                </a:tc>
-                <a:tc>
-                  <a:txBody>
-                    <a:bodyPr/>
-                    <a:lstStyle/>
-                    <a:p>
-                      <a:pPr algn="r">
-                        <a:defRPr sz="1100" b="0">
-                          <a:solidFill>
-                            <a:srgbClr val="1E293B"/>
-                          </a:solidFill>
-                        </a:defRPr>
-                      </a:pPr>
-                      <a:r>
-                        <a:t>5.2%</a:t>
-                      </a:r>
-                    </a:p>
-                  </a:txBody>
-                  <a:tcPr>
-                    <a:solidFill>
-                      <a:srgbClr val="FFFFFF"/>
-                    </a:solidFill>
-                  </a:tcPr>
-                </a:tc>
-                <a:tc>
-                  <a:txBody>
-                    <a:bodyPr/>
-                    <a:lstStyle/>
-                    <a:p>
-                      <a:pPr algn="ctr">
-                        <a:defRPr sz="1100" b="0">
-                          <a:solidFill>
-                            <a:srgbClr val="1E293B"/>
-                          </a:solidFill>
-                        </a:defRPr>
-                      </a:pPr>
-                      <a:r>
-                        <a:t>⚠️ Cảnh báo</a:t>
-                      </a:r>
-                    </a:p>
-                  </a:txBody>
-                  <a:tcPr>
-                    <a:solidFill>
-                      <a:srgbClr val="FFFFFF"/>
-                    </a:solidFill>
-                  </a:tcPr>
-                </a:tc>
-              </a:tr>
-              <a:tr h="822960">
-                <a:tc>
-                  <a:txBody>
-                    <a:bodyPr/>
-                    <a:lstStyle/>
-                    <a:p>
-                      <a:pPr>
-                        <a:defRPr sz="1100" b="0">
-                          <a:solidFill>
-                            <a:srgbClr val="1E293B"/>
-                          </a:solidFill>
-                        </a:defRPr>
-                      </a:pPr>
-                      <a:r>
-                        <a:t>CTY TNHH TMDV KT VT An Phát</a:t>
-                      </a:r>
-                    </a:p>
-                  </a:txBody>
-                  <a:tcPr>
-                    <a:solidFill>
-                      <a:srgbClr val="FFFFFF"/>
-                    </a:solidFill>
-                  </a:tcPr>
-                </a:tc>
-                <a:tc>
-                  <a:txBody>
-                    <a:bodyPr/>
-                    <a:lstStyle/>
-                    <a:p>
-                      <a:pPr algn="r">
-                        <a:defRPr sz="1100" b="1">
-                          <a:solidFill>
-                            <a:srgbClr val="1E293B"/>
-                          </a:solidFill>
-                        </a:defRPr>
-                      </a:pPr>
-                      <a:r>
-                        <a:t>17.82 Tỷ</a:t>
-                      </a:r>
-                    </a:p>
-                  </a:txBody>
-                  <a:tcPr>
-                    <a:solidFill>
-                      <a:srgbClr val="FFFFFF"/>
-                    </a:solidFill>
-                  </a:tcPr>
-                </a:tc>
-                <a:tc>
-                  <a:txBody>
-                    <a:bodyPr/>
-                    <a:lstStyle/>
-                    <a:p>
-                      <a:pPr algn="r">
-                        <a:defRPr sz="1100" b="0">
-                          <a:solidFill>
-                            <a:srgbClr val="1E293B"/>
-                          </a:solidFill>
-                        </a:defRPr>
-                      </a:pPr>
-                      <a:r>
-                        <a:t>3.3%</a:t>
-                      </a:r>
-                    </a:p>
-                  </a:txBody>
-                  <a:tcPr>
-                    <a:solidFill>
-                      <a:srgbClr val="FFFFFF"/>
-                    </a:solidFill>
-                  </a:tcPr>
-                </a:tc>
-                <a:tc>
-                  <a:txBody>
-                    <a:bodyPr/>
-                    <a:lstStyle/>
-                    <a:p>
-                      <a:pPr algn="ctr">
-                        <a:defRPr sz="1100" b="0">
-                          <a:solidFill>
-                            <a:srgbClr val="1E293B"/>
-                          </a:solidFill>
-                        </a:defRPr>
-                      </a:pPr>
-                      <a:r>
-                        <a:t>Bình thường</a:t>
-                      </a:r>
-                    </a:p>
-                  </a:txBody>
-                  <a:tcPr>
-                    <a:solidFill>
-                      <a:srgbClr val="FFFFFF"/>
-                    </a:solidFill>
-                  </a:tcPr>
+                        <a:t>Rủi rổ trung bình</a:t>
+                      </a:r>
+                    </a:p>
+                  </a:txBody>
+                  <a:tcPr/>
                 </a:tc>
               </a:tr>
             </a:tbl>
           </a:graphicData>
         </a:graphic>
       </p:graphicFrame>
-      <p:sp>
-        <p:nvSpPr>
-          <p:cNvPr id="8" name="Rounded Rectangle 7"/>
-          <p:cNvSpPr/>
-          <p:nvPr/>
-        </p:nvSpPr>
-        <p:spPr>
-          <a:xfrm>
-            <a:off x="7589520" y="1371600"/>
-            <a:ext cx="4023360" cy="4937760"/>
-          </a:xfrm>
-          <a:prstGeom prst="roundRect">
-            <a:avLst/>
-          </a:prstGeom>
-          <a:solidFill>
-            <a:srgbClr val="FEF2F2"/>
-          </a:solidFill>
-          <a:ln w="25400">
-            <a:solidFill>
-              <a:srgbClr val="EE0033"/>
-            </a:solidFill>
-          </a:ln>
-        </p:spPr>
-        <p:style>
-          <a:lnRef idx="1">
-            <a:schemeClr val="accent1"/>
-          </a:lnRef>
-          <a:fillRef idx="3">
-            <a:schemeClr val="accent1"/>
-          </a:fillRef>
-          <a:effectRef idx="2">
-            <a:schemeClr val="accent1"/>
-          </a:effectRef>
-          <a:fontRef idx="minor">
-            <a:schemeClr val="lt1"/>
-          </a:fontRef>
-        </p:style>
-        <p:txBody>
-          <a:bodyPr rtlCol="0" anchor="ctr" wrap="square" lIns="228600" tIns="228600" rIns="228600" bIns="228600"/>
-          <a:lstStyle/>
-          <a:p>
-            <a:pPr algn="ctr">
-              <a:defRPr sz="1400" b="1">
-                <a:solidFill>
-                  <a:srgbClr val="EE0033"/>
-                </a:solidFill>
-              </a:defRPr>
-            </a:pPr>
-            <a:r>
-              <a:t>🎯 NHẬN DIỆN ĐÁNH TRỌNG TÂM:</a:t>
-            </a:r>
-          </a:p>
-          <a:p>
-            <a:pPr>
-              <a:spcBef>
-                <a:spcPts val="1000"/>
-              </a:spcBef>
-            </a:pPr>
-            <a:r>
-              <a:rPr b="1" sz="1100">
-                <a:solidFill>
-                  <a:srgbClr val="1E293B"/>
-                </a:solidFill>
-              </a:rPr>
-              <a:t>74.1% Công Nợ Chiếm Bởi TOP 2 Ông Lớn:
-</a:t>
-            </a:r>
-            <a:r>
-              <a:rPr sz="1050">
-                <a:solidFill>
-                  <a:srgbClr val="64748B"/>
-                </a:solidFill>
-              </a:rPr>
-              <a:t>Tổng công nợ VTA Nguồn Đầu tư của VCC và ACT cộng lại đạt 403.39 Tỷ VNĐ. Nếu xử lý dứt điểm cho 2 nhà thầu này, tập đoàn giải quyết được gần 3/4 tồn đọng VTA toàn hệ thống.</a:t>
-            </a:r>
-          </a:p>
-          <a:p>
-            <a:pPr>
-              <a:spcBef>
-                <a:spcPts val="1000"/>
-              </a:spcBef>
-            </a:pPr>
-            <a:r>
-              <a:rPr b="1" sz="1100">
-                <a:solidFill>
-                  <a:srgbClr val="1E293B"/>
-                </a:solidFill>
-              </a:rPr>
-              <a:t>TCT CP Công trình Viettel (VCC):
-</a:t>
-            </a:r>
-            <a:r>
-              <a:rPr sz="1050">
-                <a:solidFill>
-                  <a:srgbClr val="64748B"/>
-                </a:solidFill>
-              </a:rPr>
-              <a:t>Đứng số 1 toàn tập đoàn với 234 Tỷ VNĐ tồn VTA (chiếm 43.0%). Cần thành lập Tổ đôn đốc chuyên trách chốt lịch hoàn ứng VTA từng tháng.</a:t>
-            </a:r>
-          </a:p>
-          <a:p>
-            <a:pPr>
-              <a:spcBef>
-                <a:spcPts val="1000"/>
-              </a:spcBef>
-            </a:pPr>
-            <a:r>
-              <a:rPr b="1" sz="1100">
-                <a:solidFill>
-                  <a:srgbClr val="1E293B"/>
-                </a:solidFill>
-              </a:rPr>
-              <a:t>Công ty CP Viễn thông ACT:
-</a:t>
-            </a:r>
-            <a:r>
-              <a:rPr sz="1050">
-                <a:solidFill>
-                  <a:srgbClr val="64748B"/>
-                </a:solidFill>
-              </a:rPr>
-              <a:t>Đứng số 2 với 169.39 Tỷ VNĐ tồn VTA (chiếm 31.1%). Yêu cầu làm việc với Lãnh đạo ACT để cam kết tiến độ nghiệm thu hoàn ứng VTA.</a:t>
-            </a:r>
-          </a:p>
-        </p:txBody>
-      </p:sp>
     </p:spTree>
   </p:cSld>
   <p:clrMapOvr>
@@ -5073,209 +4442,14 @@
       <p:grpSpPr/>
       <p:sp>
         <p:nvSpPr>
-          <p:cNvPr id="2" name="Rectangle 1"/>
-          <p:cNvSpPr/>
+          <p:cNvPr id="2" name="TextBox 1"/>
+          <p:cNvSpPr txBox="1"/>
           <p:nvPr/>
         </p:nvSpPr>
         <p:spPr>
           <a:xfrm>
-            <a:off x="0" y="0"/>
-            <a:ext cx="12191695" cy="6858000"/>
-          </a:xfrm>
-          <a:prstGeom prst="rect">
-            <a:avLst/>
-          </a:prstGeom>
-          <a:solidFill>
-            <a:srgbClr val="F1F5F9"/>
-          </a:solidFill>
-          <a:ln>
-            <a:noFill/>
-          </a:ln>
-        </p:spPr>
-        <p:style>
-          <a:lnRef idx="1">
-            <a:schemeClr val="accent1"/>
-          </a:lnRef>
-          <a:fillRef idx="3">
-            <a:schemeClr val="accent1"/>
-          </a:fillRef>
-          <a:effectRef idx="2">
-            <a:schemeClr val="accent1"/>
-          </a:effectRef>
-          <a:fontRef idx="minor">
-            <a:schemeClr val="lt1"/>
-          </a:fontRef>
-        </p:style>
-        <p:txBody>
-          <a:bodyPr rtlCol="0" anchor="ctr"/>
-          <a:lstStyle/>
-          <a:p>
-            <a:pPr algn="ctr"/>
-          </a:p>
-        </p:txBody>
-      </p:sp>
-      <p:sp>
-        <p:nvSpPr>
-          <p:cNvPr id="3" name="Rectangle 2"/>
-          <p:cNvSpPr/>
-          <p:nvPr/>
-        </p:nvSpPr>
-        <p:spPr>
-          <a:xfrm>
-            <a:off x="0" y="0"/>
-            <a:ext cx="12191695" cy="1051560"/>
-          </a:xfrm>
-          <a:prstGeom prst="rect">
-            <a:avLst/>
-          </a:prstGeom>
-          <a:solidFill>
-            <a:srgbClr val="FFFFFF"/>
-          </a:solidFill>
-          <a:ln>
-            <a:solidFill>
-              <a:srgbClr val="E2E8F0"/>
-            </a:solidFill>
-          </a:ln>
-        </p:spPr>
-        <p:style>
-          <a:lnRef idx="1">
-            <a:schemeClr val="accent1"/>
-          </a:lnRef>
-          <a:fillRef idx="3">
-            <a:schemeClr val="accent1"/>
-          </a:fillRef>
-          <a:effectRef idx="2">
-            <a:schemeClr val="accent1"/>
-          </a:effectRef>
-          <a:fontRef idx="minor">
-            <a:schemeClr val="lt1"/>
-          </a:fontRef>
-        </p:style>
-        <p:txBody>
-          <a:bodyPr rtlCol="0" anchor="ctr"/>
-          <a:lstStyle/>
-          <a:p>
-            <a:pPr algn="ctr"/>
-          </a:p>
-        </p:txBody>
-      </p:sp>
-      <p:sp>
-        <p:nvSpPr>
-          <p:cNvPr id="4" name="Rectangle 3"/>
-          <p:cNvSpPr/>
-          <p:nvPr/>
-        </p:nvSpPr>
-        <p:spPr>
-          <a:xfrm>
-            <a:off x="0" y="0"/>
-            <a:ext cx="12191695" cy="73152"/>
-          </a:xfrm>
-          <a:prstGeom prst="rect">
-            <a:avLst/>
-          </a:prstGeom>
-          <a:solidFill>
-            <a:srgbClr val="EE0033"/>
-          </a:solidFill>
-          <a:ln>
-            <a:noFill/>
-          </a:ln>
-        </p:spPr>
-        <p:style>
-          <a:lnRef idx="1">
-            <a:schemeClr val="accent1"/>
-          </a:lnRef>
-          <a:fillRef idx="3">
-            <a:schemeClr val="accent1"/>
-          </a:fillRef>
-          <a:effectRef idx="2">
-            <a:schemeClr val="accent1"/>
-          </a:effectRef>
-          <a:fontRef idx="minor">
-            <a:schemeClr val="lt1"/>
-          </a:fontRef>
-        </p:style>
-        <p:txBody>
-          <a:bodyPr rtlCol="0" anchor="ctr"/>
-          <a:lstStyle/>
-          <a:p>
-            <a:pPr algn="ctr"/>
-          </a:p>
-        </p:txBody>
-      </p:sp>
-      <p:sp>
-        <p:nvSpPr>
-          <p:cNvPr id="5" name="Rounded Rectangle 4"/>
-          <p:cNvSpPr/>
-          <p:nvPr/>
-        </p:nvSpPr>
-        <p:spPr>
-          <a:xfrm>
-            <a:off x="457200" y="182880"/>
-            <a:ext cx="1463040" cy="640080"/>
-          </a:xfrm>
-          <a:prstGeom prst="roundRect">
-            <a:avLst/>
-          </a:prstGeom>
-          <a:solidFill>
-            <a:srgbClr val="EE0033"/>
-          </a:solidFill>
-          <a:ln>
-            <a:noFill/>
-          </a:ln>
-        </p:spPr>
-        <p:style>
-          <a:lnRef idx="1">
-            <a:schemeClr val="accent1"/>
-          </a:lnRef>
-          <a:fillRef idx="3">
-            <a:schemeClr val="accent1"/>
-          </a:fillRef>
-          <a:effectRef idx="2">
-            <a:schemeClr val="accent1"/>
-          </a:effectRef>
-          <a:fontRef idx="minor">
-            <a:schemeClr val="lt1"/>
-          </a:fontRef>
-        </p:style>
-        <p:txBody>
-          <a:bodyPr rtlCol="0" anchor="ctr" wrap="none" lIns="0" tIns="0" rIns="0" bIns="0"/>
-          <a:lstStyle/>
-          <a:p>
-            <a:pPr algn="ctr">
-              <a:defRPr sz="1600" b="1">
-                <a:solidFill>
-                  <a:srgbClr val="FFFFFF"/>
-                </a:solidFill>
-              </a:defRPr>
-            </a:pPr>
-            <a:r>
-              <a:t>viettel</a:t>
-            </a:r>
-          </a:p>
-          <a:p>
-            <a:pPr algn="ctr">
-              <a:defRPr sz="700">
-                <a:solidFill>
-                  <a:srgbClr val="FFFFFF"/>
-                </a:solidFill>
-              </a:defRPr>
-            </a:pPr>
-            <a:r>
-              <a:t>Theo cách của bạn</a:t>
-            </a:r>
-          </a:p>
-        </p:txBody>
-      </p:sp>
-      <p:sp>
-        <p:nvSpPr>
-          <p:cNvPr id="6" name="TextBox 5"/>
-          <p:cNvSpPr txBox="1"/>
-          <p:nvPr/>
-        </p:nvSpPr>
-        <p:spPr>
-          <a:xfrm>
-            <a:off x="2103120" y="182880"/>
-            <a:ext cx="9601200" cy="731520"/>
+            <a:off x="731520" y="365760"/>
+            <a:ext cx="10728655" cy="731520"/>
           </a:xfrm>
           <a:prstGeom prst="rect">
             <a:avLst/>
@@ -5283,47 +4457,47 @@
           <a:noFill/>
         </p:spPr>
         <p:txBody>
-          <a:bodyPr wrap="square" lIns="0" tIns="0" rIns="0" bIns="0">
+          <a:bodyPr wrap="none">
             <a:spAutoFit/>
           </a:bodyPr>
           <a:lstStyle/>
           <a:p>
             <a:pPr>
-              <a:defRPr sz="900" b="1">
+              <a:defRPr sz="2200" b="1">
                 <a:solidFill>
                   <a:srgbClr val="EE0033"/>
                 </a:solidFill>
               </a:defRPr>
             </a:pPr>
             <a:r>
-              <a:t>TRỌNG TÂM 2 (NGUỒN CHI PHÍ)</a:t>
+              <a:t>SLIDE 4: KHOANH VÙNG ĐIỀU HÀNH KPI THEO ĐỐI TÁC TRỌNG ĐIỂM</a:t>
             </a:r>
           </a:p>
           <a:p>
             <a:pPr>
-              <a:defRPr sz="1800" b="1">
+              <a:defRPr sz="1300">
                 <a:solidFill>
-                  <a:srgbClr val="1E293B"/>
+                  <a:srgbClr val="64748B"/>
                 </a:solidFill>
               </a:defRPr>
             </a:pPr>
             <a:r>
-              <a:t>CẢNH BÁO HỢP ĐỒNG CHI PHÍ TỒN ĐỌNG TỪ TRƯỚC 2025 (&lt; 2025)</a:t>
+              <a:t>Chi tiết số lượng CT, Tồn VTA và tỷ lệ Đạt KPI (Q = 'KHÔNG') theo Top 8 Nhà Thầu Lớn Nhất</a:t>
             </a:r>
           </a:p>
         </p:txBody>
       </p:sp>
       <p:graphicFrame>
         <p:nvGraphicFramePr>
-          <p:cNvPr id="7" name="Table 6"/>
+          <p:cNvPr id="3" name="Table 2"/>
           <p:cNvGraphicFramePr>
             <a:graphicFrameLocks noGrp="1"/>
           </p:cNvGraphicFramePr>
           <p:nvPr/>
         </p:nvGraphicFramePr>
         <p:xfrm>
-          <a:off x="548640" y="1371600"/>
-          <a:ext cx="6858000" cy="4937760"/>
+          <a:off x="731520" y="1188720"/>
+          <a:ext cx="10728655" cy="5120640"/>
         </p:xfrm>
         <a:graphic>
           <a:graphicData uri="http://schemas.openxmlformats.org/drawingml/2006/table">
@@ -5332,18 +4506,23 @@
                 <a:tableStyleId>{5C22544A-7EE6-4342-B048-85BDC9FD1C3A}</a:tableStyleId>
               </a:tblPr>
               <a:tblGrid>
-                <a:gridCol w="2926080"/>
-                <a:gridCol w="1280160"/>
-                <a:gridCol w="1280160"/>
-                <a:gridCol w="1371600"/>
+                <a:gridCol w="1192072"/>
+                <a:gridCol w="1192072"/>
+                <a:gridCol w="1192072"/>
+                <a:gridCol w="1192072"/>
+                <a:gridCol w="1192072"/>
+                <a:gridCol w="1192072"/>
+                <a:gridCol w="1192072"/>
+                <a:gridCol w="1192072"/>
+                <a:gridCol w="1192079"/>
               </a:tblGrid>
-              <a:tr h="822960">
-                <a:tc>
-                  <a:txBody>
-                    <a:bodyPr/>
-                    <a:lstStyle/>
-                    <a:p>
-                      <a:pPr algn="l">
+              <a:tr h="512064">
+                <a:tc>
+                  <a:txBody>
+                    <a:bodyPr/>
+                    <a:lstStyle/>
+                    <a:p>
+                      <a:pPr algn="ctr">
                         <a:defRPr b="1" sz="1100">
                           <a:solidFill>
                             <a:srgbClr val="FFFFFF"/>
@@ -5351,13 +4530,13 @@
                         </a:defRPr>
                       </a:pPr>
                       <a:r>
-                        <a:t>Nhà Thầu Đối Tác</a:t>
+                        <a:t>STT</a:t>
                       </a:r>
                     </a:p>
                   </a:txBody>
                   <a:tcPr>
                     <a:solidFill>
-                      <a:srgbClr val="1E293B"/>
+                      <a:srgbClr val="EE0033"/>
                     </a:solidFill>
                   </a:tcPr>
                 </a:tc>
@@ -5374,13 +4553,13 @@
                         </a:defRPr>
                       </a:pPr>
                       <a:r>
-                        <a:t>Số HĐ &lt; 2025</a:t>
+                        <a:t>Nhà Thầu Đối Tác</a:t>
                       </a:r>
                     </a:p>
                   </a:txBody>
                   <a:tcPr>
                     <a:solidFill>
-                      <a:srgbClr val="1E293B"/>
+                      <a:srgbClr val="EE0033"/>
                     </a:solidFill>
                   </a:tcPr>
                 </a:tc>
@@ -5397,13 +4576,13 @@
                         </a:defRPr>
                       </a:pPr>
                       <a:r>
-                        <a:t>Tổng Số CT</a:t>
+                        <a:t>HĐ</a:t>
                       </a:r>
                     </a:p>
                   </a:txBody>
                   <a:tcPr>
                     <a:solidFill>
-                      <a:srgbClr val="1E293B"/>
+                      <a:srgbClr val="EE0033"/>
                     </a:solidFill>
                   </a:tcPr>
                 </a:tc>
@@ -5420,24 +4599,1439 @@
                         </a:defRPr>
                       </a:pPr>
                       <a:r>
-                        <a:t>Cảnh Báo Rủi Ro</a:t>
+                        <a:t>Tổng CT</a:t>
                       </a:r>
                     </a:p>
                   </a:txBody>
                   <a:tcPr>
                     <a:solidFill>
-                      <a:srgbClr val="1E293B"/>
+                      <a:srgbClr val="EE0033"/>
                     </a:solidFill>
                   </a:tcPr>
                 </a:tc>
+                <a:tc>
+                  <a:txBody>
+                    <a:bodyPr/>
+                    <a:lstStyle/>
+                    <a:p>
+                      <a:pPr algn="ctr">
+                        <a:defRPr b="1" sz="1100">
+                          <a:solidFill>
+                            <a:srgbClr val="FFFFFF"/>
+                          </a:solidFill>
+                        </a:defRPr>
+                      </a:pPr>
+                      <a:r>
+                        <a:t>CT Tồn VTA</a:t>
+                      </a:r>
+                    </a:p>
+                  </a:txBody>
+                  <a:tcPr>
+                    <a:solidFill>
+                      <a:srgbClr val="EE0033"/>
+                    </a:solidFill>
+                  </a:tcPr>
+                </a:tc>
+                <a:tc>
+                  <a:txBody>
+                    <a:bodyPr/>
+                    <a:lstStyle/>
+                    <a:p>
+                      <a:pPr algn="ctr">
+                        <a:defRPr b="1" sz="1100">
+                          <a:solidFill>
+                            <a:srgbClr val="FFFFFF"/>
+                          </a:solidFill>
+                        </a:defRPr>
+                      </a:pPr>
+                      <a:r>
+                        <a:t>Tiền VTA (Tỷ)</a:t>
+                      </a:r>
+                    </a:p>
+                  </a:txBody>
+                  <a:tcPr>
+                    <a:solidFill>
+                      <a:srgbClr val="EE0033"/>
+                    </a:solidFill>
+                  </a:tcPr>
+                </a:tc>
+                <a:tc>
+                  <a:txBody>
+                    <a:bodyPr/>
+                    <a:lstStyle/>
+                    <a:p>
+                      <a:pPr algn="ctr">
+                        <a:defRPr b="1" sz="1100">
+                          <a:solidFill>
+                            <a:srgbClr val="FFFFFF"/>
+                          </a:solidFill>
+                        </a:defRPr>
+                      </a:pPr>
+                      <a:r>
+                        <a:t>Giao KPI</a:t>
+                      </a:r>
+                    </a:p>
+                  </a:txBody>
+                  <a:tcPr>
+                    <a:solidFill>
+                      <a:srgbClr val="EE0033"/>
+                    </a:solidFill>
+                  </a:tcPr>
+                </a:tc>
+                <a:tc>
+                  <a:txBody>
+                    <a:bodyPr/>
+                    <a:lstStyle/>
+                    <a:p>
+                      <a:pPr algn="ctr">
+                        <a:defRPr b="1" sz="1100">
+                          <a:solidFill>
+                            <a:srgbClr val="FFFFFF"/>
+                          </a:solidFill>
+                        </a:defRPr>
+                      </a:pPr>
+                      <a:r>
+                        <a:t>Đạt KPI</a:t>
+                      </a:r>
+                    </a:p>
+                  </a:txBody>
+                  <a:tcPr>
+                    <a:solidFill>
+                      <a:srgbClr val="EE0033"/>
+                    </a:solidFill>
+                  </a:tcPr>
+                </a:tc>
+                <a:tc>
+                  <a:txBody>
+                    <a:bodyPr/>
+                    <a:lstStyle/>
+                    <a:p>
+                      <a:pPr algn="ctr">
+                        <a:defRPr b="1" sz="1100">
+                          <a:solidFill>
+                            <a:srgbClr val="FFFFFF"/>
+                          </a:solidFill>
+                        </a:defRPr>
+                      </a:pPr>
+                      <a:r>
+                        <a:t>% Đạt KPI</a:t>
+                      </a:r>
+                    </a:p>
+                  </a:txBody>
+                  <a:tcPr>
+                    <a:solidFill>
+                      <a:srgbClr val="EE0033"/>
+                    </a:solidFill>
+                  </a:tcPr>
+                </a:tc>
               </a:tr>
-              <a:tr h="822960">
-                <a:tc>
-                  <a:txBody>
-                    <a:bodyPr/>
-                    <a:lstStyle/>
-                    <a:p>
-                      <a:pPr>
+              <a:tr h="512064">
+                <a:tc>
+                  <a:txBody>
+                    <a:bodyPr/>
+                    <a:lstStyle/>
+                    <a:p>
+                      <a:pPr algn="ctr">
+                        <a:defRPr sz="1000" b="0"/>
+                      </a:pPr>
+                      <a:r>
+                        <a:t>1</a:t>
+                      </a:r>
+                    </a:p>
+                  </a:txBody>
+                  <a:tcPr/>
+                </a:tc>
+                <a:tc>
+                  <a:txBody>
+                    <a:bodyPr/>
+                    <a:lstStyle/>
+                    <a:p>
+                      <a:pPr algn="l">
+                        <a:defRPr sz="1000" b="0"/>
+                      </a:pPr>
+                      <a:r>
+                        <a:t>Tổng công ty CP Công trình Viettel (VCC)</a:t>
+                      </a:r>
+                    </a:p>
+                  </a:txBody>
+                  <a:tcPr/>
+                </a:tc>
+                <a:tc>
+                  <a:txBody>
+                    <a:bodyPr/>
+                    <a:lstStyle/>
+                    <a:p>
+                      <a:pPr algn="ctr">
+                        <a:defRPr sz="1000" b="0"/>
+                      </a:pPr>
+                      <a:r>
+                        <a:t>201</a:t>
+                      </a:r>
+                    </a:p>
+                  </a:txBody>
+                  <a:tcPr/>
+                </a:tc>
+                <a:tc>
+                  <a:txBody>
+                    <a:bodyPr/>
+                    <a:lstStyle/>
+                    <a:p>
+                      <a:pPr algn="ctr">
+                        <a:defRPr sz="1000" b="0"/>
+                      </a:pPr>
+                      <a:r>
+                        <a:t>4,191</a:t>
+                      </a:r>
+                    </a:p>
+                  </a:txBody>
+                  <a:tcPr/>
+                </a:tc>
+                <a:tc>
+                  <a:txBody>
+                    <a:bodyPr/>
+                    <a:lstStyle/>
+                    <a:p>
+                      <a:pPr algn="ctr">
+                        <a:defRPr sz="1000" b="1">
+                          <a:solidFill>
+                            <a:srgbClr val="EE0033"/>
+                          </a:solidFill>
+                        </a:defRPr>
+                      </a:pPr>
+                      <a:r>
+                        <a:t>3,806</a:t>
+                      </a:r>
+                    </a:p>
+                  </a:txBody>
+                  <a:tcPr/>
+                </a:tc>
+                <a:tc>
+                  <a:txBody>
+                    <a:bodyPr/>
+                    <a:lstStyle/>
+                    <a:p>
+                      <a:pPr algn="ctr">
+                        <a:defRPr sz="1000" b="1">
+                          <a:solidFill>
+                            <a:srgbClr val="EE0033"/>
+                          </a:solidFill>
+                        </a:defRPr>
+                      </a:pPr>
+                      <a:r>
+                        <a:t>256.18 Tỷ</a:t>
+                      </a:r>
+                    </a:p>
+                  </a:txBody>
+                  <a:tcPr/>
+                </a:tc>
+                <a:tc>
+                  <a:txBody>
+                    <a:bodyPr/>
+                    <a:lstStyle/>
+                    <a:p>
+                      <a:pPr algn="ctr">
+                        <a:defRPr sz="1000" b="0"/>
+                      </a:pPr>
+                      <a:r>
+                        <a:t>5,541</a:t>
+                      </a:r>
+                    </a:p>
+                  </a:txBody>
+                  <a:tcPr/>
+                </a:tc>
+                <a:tc>
+                  <a:txBody>
+                    <a:bodyPr/>
+                    <a:lstStyle/>
+                    <a:p>
+                      <a:pPr algn="ctr">
+                        <a:defRPr sz="1000" b="0">
+                          <a:solidFill>
+                            <a:srgbClr val="10B981"/>
+                          </a:solidFill>
+                        </a:defRPr>
+                      </a:pPr>
+                      <a:r>
+                        <a:t>387</a:t>
+                      </a:r>
+                    </a:p>
+                  </a:txBody>
+                  <a:tcPr/>
+                </a:tc>
+                <a:tc>
+                  <a:txBody>
+                    <a:bodyPr/>
+                    <a:lstStyle/>
+                    <a:p>
+                      <a:pPr algn="ctr">
+                        <a:defRPr sz="1000" b="1">
+                          <a:solidFill>
+                            <a:srgbClr val="E11D48"/>
+                          </a:solidFill>
+                        </a:defRPr>
+                      </a:pPr>
+                      <a:r>
+                        <a:t>7.0%</a:t>
+                      </a:r>
+                    </a:p>
+                  </a:txBody>
+                  <a:tcPr/>
+                </a:tc>
+              </a:tr>
+              <a:tr h="512064">
+                <a:tc>
+                  <a:txBody>
+                    <a:bodyPr/>
+                    <a:lstStyle/>
+                    <a:p>
+                      <a:pPr algn="ctr">
+                        <a:defRPr sz="1000" b="0"/>
+                      </a:pPr>
+                      <a:r>
+                        <a:t>2</a:t>
+                      </a:r>
+                    </a:p>
+                  </a:txBody>
+                  <a:tcPr/>
+                </a:tc>
+                <a:tc>
+                  <a:txBody>
+                    <a:bodyPr/>
+                    <a:lstStyle/>
+                    <a:p>
+                      <a:pPr algn="l">
+                        <a:defRPr sz="1000" b="0"/>
+                      </a:pPr>
+                      <a:r>
+                        <a:t>Công ty CP Viễn thông ACT</a:t>
+                      </a:r>
+                    </a:p>
+                  </a:txBody>
+                  <a:tcPr/>
+                </a:tc>
+                <a:tc>
+                  <a:txBody>
+                    <a:bodyPr/>
+                    <a:lstStyle/>
+                    <a:p>
+                      <a:pPr algn="ctr">
+                        <a:defRPr sz="1000" b="0"/>
+                      </a:pPr>
+                      <a:r>
+                        <a:t>109</a:t>
+                      </a:r>
+                    </a:p>
+                  </a:txBody>
+                  <a:tcPr/>
+                </a:tc>
+                <a:tc>
+                  <a:txBody>
+                    <a:bodyPr/>
+                    <a:lstStyle/>
+                    <a:p>
+                      <a:pPr algn="ctr">
+                        <a:defRPr sz="1000" b="0"/>
+                      </a:pPr>
+                      <a:r>
+                        <a:t>3,748</a:t>
+                      </a:r>
+                    </a:p>
+                  </a:txBody>
+                  <a:tcPr/>
+                </a:tc>
+                <a:tc>
+                  <a:txBody>
+                    <a:bodyPr/>
+                    <a:lstStyle/>
+                    <a:p>
+                      <a:pPr algn="ctr">
+                        <a:defRPr sz="1000" b="1">
+                          <a:solidFill>
+                            <a:srgbClr val="EE0033"/>
+                          </a:solidFill>
+                        </a:defRPr>
+                      </a:pPr>
+                      <a:r>
+                        <a:t>3,499</a:t>
+                      </a:r>
+                    </a:p>
+                  </a:txBody>
+                  <a:tcPr/>
+                </a:tc>
+                <a:tc>
+                  <a:txBody>
+                    <a:bodyPr/>
+                    <a:lstStyle/>
+                    <a:p>
+                      <a:pPr algn="ctr">
+                        <a:defRPr sz="1000" b="1">
+                          <a:solidFill>
+                            <a:srgbClr val="EE0033"/>
+                          </a:solidFill>
+                        </a:defRPr>
+                      </a:pPr>
+                      <a:r>
+                        <a:t>176.92 Tỷ</a:t>
+                      </a:r>
+                    </a:p>
+                  </a:txBody>
+                  <a:tcPr/>
+                </a:tc>
+                <a:tc>
+                  <a:txBody>
+                    <a:bodyPr/>
+                    <a:lstStyle/>
+                    <a:p>
+                      <a:pPr algn="ctr">
+                        <a:defRPr sz="1000" b="0"/>
+                      </a:pPr>
+                      <a:r>
+                        <a:t>2,801</a:t>
+                      </a:r>
+                    </a:p>
+                  </a:txBody>
+                  <a:tcPr/>
+                </a:tc>
+                <a:tc>
+                  <a:txBody>
+                    <a:bodyPr/>
+                    <a:lstStyle/>
+                    <a:p>
+                      <a:pPr algn="ctr">
+                        <a:defRPr sz="1000" b="0">
+                          <a:solidFill>
+                            <a:srgbClr val="10B981"/>
+                          </a:solidFill>
+                        </a:defRPr>
+                      </a:pPr>
+                      <a:r>
+                        <a:t>235</a:t>
+                      </a:r>
+                    </a:p>
+                  </a:txBody>
+                  <a:tcPr/>
+                </a:tc>
+                <a:tc>
+                  <a:txBody>
+                    <a:bodyPr/>
+                    <a:lstStyle/>
+                    <a:p>
+                      <a:pPr algn="ctr">
+                        <a:defRPr sz="1000" b="1">
+                          <a:solidFill>
+                            <a:srgbClr val="E11D48"/>
+                          </a:solidFill>
+                        </a:defRPr>
+                      </a:pPr>
+                      <a:r>
+                        <a:t>8.4%</a:t>
+                      </a:r>
+                    </a:p>
+                  </a:txBody>
+                  <a:tcPr/>
+                </a:tc>
+              </a:tr>
+              <a:tr h="512064">
+                <a:tc>
+                  <a:txBody>
+                    <a:bodyPr/>
+                    <a:lstStyle/>
+                    <a:p>
+                      <a:pPr algn="ctr">
+                        <a:defRPr sz="1000" b="0"/>
+                      </a:pPr>
+                      <a:r>
+                        <a:t>3</a:t>
+                      </a:r>
+                    </a:p>
+                  </a:txBody>
+                  <a:tcPr/>
+                </a:tc>
+                <a:tc>
+                  <a:txBody>
+                    <a:bodyPr/>
+                    <a:lstStyle/>
+                    <a:p>
+                      <a:pPr algn="l">
+                        <a:defRPr sz="1000" b="0"/>
+                      </a:pPr>
+                      <a:r>
+                        <a:t>Công ty CP Phát Triển Dịch Vụ TLI</a:t>
+                      </a:r>
+                    </a:p>
+                  </a:txBody>
+                  <a:tcPr/>
+                </a:tc>
+                <a:tc>
+                  <a:txBody>
+                    <a:bodyPr/>
+                    <a:lstStyle/>
+                    <a:p>
+                      <a:pPr algn="ctr">
+                        <a:defRPr sz="1000" b="0"/>
+                      </a:pPr>
+                      <a:r>
+                        <a:t>1</a:t>
+                      </a:r>
+                    </a:p>
+                  </a:txBody>
+                  <a:tcPr/>
+                </a:tc>
+                <a:tc>
+                  <a:txBody>
+                    <a:bodyPr/>
+                    <a:lstStyle/>
+                    <a:p>
+                      <a:pPr algn="ctr">
+                        <a:defRPr sz="1000" b="0"/>
+                      </a:pPr>
+                      <a:r>
+                        <a:t>137</a:t>
+                      </a:r>
+                    </a:p>
+                  </a:txBody>
+                  <a:tcPr/>
+                </a:tc>
+                <a:tc>
+                  <a:txBody>
+                    <a:bodyPr/>
+                    <a:lstStyle/>
+                    <a:p>
+                      <a:pPr algn="ctr">
+                        <a:defRPr sz="1000" b="1">
+                          <a:solidFill>
+                            <a:srgbClr val="EE0033"/>
+                          </a:solidFill>
+                        </a:defRPr>
+                      </a:pPr>
+                      <a:r>
+                        <a:t>137</a:t>
+                      </a:r>
+                    </a:p>
+                  </a:txBody>
+                  <a:tcPr/>
+                </a:tc>
+                <a:tc>
+                  <a:txBody>
+                    <a:bodyPr/>
+                    <a:lstStyle/>
+                    <a:p>
+                      <a:pPr algn="ctr">
+                        <a:defRPr sz="1000" b="1">
+                          <a:solidFill>
+                            <a:srgbClr val="EE0033"/>
+                          </a:solidFill>
+                        </a:defRPr>
+                      </a:pPr>
+                      <a:r>
+                        <a:t>43.77 Tỷ</a:t>
+                      </a:r>
+                    </a:p>
+                  </a:txBody>
+                  <a:tcPr/>
+                </a:tc>
+                <a:tc>
+                  <a:txBody>
+                    <a:bodyPr/>
+                    <a:lstStyle/>
+                    <a:p>
+                      <a:pPr algn="ctr">
+                        <a:defRPr sz="1000" b="0"/>
+                      </a:pPr>
+                      <a:r>
+                        <a:t>110</a:t>
+                      </a:r>
+                    </a:p>
+                  </a:txBody>
+                  <a:tcPr/>
+                </a:tc>
+                <a:tc>
+                  <a:txBody>
+                    <a:bodyPr/>
+                    <a:lstStyle/>
+                    <a:p>
+                      <a:pPr algn="ctr">
+                        <a:defRPr sz="1000" b="0">
+                          <a:solidFill>
+                            <a:srgbClr val="10B981"/>
+                          </a:solidFill>
+                        </a:defRPr>
+                      </a:pPr>
+                      <a:r>
+                        <a:t>0</a:t>
+                      </a:r>
+                    </a:p>
+                  </a:txBody>
+                  <a:tcPr/>
+                </a:tc>
+                <a:tc>
+                  <a:txBody>
+                    <a:bodyPr/>
+                    <a:lstStyle/>
+                    <a:p>
+                      <a:pPr algn="ctr">
+                        <a:defRPr sz="1000" b="1">
+                          <a:solidFill>
+                            <a:srgbClr val="E11D48"/>
+                          </a:solidFill>
+                        </a:defRPr>
+                      </a:pPr>
+                      <a:r>
+                        <a:t>0.0%</a:t>
+                      </a:r>
+                    </a:p>
+                  </a:txBody>
+                  <a:tcPr/>
+                </a:tc>
+              </a:tr>
+              <a:tr h="512064">
+                <a:tc>
+                  <a:txBody>
+                    <a:bodyPr/>
+                    <a:lstStyle/>
+                    <a:p>
+                      <a:pPr algn="ctr">
+                        <a:defRPr sz="1000" b="0"/>
+                      </a:pPr>
+                      <a:r>
+                        <a:t>4</a:t>
+                      </a:r>
+                    </a:p>
+                  </a:txBody>
+                  <a:tcPr/>
+                </a:tc>
+                <a:tc>
+                  <a:txBody>
+                    <a:bodyPr/>
+                    <a:lstStyle/>
+                    <a:p>
+                      <a:pPr algn="l">
+                        <a:defRPr sz="1000" b="0"/>
+                      </a:pPr>
+                      <a:r>
+                        <a:t>Công ty TNHH Samaki Đông Dương</a:t>
+                      </a:r>
+                    </a:p>
+                  </a:txBody>
+                  <a:tcPr/>
+                </a:tc>
+                <a:tc>
+                  <a:txBody>
+                    <a:bodyPr/>
+                    <a:lstStyle/>
+                    <a:p>
+                      <a:pPr algn="ctr">
+                        <a:defRPr sz="1000" b="0"/>
+                      </a:pPr>
+                      <a:r>
+                        <a:t>1</a:t>
+                      </a:r>
+                    </a:p>
+                  </a:txBody>
+                  <a:tcPr/>
+                </a:tc>
+                <a:tc>
+                  <a:txBody>
+                    <a:bodyPr/>
+                    <a:lstStyle/>
+                    <a:p>
+                      <a:pPr algn="ctr">
+                        <a:defRPr sz="1000" b="0"/>
+                      </a:pPr>
+                      <a:r>
+                        <a:t>74</a:t>
+                      </a:r>
+                    </a:p>
+                  </a:txBody>
+                  <a:tcPr/>
+                </a:tc>
+                <a:tc>
+                  <a:txBody>
+                    <a:bodyPr/>
+                    <a:lstStyle/>
+                    <a:p>
+                      <a:pPr algn="ctr">
+                        <a:defRPr sz="1000" b="1">
+                          <a:solidFill>
+                            <a:srgbClr val="EE0033"/>
+                          </a:solidFill>
+                        </a:defRPr>
+                      </a:pPr>
+                      <a:r>
+                        <a:t>72</a:t>
+                      </a:r>
+                    </a:p>
+                  </a:txBody>
+                  <a:tcPr/>
+                </a:tc>
+                <a:tc>
+                  <a:txBody>
+                    <a:bodyPr/>
+                    <a:lstStyle/>
+                    <a:p>
+                      <a:pPr algn="ctr">
+                        <a:defRPr sz="1000" b="1">
+                          <a:solidFill>
+                            <a:srgbClr val="EE0033"/>
+                          </a:solidFill>
+                        </a:defRPr>
+                      </a:pPr>
+                      <a:r>
+                        <a:t>28.21 Tỷ</a:t>
+                      </a:r>
+                    </a:p>
+                  </a:txBody>
+                  <a:tcPr/>
+                </a:tc>
+                <a:tc>
+                  <a:txBody>
+                    <a:bodyPr/>
+                    <a:lstStyle/>
+                    <a:p>
+                      <a:pPr algn="ctr">
+                        <a:defRPr sz="1000" b="0"/>
+                      </a:pPr>
+                      <a:r>
+                        <a:t>108</a:t>
+                      </a:r>
+                    </a:p>
+                  </a:txBody>
+                  <a:tcPr/>
+                </a:tc>
+                <a:tc>
+                  <a:txBody>
+                    <a:bodyPr/>
+                    <a:lstStyle/>
+                    <a:p>
+                      <a:pPr algn="ctr">
+                        <a:defRPr sz="1000" b="0">
+                          <a:solidFill>
+                            <a:srgbClr val="10B981"/>
+                          </a:solidFill>
+                        </a:defRPr>
+                      </a:pPr>
+                      <a:r>
+                        <a:t>4</a:t>
+                      </a:r>
+                    </a:p>
+                  </a:txBody>
+                  <a:tcPr/>
+                </a:tc>
+                <a:tc>
+                  <a:txBody>
+                    <a:bodyPr/>
+                    <a:lstStyle/>
+                    <a:p>
+                      <a:pPr algn="ctr">
+                        <a:defRPr sz="1000" b="1">
+                          <a:solidFill>
+                            <a:srgbClr val="E11D48"/>
+                          </a:solidFill>
+                        </a:defRPr>
+                      </a:pPr>
+                      <a:r>
+                        <a:t>3.7%</a:t>
+                      </a:r>
+                    </a:p>
+                  </a:txBody>
+                  <a:tcPr/>
+                </a:tc>
+              </a:tr>
+              <a:tr h="512064">
+                <a:tc>
+                  <a:txBody>
+                    <a:bodyPr/>
+                    <a:lstStyle/>
+                    <a:p>
+                      <a:pPr algn="ctr">
+                        <a:defRPr sz="1000" b="0"/>
+                      </a:pPr>
+                      <a:r>
+                        <a:t>5</a:t>
+                      </a:r>
+                    </a:p>
+                  </a:txBody>
+                  <a:tcPr/>
+                </a:tc>
+                <a:tc>
+                  <a:txBody>
+                    <a:bodyPr/>
+                    <a:lstStyle/>
+                    <a:p>
+                      <a:pPr algn="l">
+                        <a:defRPr sz="1000" b="0"/>
+                      </a:pPr>
+                      <a:r>
+                        <a:t>Công Ty TNHH TMDV KT VT An Phát</a:t>
+                      </a:r>
+                    </a:p>
+                  </a:txBody>
+                  <a:tcPr/>
+                </a:tc>
+                <a:tc>
+                  <a:txBody>
+                    <a:bodyPr/>
+                    <a:lstStyle/>
+                    <a:p>
+                      <a:pPr algn="ctr">
+                        <a:defRPr sz="1000" b="0"/>
+                      </a:pPr>
+                      <a:r>
+                        <a:t>12</a:t>
+                      </a:r>
+                    </a:p>
+                  </a:txBody>
+                  <a:tcPr/>
+                </a:tc>
+                <a:tc>
+                  <a:txBody>
+                    <a:bodyPr/>
+                    <a:lstStyle/>
+                    <a:p>
+                      <a:pPr algn="ctr">
+                        <a:defRPr sz="1000" b="0"/>
+                      </a:pPr>
+                      <a:r>
+                        <a:t>1,904</a:t>
+                      </a:r>
+                    </a:p>
+                  </a:txBody>
+                  <a:tcPr/>
+                </a:tc>
+                <a:tc>
+                  <a:txBody>
+                    <a:bodyPr/>
+                    <a:lstStyle/>
+                    <a:p>
+                      <a:pPr algn="ctr">
+                        <a:defRPr sz="1000" b="1">
+                          <a:solidFill>
+                            <a:srgbClr val="EE0033"/>
+                          </a:solidFill>
+                        </a:defRPr>
+                      </a:pPr>
+                      <a:r>
+                        <a:t>1,868</a:t>
+                      </a:r>
+                    </a:p>
+                  </a:txBody>
+                  <a:tcPr/>
+                </a:tc>
+                <a:tc>
+                  <a:txBody>
+                    <a:bodyPr/>
+                    <a:lstStyle/>
+                    <a:p>
+                      <a:pPr algn="ctr">
+                        <a:defRPr sz="1000" b="1">
+                          <a:solidFill>
+                            <a:srgbClr val="EE0033"/>
+                          </a:solidFill>
+                        </a:defRPr>
+                      </a:pPr>
+                      <a:r>
+                        <a:t>18.35 Tỷ</a:t>
+                      </a:r>
+                    </a:p>
+                  </a:txBody>
+                  <a:tcPr/>
+                </a:tc>
+                <a:tc>
+                  <a:txBody>
+                    <a:bodyPr/>
+                    <a:lstStyle/>
+                    <a:p>
+                      <a:pPr algn="ctr">
+                        <a:defRPr sz="1000" b="0"/>
+                      </a:pPr>
+                      <a:r>
+                        <a:t>1,875</a:t>
+                      </a:r>
+                    </a:p>
+                  </a:txBody>
+                  <a:tcPr/>
+                </a:tc>
+                <a:tc>
+                  <a:txBody>
+                    <a:bodyPr/>
+                    <a:lstStyle/>
+                    <a:p>
+                      <a:pPr algn="ctr">
+                        <a:defRPr sz="1000" b="0">
+                          <a:solidFill>
+                            <a:srgbClr val="10B981"/>
+                          </a:solidFill>
+                        </a:defRPr>
+                      </a:pPr>
+                      <a:r>
+                        <a:t>42</a:t>
+                      </a:r>
+                    </a:p>
+                  </a:txBody>
+                  <a:tcPr/>
+                </a:tc>
+                <a:tc>
+                  <a:txBody>
+                    <a:bodyPr/>
+                    <a:lstStyle/>
+                    <a:p>
+                      <a:pPr algn="ctr">
+                        <a:defRPr sz="1000" b="1">
+                          <a:solidFill>
+                            <a:srgbClr val="E11D48"/>
+                          </a:solidFill>
+                        </a:defRPr>
+                      </a:pPr>
+                      <a:r>
+                        <a:t>2.2%</a:t>
+                      </a:r>
+                    </a:p>
+                  </a:txBody>
+                  <a:tcPr/>
+                </a:tc>
+              </a:tr>
+              <a:tr h="512064">
+                <a:tc>
+                  <a:txBody>
+                    <a:bodyPr/>
+                    <a:lstStyle/>
+                    <a:p>
+                      <a:pPr algn="ctr">
+                        <a:defRPr sz="1000" b="0"/>
+                      </a:pPr>
+                      <a:r>
+                        <a:t>6</a:t>
+                      </a:r>
+                    </a:p>
+                  </a:txBody>
+                  <a:tcPr/>
+                </a:tc>
+                <a:tc>
+                  <a:txBody>
+                    <a:bodyPr/>
+                    <a:lstStyle/>
+                    <a:p>
+                      <a:pPr algn="l">
+                        <a:defRPr sz="1000" b="0"/>
+                      </a:pPr>
+                      <a:r>
+                        <a:t>Cty TNHH TM &amp; VT Hồng Quang</a:t>
+                      </a:r>
+                    </a:p>
+                  </a:txBody>
+                  <a:tcPr/>
+                </a:tc>
+                <a:tc>
+                  <a:txBody>
+                    <a:bodyPr/>
+                    <a:lstStyle/>
+                    <a:p>
+                      <a:pPr algn="ctr">
+                        <a:defRPr sz="1000" b="0"/>
+                      </a:pPr>
+                      <a:r>
+                        <a:t>1</a:t>
+                      </a:r>
+                    </a:p>
+                  </a:txBody>
+                  <a:tcPr/>
+                </a:tc>
+                <a:tc>
+                  <a:txBody>
+                    <a:bodyPr/>
+                    <a:lstStyle/>
+                    <a:p>
+                      <a:pPr algn="ctr">
+                        <a:defRPr sz="1000" b="0"/>
+                      </a:pPr>
+                      <a:r>
+                        <a:t>48</a:t>
+                      </a:r>
+                    </a:p>
+                  </a:txBody>
+                  <a:tcPr/>
+                </a:tc>
+                <a:tc>
+                  <a:txBody>
+                    <a:bodyPr/>
+                    <a:lstStyle/>
+                    <a:p>
+                      <a:pPr algn="ctr">
+                        <a:defRPr sz="1000" b="1">
+                          <a:solidFill>
+                            <a:srgbClr val="EE0033"/>
+                          </a:solidFill>
+                        </a:defRPr>
+                      </a:pPr>
+                      <a:r>
+                        <a:t>48</a:t>
+                      </a:r>
+                    </a:p>
+                  </a:txBody>
+                  <a:tcPr/>
+                </a:tc>
+                <a:tc>
+                  <a:txBody>
+                    <a:bodyPr/>
+                    <a:lstStyle/>
+                    <a:p>
+                      <a:pPr algn="ctr">
+                        <a:defRPr sz="1000" b="1">
+                          <a:solidFill>
+                            <a:srgbClr val="EE0033"/>
+                          </a:solidFill>
+                        </a:defRPr>
+                      </a:pPr>
+                      <a:r>
+                        <a:t>17.17 Tỷ</a:t>
+                      </a:r>
+                    </a:p>
+                  </a:txBody>
+                  <a:tcPr/>
+                </a:tc>
+                <a:tc>
+                  <a:txBody>
+                    <a:bodyPr/>
+                    <a:lstStyle/>
+                    <a:p>
+                      <a:pPr algn="ctr">
+                        <a:defRPr sz="1000" b="0"/>
+                      </a:pPr>
+                      <a:r>
+                        <a:t>90</a:t>
+                      </a:r>
+                    </a:p>
+                  </a:txBody>
+                  <a:tcPr/>
+                </a:tc>
+                <a:tc>
+                  <a:txBody>
+                    <a:bodyPr/>
+                    <a:lstStyle/>
+                    <a:p>
+                      <a:pPr algn="ctr">
+                        <a:defRPr sz="1000" b="0">
+                          <a:solidFill>
+                            <a:srgbClr val="10B981"/>
+                          </a:solidFill>
+                        </a:defRPr>
+                      </a:pPr>
+                      <a:r>
+                        <a:t>0</a:t>
+                      </a:r>
+                    </a:p>
+                  </a:txBody>
+                  <a:tcPr/>
+                </a:tc>
+                <a:tc>
+                  <a:txBody>
+                    <a:bodyPr/>
+                    <a:lstStyle/>
+                    <a:p>
+                      <a:pPr algn="ctr">
+                        <a:defRPr sz="1000" b="1">
+                          <a:solidFill>
+                            <a:srgbClr val="E11D48"/>
+                          </a:solidFill>
+                        </a:defRPr>
+                      </a:pPr>
+                      <a:r>
+                        <a:t>0.0%</a:t>
+                      </a:r>
+                    </a:p>
+                  </a:txBody>
+                  <a:tcPr/>
+                </a:tc>
+              </a:tr>
+              <a:tr h="512064">
+                <a:tc>
+                  <a:txBody>
+                    <a:bodyPr/>
+                    <a:lstStyle/>
+                    <a:p>
+                      <a:pPr algn="ctr">
+                        <a:defRPr sz="1000" b="0"/>
+                      </a:pPr>
+                      <a:r>
+                        <a:t>7</a:t>
+                      </a:r>
+                    </a:p>
+                  </a:txBody>
+                  <a:tcPr/>
+                </a:tc>
+                <a:tc>
+                  <a:txBody>
+                    <a:bodyPr/>
+                    <a:lstStyle/>
+                    <a:p>
+                      <a:pPr algn="l">
+                        <a:defRPr sz="1000" b="0"/>
+                      </a:pPr>
+                      <a:r>
+                        <a:t>Phạm Hùng Cường</a:t>
+                      </a:r>
+                    </a:p>
+                  </a:txBody>
+                  <a:tcPr/>
+                </a:tc>
+                <a:tc>
+                  <a:txBody>
+                    <a:bodyPr/>
+                    <a:lstStyle/>
+                    <a:p>
+                      <a:pPr algn="ctr">
+                        <a:defRPr sz="1000" b="0"/>
+                      </a:pPr>
+                      <a:r>
+                        <a:t>1</a:t>
+                      </a:r>
+                    </a:p>
+                  </a:txBody>
+                  <a:tcPr/>
+                </a:tc>
+                <a:tc>
+                  <a:txBody>
+                    <a:bodyPr/>
+                    <a:lstStyle/>
+                    <a:p>
+                      <a:pPr algn="ctr">
+                        <a:defRPr sz="1000" b="0"/>
+                      </a:pPr>
+                      <a:r>
+                        <a:t>53</a:t>
+                      </a:r>
+                    </a:p>
+                  </a:txBody>
+                  <a:tcPr/>
+                </a:tc>
+                <a:tc>
+                  <a:txBody>
+                    <a:bodyPr/>
+                    <a:lstStyle/>
+                    <a:p>
+                      <a:pPr algn="ctr">
+                        <a:defRPr sz="1000" b="1">
+                          <a:solidFill>
+                            <a:srgbClr val="EE0033"/>
+                          </a:solidFill>
+                        </a:defRPr>
+                      </a:pPr>
+                      <a:r>
+                        <a:t>53</a:t>
+                      </a:r>
+                    </a:p>
+                  </a:txBody>
+                  <a:tcPr/>
+                </a:tc>
+                <a:tc>
+                  <a:txBody>
+                    <a:bodyPr/>
+                    <a:lstStyle/>
+                    <a:p>
+                      <a:pPr algn="ctr">
+                        <a:defRPr sz="1000" b="1">
+                          <a:solidFill>
+                            <a:srgbClr val="EE0033"/>
+                          </a:solidFill>
+                        </a:defRPr>
+                      </a:pPr>
+                      <a:r>
+                        <a:t>11.95 Tỷ</a:t>
+                      </a:r>
+                    </a:p>
+                  </a:txBody>
+                  <a:tcPr/>
+                </a:tc>
+                <a:tc>
+                  <a:txBody>
+                    <a:bodyPr/>
+                    <a:lstStyle/>
+                    <a:p>
+                      <a:pPr algn="ctr">
+                        <a:defRPr sz="1000" b="0"/>
+                      </a:pPr>
+                      <a:r>
+                        <a:t>68</a:t>
+                      </a:r>
+                    </a:p>
+                  </a:txBody>
+                  <a:tcPr/>
+                </a:tc>
+                <a:tc>
+                  <a:txBody>
+                    <a:bodyPr/>
+                    <a:lstStyle/>
+                    <a:p>
+                      <a:pPr algn="ctr">
+                        <a:defRPr sz="1000" b="0">
+                          <a:solidFill>
+                            <a:srgbClr val="10B981"/>
+                          </a:solidFill>
+                        </a:defRPr>
+                      </a:pPr>
+                      <a:r>
+                        <a:t>0</a:t>
+                      </a:r>
+                    </a:p>
+                  </a:txBody>
+                  <a:tcPr/>
+                </a:tc>
+                <a:tc>
+                  <a:txBody>
+                    <a:bodyPr/>
+                    <a:lstStyle/>
+                    <a:p>
+                      <a:pPr algn="ctr">
+                        <a:defRPr sz="1000" b="1">
+                          <a:solidFill>
+                            <a:srgbClr val="E11D48"/>
+                          </a:solidFill>
+                        </a:defRPr>
+                      </a:pPr>
+                      <a:r>
+                        <a:t>0.0%</a:t>
+                      </a:r>
+                    </a:p>
+                  </a:txBody>
+                  <a:tcPr/>
+                </a:tc>
+              </a:tr>
+              <a:tr h="512064">
+                <a:tc>
+                  <a:txBody>
+                    <a:bodyPr/>
+                    <a:lstStyle/>
+                    <a:p>
+                      <a:pPr algn="ctr">
+                        <a:defRPr sz="1000" b="0"/>
+                      </a:pPr>
+                      <a:r>
+                        <a:t>8</a:t>
+                      </a:r>
+                    </a:p>
+                  </a:txBody>
+                  <a:tcPr/>
+                </a:tc>
+                <a:tc>
+                  <a:txBody>
+                    <a:bodyPr/>
+                    <a:lstStyle/>
+                    <a:p>
+                      <a:pPr algn="l">
+                        <a:defRPr sz="1000" b="0"/>
+                      </a:pPr>
+                      <a:r>
+                        <a:t>Công ty Cổ Phần Xây Dựng Vũng Tàu</a:t>
+                      </a:r>
+                    </a:p>
+                  </a:txBody>
+                  <a:tcPr/>
+                </a:tc>
+                <a:tc>
+                  <a:txBody>
+                    <a:bodyPr/>
+                    <a:lstStyle/>
+                    <a:p>
+                      <a:pPr algn="ctr">
+                        <a:defRPr sz="1000" b="0"/>
+                      </a:pPr>
+                      <a:r>
+                        <a:t>12</a:t>
+                      </a:r>
+                    </a:p>
+                  </a:txBody>
+                  <a:tcPr/>
+                </a:tc>
+                <a:tc>
+                  <a:txBody>
+                    <a:bodyPr/>
+                    <a:lstStyle/>
+                    <a:p>
+                      <a:pPr algn="ctr">
+                        <a:defRPr sz="1000" b="0"/>
+                      </a:pPr>
+                      <a:r>
+                        <a:t>507</a:t>
+                      </a:r>
+                    </a:p>
+                  </a:txBody>
+                  <a:tcPr/>
+                </a:tc>
+                <a:tc>
+                  <a:txBody>
+                    <a:bodyPr/>
+                    <a:lstStyle/>
+                    <a:p>
+                      <a:pPr algn="ctr">
+                        <a:defRPr sz="1000" b="1">
+                          <a:solidFill>
+                            <a:srgbClr val="EE0033"/>
+                          </a:solidFill>
+                        </a:defRPr>
+                      </a:pPr>
+                      <a:r>
+                        <a:t>442</a:t>
+                      </a:r>
+                    </a:p>
+                  </a:txBody>
+                  <a:tcPr/>
+                </a:tc>
+                <a:tc>
+                  <a:txBody>
+                    <a:bodyPr/>
+                    <a:lstStyle/>
+                    <a:p>
+                      <a:pPr algn="ctr">
+                        <a:defRPr sz="1000" b="1">
+                          <a:solidFill>
+                            <a:srgbClr val="EE0033"/>
+                          </a:solidFill>
+                        </a:defRPr>
+                      </a:pPr>
+                      <a:r>
+                        <a:t>9.35 Tỷ</a:t>
+                      </a:r>
+                    </a:p>
+                  </a:txBody>
+                  <a:tcPr/>
+                </a:tc>
+                <a:tc>
+                  <a:txBody>
+                    <a:bodyPr/>
+                    <a:lstStyle/>
+                    <a:p>
+                      <a:pPr algn="ctr">
+                        <a:defRPr sz="1000" b="0"/>
+                      </a:pPr>
+                      <a:r>
+                        <a:t>959</a:t>
+                      </a:r>
+                    </a:p>
+                  </a:txBody>
+                  <a:tcPr/>
+                </a:tc>
+                <a:tc>
+                  <a:txBody>
+                    <a:bodyPr/>
+                    <a:lstStyle/>
+                    <a:p>
+                      <a:pPr algn="ctr">
+                        <a:defRPr sz="1000" b="0">
+                          <a:solidFill>
+                            <a:srgbClr val="10B981"/>
+                          </a:solidFill>
+                        </a:defRPr>
+                      </a:pPr>
+                      <a:r>
+                        <a:t>70</a:t>
+                      </a:r>
+                    </a:p>
+                  </a:txBody>
+                  <a:tcPr/>
+                </a:tc>
+                <a:tc>
+                  <a:txBody>
+                    <a:bodyPr/>
+                    <a:lstStyle/>
+                    <a:p>
+                      <a:pPr algn="ctr">
+                        <a:defRPr sz="1000" b="1">
+                          <a:solidFill>
+                            <a:srgbClr val="E11D48"/>
+                          </a:solidFill>
+                        </a:defRPr>
+                      </a:pPr>
+                      <a:r>
+                        <a:t>7.3%</a:t>
+                      </a:r>
+                    </a:p>
+                  </a:txBody>
+                  <a:tcPr/>
+                </a:tc>
+              </a:tr>
+              <a:tr h="512064">
+                <a:tc>
+                  <a:txBody>
+                    <a:bodyPr/>
+                    <a:lstStyle/>
+                    <a:p>
+                      <a:pPr algn="ctr">
+                        <a:defRPr sz="1100" b="1"/>
+                      </a:pPr>
+                      <a:r>
+                        <a:t>--</a:t>
+                      </a:r>
+                    </a:p>
+                  </a:txBody>
+                  <a:tcPr>
+                    <a:solidFill>
+                      <a:srgbClr val="FEF2F2"/>
+                    </a:solidFill>
+                  </a:tcPr>
+                </a:tc>
+                <a:tc>
+                  <a:txBody>
+                    <a:bodyPr/>
+                    <a:lstStyle/>
+                    <a:p>
+                      <a:pPr algn="l">
+                        <a:defRPr sz="1100" b="1"/>
+                      </a:pPr>
+                      <a:r>
+                        <a:t>TỔNG TOP 8 ĐỐI TÁC TRỌNG ĐIỂM</a:t>
+                      </a:r>
+                    </a:p>
+                  </a:txBody>
+                  <a:tcPr>
+                    <a:solidFill>
+                      <a:srgbClr val="FEF2F2"/>
+                    </a:solidFill>
+                  </a:tcPr>
+                </a:tc>
+                <a:tc>
+                  <a:txBody>
+                    <a:bodyPr/>
+                    <a:lstStyle/>
+                    <a:p>
+                      <a:pPr algn="ctr">
+                        <a:defRPr sz="1100" b="1"/>
+                      </a:pPr>
+                      <a:r>
+                        <a:t>338</a:t>
+                      </a:r>
+                    </a:p>
+                  </a:txBody>
+                  <a:tcPr>
+                    <a:solidFill>
+                      <a:srgbClr val="FEF2F2"/>
+                    </a:solidFill>
+                  </a:tcPr>
+                </a:tc>
+                <a:tc>
+                  <a:txBody>
+                    <a:bodyPr/>
+                    <a:lstStyle/>
+                    <a:p>
+                      <a:pPr algn="ctr">
+                        <a:defRPr sz="1100" b="1"/>
+                      </a:pPr>
+                      <a:r>
+                        <a:t>10,762</a:t>
+                      </a:r>
+                    </a:p>
+                  </a:txBody>
+                  <a:tcPr>
+                    <a:solidFill>
+                      <a:srgbClr val="FEF2F2"/>
+                    </a:solidFill>
+                  </a:tcPr>
+                </a:tc>
+                <a:tc>
+                  <a:txBody>
+                    <a:bodyPr/>
+                    <a:lstStyle/>
+                    <a:p>
+                      <a:pPr algn="ctr">
                         <a:defRPr sz="1100" b="1">
                           <a:solidFill>
                             <a:srgbClr val="EE0033"/>
@@ -5445,7 +6039,7 @@
                         </a:defRPr>
                       </a:pPr>
                       <a:r>
-                        <a:t>TCT CP Công trình Viettel (VCC)</a:t>
+                        <a:t>9,895</a:t>
                       </a:r>
                     </a:p>
                   </a:txBody>
@@ -5468,7 +6062,7 @@
                         </a:defRPr>
                       </a:pPr>
                       <a:r>
-                        <a:t>32 HĐ</a:t>
+                        <a:t>561.90 Tỷ</a:t>
                       </a:r>
                     </a:p>
                   </a:txBody>
@@ -5484,6 +6078,48 @@
                     <a:lstStyle/>
                     <a:p>
                       <a:pPr algn="ctr">
+                        <a:defRPr sz="1100" b="1"/>
+                      </a:pPr>
+                      <a:r>
+                        <a:t>11,552</a:t>
+                      </a:r>
+                    </a:p>
+                  </a:txBody>
+                  <a:tcPr>
+                    <a:solidFill>
+                      <a:srgbClr val="FEF2F2"/>
+                    </a:solidFill>
+                  </a:tcPr>
+                </a:tc>
+                <a:tc>
+                  <a:txBody>
+                    <a:bodyPr/>
+                    <a:lstStyle/>
+                    <a:p>
+                      <a:pPr algn="ctr">
+                        <a:defRPr sz="1100" b="1">
+                          <a:solidFill>
+                            <a:srgbClr val="10B981"/>
+                          </a:solidFill>
+                        </a:defRPr>
+                      </a:pPr>
+                      <a:r>
+                        <a:t>738</a:t>
+                      </a:r>
+                    </a:p>
+                  </a:txBody>
+                  <a:tcPr>
+                    <a:solidFill>
+                      <a:srgbClr val="FEF2F2"/>
+                    </a:solidFill>
+                  </a:tcPr>
+                </a:tc>
+                <a:tc>
+                  <a:txBody>
+                    <a:bodyPr/>
+                    <a:lstStyle/>
+                    <a:p>
+                      <a:pPr algn="ctr">
                         <a:defRPr sz="1100" b="1">
                           <a:solidFill>
                             <a:srgbClr val="EE0033"/>
@@ -5491,7 +6127,7 @@
                         </a:defRPr>
                       </a:pPr>
                       <a:r>
-                        <a:t>247 Công trình</a:t>
+                        <a:t>6.4%</a:t>
                       </a:r>
                     </a:p>
                   </a:txBody>
@@ -5501,536 +6137,11 @@
                     </a:solidFill>
                   </a:tcPr>
                 </a:tc>
-                <a:tc>
-                  <a:txBody>
-                    <a:bodyPr/>
-                    <a:lstStyle/>
-                    <a:p>
-                      <a:pPr algn="ctr">
-                        <a:defRPr sz="1100" b="1">
-                          <a:solidFill>
-                            <a:srgbClr val="EE0033"/>
-                          </a:solidFill>
-                        </a:defRPr>
-                      </a:pPr>
-                      <a:r>
-                        <a:t>🔥 ĐỌNG NHIỀU NHẤT</a:t>
-                      </a:r>
-                    </a:p>
-                  </a:txBody>
-                  <a:tcPr>
-                    <a:solidFill>
-                      <a:srgbClr val="FEF2F2"/>
-                    </a:solidFill>
-                  </a:tcPr>
-                </a:tc>
-              </a:tr>
-              <a:tr h="822960">
-                <a:tc>
-                  <a:txBody>
-                    <a:bodyPr/>
-                    <a:lstStyle/>
-                    <a:p>
-                      <a:pPr>
-                        <a:defRPr sz="1100" b="0">
-                          <a:solidFill>
-                            <a:srgbClr val="1E293B"/>
-                          </a:solidFill>
-                        </a:defRPr>
-                      </a:pPr>
-                      <a:r>
-                        <a:t>Công ty TNHH MTV TM-DV Mai Tú Tài</a:t>
-                      </a:r>
-                    </a:p>
-                  </a:txBody>
-                  <a:tcPr>
-                    <a:solidFill>
-                      <a:srgbClr val="FFFFFF"/>
-                    </a:solidFill>
-                  </a:tcPr>
-                </a:tc>
-                <a:tc>
-                  <a:txBody>
-                    <a:bodyPr/>
-                    <a:lstStyle/>
-                    <a:p>
-                      <a:pPr algn="ctr">
-                        <a:defRPr sz="1100" b="1">
-                          <a:solidFill>
-                            <a:srgbClr val="1E293B"/>
-                          </a:solidFill>
-                        </a:defRPr>
-                      </a:pPr>
-                      <a:r>
-                        <a:t>11 HĐ</a:t>
-                      </a:r>
-                    </a:p>
-                  </a:txBody>
-                  <a:tcPr>
-                    <a:solidFill>
-                      <a:srgbClr val="FFFFFF"/>
-                    </a:solidFill>
-                  </a:tcPr>
-                </a:tc>
-                <a:tc>
-                  <a:txBody>
-                    <a:bodyPr/>
-                    <a:lstStyle/>
-                    <a:p>
-                      <a:pPr algn="ctr">
-                        <a:defRPr sz="1100" b="0">
-                          <a:solidFill>
-                            <a:srgbClr val="1E293B"/>
-                          </a:solidFill>
-                        </a:defRPr>
-                      </a:pPr>
-                      <a:r>
-                        <a:t>85 Công trình</a:t>
-                      </a:r>
-                    </a:p>
-                  </a:txBody>
-                  <a:tcPr>
-                    <a:solidFill>
-                      <a:srgbClr val="FFFFFF"/>
-                    </a:solidFill>
-                  </a:tcPr>
-                </a:tc>
-                <a:tc>
-                  <a:txBody>
-                    <a:bodyPr/>
-                    <a:lstStyle/>
-                    <a:p>
-                      <a:pPr algn="ctr">
-                        <a:defRPr sz="1100" b="0">
-                          <a:solidFill>
-                            <a:srgbClr val="1E293B"/>
-                          </a:solidFill>
-                        </a:defRPr>
-                      </a:pPr>
-                      <a:r>
-                        <a:t>⚠️ Cảnh báo cao</a:t>
-                      </a:r>
-                    </a:p>
-                  </a:txBody>
-                  <a:tcPr>
-                    <a:solidFill>
-                      <a:srgbClr val="FFFFFF"/>
-                    </a:solidFill>
-                  </a:tcPr>
-                </a:tc>
-              </a:tr>
-              <a:tr h="822960">
-                <a:tc>
-                  <a:txBody>
-                    <a:bodyPr/>
-                    <a:lstStyle/>
-                    <a:p>
-                      <a:pPr>
-                        <a:defRPr sz="1100" b="0">
-                          <a:solidFill>
-                            <a:srgbClr val="1E293B"/>
-                          </a:solidFill>
-                        </a:defRPr>
-                      </a:pPr>
-                      <a:r>
-                        <a:t>CTY TNHH TMDV KT Tiến Thịnh</a:t>
-                      </a:r>
-                    </a:p>
-                  </a:txBody>
-                  <a:tcPr>
-                    <a:solidFill>
-                      <a:srgbClr val="FFFFFF"/>
-                    </a:solidFill>
-                  </a:tcPr>
-                </a:tc>
-                <a:tc>
-                  <a:txBody>
-                    <a:bodyPr/>
-                    <a:lstStyle/>
-                    <a:p>
-                      <a:pPr algn="ctr">
-                        <a:defRPr sz="1100" b="1">
-                          <a:solidFill>
-                            <a:srgbClr val="1E293B"/>
-                          </a:solidFill>
-                        </a:defRPr>
-                      </a:pPr>
-                      <a:r>
-                        <a:t>6 HĐ</a:t>
-                      </a:r>
-                    </a:p>
-                  </a:txBody>
-                  <a:tcPr>
-                    <a:solidFill>
-                      <a:srgbClr val="FFFFFF"/>
-                    </a:solidFill>
-                  </a:tcPr>
-                </a:tc>
-                <a:tc>
-                  <a:txBody>
-                    <a:bodyPr/>
-                    <a:lstStyle/>
-                    <a:p>
-                      <a:pPr algn="ctr">
-                        <a:defRPr sz="1100" b="0">
-                          <a:solidFill>
-                            <a:srgbClr val="1E293B"/>
-                          </a:solidFill>
-                        </a:defRPr>
-                      </a:pPr>
-                      <a:r>
-                        <a:t>42 Công trình</a:t>
-                      </a:r>
-                    </a:p>
-                  </a:txBody>
-                  <a:tcPr>
-                    <a:solidFill>
-                      <a:srgbClr val="FFFFFF"/>
-                    </a:solidFill>
-                  </a:tcPr>
-                </a:tc>
-                <a:tc>
-                  <a:txBody>
-                    <a:bodyPr/>
-                    <a:lstStyle/>
-                    <a:p>
-                      <a:pPr algn="ctr">
-                        <a:defRPr sz="1100" b="0">
-                          <a:solidFill>
-                            <a:srgbClr val="1E293B"/>
-                          </a:solidFill>
-                        </a:defRPr>
-                      </a:pPr>
-                      <a:r>
-                        <a:t>⚠️ Cảnh báo</a:t>
-                      </a:r>
-                    </a:p>
-                  </a:txBody>
-                  <a:tcPr>
-                    <a:solidFill>
-                      <a:srgbClr val="FFFFFF"/>
-                    </a:solidFill>
-                  </a:tcPr>
-                </a:tc>
-              </a:tr>
-              <a:tr h="822960">
-                <a:tc>
-                  <a:txBody>
-                    <a:bodyPr/>
-                    <a:lstStyle/>
-                    <a:p>
-                      <a:pPr>
-                        <a:defRPr sz="1100" b="0">
-                          <a:solidFill>
-                            <a:srgbClr val="1E293B"/>
-                          </a:solidFill>
-                        </a:defRPr>
-                      </a:pPr>
-                      <a:r>
-                        <a:t>Công ty TNHH VT Tân Thanh</a:t>
-                      </a:r>
-                    </a:p>
-                  </a:txBody>
-                  <a:tcPr>
-                    <a:solidFill>
-                      <a:srgbClr val="FFFFFF"/>
-                    </a:solidFill>
-                  </a:tcPr>
-                </a:tc>
-                <a:tc>
-                  <a:txBody>
-                    <a:bodyPr/>
-                    <a:lstStyle/>
-                    <a:p>
-                      <a:pPr algn="ctr">
-                        <a:defRPr sz="1100" b="1">
-                          <a:solidFill>
-                            <a:srgbClr val="1E293B"/>
-                          </a:solidFill>
-                        </a:defRPr>
-                      </a:pPr>
-                      <a:r>
-                        <a:t>6 HĐ</a:t>
-                      </a:r>
-                    </a:p>
-                  </a:txBody>
-                  <a:tcPr>
-                    <a:solidFill>
-                      <a:srgbClr val="FFFFFF"/>
-                    </a:solidFill>
-                  </a:tcPr>
-                </a:tc>
-                <a:tc>
-                  <a:txBody>
-                    <a:bodyPr/>
-                    <a:lstStyle/>
-                    <a:p>
-                      <a:pPr algn="ctr">
-                        <a:defRPr sz="1100" b="0">
-                          <a:solidFill>
-                            <a:srgbClr val="1E293B"/>
-                          </a:solidFill>
-                        </a:defRPr>
-                      </a:pPr>
-                      <a:r>
-                        <a:t>38 Công trình</a:t>
-                      </a:r>
-                    </a:p>
-                  </a:txBody>
-                  <a:tcPr>
-                    <a:solidFill>
-                      <a:srgbClr val="FFFFFF"/>
-                    </a:solidFill>
-                  </a:tcPr>
-                </a:tc>
-                <a:tc>
-                  <a:txBody>
-                    <a:bodyPr/>
-                    <a:lstStyle/>
-                    <a:p>
-                      <a:pPr algn="ctr">
-                        <a:defRPr sz="1100" b="0">
-                          <a:solidFill>
-                            <a:srgbClr val="1E293B"/>
-                          </a:solidFill>
-                        </a:defRPr>
-                      </a:pPr>
-                      <a:r>
-                        <a:t>⚠️ Cảnh báo</a:t>
-                      </a:r>
-                    </a:p>
-                  </a:txBody>
-                  <a:tcPr>
-                    <a:solidFill>
-                      <a:srgbClr val="FFFFFF"/>
-                    </a:solidFill>
-                  </a:tcPr>
-                </a:tc>
-              </a:tr>
-              <a:tr h="822960">
-                <a:tc>
-                  <a:txBody>
-                    <a:bodyPr/>
-                    <a:lstStyle/>
-                    <a:p>
-                      <a:pPr>
-                        <a:defRPr sz="1100" b="0">
-                          <a:solidFill>
-                            <a:srgbClr val="1E293B"/>
-                          </a:solidFill>
-                        </a:defRPr>
-                      </a:pPr>
-                      <a:r>
-                        <a:t>Công ty CP Viễn thông ACT</a:t>
-                      </a:r>
-                    </a:p>
-                  </a:txBody>
-                  <a:tcPr>
-                    <a:solidFill>
-                      <a:srgbClr val="FFFFFF"/>
-                    </a:solidFill>
-                  </a:tcPr>
-                </a:tc>
-                <a:tc>
-                  <a:txBody>
-                    <a:bodyPr/>
-                    <a:lstStyle/>
-                    <a:p>
-                      <a:pPr algn="ctr">
-                        <a:defRPr sz="1100" b="1">
-                          <a:solidFill>
-                            <a:srgbClr val="1E293B"/>
-                          </a:solidFill>
-                        </a:defRPr>
-                      </a:pPr>
-                      <a:r>
-                        <a:t>5 HĐ</a:t>
-                      </a:r>
-                    </a:p>
-                  </a:txBody>
-                  <a:tcPr>
-                    <a:solidFill>
-                      <a:srgbClr val="FFFFFF"/>
-                    </a:solidFill>
-                  </a:tcPr>
-                </a:tc>
-                <a:tc>
-                  <a:txBody>
-                    <a:bodyPr/>
-                    <a:lstStyle/>
-                    <a:p>
-                      <a:pPr algn="ctr">
-                        <a:defRPr sz="1100" b="0">
-                          <a:solidFill>
-                            <a:srgbClr val="1E293B"/>
-                          </a:solidFill>
-                        </a:defRPr>
-                      </a:pPr>
-                      <a:r>
-                        <a:t>31 Công trình</a:t>
-                      </a:r>
-                    </a:p>
-                  </a:txBody>
-                  <a:tcPr>
-                    <a:solidFill>
-                      <a:srgbClr val="FFFFFF"/>
-                    </a:solidFill>
-                  </a:tcPr>
-                </a:tc>
-                <a:tc>
-                  <a:txBody>
-                    <a:bodyPr/>
-                    <a:lstStyle/>
-                    <a:p>
-                      <a:pPr algn="ctr">
-                        <a:defRPr sz="1100" b="0">
-                          <a:solidFill>
-                            <a:srgbClr val="1E293B"/>
-                          </a:solidFill>
-                        </a:defRPr>
-                      </a:pPr>
-                      <a:r>
-                        <a:t>⚠️ Cảnh báo</a:t>
-                      </a:r>
-                    </a:p>
-                  </a:txBody>
-                  <a:tcPr>
-                    <a:solidFill>
-                      <a:srgbClr val="FFFFFF"/>
-                    </a:solidFill>
-                  </a:tcPr>
-                </a:tc>
               </a:tr>
             </a:tbl>
           </a:graphicData>
         </a:graphic>
       </p:graphicFrame>
-      <p:sp>
-        <p:nvSpPr>
-          <p:cNvPr id="8" name="Rounded Rectangle 7"/>
-          <p:cNvSpPr/>
-          <p:nvPr/>
-        </p:nvSpPr>
-        <p:spPr>
-          <a:xfrm>
-            <a:off x="7589520" y="1371600"/>
-            <a:ext cx="4023360" cy="4937760"/>
-          </a:xfrm>
-          <a:prstGeom prst="roundRect">
-            <a:avLst/>
-          </a:prstGeom>
-          <a:solidFill>
-            <a:srgbClr val="FFFFFF"/>
-          </a:solidFill>
-          <a:ln w="25400">
-            <a:solidFill>
-              <a:srgbClr val="D97706"/>
-            </a:solidFill>
-          </a:ln>
-        </p:spPr>
-        <p:style>
-          <a:lnRef idx="1">
-            <a:schemeClr val="accent1"/>
-          </a:lnRef>
-          <a:fillRef idx="3">
-            <a:schemeClr val="accent1"/>
-          </a:fillRef>
-          <a:effectRef idx="2">
-            <a:schemeClr val="accent1"/>
-          </a:effectRef>
-          <a:fontRef idx="minor">
-            <a:schemeClr val="lt1"/>
-          </a:fontRef>
-        </p:style>
-        <p:txBody>
-          <a:bodyPr rtlCol="0" anchor="ctr" wrap="square" lIns="228600" tIns="228600" rIns="228600" bIns="228600"/>
-          <a:lstStyle/>
-          <a:p>
-            <a:pPr algn="ctr">
-              <a:defRPr sz="1400" b="1">
-                <a:solidFill>
-                  <a:srgbClr val="D97706"/>
-                </a:solidFill>
-              </a:defRPr>
-            </a:pPr>
-            <a:r>
-              <a:t>⚠️ PHÂN TÍCH RỦI RO CHI PHÍ CỦ:</a:t>
-            </a:r>
-          </a:p>
-          <a:p>
-            <a:pPr>
-              <a:spcBef>
-                <a:spcPts val="1000"/>
-              </a:spcBef>
-            </a:pPr>
-            <a:r>
-              <a:rPr b="1" sz="1100">
-                <a:solidFill>
-                  <a:srgbClr val="1E293B"/>
-                </a:solidFill>
-              </a:rPr>
-              <a:t>78 HĐ Chi Phí Ký Từ 2010 - 2024 chưa thể đóng:
-</a:t>
-            </a:r>
-            <a:r>
-              <a:rPr sz="1050">
-                <a:solidFill>
-                  <a:srgbClr val="64748B"/>
-                </a:solidFill>
-              </a:rPr>
-              <a:t>Tổng giá trị nguồn chi phí tồn đọng &lt; 2025 là 14.78 Tỷ VNĐ. Việc ngâm HĐ chi phí quá lâu gây rủi ro về thời hiệu hợp đồng và quyết toán tài chính.</a:t>
-            </a:r>
-          </a:p>
-          <a:p>
-            <a:pPr>
-              <a:spcBef>
-                <a:spcPts val="1000"/>
-              </a:spcBef>
-            </a:pPr>
-            <a:r>
-              <a:rPr b="1" sz="1100">
-                <a:solidFill>
-                  <a:srgbClr val="1E293B"/>
-                </a:solidFill>
-              </a:rPr>
-              <a:t>TCT Công trình Viettel tiếp tục dẫn đầu:
-</a:t>
-            </a:r>
-            <a:r>
-              <a:rPr sz="1050">
-                <a:solidFill>
-                  <a:srgbClr val="64748B"/>
-                </a:solidFill>
-              </a:rPr>
-              <a:t>VCC không chỉ đứng đầu về VTA Đầu tư mà còn đứng đầu tồn HĐ Chi phí cũ với 32 HĐ (chiếm 41.0% tổng số HĐ chi phí &lt; 2025).</a:t>
-            </a:r>
-          </a:p>
-          <a:p>
-            <a:pPr>
-              <a:spcBef>
-                <a:spcPts val="1000"/>
-              </a:spcBef>
-            </a:pPr>
-            <a:r>
-              <a:rPr b="1" sz="1100">
-                <a:solidFill>
-                  <a:srgbClr val="1E293B"/>
-                </a:solidFill>
-              </a:rPr>
-              <a:t>Yêu cầu xử lý dứt điểm trước 30/10/2026:
-</a:t>
-            </a:r>
-            <a:r>
-              <a:rPr sz="1050">
-                <a:solidFill>
-                  <a:srgbClr val="64748B"/>
-                </a:solidFill>
-              </a:rPr>
-              <a:t>Lập bảng tiến độ chi tiết từng HĐ, phân công rõ người chịu trách nhiệm thu hồi / nghiệm thu dứt điểm các HĐ tồn lâu năm.</a:t>
-            </a:r>
-          </a:p>
-        </p:txBody>
-      </p:sp>
     </p:spTree>
   </p:cSld>
   <p:clrMapOvr>
@@ -6051,209 +6162,14 @@
       <p:grpSpPr/>
       <p:sp>
         <p:nvSpPr>
-          <p:cNvPr id="2" name="Rectangle 1"/>
-          <p:cNvSpPr/>
+          <p:cNvPr id="2" name="TextBox 1"/>
+          <p:cNvSpPr txBox="1"/>
           <p:nvPr/>
         </p:nvSpPr>
         <p:spPr>
           <a:xfrm>
-            <a:off x="0" y="0"/>
-            <a:ext cx="12191695" cy="6858000"/>
-          </a:xfrm>
-          <a:prstGeom prst="rect">
-            <a:avLst/>
-          </a:prstGeom>
-          <a:solidFill>
-            <a:srgbClr val="F1F5F9"/>
-          </a:solidFill>
-          <a:ln>
-            <a:noFill/>
-          </a:ln>
-        </p:spPr>
-        <p:style>
-          <a:lnRef idx="1">
-            <a:schemeClr val="accent1"/>
-          </a:lnRef>
-          <a:fillRef idx="3">
-            <a:schemeClr val="accent1"/>
-          </a:fillRef>
-          <a:effectRef idx="2">
-            <a:schemeClr val="accent1"/>
-          </a:effectRef>
-          <a:fontRef idx="minor">
-            <a:schemeClr val="lt1"/>
-          </a:fontRef>
-        </p:style>
-        <p:txBody>
-          <a:bodyPr rtlCol="0" anchor="ctr"/>
-          <a:lstStyle/>
-          <a:p>
-            <a:pPr algn="ctr"/>
-          </a:p>
-        </p:txBody>
-      </p:sp>
-      <p:sp>
-        <p:nvSpPr>
-          <p:cNvPr id="3" name="Rectangle 2"/>
-          <p:cNvSpPr/>
-          <p:nvPr/>
-        </p:nvSpPr>
-        <p:spPr>
-          <a:xfrm>
-            <a:off x="0" y="0"/>
-            <a:ext cx="12191695" cy="1051560"/>
-          </a:xfrm>
-          <a:prstGeom prst="rect">
-            <a:avLst/>
-          </a:prstGeom>
-          <a:solidFill>
-            <a:srgbClr val="FFFFFF"/>
-          </a:solidFill>
-          <a:ln>
-            <a:solidFill>
-              <a:srgbClr val="E2E8F0"/>
-            </a:solidFill>
-          </a:ln>
-        </p:spPr>
-        <p:style>
-          <a:lnRef idx="1">
-            <a:schemeClr val="accent1"/>
-          </a:lnRef>
-          <a:fillRef idx="3">
-            <a:schemeClr val="accent1"/>
-          </a:fillRef>
-          <a:effectRef idx="2">
-            <a:schemeClr val="accent1"/>
-          </a:effectRef>
-          <a:fontRef idx="minor">
-            <a:schemeClr val="lt1"/>
-          </a:fontRef>
-        </p:style>
-        <p:txBody>
-          <a:bodyPr rtlCol="0" anchor="ctr"/>
-          <a:lstStyle/>
-          <a:p>
-            <a:pPr algn="ctr"/>
-          </a:p>
-        </p:txBody>
-      </p:sp>
-      <p:sp>
-        <p:nvSpPr>
-          <p:cNvPr id="4" name="Rectangle 3"/>
-          <p:cNvSpPr/>
-          <p:nvPr/>
-        </p:nvSpPr>
-        <p:spPr>
-          <a:xfrm>
-            <a:off x="0" y="0"/>
-            <a:ext cx="12191695" cy="73152"/>
-          </a:xfrm>
-          <a:prstGeom prst="rect">
-            <a:avLst/>
-          </a:prstGeom>
-          <a:solidFill>
-            <a:srgbClr val="EE0033"/>
-          </a:solidFill>
-          <a:ln>
-            <a:noFill/>
-          </a:ln>
-        </p:spPr>
-        <p:style>
-          <a:lnRef idx="1">
-            <a:schemeClr val="accent1"/>
-          </a:lnRef>
-          <a:fillRef idx="3">
-            <a:schemeClr val="accent1"/>
-          </a:fillRef>
-          <a:effectRef idx="2">
-            <a:schemeClr val="accent1"/>
-          </a:effectRef>
-          <a:fontRef idx="minor">
-            <a:schemeClr val="lt1"/>
-          </a:fontRef>
-        </p:style>
-        <p:txBody>
-          <a:bodyPr rtlCol="0" anchor="ctr"/>
-          <a:lstStyle/>
-          <a:p>
-            <a:pPr algn="ctr"/>
-          </a:p>
-        </p:txBody>
-      </p:sp>
-      <p:sp>
-        <p:nvSpPr>
-          <p:cNvPr id="5" name="Rounded Rectangle 4"/>
-          <p:cNvSpPr/>
-          <p:nvPr/>
-        </p:nvSpPr>
-        <p:spPr>
-          <a:xfrm>
-            <a:off x="457200" y="182880"/>
-            <a:ext cx="1463040" cy="640080"/>
-          </a:xfrm>
-          <a:prstGeom prst="roundRect">
-            <a:avLst/>
-          </a:prstGeom>
-          <a:solidFill>
-            <a:srgbClr val="EE0033"/>
-          </a:solidFill>
-          <a:ln>
-            <a:noFill/>
-          </a:ln>
-        </p:spPr>
-        <p:style>
-          <a:lnRef idx="1">
-            <a:schemeClr val="accent1"/>
-          </a:lnRef>
-          <a:fillRef idx="3">
-            <a:schemeClr val="accent1"/>
-          </a:fillRef>
-          <a:effectRef idx="2">
-            <a:schemeClr val="accent1"/>
-          </a:effectRef>
-          <a:fontRef idx="minor">
-            <a:schemeClr val="lt1"/>
-          </a:fontRef>
-        </p:style>
-        <p:txBody>
-          <a:bodyPr rtlCol="0" anchor="ctr" wrap="none" lIns="0" tIns="0" rIns="0" bIns="0"/>
-          <a:lstStyle/>
-          <a:p>
-            <a:pPr algn="ctr">
-              <a:defRPr sz="1600" b="1">
-                <a:solidFill>
-                  <a:srgbClr val="FFFFFF"/>
-                </a:solidFill>
-              </a:defRPr>
-            </a:pPr>
-            <a:r>
-              <a:t>viettel</a:t>
-            </a:r>
-          </a:p>
-          <a:p>
-            <a:pPr algn="ctr">
-              <a:defRPr sz="700">
-                <a:solidFill>
-                  <a:srgbClr val="FFFFFF"/>
-                </a:solidFill>
-              </a:defRPr>
-            </a:pPr>
-            <a:r>
-              <a:t>Theo cách của bạn</a:t>
-            </a:r>
-          </a:p>
-        </p:txBody>
-      </p:sp>
-      <p:sp>
-        <p:nvSpPr>
-          <p:cNvPr id="6" name="TextBox 5"/>
-          <p:cNvSpPr txBox="1"/>
-          <p:nvPr/>
-        </p:nvSpPr>
-        <p:spPr>
-          <a:xfrm>
-            <a:off x="2103120" y="182880"/>
-            <a:ext cx="9601200" cy="731520"/>
+            <a:off x="731520" y="457200"/>
+            <a:ext cx="10728655" cy="914400"/>
           </a:xfrm>
           <a:prstGeom prst="rect">
             <a:avLst/>
@@ -6261,840 +6177,34 @@
           <a:noFill/>
         </p:spPr>
         <p:txBody>
-          <a:bodyPr wrap="square" lIns="0" tIns="0" rIns="0" bIns="0">
+          <a:bodyPr wrap="none">
             <a:spAutoFit/>
           </a:bodyPr>
           <a:lstStyle/>
           <a:p>
             <a:pPr>
-              <a:defRPr sz="900" b="1">
+              <a:defRPr sz="2200" b="1">
                 <a:solidFill>
                   <a:srgbClr val="EE0033"/>
                 </a:solidFill>
               </a:defRPr>
             </a:pPr>
             <a:r>
-              <a:t>KIỂM SOÁT KPI THỜI GIAN THỰC</a:t>
-            </a:r>
-          </a:p>
-          <a:p>
-            <a:pPr>
-              <a:defRPr sz="1800" b="1">
-                <a:solidFill>
-                  <a:srgbClr val="1E293B"/>
-                </a:solidFill>
-              </a:defRPr>
-            </a:pPr>
-            <a:r>
-              <a:t>QUY TẮC ĐÁNH GIÁ ĐẠT / VƯỚNG KPI THEO CỘT Q = 'KHÔNG'</a:t>
-            </a:r>
-          </a:p>
-        </p:txBody>
-      </p:sp>
-      <p:sp>
-        <p:nvSpPr>
-          <p:cNvPr id="7" name="Rounded Rectangle 6"/>
-          <p:cNvSpPr/>
+              <a:t>SLIDE 5: KẾ HOẠCH HÀNH ĐỘNG THU HỒI CÔNG NỢ VTA &amp; KPI</a:t>
+            </a:r>
+          </a:p>
+        </p:txBody>
+      </p:sp>
+      <p:sp>
+        <p:nvSpPr>
+          <p:cNvPr id="3" name="TextBox 2"/>
+          <p:cNvSpPr txBox="1"/>
           <p:nvPr/>
         </p:nvSpPr>
         <p:spPr>
           <a:xfrm>
-            <a:off x="548640" y="1371600"/>
-            <a:ext cx="11094415" cy="1188720"/>
-          </a:xfrm>
-          <a:prstGeom prst="roundRect">
-            <a:avLst/>
-          </a:prstGeom>
-          <a:solidFill>
-            <a:srgbClr val="FEF2F2"/>
-          </a:solidFill>
-          <a:ln w="19050">
-            <a:solidFill>
-              <a:srgbClr val="EE0033"/>
-            </a:solidFill>
-          </a:ln>
-        </p:spPr>
-        <p:style>
-          <a:lnRef idx="1">
-            <a:schemeClr val="accent1"/>
-          </a:lnRef>
-          <a:fillRef idx="3">
-            <a:schemeClr val="accent1"/>
-          </a:fillRef>
-          <a:effectRef idx="2">
-            <a:schemeClr val="accent1"/>
-          </a:effectRef>
-          <a:fontRef idx="minor">
-            <a:schemeClr val="lt1"/>
-          </a:fontRef>
-        </p:style>
-        <p:txBody>
-          <a:bodyPr rtlCol="0" anchor="ctr" wrap="square" lIns="137160" tIns="137160" rIns="137160" bIns="137160"/>
-          <a:lstStyle/>
-          <a:p>
-            <a:pPr algn="ctr">
-              <a:defRPr sz="1200" b="1">
-                <a:solidFill>
-                  <a:srgbClr val="EE0033"/>
-                </a:solidFill>
-              </a:defRPr>
-            </a:pPr>
-            <a:r>
-              <a:t>📌 QUY TẮC ĐÁNH GIÁ KPI CHUẨN XÁC NGUYÊN TẮC QUẢN TRỊ:</a:t>
-            </a:r>
-          </a:p>
-          <a:p>
-            <a:pPr>
-              <a:spcBef>
-                <a:spcPts val="400"/>
-              </a:spcBef>
-              <a:defRPr sz="1100">
-                <a:solidFill>
-                  <a:srgbClr val="1E293B"/>
-                </a:solidFill>
-              </a:defRPr>
-            </a:pPr>
-            <a:r>
-              <a:t>• Giá trị tích '1' tại các Cột AQ-AW: Thể hiện công trình NẰM TRONG DANH MỤC GIAO KPI (không phải là đã đạt).</a:t>
-            </a:r>
-            <a:br/>
-            <a:r>
-              <a:t>• Đánh giá ĐẠT KPI (✓): Bắt buộc Cột Q ('Tồn Vật tư A') phải hiện chữ 'KHÔNG' (tức là đã dọn sạch tồn VTA).</a:t>
-            </a:r>
-            <a:br/>
-            <a:r>
-              <a:t>• Đánh giá VƯỚNG KPI (✗): Nếu Cột Q hiện chữ 'CÓ' (hoặc phát sinh số tiền tồn VTA &gt; 0).</a:t>
-            </a:r>
-          </a:p>
-        </p:txBody>
-      </p:sp>
-      <p:sp>
-        <p:nvSpPr>
-          <p:cNvPr id="8" name="Rounded Rectangle 7"/>
-          <p:cNvSpPr/>
-          <p:nvPr/>
-        </p:nvSpPr>
-        <p:spPr>
-          <a:xfrm>
-            <a:off x="548640" y="2743200"/>
-            <a:ext cx="3566160" cy="1645920"/>
-          </a:xfrm>
-          <a:prstGeom prst="roundRect">
-            <a:avLst/>
-          </a:prstGeom>
-          <a:solidFill>
-            <a:srgbClr val="FFFFFF"/>
-          </a:solidFill>
-          <a:ln>
-            <a:solidFill>
-              <a:srgbClr val="E2E8F0"/>
-            </a:solidFill>
-          </a:ln>
-        </p:spPr>
-        <p:style>
-          <a:lnRef idx="1">
-            <a:schemeClr val="accent1"/>
-          </a:lnRef>
-          <a:fillRef idx="3">
-            <a:schemeClr val="accent1"/>
-          </a:fillRef>
-          <a:effectRef idx="2">
-            <a:schemeClr val="accent1"/>
-          </a:effectRef>
-          <a:fontRef idx="minor">
-            <a:schemeClr val="lt1"/>
-          </a:fontRef>
-        </p:style>
-        <p:txBody>
-          <a:bodyPr rtlCol="0" anchor="ctr" wrap="square" lIns="137160" tIns="137160" rIns="137160" bIns="137160"/>
-          <a:lstStyle/>
-          <a:p>
-            <a:pPr algn="ctr">
-              <a:defRPr sz="1300" b="1">
-                <a:solidFill>
-                  <a:srgbClr val="EE0033"/>
-                </a:solidFill>
-              </a:defRPr>
-            </a:pPr>
-            <a:r>
-              <a:t>AQ: KH VTT</a:t>
-            </a:r>
-          </a:p>
-          <a:p>
-            <a:pPr>
-              <a:spcBef>
-                <a:spcPts val="200"/>
-              </a:spcBef>
-              <a:defRPr sz="1200" b="1">
-                <a:solidFill>
-                  <a:srgbClr val="1E293B"/>
-                </a:solidFill>
-              </a:defRPr>
-            </a:pPr>
-            <a:r>
-              <a:t>Chấm điểm GĐ</a:t>
-            </a:r>
-          </a:p>
-          <a:p>
-            <a:pPr>
-              <a:spcBef>
-                <a:spcPts val="200"/>
-              </a:spcBef>
-              <a:defRPr sz="1000">
-                <a:solidFill>
-                  <a:srgbClr val="64748B"/>
-                </a:solidFill>
-              </a:defRPr>
-            </a:pPr>
-            <a:r>
-              <a:t>Chỉ tiêu Kế hoạch Vật tư thiết bị</a:t>
-            </a:r>
-          </a:p>
-        </p:txBody>
-      </p:sp>
-      <p:sp>
-        <p:nvSpPr>
-          <p:cNvPr id="9" name="Rounded Rectangle 8"/>
-          <p:cNvSpPr/>
-          <p:nvPr/>
-        </p:nvSpPr>
-        <p:spPr>
-          <a:xfrm>
-            <a:off x="4297679" y="2743200"/>
-            <a:ext cx="3566160" cy="1645920"/>
-          </a:xfrm>
-          <a:prstGeom prst="roundRect">
-            <a:avLst/>
-          </a:prstGeom>
-          <a:solidFill>
-            <a:srgbClr val="FFFFFF"/>
-          </a:solidFill>
-          <a:ln>
-            <a:solidFill>
-              <a:srgbClr val="E2E8F0"/>
-            </a:solidFill>
-          </a:ln>
-        </p:spPr>
-        <p:style>
-          <a:lnRef idx="1">
-            <a:schemeClr val="accent1"/>
-          </a:lnRef>
-          <a:fillRef idx="3">
-            <a:schemeClr val="accent1"/>
-          </a:fillRef>
-          <a:effectRef idx="2">
-            <a:schemeClr val="accent1"/>
-          </a:effectRef>
-          <a:fontRef idx="minor">
-            <a:schemeClr val="lt1"/>
-          </a:fontRef>
-        </p:style>
-        <p:txBody>
-          <a:bodyPr rtlCol="0" anchor="ctr" wrap="square" lIns="137160" tIns="137160" rIns="137160" bIns="137160"/>
-          <a:lstStyle/>
-          <a:p>
-            <a:pPr algn="ctr">
-              <a:defRPr sz="1300" b="1">
-                <a:solidFill>
-                  <a:srgbClr val="EE0033"/>
-                </a:solidFill>
-              </a:defRPr>
-            </a:pPr>
-            <a:r>
-              <a:t>AR: NT BQLDA</a:t>
-            </a:r>
-          </a:p>
-          <a:p>
-            <a:pPr>
-              <a:spcBef>
-                <a:spcPts val="200"/>
-              </a:spcBef>
-              <a:defRPr sz="1200" b="1">
-                <a:solidFill>
-                  <a:srgbClr val="1E293B"/>
-                </a:solidFill>
-              </a:defRPr>
-            </a:pPr>
-            <a:r>
-              <a:t>Nghiệm thu BQLDA</a:t>
-            </a:r>
-          </a:p>
-          <a:p>
-            <a:pPr>
-              <a:spcBef>
-                <a:spcPts val="200"/>
-              </a:spcBef>
-              <a:defRPr sz="1000">
-                <a:solidFill>
-                  <a:srgbClr val="64748B"/>
-                </a:solidFill>
-              </a:defRPr>
-            </a:pPr>
-            <a:r>
-              <a:t>Nghiệm thu khối lượng BQLDA</a:t>
-            </a:r>
-          </a:p>
-        </p:txBody>
-      </p:sp>
-      <p:sp>
-        <p:nvSpPr>
-          <p:cNvPr id="10" name="Rounded Rectangle 9"/>
-          <p:cNvSpPr/>
-          <p:nvPr/>
-        </p:nvSpPr>
-        <p:spPr>
-          <a:xfrm>
-            <a:off x="8046719" y="2743200"/>
-            <a:ext cx="3566160" cy="1645920"/>
-          </a:xfrm>
-          <a:prstGeom prst="roundRect">
-            <a:avLst/>
-          </a:prstGeom>
-          <a:solidFill>
-            <a:srgbClr val="FFFFFF"/>
-          </a:solidFill>
-          <a:ln>
-            <a:solidFill>
-              <a:srgbClr val="E2E8F0"/>
-            </a:solidFill>
-          </a:ln>
-        </p:spPr>
-        <p:style>
-          <a:lnRef idx="1">
-            <a:schemeClr val="accent1"/>
-          </a:lnRef>
-          <a:fillRef idx="3">
-            <a:schemeClr val="accent1"/>
-          </a:fillRef>
-          <a:effectRef idx="2">
-            <a:schemeClr val="accent1"/>
-          </a:effectRef>
-          <a:fontRef idx="minor">
-            <a:schemeClr val="lt1"/>
-          </a:fontRef>
-        </p:style>
-        <p:txBody>
-          <a:bodyPr rtlCol="0" anchor="ctr" wrap="square" lIns="137160" tIns="137160" rIns="137160" bIns="137160"/>
-          <a:lstStyle/>
-          <a:p>
-            <a:pPr algn="ctr">
-              <a:defRPr sz="1300" b="1">
-                <a:solidFill>
-                  <a:srgbClr val="EE0033"/>
-                </a:solidFill>
-              </a:defRPr>
-            </a:pPr>
-            <a:r>
-              <a:t>AS: BGTS BQLDA</a:t>
-            </a:r>
-          </a:p>
-          <a:p>
-            <a:pPr>
-              <a:spcBef>
-                <a:spcPts val="200"/>
-              </a:spcBef>
-              <a:defRPr sz="1200" b="1">
-                <a:solidFill>
-                  <a:srgbClr val="1E293B"/>
-                </a:solidFill>
-              </a:defRPr>
-            </a:pPr>
-            <a:r>
-              <a:t>Bàn giao tài sản</a:t>
-            </a:r>
-          </a:p>
-          <a:p>
-            <a:pPr>
-              <a:spcBef>
-                <a:spcPts val="200"/>
-              </a:spcBef>
-              <a:defRPr sz="1000">
-                <a:solidFill>
-                  <a:srgbClr val="64748B"/>
-                </a:solidFill>
-              </a:defRPr>
-            </a:pPr>
-            <a:r>
-              <a:t>Bàn giao tài sản vào BQLDA</a:t>
-            </a:r>
-          </a:p>
-        </p:txBody>
-      </p:sp>
-      <p:sp>
-        <p:nvSpPr>
-          <p:cNvPr id="11" name="Rounded Rectangle 10"/>
-          <p:cNvSpPr/>
-          <p:nvPr/>
-        </p:nvSpPr>
-        <p:spPr>
-          <a:xfrm>
-            <a:off x="548640" y="4572000"/>
-            <a:ext cx="3566160" cy="1645920"/>
-          </a:xfrm>
-          <a:prstGeom prst="roundRect">
-            <a:avLst/>
-          </a:prstGeom>
-          <a:solidFill>
-            <a:srgbClr val="FFFFFF"/>
-          </a:solidFill>
-          <a:ln>
-            <a:solidFill>
-              <a:srgbClr val="E2E8F0"/>
-            </a:solidFill>
-          </a:ln>
-        </p:spPr>
-        <p:style>
-          <a:lnRef idx="1">
-            <a:schemeClr val="accent1"/>
-          </a:lnRef>
-          <a:fillRef idx="3">
-            <a:schemeClr val="accent1"/>
-          </a:fillRef>
-          <a:effectRef idx="2">
-            <a:schemeClr val="accent1"/>
-          </a:effectRef>
-          <a:fontRef idx="minor">
-            <a:schemeClr val="lt1"/>
-          </a:fontRef>
-        </p:style>
-        <p:txBody>
-          <a:bodyPr rtlCol="0" anchor="ctr" wrap="square" lIns="137160" tIns="137160" rIns="137160" bIns="137160"/>
-          <a:lstStyle/>
-          <a:p>
-            <a:pPr algn="ctr">
-              <a:defRPr sz="1300" b="1">
-                <a:solidFill>
-                  <a:srgbClr val="EE0033"/>
-                </a:solidFill>
-              </a:defRPr>
-            </a:pPr>
-            <a:r>
-              <a:t>AT: NT SAP</a:t>
-            </a:r>
-          </a:p>
-          <a:p>
-            <a:pPr>
-              <a:spcBef>
-                <a:spcPts val="200"/>
-              </a:spcBef>
-              <a:defRPr sz="1200" b="1">
-                <a:solidFill>
-                  <a:srgbClr val="1E293B"/>
-                </a:solidFill>
-              </a:defRPr>
-            </a:pPr>
-            <a:r>
-              <a:t>Nghiệm thu SAP</a:t>
-            </a:r>
-          </a:p>
-          <a:p>
-            <a:pPr>
-              <a:spcBef>
-                <a:spcPts val="200"/>
-              </a:spcBef>
-              <a:defRPr sz="1000">
-                <a:solidFill>
-                  <a:srgbClr val="64748B"/>
-                </a:solidFill>
-              </a:defRPr>
-            </a:pPr>
-            <a:r>
-              <a:t>Nghiệm thu hệ thống SAP</a:t>
-            </a:r>
-          </a:p>
-        </p:txBody>
-      </p:sp>
-      <p:sp>
-        <p:nvSpPr>
-          <p:cNvPr id="12" name="Rounded Rectangle 11"/>
-          <p:cNvSpPr/>
-          <p:nvPr/>
-        </p:nvSpPr>
-        <p:spPr>
-          <a:xfrm>
-            <a:off x="4297679" y="4572000"/>
-            <a:ext cx="3566160" cy="1645920"/>
-          </a:xfrm>
-          <a:prstGeom prst="roundRect">
-            <a:avLst/>
-          </a:prstGeom>
-          <a:solidFill>
-            <a:srgbClr val="FFFFFF"/>
-          </a:solidFill>
-          <a:ln>
-            <a:solidFill>
-              <a:srgbClr val="E2E8F0"/>
-            </a:solidFill>
-          </a:ln>
-        </p:spPr>
-        <p:style>
-          <a:lnRef idx="1">
-            <a:schemeClr val="accent1"/>
-          </a:lnRef>
-          <a:fillRef idx="3">
-            <a:schemeClr val="accent1"/>
-          </a:fillRef>
-          <a:effectRef idx="2">
-            <a:schemeClr val="accent1"/>
-          </a:effectRef>
-          <a:fontRef idx="minor">
-            <a:schemeClr val="lt1"/>
-          </a:fontRef>
-        </p:style>
-        <p:txBody>
-          <a:bodyPr rtlCol="0" anchor="ctr" wrap="square" lIns="137160" tIns="137160" rIns="137160" bIns="137160"/>
-          <a:lstStyle/>
-          <a:p>
-            <a:pPr algn="ctr">
-              <a:defRPr sz="1300" b="1">
-                <a:solidFill>
-                  <a:srgbClr val="EE0033"/>
-                </a:solidFill>
-              </a:defRPr>
-            </a:pPr>
-            <a:r>
-              <a:t>AU: BGTS SAP</a:t>
-            </a:r>
-          </a:p>
-          <a:p>
-            <a:pPr>
-              <a:spcBef>
-                <a:spcPts val="200"/>
-              </a:spcBef>
-              <a:defRPr sz="1200" b="1">
-                <a:solidFill>
-                  <a:srgbClr val="1E293B"/>
-                </a:solidFill>
-              </a:defRPr>
-            </a:pPr>
-            <a:r>
-              <a:t>BGTS trên SAP</a:t>
-            </a:r>
-          </a:p>
-          <a:p>
-            <a:pPr>
-              <a:spcBef>
-                <a:spcPts val="200"/>
-              </a:spcBef>
-              <a:defRPr sz="1000">
-                <a:solidFill>
-                  <a:srgbClr val="64748B"/>
-                </a:solidFill>
-              </a:defRPr>
-            </a:pPr>
-            <a:r>
-              <a:t>Bàn giao tài sản trên hệ thống SAP</a:t>
-            </a:r>
-          </a:p>
-        </p:txBody>
-      </p:sp>
-      <p:sp>
-        <p:nvSpPr>
-          <p:cNvPr id="13" name="Rounded Rectangle 12"/>
-          <p:cNvSpPr/>
-          <p:nvPr/>
-        </p:nvSpPr>
-        <p:spPr>
-          <a:xfrm>
-            <a:off x="8046719" y="4572000"/>
-            <a:ext cx="3566160" cy="1645920"/>
-          </a:xfrm>
-          <a:prstGeom prst="roundRect">
-            <a:avLst/>
-          </a:prstGeom>
-          <a:solidFill>
-            <a:srgbClr val="FFFFFF"/>
-          </a:solidFill>
-          <a:ln>
-            <a:solidFill>
-              <a:srgbClr val="E2E8F0"/>
-            </a:solidFill>
-          </a:ln>
-        </p:spPr>
-        <p:style>
-          <a:lnRef idx="1">
-            <a:schemeClr val="accent1"/>
-          </a:lnRef>
-          <a:fillRef idx="3">
-            <a:schemeClr val="accent1"/>
-          </a:fillRef>
-          <a:effectRef idx="2">
-            <a:schemeClr val="accent1"/>
-          </a:effectRef>
-          <a:fontRef idx="minor">
-            <a:schemeClr val="lt1"/>
-          </a:fontRef>
-        </p:style>
-        <p:txBody>
-          <a:bodyPr rtlCol="0" anchor="ctr" wrap="square" lIns="137160" tIns="137160" rIns="137160" bIns="137160"/>
-          <a:lstStyle/>
-          <a:p>
-            <a:pPr algn="ctr">
-              <a:defRPr sz="1300" b="1">
-                <a:solidFill>
-                  <a:srgbClr val="EE0033"/>
-                </a:solidFill>
-              </a:defRPr>
-            </a:pPr>
-            <a:r>
-              <a:t>AW: VHKT</a:t>
-            </a:r>
-          </a:p>
-          <a:p>
-            <a:pPr>
-              <a:spcBef>
-                <a:spcPts val="200"/>
-              </a:spcBef>
-              <a:defRPr sz="1200" b="1">
-                <a:solidFill>
-                  <a:srgbClr val="1E293B"/>
-                </a:solidFill>
-              </a:defRPr>
-            </a:pPr>
-            <a:r>
-              <a:t>Vận hành kỹ thuật</a:t>
-            </a:r>
-          </a:p>
-          <a:p>
-            <a:pPr>
-              <a:spcBef>
-                <a:spcPts val="200"/>
-              </a:spcBef>
-              <a:defRPr sz="1000">
-                <a:solidFill>
-                  <a:srgbClr val="64748B"/>
-                </a:solidFill>
-              </a:defRPr>
-            </a:pPr>
-            <a:r>
-              <a:t>Bàn giao đưa vào Vận hành KT</a:t>
-            </a:r>
-          </a:p>
-        </p:txBody>
-      </p:sp>
-    </p:spTree>
-  </p:cSld>
-  <p:clrMapOvr>
-    <a:masterClrMapping/>
-  </p:clrMapOvr>
-</p:sld>
-</file>
-
-<file path=ppt/slides/slide6.xml><?xml version="1.0" encoding="utf-8"?>
-<p:sld xmlns:a="http://schemas.openxmlformats.org/drawingml/2006/main" xmlns:p="http://schemas.openxmlformats.org/presentationml/2006/main" xmlns:r="http://schemas.openxmlformats.org/officeDocument/2006/relationships">
-  <p:cSld>
-    <p:spTree>
-      <p:nvGrpSpPr>
-        <p:cNvPr id="1" name=""/>
-        <p:cNvGrpSpPr/>
-        <p:nvPr/>
-      </p:nvGrpSpPr>
-      <p:grpSpPr/>
-      <p:sp>
-        <p:nvSpPr>
-          <p:cNvPr id="2" name="Rectangle 1"/>
-          <p:cNvSpPr/>
-          <p:nvPr/>
-        </p:nvSpPr>
-        <p:spPr>
-          <a:xfrm>
-            <a:off x="0" y="0"/>
-            <a:ext cx="12191695" cy="6858000"/>
-          </a:xfrm>
-          <a:prstGeom prst="rect">
-            <a:avLst/>
-          </a:prstGeom>
-          <a:solidFill>
-            <a:srgbClr val="F1F5F9"/>
-          </a:solidFill>
-          <a:ln>
-            <a:noFill/>
-          </a:ln>
-        </p:spPr>
-        <p:style>
-          <a:lnRef idx="1">
-            <a:schemeClr val="accent1"/>
-          </a:lnRef>
-          <a:fillRef idx="3">
-            <a:schemeClr val="accent1"/>
-          </a:fillRef>
-          <a:effectRef idx="2">
-            <a:schemeClr val="accent1"/>
-          </a:effectRef>
-          <a:fontRef idx="minor">
-            <a:schemeClr val="lt1"/>
-          </a:fontRef>
-        </p:style>
-        <p:txBody>
-          <a:bodyPr rtlCol="0" anchor="ctr"/>
-          <a:lstStyle/>
-          <a:p>
-            <a:pPr algn="ctr"/>
-          </a:p>
-        </p:txBody>
-      </p:sp>
-      <p:sp>
-        <p:nvSpPr>
-          <p:cNvPr id="3" name="Rectangle 2"/>
-          <p:cNvSpPr/>
-          <p:nvPr/>
-        </p:nvSpPr>
-        <p:spPr>
-          <a:xfrm>
-            <a:off x="0" y="0"/>
-            <a:ext cx="12191695" cy="1051560"/>
-          </a:xfrm>
-          <a:prstGeom prst="rect">
-            <a:avLst/>
-          </a:prstGeom>
-          <a:solidFill>
-            <a:srgbClr val="FFFFFF"/>
-          </a:solidFill>
-          <a:ln>
-            <a:solidFill>
-              <a:srgbClr val="E2E8F0"/>
-            </a:solidFill>
-          </a:ln>
-        </p:spPr>
-        <p:style>
-          <a:lnRef idx="1">
-            <a:schemeClr val="accent1"/>
-          </a:lnRef>
-          <a:fillRef idx="3">
-            <a:schemeClr val="accent1"/>
-          </a:fillRef>
-          <a:effectRef idx="2">
-            <a:schemeClr val="accent1"/>
-          </a:effectRef>
-          <a:fontRef idx="minor">
-            <a:schemeClr val="lt1"/>
-          </a:fontRef>
-        </p:style>
-        <p:txBody>
-          <a:bodyPr rtlCol="0" anchor="ctr"/>
-          <a:lstStyle/>
-          <a:p>
-            <a:pPr algn="ctr"/>
-          </a:p>
-        </p:txBody>
-      </p:sp>
-      <p:sp>
-        <p:nvSpPr>
-          <p:cNvPr id="4" name="Rectangle 3"/>
-          <p:cNvSpPr/>
-          <p:nvPr/>
-        </p:nvSpPr>
-        <p:spPr>
-          <a:xfrm>
-            <a:off x="0" y="0"/>
-            <a:ext cx="12191695" cy="73152"/>
-          </a:xfrm>
-          <a:prstGeom prst="rect">
-            <a:avLst/>
-          </a:prstGeom>
-          <a:solidFill>
-            <a:srgbClr val="EE0033"/>
-          </a:solidFill>
-          <a:ln>
-            <a:noFill/>
-          </a:ln>
-        </p:spPr>
-        <p:style>
-          <a:lnRef idx="1">
-            <a:schemeClr val="accent1"/>
-          </a:lnRef>
-          <a:fillRef idx="3">
-            <a:schemeClr val="accent1"/>
-          </a:fillRef>
-          <a:effectRef idx="2">
-            <a:schemeClr val="accent1"/>
-          </a:effectRef>
-          <a:fontRef idx="minor">
-            <a:schemeClr val="lt1"/>
-          </a:fontRef>
-        </p:style>
-        <p:txBody>
-          <a:bodyPr rtlCol="0" anchor="ctr"/>
-          <a:lstStyle/>
-          <a:p>
-            <a:pPr algn="ctr"/>
-          </a:p>
-        </p:txBody>
-      </p:sp>
-      <p:sp>
-        <p:nvSpPr>
-          <p:cNvPr id="5" name="Rounded Rectangle 4"/>
-          <p:cNvSpPr/>
-          <p:nvPr/>
-        </p:nvSpPr>
-        <p:spPr>
-          <a:xfrm>
-            <a:off x="457200" y="182880"/>
-            <a:ext cx="1463040" cy="640080"/>
-          </a:xfrm>
-          <a:prstGeom prst="roundRect">
-            <a:avLst/>
-          </a:prstGeom>
-          <a:solidFill>
-            <a:srgbClr val="EE0033"/>
-          </a:solidFill>
-          <a:ln>
-            <a:noFill/>
-          </a:ln>
-        </p:spPr>
-        <p:style>
-          <a:lnRef idx="1">
-            <a:schemeClr val="accent1"/>
-          </a:lnRef>
-          <a:fillRef idx="3">
-            <a:schemeClr val="accent1"/>
-          </a:fillRef>
-          <a:effectRef idx="2">
-            <a:schemeClr val="accent1"/>
-          </a:effectRef>
-          <a:fontRef idx="minor">
-            <a:schemeClr val="lt1"/>
-          </a:fontRef>
-        </p:style>
-        <p:txBody>
-          <a:bodyPr rtlCol="0" anchor="ctr" wrap="none" lIns="0" tIns="0" rIns="0" bIns="0"/>
-          <a:lstStyle/>
-          <a:p>
-            <a:pPr algn="ctr">
-              <a:defRPr sz="1600" b="1">
-                <a:solidFill>
-                  <a:srgbClr val="FFFFFF"/>
-                </a:solidFill>
-              </a:defRPr>
-            </a:pPr>
-            <a:r>
-              <a:t>viettel</a:t>
-            </a:r>
-          </a:p>
-          <a:p>
-            <a:pPr algn="ctr">
-              <a:defRPr sz="700">
-                <a:solidFill>
-                  <a:srgbClr val="FFFFFF"/>
-                </a:solidFill>
-              </a:defRPr>
-            </a:pPr>
-            <a:r>
-              <a:t>Theo cách của bạn</a:t>
-            </a:r>
-          </a:p>
-        </p:txBody>
-      </p:sp>
-      <p:sp>
-        <p:nvSpPr>
-          <p:cNvPr id="6" name="TextBox 5"/>
-          <p:cNvSpPr txBox="1"/>
-          <p:nvPr/>
-        </p:nvSpPr>
-        <p:spPr>
-          <a:xfrm>
-            <a:off x="2103120" y="182880"/>
-            <a:ext cx="9601200" cy="731520"/>
+            <a:off x="731520" y="1463040"/>
+            <a:ext cx="10728655" cy="4572000"/>
           </a:xfrm>
           <a:prstGeom prst="rect">
             <a:avLst/>
@@ -7102,251 +6212,105 @@
           <a:noFill/>
         </p:spPr>
         <p:txBody>
-          <a:bodyPr wrap="square" lIns="0" tIns="0" rIns="0" bIns="0">
+          <a:bodyPr wrap="square">
             <a:spAutoFit/>
           </a:bodyPr>
           <a:lstStyle/>
+          <a:p/>
           <a:p>
             <a:pPr>
-              <a:defRPr sz="900" b="1">
-                <a:solidFill>
-                  <a:srgbClr val="EE0033"/>
-                </a:solidFill>
-              </a:defRPr>
-            </a:pPr>
-            <a:r>
-              <a:t>ĐỀ XUẤT ĐÁNH TRỌNG TÂM</a:t>
-            </a:r>
-          </a:p>
-          <a:p>
-            <a:pPr>
-              <a:defRPr sz="1800" b="1">
+              <a:defRPr b="1" sz="1400">
                 <a:solidFill>
                   <a:srgbClr val="1E293B"/>
                 </a:solidFill>
               </a:defRPr>
             </a:pPr>
             <a:r>
-              <a:t>KẾ HOẠCH HÀNH ĐỘNG THU HỒI CÔNG NỢ VTA &amp; HỢP ĐỒNG CHI PHÍ</a:t>
-            </a:r>
-          </a:p>
-        </p:txBody>
-      </p:sp>
-      <p:sp>
-        <p:nvSpPr>
-          <p:cNvPr id="7" name="Rounded Rectangle 6"/>
-          <p:cNvSpPr/>
-          <p:nvPr/>
-        </p:nvSpPr>
-        <p:spPr>
-          <a:xfrm>
-            <a:off x="548640" y="1371600"/>
-            <a:ext cx="11094415" cy="1463040"/>
-          </a:xfrm>
-          <a:prstGeom prst="roundRect">
-            <a:avLst/>
-          </a:prstGeom>
-          <a:solidFill>
-            <a:srgbClr val="FEF2F2"/>
-          </a:solidFill>
-          <a:ln w="19050">
-            <a:solidFill>
-              <a:srgbClr val="EE0033"/>
-            </a:solidFill>
-          </a:ln>
-        </p:spPr>
-        <p:style>
-          <a:lnRef idx="1">
-            <a:schemeClr val="accent1"/>
-          </a:lnRef>
-          <a:fillRef idx="3">
-            <a:schemeClr val="accent1"/>
-          </a:fillRef>
-          <a:effectRef idx="2">
-            <a:schemeClr val="accent1"/>
-          </a:effectRef>
-          <a:fontRef idx="minor">
-            <a:schemeClr val="lt1"/>
-          </a:fontRef>
-        </p:style>
-        <p:txBody>
-          <a:bodyPr rtlCol="0" anchor="ctr" wrap="square" lIns="182880" tIns="182880" rIns="182880" bIns="182880"/>
-          <a:lstStyle/>
-          <a:p>
-            <a:pPr algn="ctr">
-              <a:defRPr sz="1300" b="1">
+              <a:t>1. Tập trung xử lý Top 2 Đối tác VCC &amp; ACT (Chiếm 79% nợ VTA):</a:t>
+            </a:r>
+          </a:p>
+          <a:p>
+            <a:pPr>
+              <a:defRPr sz="1200">
                 <a:solidFill>
-                  <a:srgbClr val="EE0033"/>
+                  <a:srgbClr val="64748B"/>
                 </a:solidFill>
               </a:defRPr>
             </a:pPr>
             <a:r>
-              <a:t>1. ĐÔN ĐỐC LÀM VIỆC RIÊNG VỚI TOP 2 NHÀ THẦU (VCC &amp; ACT - CHIẾM 74.1% VTA)</a:t>
+              <a:t>   → Lập tổ công tác liên ngành đôn đốc thu hồi vật tư A tồn đọng và hoàn thiện chứng từ nghiệm thu.</a:t>
             </a:r>
           </a:p>
           <a:p>
             <a:pPr>
-              <a:spcBef>
-                <a:spcPts val="600"/>
-              </a:spcBef>
-              <a:defRPr sz="1100">
+              <a:defRPr b="1" sz="1400">
                 <a:solidFill>
                   <a:srgbClr val="1E293B"/>
                 </a:solidFill>
               </a:defRPr>
             </a:pPr>
             <a:r>
-              <a:t>• Thành lập Tổ công tác chuyên trách làm việc với Ban Lãnh đạo TCT CP Công trình Viettel (234 Tỷ) và Viễn thông ACT (169.4 Tỷ).</a:t>
-            </a:r>
-            <a:br/>
-            <a:r>
-              <a:t>• Giao chỉ tiêu cứng: Giảm tối thiểu 40 - 50% tồn công nợ VTA (tương đương 200 Tỷ VNĐ) trong Quý 4/2026.</a:t>
-            </a:r>
-          </a:p>
-        </p:txBody>
-      </p:sp>
-      <p:sp>
-        <p:nvSpPr>
-          <p:cNvPr id="8" name="Rounded Rectangle 7"/>
-          <p:cNvSpPr/>
-          <p:nvPr/>
-        </p:nvSpPr>
-        <p:spPr>
-          <a:xfrm>
-            <a:off x="548640" y="3017520"/>
-            <a:ext cx="11094415" cy="1463040"/>
-          </a:xfrm>
-          <a:prstGeom prst="roundRect">
-            <a:avLst/>
-          </a:prstGeom>
-          <a:solidFill>
-            <a:srgbClr val="FFFFFF"/>
-          </a:solidFill>
-          <a:ln w="19050">
-            <a:solidFill>
-              <a:srgbClr val="D97706"/>
-            </a:solidFill>
-          </a:ln>
-        </p:spPr>
-        <p:style>
-          <a:lnRef idx="1">
-            <a:schemeClr val="accent1"/>
-          </a:lnRef>
-          <a:fillRef idx="3">
-            <a:schemeClr val="accent1"/>
-          </a:fillRef>
-          <a:effectRef idx="2">
-            <a:schemeClr val="accent1"/>
-          </a:effectRef>
-          <a:fontRef idx="minor">
-            <a:schemeClr val="lt1"/>
-          </a:fontRef>
-        </p:style>
-        <p:txBody>
-          <a:bodyPr rtlCol="0" anchor="ctr" wrap="square" lIns="182880" tIns="182880" rIns="182880" bIns="182880"/>
-          <a:lstStyle/>
-          <a:p>
-            <a:pPr algn="ctr">
-              <a:defRPr sz="1300" b="1">
+              <a:t>2. Xử lý triệt để Hợp đồng Chi phí Ký trước 2025 (&lt; 2025):</a:t>
+            </a:r>
+          </a:p>
+          <a:p>
+            <a:pPr>
+              <a:defRPr sz="1200">
                 <a:solidFill>
-                  <a:srgbClr val="D97706"/>
+                  <a:srgbClr val="64748B"/>
                 </a:solidFill>
               </a:defRPr>
             </a:pPr>
             <a:r>
-              <a:t>2. TỔ CÔNG TÁC XỬ LÝ DỨT ĐIỂM 78 HỢP ĐỒNG CHI PHÍ KÝ TRƯỚC 2025</a:t>
+              <a:t>   → Tạm dừng thanh toán các đợt tiếp theo cho đến khi hoàn thành quyết toán công nợ cũ.</a:t>
             </a:r>
           </a:p>
           <a:p>
             <a:pPr>
-              <a:spcBef>
-                <a:spcPts val="600"/>
-              </a:spcBef>
-              <a:defRPr sz="1100">
+              <a:defRPr b="1" sz="1400">
                 <a:solidFill>
                   <a:srgbClr val="1E293B"/>
                 </a:solidFill>
               </a:defRPr>
             </a:pPr>
             <a:r>
-              <a:t>• Rà soát từng HĐ chi phí đọng lâu năm (đặc biệt 32 HĐ của VCC và 11 HĐ của Mai Tú Tài).</a:t>
-            </a:r>
-            <a:br/>
-            <a:r>
-              <a:t>• Đặt hạn chót 30/10/2026: Hoàn thành 100% hồ sơ nghiệm thu thu hồi hoặc xử lý dứt điểm hiệu lực hợp đồng.</a:t>
-            </a:r>
-          </a:p>
-        </p:txBody>
-      </p:sp>
-      <p:sp>
-        <p:nvSpPr>
-          <p:cNvPr id="9" name="Rounded Rectangle 8"/>
-          <p:cNvSpPr/>
-          <p:nvPr/>
-        </p:nvSpPr>
-        <p:spPr>
-          <a:xfrm>
-            <a:off x="548640" y="4663440"/>
-            <a:ext cx="11094415" cy="1463040"/>
-          </a:xfrm>
-          <a:prstGeom prst="roundRect">
-            <a:avLst/>
-          </a:prstGeom>
-          <a:solidFill>
-            <a:srgbClr val="FFFFFF"/>
-          </a:solidFill>
-          <a:ln w="19050">
-            <a:solidFill>
-              <a:srgbClr val="10B981"/>
-            </a:solidFill>
-          </a:ln>
-        </p:spPr>
-        <p:style>
-          <a:lnRef idx="1">
-            <a:schemeClr val="accent1"/>
-          </a:lnRef>
-          <a:fillRef idx="3">
-            <a:schemeClr val="accent1"/>
-          </a:fillRef>
-          <a:effectRef idx="2">
-            <a:schemeClr val="accent1"/>
-          </a:effectRef>
-          <a:fontRef idx="minor">
-            <a:schemeClr val="lt1"/>
-          </a:fontRef>
-        </p:style>
-        <p:txBody>
-          <a:bodyPr rtlCol="0" anchor="ctr" wrap="square" lIns="182880" tIns="182880" rIns="182880" bIns="182880"/>
-          <a:lstStyle/>
-          <a:p>
-            <a:pPr algn="ctr">
-              <a:defRPr sz="1300" b="1">
+              <a:t>3. Theo dõi sát chỉ tiêu KPI Q = 'KHÔNG':</a:t>
+            </a:r>
+          </a:p>
+          <a:p>
+            <a:pPr>
+              <a:defRPr sz="1200">
                 <a:solidFill>
-                  <a:srgbClr val="10B981"/>
+                  <a:srgbClr val="64748B"/>
                 </a:solidFill>
               </a:defRPr>
             </a:pPr>
             <a:r>
-              <a:t>3. KIỂM SOÁT KPI THỜI GIAN THỰC QUA DASHBOARD GOOGLE SHEET LIVE</a:t>
+              <a:t>   → Định kỳ hàng tuần cập nhật tiến độ giải tỏa công nợ VTA lên hệ thống Dashboard Online.</a:t>
             </a:r>
           </a:p>
           <a:p>
             <a:pPr>
-              <a:spcBef>
-                <a:spcPts val="600"/>
-              </a:spcBef>
-              <a:defRPr sz="1100">
+              <a:defRPr b="1" sz="1400">
                 <a:solidFill>
                   <a:srgbClr val="1E293B"/>
                 </a:solidFill>
               </a:defRPr>
             </a:pPr>
             <a:r>
-              <a:t>• Sử dụng trực tiếp Dashboard Online 24/7 (https://cuongph2.github.io/viettel-dashboard/) để giao ban kiểm soát KPI hàng tuần.</a:t>
-            </a:r>
-            <a:br/>
-            <a:r>
-              <a:t>• Bấm nút 'Cập Nhật Từ Google Sheet' để lấy số liệu công nợ mới nhất theo thời gian thực.</a:t>
+              <a:t>4. Áp dụng tài khoản cấp vốn và điều phối hạ tầng:</a:t>
+            </a:r>
+          </a:p>
+          <a:p>
+            <a:pPr>
+              <a:defRPr sz="1200">
+                <a:solidFill>
+                  <a:srgbClr val="64748B"/>
+                </a:solidFill>
+              </a:defRPr>
+            </a:pPr>
+            <a:r>
+              <a:t>   → Gắn trách nhiệm trực tiếp cho từng Giám đốc Ban/Trung tâm Quản lý Hợp đồng.</a:t>
             </a:r>
           </a:p>
         </p:txBody>

--- a/Bao_Cao_Viettel_Cong_No_VTA_Slide.pptx
+++ b/Bao_Cao_Viettel_Cong_No_VTA_Slide.pptx
@@ -3191,7 +3191,7 @@
               </a:defRPr>
             </a:pPr>
             <a:r>
-              <a:t>Phân tích trọng tâm Công nợ Vật tư A (548.3 Tỷ VNĐ) &amp; Bảng Khoanh Vùng KPI Theo Đối Tác Trọng Điểm</a:t>
+              <a:t>Phân tích trọng tâm Công nợ Vật tư A (548.3 Tỷ VNĐ) &amp; Bảng Khoanh Vùng Chi Tiết Từng KPI Theo Đối Tác</a:t>
             </a:r>
           </a:p>
         </p:txBody>
@@ -4448,8 +4448,8 @@
         </p:nvSpPr>
         <p:spPr>
           <a:xfrm>
-            <a:off x="731520" y="365760"/>
-            <a:ext cx="10728655" cy="731520"/>
+            <a:off x="457200" y="365760"/>
+            <a:ext cx="11277295" cy="731520"/>
           </a:xfrm>
           <a:prstGeom prst="rect">
             <a:avLst/>
@@ -4463,26 +4463,26 @@
           <a:lstStyle/>
           <a:p>
             <a:pPr>
-              <a:defRPr sz="2200" b="1">
+              <a:defRPr sz="2000" b="1">
                 <a:solidFill>
                   <a:srgbClr val="EE0033"/>
                 </a:solidFill>
               </a:defRPr>
             </a:pPr>
             <a:r>
-              <a:t>SLIDE 4: KHOANH VÙNG ĐIỀU HÀNH KPI THEO ĐỐI TÁC TRỌNG ĐIỂM</a:t>
+              <a:t>SLIDE 4: KHOANH VÙNG CHI TIẾT TỪNG KPI THEO ĐỐI TÁC TRỌNG ĐIỂM</a:t>
             </a:r>
           </a:p>
           <a:p>
             <a:pPr>
-              <a:defRPr sz="1300">
+              <a:defRPr sz="1200">
                 <a:solidFill>
                   <a:srgbClr val="64748B"/>
                 </a:solidFill>
               </a:defRPr>
             </a:pPr>
             <a:r>
-              <a:t>Chi tiết số lượng CT, Tồn VTA và tỷ lệ Đạt KPI (Q = 'KHÔNG') theo Top 8 Nhà Thầu Lớn Nhất</a:t>
+              <a:t>Chi tiết kết quả Đạt / Giao của 6 chỉ tiêu KPI (KHVTT, NT BQLDA, BGTS BQLDA, NT SAP, BGTS SAP, VHKT) theo Top 8 Nhà Thầu</a:t>
             </a:r>
           </a:p>
         </p:txBody>
@@ -4496,8 +4496,8 @@
           <p:nvPr/>
         </p:nvGraphicFramePr>
         <p:xfrm>
-          <a:off x="731520" y="1188720"/>
-          <a:ext cx="10728655" cy="5120640"/>
+          <a:off x="457200" y="1188720"/>
+          <a:ext cx="11277295" cy="5120640"/>
         </p:xfrm>
         <a:graphic>
           <a:graphicData uri="http://schemas.openxmlformats.org/drawingml/2006/table">
@@ -4506,15 +4506,18 @@
                 <a:tableStyleId>{5C22544A-7EE6-4342-B048-85BDC9FD1C3A}</a:tableStyleId>
               </a:tblPr>
               <a:tblGrid>
-                <a:gridCol w="1192072"/>
-                <a:gridCol w="1192072"/>
-                <a:gridCol w="1192072"/>
-                <a:gridCol w="1192072"/>
-                <a:gridCol w="1192072"/>
-                <a:gridCol w="1192072"/>
-                <a:gridCol w="1192072"/>
-                <a:gridCol w="1192072"/>
-                <a:gridCol w="1192079"/>
+                <a:gridCol w="939774"/>
+                <a:gridCol w="939774"/>
+                <a:gridCol w="939774"/>
+                <a:gridCol w="939774"/>
+                <a:gridCol w="939774"/>
+                <a:gridCol w="939774"/>
+                <a:gridCol w="939774"/>
+                <a:gridCol w="939774"/>
+                <a:gridCol w="939774"/>
+                <a:gridCol w="939774"/>
+                <a:gridCol w="939774"/>
+                <a:gridCol w="939781"/>
               </a:tblGrid>
               <a:tr h="512064">
                 <a:tc>
@@ -4523,7 +4526,7 @@
                     <a:lstStyle/>
                     <a:p>
                       <a:pPr algn="ctr">
-                        <a:defRPr b="1" sz="1100">
+                        <a:defRPr b="1" sz="1000">
                           <a:solidFill>
                             <a:srgbClr val="FFFFFF"/>
                           </a:solidFill>
@@ -4546,7 +4549,7 @@
                     <a:lstStyle/>
                     <a:p>
                       <a:pPr algn="ctr">
-                        <a:defRPr b="1" sz="1100">
+                        <a:defRPr b="1" sz="1000">
                           <a:solidFill>
                             <a:srgbClr val="FFFFFF"/>
                           </a:solidFill>
@@ -4569,7 +4572,7 @@
                     <a:lstStyle/>
                     <a:p>
                       <a:pPr algn="ctr">
-                        <a:defRPr b="1" sz="1100">
+                        <a:defRPr b="1" sz="1000">
                           <a:solidFill>
                             <a:srgbClr val="FFFFFF"/>
                           </a:solidFill>
@@ -4592,14 +4595,14 @@
                     <a:lstStyle/>
                     <a:p>
                       <a:pPr algn="ctr">
-                        <a:defRPr b="1" sz="1100">
+                        <a:defRPr b="1" sz="1000">
                           <a:solidFill>
                             <a:srgbClr val="FFFFFF"/>
                           </a:solidFill>
                         </a:defRPr>
                       </a:pPr>
                       <a:r>
-                        <a:t>Tổng CT</a:t>
+                        <a:t>Tồn VTA</a:t>
                       </a:r>
                     </a:p>
                   </a:txBody>
@@ -4615,14 +4618,14 @@
                     <a:lstStyle/>
                     <a:p>
                       <a:pPr algn="ctr">
-                        <a:defRPr b="1" sz="1100">
+                        <a:defRPr b="1" sz="1000">
                           <a:solidFill>
                             <a:srgbClr val="FFFFFF"/>
                           </a:solidFill>
                         </a:defRPr>
                       </a:pPr>
                       <a:r>
-                        <a:t>CT Tồn VTA</a:t>
+                        <a:t>Tiền VTA</a:t>
                       </a:r>
                     </a:p>
                   </a:txBody>
@@ -4638,14 +4641,14 @@
                     <a:lstStyle/>
                     <a:p>
                       <a:pPr algn="ctr">
-                        <a:defRPr b="1" sz="1100">
+                        <a:defRPr b="1" sz="1000">
                           <a:solidFill>
                             <a:srgbClr val="FFFFFF"/>
                           </a:solidFill>
                         </a:defRPr>
                       </a:pPr>
                       <a:r>
-                        <a:t>Tiền VTA (Tỷ)</a:t>
+                        <a:t>1.KHVTT</a:t>
                       </a:r>
                     </a:p>
                   </a:txBody>
@@ -4661,14 +4664,14 @@
                     <a:lstStyle/>
                     <a:p>
                       <a:pPr algn="ctr">
-                        <a:defRPr b="1" sz="1100">
+                        <a:defRPr b="1" sz="1000">
                           <a:solidFill>
                             <a:srgbClr val="FFFFFF"/>
                           </a:solidFill>
                         </a:defRPr>
                       </a:pPr>
                       <a:r>
-                        <a:t>Giao KPI</a:t>
+                        <a:t>2.NT BQL</a:t>
                       </a:r>
                     </a:p>
                   </a:txBody>
@@ -4684,14 +4687,14 @@
                     <a:lstStyle/>
                     <a:p>
                       <a:pPr algn="ctr">
-                        <a:defRPr b="1" sz="1100">
+                        <a:defRPr b="1" sz="1000">
                           <a:solidFill>
                             <a:srgbClr val="FFFFFF"/>
                           </a:solidFill>
                         </a:defRPr>
                       </a:pPr>
                       <a:r>
-                        <a:t>Đạt KPI</a:t>
+                        <a:t>3.BGTS BQL</a:t>
                       </a:r>
                     </a:p>
                   </a:txBody>
@@ -4707,14 +4710,14 @@
                     <a:lstStyle/>
                     <a:p>
                       <a:pPr algn="ctr">
-                        <a:defRPr b="1" sz="1100">
+                        <a:defRPr b="1" sz="1000">
                           <a:solidFill>
                             <a:srgbClr val="FFFFFF"/>
                           </a:solidFill>
                         </a:defRPr>
                       </a:pPr>
                       <a:r>
-                        <a:t>% Đạt KPI</a:t>
+                        <a:t>4.NT SAP</a:t>
                       </a:r>
                     </a:p>
                   </a:txBody>
@@ -4724,6 +4727,75 @@
                     </a:solidFill>
                   </a:tcPr>
                 </a:tc>
+                <a:tc>
+                  <a:txBody>
+                    <a:bodyPr/>
+                    <a:lstStyle/>
+                    <a:p>
+                      <a:pPr algn="ctr">
+                        <a:defRPr b="1" sz="1000">
+                          <a:solidFill>
+                            <a:srgbClr val="FFFFFF"/>
+                          </a:solidFill>
+                        </a:defRPr>
+                      </a:pPr>
+                      <a:r>
+                        <a:t>5.BGTS SAP</a:t>
+                      </a:r>
+                    </a:p>
+                  </a:txBody>
+                  <a:tcPr>
+                    <a:solidFill>
+                      <a:srgbClr val="EE0033"/>
+                    </a:solidFill>
+                  </a:tcPr>
+                </a:tc>
+                <a:tc>
+                  <a:txBody>
+                    <a:bodyPr/>
+                    <a:lstStyle/>
+                    <a:p>
+                      <a:pPr algn="ctr">
+                        <a:defRPr b="1" sz="1000">
+                          <a:solidFill>
+                            <a:srgbClr val="FFFFFF"/>
+                          </a:solidFill>
+                        </a:defRPr>
+                      </a:pPr>
+                      <a:r>
+                        <a:t>6.VHKT</a:t>
+                      </a:r>
+                    </a:p>
+                  </a:txBody>
+                  <a:tcPr>
+                    <a:solidFill>
+                      <a:srgbClr val="EE0033"/>
+                    </a:solidFill>
+                  </a:tcPr>
+                </a:tc>
+                <a:tc>
+                  <a:txBody>
+                    <a:bodyPr/>
+                    <a:lstStyle/>
+                    <a:p>
+                      <a:pPr algn="ctr">
+                        <a:defRPr b="1" sz="1000">
+                          <a:solidFill>
+                            <a:srgbClr val="FFFFFF"/>
+                          </a:solidFill>
+                        </a:defRPr>
+                      </a:pPr>
+                      <a:r>
+                        <a:t>% Đạt</a:t>
+                      </a:r>
+                    </a:p>
+                  </a:txBody>
+                  <a:tcPr>
+                    <a:solidFill>
+                      <a:srgbClr val="EE0033"/>
+                    </a:solidFill>
+                  </a:tcPr>
+                </a:tc>
               </a:tr>
               <a:tr h="512064">
                 <a:tc>
@@ -4732,7 +4804,7 @@
                     <a:lstStyle/>
                     <a:p>
                       <a:pPr algn="ctr">
-                        <a:defRPr sz="1000" b="0"/>
+                        <a:defRPr sz="900" b="0"/>
                       </a:pPr>
                       <a:r>
                         <a:t>1</a:t>
@@ -4747,7 +4819,7 @@
                     <a:lstStyle/>
                     <a:p>
                       <a:pPr algn="l">
-                        <a:defRPr sz="1000" b="0"/>
+                        <a:defRPr sz="900" b="0"/>
                       </a:pPr>
                       <a:r>
                         <a:t>Tổng công ty CP Công trình Viettel (VCC)</a:t>
@@ -4762,7 +4834,7 @@
                     <a:lstStyle/>
                     <a:p>
                       <a:pPr algn="ctr">
-                        <a:defRPr sz="1000" b="0"/>
+                        <a:defRPr sz="900" b="0"/>
                       </a:pPr>
                       <a:r>
                         <a:t>201</a:t>
@@ -4777,14 +4849,1563 @@
                     <a:lstStyle/>
                     <a:p>
                       <a:pPr algn="ctr">
-                        <a:defRPr sz="1000" b="0"/>
-                      </a:pPr>
-                      <a:r>
-                        <a:t>4,191</a:t>
-                      </a:r>
-                    </a:p>
-                  </a:txBody>
-                  <a:tcPr/>
+                        <a:defRPr sz="900" b="1">
+                          <a:solidFill>
+                            <a:srgbClr val="EE0033"/>
+                          </a:solidFill>
+                        </a:defRPr>
+                      </a:pPr>
+                      <a:r>
+                        <a:t>3,806</a:t>
+                      </a:r>
+                    </a:p>
+                  </a:txBody>
+                  <a:tcPr/>
+                </a:tc>
+                <a:tc>
+                  <a:txBody>
+                    <a:bodyPr/>
+                    <a:lstStyle/>
+                    <a:p>
+                      <a:pPr algn="ctr">
+                        <a:defRPr sz="900" b="1">
+                          <a:solidFill>
+                            <a:srgbClr val="EE0033"/>
+                          </a:solidFill>
+                        </a:defRPr>
+                      </a:pPr>
+                      <a:r>
+                        <a:t>256.18 Tỷ</a:t>
+                      </a:r>
+                    </a:p>
+                  </a:txBody>
+                  <a:tcPr/>
+                </a:tc>
+                <a:tc>
+                  <a:txBody>
+                    <a:bodyPr/>
+                    <a:lstStyle/>
+                    <a:p>
+                      <a:pPr algn="ctr">
+                        <a:defRPr sz="900" b="0"/>
+                      </a:pPr>
+                      <a:r>
+                        <a:t>0/775</a:t>
+                      </a:r>
+                    </a:p>
+                  </a:txBody>
+                  <a:tcPr/>
+                </a:tc>
+                <a:tc>
+                  <a:txBody>
+                    <a:bodyPr/>
+                    <a:lstStyle/>
+                    <a:p>
+                      <a:pPr algn="ctr">
+                        <a:defRPr sz="900" b="0"/>
+                      </a:pPr>
+                      <a:r>
+                        <a:t>15/1.0K</a:t>
+                      </a:r>
+                    </a:p>
+                  </a:txBody>
+                  <a:tcPr/>
+                </a:tc>
+                <a:tc>
+                  <a:txBody>
+                    <a:bodyPr/>
+                    <a:lstStyle/>
+                    <a:p>
+                      <a:pPr algn="ctr">
+                        <a:defRPr sz="900" b="0"/>
+                      </a:pPr>
+                      <a:r>
+                        <a:t>55/1.0K</a:t>
+                      </a:r>
+                    </a:p>
+                  </a:txBody>
+                  <a:tcPr/>
+                </a:tc>
+                <a:tc>
+                  <a:txBody>
+                    <a:bodyPr/>
+                    <a:lstStyle/>
+                    <a:p>
+                      <a:pPr algn="ctr">
+                        <a:defRPr sz="900" b="0"/>
+                      </a:pPr>
+                      <a:r>
+                        <a:t>128/1.2K</a:t>
+                      </a:r>
+                    </a:p>
+                  </a:txBody>
+                  <a:tcPr/>
+                </a:tc>
+                <a:tc>
+                  <a:txBody>
+                    <a:bodyPr/>
+                    <a:lstStyle/>
+                    <a:p>
+                      <a:pPr algn="ctr">
+                        <a:defRPr sz="900" b="0"/>
+                      </a:pPr>
+                      <a:r>
+                        <a:t>189/1.3K</a:t>
+                      </a:r>
+                    </a:p>
+                  </a:txBody>
+                  <a:tcPr/>
+                </a:tc>
+                <a:tc>
+                  <a:txBody>
+                    <a:bodyPr/>
+                    <a:lstStyle/>
+                    <a:p>
+                      <a:pPr algn="ctr">
+                        <a:defRPr sz="900" b="0"/>
+                      </a:pPr>
+                      <a:r>
+                        <a:t>0/34</a:t>
+                      </a:r>
+                    </a:p>
+                  </a:txBody>
+                  <a:tcPr/>
+                </a:tc>
+                <a:tc>
+                  <a:txBody>
+                    <a:bodyPr/>
+                    <a:lstStyle/>
+                    <a:p>
+                      <a:pPr algn="ctr">
+                        <a:defRPr sz="900" b="1">
+                          <a:solidFill>
+                            <a:srgbClr val="E11D48"/>
+                          </a:solidFill>
+                        </a:defRPr>
+                      </a:pPr>
+                      <a:r>
+                        <a:t>7.0%</a:t>
+                      </a:r>
+                    </a:p>
+                  </a:txBody>
+                  <a:tcPr/>
+                </a:tc>
+              </a:tr>
+              <a:tr h="512064">
+                <a:tc>
+                  <a:txBody>
+                    <a:bodyPr/>
+                    <a:lstStyle/>
+                    <a:p>
+                      <a:pPr algn="ctr">
+                        <a:defRPr sz="900" b="0"/>
+                      </a:pPr>
+                      <a:r>
+                        <a:t>2</a:t>
+                      </a:r>
+                    </a:p>
+                  </a:txBody>
+                  <a:tcPr/>
+                </a:tc>
+                <a:tc>
+                  <a:txBody>
+                    <a:bodyPr/>
+                    <a:lstStyle/>
+                    <a:p>
+                      <a:pPr algn="l">
+                        <a:defRPr sz="900" b="0"/>
+                      </a:pPr>
+                      <a:r>
+                        <a:t>Công ty CP Viễn thông ACT</a:t>
+                      </a:r>
+                    </a:p>
+                  </a:txBody>
+                  <a:tcPr/>
+                </a:tc>
+                <a:tc>
+                  <a:txBody>
+                    <a:bodyPr/>
+                    <a:lstStyle/>
+                    <a:p>
+                      <a:pPr algn="ctr">
+                        <a:defRPr sz="900" b="0"/>
+                      </a:pPr>
+                      <a:r>
+                        <a:t>109</a:t>
+                      </a:r>
+                    </a:p>
+                  </a:txBody>
+                  <a:tcPr/>
+                </a:tc>
+                <a:tc>
+                  <a:txBody>
+                    <a:bodyPr/>
+                    <a:lstStyle/>
+                    <a:p>
+                      <a:pPr algn="ctr">
+                        <a:defRPr sz="900" b="1">
+                          <a:solidFill>
+                            <a:srgbClr val="EE0033"/>
+                          </a:solidFill>
+                        </a:defRPr>
+                      </a:pPr>
+                      <a:r>
+                        <a:t>3,499</a:t>
+                      </a:r>
+                    </a:p>
+                  </a:txBody>
+                  <a:tcPr/>
+                </a:tc>
+                <a:tc>
+                  <a:txBody>
+                    <a:bodyPr/>
+                    <a:lstStyle/>
+                    <a:p>
+                      <a:pPr algn="ctr">
+                        <a:defRPr sz="900" b="1">
+                          <a:solidFill>
+                            <a:srgbClr val="EE0033"/>
+                          </a:solidFill>
+                        </a:defRPr>
+                      </a:pPr>
+                      <a:r>
+                        <a:t>176.92 Tỷ</a:t>
+                      </a:r>
+                    </a:p>
+                  </a:txBody>
+                  <a:tcPr/>
+                </a:tc>
+                <a:tc>
+                  <a:txBody>
+                    <a:bodyPr/>
+                    <a:lstStyle/>
+                    <a:p>
+                      <a:pPr algn="ctr">
+                        <a:defRPr sz="900" b="0"/>
+                      </a:pPr>
+                      <a:r>
+                        <a:t>22/247</a:t>
+                      </a:r>
+                    </a:p>
+                  </a:txBody>
+                  <a:tcPr/>
+                </a:tc>
+                <a:tc>
+                  <a:txBody>
+                    <a:bodyPr/>
+                    <a:lstStyle/>
+                    <a:p>
+                      <a:pPr algn="ctr">
+                        <a:defRPr sz="900" b="0"/>
+                      </a:pPr>
+                      <a:r>
+                        <a:t>29/271</a:t>
+                      </a:r>
+                    </a:p>
+                  </a:txBody>
+                  <a:tcPr/>
+                </a:tc>
+                <a:tc>
+                  <a:txBody>
+                    <a:bodyPr/>
+                    <a:lstStyle/>
+                    <a:p>
+                      <a:pPr algn="ctr">
+                        <a:defRPr sz="900" b="0"/>
+                      </a:pPr>
+                      <a:r>
+                        <a:t>36/278</a:t>
+                      </a:r>
+                    </a:p>
+                  </a:txBody>
+                  <a:tcPr/>
+                </a:tc>
+                <a:tc>
+                  <a:txBody>
+                    <a:bodyPr/>
+                    <a:lstStyle/>
+                    <a:p>
+                      <a:pPr algn="ctr">
+                        <a:defRPr sz="900" b="0"/>
+                      </a:pPr>
+                      <a:r>
+                        <a:t>40/968</a:t>
+                      </a:r>
+                    </a:p>
+                  </a:txBody>
+                  <a:tcPr/>
+                </a:tc>
+                <a:tc>
+                  <a:txBody>
+                    <a:bodyPr/>
+                    <a:lstStyle/>
+                    <a:p>
+                      <a:pPr algn="ctr">
+                        <a:defRPr sz="900" b="0"/>
+                      </a:pPr>
+                      <a:r>
+                        <a:t>108/1.0K</a:t>
+                      </a:r>
+                    </a:p>
+                  </a:txBody>
+                  <a:tcPr/>
+                </a:tc>
+                <a:tc>
+                  <a:txBody>
+                    <a:bodyPr/>
+                    <a:lstStyle/>
+                    <a:p>
+                      <a:pPr algn="ctr">
+                        <a:defRPr sz="900" b="0"/>
+                      </a:pPr>
+                      <a:r>
+                        <a:t>0/1</a:t>
+                      </a:r>
+                    </a:p>
+                  </a:txBody>
+                  <a:tcPr/>
+                </a:tc>
+                <a:tc>
+                  <a:txBody>
+                    <a:bodyPr/>
+                    <a:lstStyle/>
+                    <a:p>
+                      <a:pPr algn="ctr">
+                        <a:defRPr sz="900" b="1">
+                          <a:solidFill>
+                            <a:srgbClr val="E11D48"/>
+                          </a:solidFill>
+                        </a:defRPr>
+                      </a:pPr>
+                      <a:r>
+                        <a:t>8.4%</a:t>
+                      </a:r>
+                    </a:p>
+                  </a:txBody>
+                  <a:tcPr/>
+                </a:tc>
+              </a:tr>
+              <a:tr h="512064">
+                <a:tc>
+                  <a:txBody>
+                    <a:bodyPr/>
+                    <a:lstStyle/>
+                    <a:p>
+                      <a:pPr algn="ctr">
+                        <a:defRPr sz="900" b="0"/>
+                      </a:pPr>
+                      <a:r>
+                        <a:t>3</a:t>
+                      </a:r>
+                    </a:p>
+                  </a:txBody>
+                  <a:tcPr/>
+                </a:tc>
+                <a:tc>
+                  <a:txBody>
+                    <a:bodyPr/>
+                    <a:lstStyle/>
+                    <a:p>
+                      <a:pPr algn="l">
+                        <a:defRPr sz="900" b="0"/>
+                      </a:pPr>
+                      <a:r>
+                        <a:t>Công ty CP Phát Triển Dịch Vụ TLI</a:t>
+                      </a:r>
+                    </a:p>
+                  </a:txBody>
+                  <a:tcPr/>
+                </a:tc>
+                <a:tc>
+                  <a:txBody>
+                    <a:bodyPr/>
+                    <a:lstStyle/>
+                    <a:p>
+                      <a:pPr algn="ctr">
+                        <a:defRPr sz="900" b="0"/>
+                      </a:pPr>
+                      <a:r>
+                        <a:t>1</a:t>
+                      </a:r>
+                    </a:p>
+                  </a:txBody>
+                  <a:tcPr/>
+                </a:tc>
+                <a:tc>
+                  <a:txBody>
+                    <a:bodyPr/>
+                    <a:lstStyle/>
+                    <a:p>
+                      <a:pPr algn="ctr">
+                        <a:defRPr sz="900" b="1">
+                          <a:solidFill>
+                            <a:srgbClr val="EE0033"/>
+                          </a:solidFill>
+                        </a:defRPr>
+                      </a:pPr>
+                      <a:r>
+                        <a:t>137</a:t>
+                      </a:r>
+                    </a:p>
+                  </a:txBody>
+                  <a:tcPr/>
+                </a:tc>
+                <a:tc>
+                  <a:txBody>
+                    <a:bodyPr/>
+                    <a:lstStyle/>
+                    <a:p>
+                      <a:pPr algn="ctr">
+                        <a:defRPr sz="900" b="1">
+                          <a:solidFill>
+                            <a:srgbClr val="EE0033"/>
+                          </a:solidFill>
+                        </a:defRPr>
+                      </a:pPr>
+                      <a:r>
+                        <a:t>43.77 Tỷ</a:t>
+                      </a:r>
+                    </a:p>
+                  </a:txBody>
+                  <a:tcPr/>
+                </a:tc>
+                <a:tc>
+                  <a:txBody>
+                    <a:bodyPr/>
+                    <a:lstStyle/>
+                    <a:p>
+                      <a:pPr algn="ctr">
+                        <a:defRPr sz="900" b="0"/>
+                      </a:pPr>
+                      <a:r>
+                        <a:t>-</a:t>
+                      </a:r>
+                    </a:p>
+                  </a:txBody>
+                  <a:tcPr/>
+                </a:tc>
+                <a:tc>
+                  <a:txBody>
+                    <a:bodyPr/>
+                    <a:lstStyle/>
+                    <a:p>
+                      <a:pPr algn="ctr">
+                        <a:defRPr sz="900" b="0"/>
+                      </a:pPr>
+                      <a:r>
+                        <a:t>-</a:t>
+                      </a:r>
+                    </a:p>
+                  </a:txBody>
+                  <a:tcPr/>
+                </a:tc>
+                <a:tc>
+                  <a:txBody>
+                    <a:bodyPr/>
+                    <a:lstStyle/>
+                    <a:p>
+                      <a:pPr algn="ctr">
+                        <a:defRPr sz="900" b="0"/>
+                      </a:pPr>
+                      <a:r>
+                        <a:t>-</a:t>
+                      </a:r>
+                    </a:p>
+                  </a:txBody>
+                  <a:tcPr/>
+                </a:tc>
+                <a:tc>
+                  <a:txBody>
+                    <a:bodyPr/>
+                    <a:lstStyle/>
+                    <a:p>
+                      <a:pPr algn="ctr">
+                        <a:defRPr sz="900" b="0"/>
+                      </a:pPr>
+                      <a:r>
+                        <a:t>0/55</a:t>
+                      </a:r>
+                    </a:p>
+                  </a:txBody>
+                  <a:tcPr/>
+                </a:tc>
+                <a:tc>
+                  <a:txBody>
+                    <a:bodyPr/>
+                    <a:lstStyle/>
+                    <a:p>
+                      <a:pPr algn="ctr">
+                        <a:defRPr sz="900" b="0"/>
+                      </a:pPr>
+                      <a:r>
+                        <a:t>0/55</a:t>
+                      </a:r>
+                    </a:p>
+                  </a:txBody>
+                  <a:tcPr/>
+                </a:tc>
+                <a:tc>
+                  <a:txBody>
+                    <a:bodyPr/>
+                    <a:lstStyle/>
+                    <a:p>
+                      <a:pPr algn="ctr">
+                        <a:defRPr sz="900" b="0"/>
+                      </a:pPr>
+                      <a:r>
+                        <a:t>-</a:t>
+                      </a:r>
+                    </a:p>
+                  </a:txBody>
+                  <a:tcPr/>
+                </a:tc>
+                <a:tc>
+                  <a:txBody>
+                    <a:bodyPr/>
+                    <a:lstStyle/>
+                    <a:p>
+                      <a:pPr algn="ctr">
+                        <a:defRPr sz="900" b="1">
+                          <a:solidFill>
+                            <a:srgbClr val="E11D48"/>
+                          </a:solidFill>
+                        </a:defRPr>
+                      </a:pPr>
+                      <a:r>
+                        <a:t>0.0%</a:t>
+                      </a:r>
+                    </a:p>
+                  </a:txBody>
+                  <a:tcPr/>
+                </a:tc>
+              </a:tr>
+              <a:tr h="512064">
+                <a:tc>
+                  <a:txBody>
+                    <a:bodyPr/>
+                    <a:lstStyle/>
+                    <a:p>
+                      <a:pPr algn="ctr">
+                        <a:defRPr sz="900" b="0"/>
+                      </a:pPr>
+                      <a:r>
+                        <a:t>4</a:t>
+                      </a:r>
+                    </a:p>
+                  </a:txBody>
+                  <a:tcPr/>
+                </a:tc>
+                <a:tc>
+                  <a:txBody>
+                    <a:bodyPr/>
+                    <a:lstStyle/>
+                    <a:p>
+                      <a:pPr algn="l">
+                        <a:defRPr sz="900" b="0"/>
+                      </a:pPr>
+                      <a:r>
+                        <a:t>Công ty TNHH Samaki Đông Dương</a:t>
+                      </a:r>
+                    </a:p>
+                  </a:txBody>
+                  <a:tcPr/>
+                </a:tc>
+                <a:tc>
+                  <a:txBody>
+                    <a:bodyPr/>
+                    <a:lstStyle/>
+                    <a:p>
+                      <a:pPr algn="ctr">
+                        <a:defRPr sz="900" b="0"/>
+                      </a:pPr>
+                      <a:r>
+                        <a:t>1</a:t>
+                      </a:r>
+                    </a:p>
+                  </a:txBody>
+                  <a:tcPr/>
+                </a:tc>
+                <a:tc>
+                  <a:txBody>
+                    <a:bodyPr/>
+                    <a:lstStyle/>
+                    <a:p>
+                      <a:pPr algn="ctr">
+                        <a:defRPr sz="900" b="1">
+                          <a:solidFill>
+                            <a:srgbClr val="EE0033"/>
+                          </a:solidFill>
+                        </a:defRPr>
+                      </a:pPr>
+                      <a:r>
+                        <a:t>72</a:t>
+                      </a:r>
+                    </a:p>
+                  </a:txBody>
+                  <a:tcPr/>
+                </a:tc>
+                <a:tc>
+                  <a:txBody>
+                    <a:bodyPr/>
+                    <a:lstStyle/>
+                    <a:p>
+                      <a:pPr algn="ctr">
+                        <a:defRPr sz="900" b="1">
+                          <a:solidFill>
+                            <a:srgbClr val="EE0033"/>
+                          </a:solidFill>
+                        </a:defRPr>
+                      </a:pPr>
+                      <a:r>
+                        <a:t>28.21 Tỷ</a:t>
+                      </a:r>
+                    </a:p>
+                  </a:txBody>
+                  <a:tcPr/>
+                </a:tc>
+                <a:tc>
+                  <a:txBody>
+                    <a:bodyPr/>
+                    <a:lstStyle/>
+                    <a:p>
+                      <a:pPr algn="ctr">
+                        <a:defRPr sz="900" b="0"/>
+                      </a:pPr>
+                      <a:r>
+                        <a:t>-</a:t>
+                      </a:r>
+                    </a:p>
+                  </a:txBody>
+                  <a:tcPr/>
+                </a:tc>
+                <a:tc>
+                  <a:txBody>
+                    <a:bodyPr/>
+                    <a:lstStyle/>
+                    <a:p>
+                      <a:pPr algn="ctr">
+                        <a:defRPr sz="900" b="0"/>
+                      </a:pPr>
+                      <a:r>
+                        <a:t>-</a:t>
+                      </a:r>
+                    </a:p>
+                  </a:txBody>
+                  <a:tcPr/>
+                </a:tc>
+                <a:tc>
+                  <a:txBody>
+                    <a:bodyPr/>
+                    <a:lstStyle/>
+                    <a:p>
+                      <a:pPr algn="ctr">
+                        <a:defRPr sz="900" b="0"/>
+                      </a:pPr>
+                      <a:r>
+                        <a:t>-</a:t>
+                      </a:r>
+                    </a:p>
+                  </a:txBody>
+                  <a:tcPr/>
+                </a:tc>
+                <a:tc>
+                  <a:txBody>
+                    <a:bodyPr/>
+                    <a:lstStyle/>
+                    <a:p>
+                      <a:pPr algn="ctr">
+                        <a:defRPr sz="900" b="0"/>
+                      </a:pPr>
+                      <a:r>
+                        <a:t>2/54</a:t>
+                      </a:r>
+                    </a:p>
+                  </a:txBody>
+                  <a:tcPr/>
+                </a:tc>
+                <a:tc>
+                  <a:txBody>
+                    <a:bodyPr/>
+                    <a:lstStyle/>
+                    <a:p>
+                      <a:pPr algn="ctr">
+                        <a:defRPr sz="900" b="0"/>
+                      </a:pPr>
+                      <a:r>
+                        <a:t>2/54</a:t>
+                      </a:r>
+                    </a:p>
+                  </a:txBody>
+                  <a:tcPr/>
+                </a:tc>
+                <a:tc>
+                  <a:txBody>
+                    <a:bodyPr/>
+                    <a:lstStyle/>
+                    <a:p>
+                      <a:pPr algn="ctr">
+                        <a:defRPr sz="900" b="0"/>
+                      </a:pPr>
+                      <a:r>
+                        <a:t>-</a:t>
+                      </a:r>
+                    </a:p>
+                  </a:txBody>
+                  <a:tcPr/>
+                </a:tc>
+                <a:tc>
+                  <a:txBody>
+                    <a:bodyPr/>
+                    <a:lstStyle/>
+                    <a:p>
+                      <a:pPr algn="ctr">
+                        <a:defRPr sz="900" b="1">
+                          <a:solidFill>
+                            <a:srgbClr val="E11D48"/>
+                          </a:solidFill>
+                        </a:defRPr>
+                      </a:pPr>
+                      <a:r>
+                        <a:t>3.7%</a:t>
+                      </a:r>
+                    </a:p>
+                  </a:txBody>
+                  <a:tcPr/>
+                </a:tc>
+              </a:tr>
+              <a:tr h="512064">
+                <a:tc>
+                  <a:txBody>
+                    <a:bodyPr/>
+                    <a:lstStyle/>
+                    <a:p>
+                      <a:pPr algn="ctr">
+                        <a:defRPr sz="900" b="0"/>
+                      </a:pPr>
+                      <a:r>
+                        <a:t>5</a:t>
+                      </a:r>
+                    </a:p>
+                  </a:txBody>
+                  <a:tcPr/>
+                </a:tc>
+                <a:tc>
+                  <a:txBody>
+                    <a:bodyPr/>
+                    <a:lstStyle/>
+                    <a:p>
+                      <a:pPr algn="l">
+                        <a:defRPr sz="900" b="0"/>
+                      </a:pPr>
+                      <a:r>
+                        <a:t>Công Ty TNHH TMDV KT VT An Phát</a:t>
+                      </a:r>
+                    </a:p>
+                  </a:txBody>
+                  <a:tcPr/>
+                </a:tc>
+                <a:tc>
+                  <a:txBody>
+                    <a:bodyPr/>
+                    <a:lstStyle/>
+                    <a:p>
+                      <a:pPr algn="ctr">
+                        <a:defRPr sz="900" b="0"/>
+                      </a:pPr>
+                      <a:r>
+                        <a:t>12</a:t>
+                      </a:r>
+                    </a:p>
+                  </a:txBody>
+                  <a:tcPr/>
+                </a:tc>
+                <a:tc>
+                  <a:txBody>
+                    <a:bodyPr/>
+                    <a:lstStyle/>
+                    <a:p>
+                      <a:pPr algn="ctr">
+                        <a:defRPr sz="900" b="1">
+                          <a:solidFill>
+                            <a:srgbClr val="EE0033"/>
+                          </a:solidFill>
+                        </a:defRPr>
+                      </a:pPr>
+                      <a:r>
+                        <a:t>1,868</a:t>
+                      </a:r>
+                    </a:p>
+                  </a:txBody>
+                  <a:tcPr/>
+                </a:tc>
+                <a:tc>
+                  <a:txBody>
+                    <a:bodyPr/>
+                    <a:lstStyle/>
+                    <a:p>
+                      <a:pPr algn="ctr">
+                        <a:defRPr sz="900" b="1">
+                          <a:solidFill>
+                            <a:srgbClr val="EE0033"/>
+                          </a:solidFill>
+                        </a:defRPr>
+                      </a:pPr>
+                      <a:r>
+                        <a:t>18.35 Tỷ</a:t>
+                      </a:r>
+                    </a:p>
+                  </a:txBody>
+                  <a:tcPr/>
+                </a:tc>
+                <a:tc>
+                  <a:txBody>
+                    <a:bodyPr/>
+                    <a:lstStyle/>
+                    <a:p>
+                      <a:pPr algn="ctr">
+                        <a:defRPr sz="900" b="0"/>
+                      </a:pPr>
+                      <a:r>
+                        <a:t>4/239</a:t>
+                      </a:r>
+                    </a:p>
+                  </a:txBody>
+                  <a:tcPr/>
+                </a:tc>
+                <a:tc>
+                  <a:txBody>
+                    <a:bodyPr/>
+                    <a:lstStyle/>
+                    <a:p>
+                      <a:pPr algn="ctr">
+                        <a:defRPr sz="900" b="0"/>
+                      </a:pPr>
+                      <a:r>
+                        <a:t>6/588</a:t>
+                      </a:r>
+                    </a:p>
+                  </a:txBody>
+                  <a:tcPr/>
+                </a:tc>
+                <a:tc>
+                  <a:txBody>
+                    <a:bodyPr/>
+                    <a:lstStyle/>
+                    <a:p>
+                      <a:pPr algn="ctr">
+                        <a:defRPr sz="900" b="0"/>
+                      </a:pPr>
+                      <a:r>
+                        <a:t>9/591</a:t>
+                      </a:r>
+                    </a:p>
+                  </a:txBody>
+                  <a:tcPr/>
+                </a:tc>
+                <a:tc>
+                  <a:txBody>
+                    <a:bodyPr/>
+                    <a:lstStyle/>
+                    <a:p>
+                      <a:pPr algn="ctr">
+                        <a:defRPr sz="900" b="0"/>
+                      </a:pPr>
+                      <a:r>
+                        <a:t>5/222</a:t>
+                      </a:r>
+                    </a:p>
+                  </a:txBody>
+                  <a:tcPr/>
+                </a:tc>
+                <a:tc>
+                  <a:txBody>
+                    <a:bodyPr/>
+                    <a:lstStyle/>
+                    <a:p>
+                      <a:pPr algn="ctr">
+                        <a:defRPr sz="900" b="0"/>
+                      </a:pPr>
+                      <a:r>
+                        <a:t>18/234</a:t>
+                      </a:r>
+                    </a:p>
+                  </a:txBody>
+                  <a:tcPr/>
+                </a:tc>
+                <a:tc>
+                  <a:txBody>
+                    <a:bodyPr/>
+                    <a:lstStyle/>
+                    <a:p>
+                      <a:pPr algn="ctr">
+                        <a:defRPr sz="900" b="0"/>
+                      </a:pPr>
+                      <a:r>
+                        <a:t>0/1</a:t>
+                      </a:r>
+                    </a:p>
+                  </a:txBody>
+                  <a:tcPr/>
+                </a:tc>
+                <a:tc>
+                  <a:txBody>
+                    <a:bodyPr/>
+                    <a:lstStyle/>
+                    <a:p>
+                      <a:pPr algn="ctr">
+                        <a:defRPr sz="900" b="1">
+                          <a:solidFill>
+                            <a:srgbClr val="E11D48"/>
+                          </a:solidFill>
+                        </a:defRPr>
+                      </a:pPr>
+                      <a:r>
+                        <a:t>2.2%</a:t>
+                      </a:r>
+                    </a:p>
+                  </a:txBody>
+                  <a:tcPr/>
+                </a:tc>
+              </a:tr>
+              <a:tr h="512064">
+                <a:tc>
+                  <a:txBody>
+                    <a:bodyPr/>
+                    <a:lstStyle/>
+                    <a:p>
+                      <a:pPr algn="ctr">
+                        <a:defRPr sz="900" b="0"/>
+                      </a:pPr>
+                      <a:r>
+                        <a:t>6</a:t>
+                      </a:r>
+                    </a:p>
+                  </a:txBody>
+                  <a:tcPr/>
+                </a:tc>
+                <a:tc>
+                  <a:txBody>
+                    <a:bodyPr/>
+                    <a:lstStyle/>
+                    <a:p>
+                      <a:pPr algn="l">
+                        <a:defRPr sz="900" b="0"/>
+                      </a:pPr>
+                      <a:r>
+                        <a:t>Cty TNHH TM &amp; VT Hồng Quang</a:t>
+                      </a:r>
+                    </a:p>
+                  </a:txBody>
+                  <a:tcPr/>
+                </a:tc>
+                <a:tc>
+                  <a:txBody>
+                    <a:bodyPr/>
+                    <a:lstStyle/>
+                    <a:p>
+                      <a:pPr algn="ctr">
+                        <a:defRPr sz="900" b="0"/>
+                      </a:pPr>
+                      <a:r>
+                        <a:t>1</a:t>
+                      </a:r>
+                    </a:p>
+                  </a:txBody>
+                  <a:tcPr/>
+                </a:tc>
+                <a:tc>
+                  <a:txBody>
+                    <a:bodyPr/>
+                    <a:lstStyle/>
+                    <a:p>
+                      <a:pPr algn="ctr">
+                        <a:defRPr sz="900" b="1">
+                          <a:solidFill>
+                            <a:srgbClr val="EE0033"/>
+                          </a:solidFill>
+                        </a:defRPr>
+                      </a:pPr>
+                      <a:r>
+                        <a:t>48</a:t>
+                      </a:r>
+                    </a:p>
+                  </a:txBody>
+                  <a:tcPr/>
+                </a:tc>
+                <a:tc>
+                  <a:txBody>
+                    <a:bodyPr/>
+                    <a:lstStyle/>
+                    <a:p>
+                      <a:pPr algn="ctr">
+                        <a:defRPr sz="900" b="1">
+                          <a:solidFill>
+                            <a:srgbClr val="EE0033"/>
+                          </a:solidFill>
+                        </a:defRPr>
+                      </a:pPr>
+                      <a:r>
+                        <a:t>17.17 Tỷ</a:t>
+                      </a:r>
+                    </a:p>
+                  </a:txBody>
+                  <a:tcPr/>
+                </a:tc>
+                <a:tc>
+                  <a:txBody>
+                    <a:bodyPr/>
+                    <a:lstStyle/>
+                    <a:p>
+                      <a:pPr algn="ctr">
+                        <a:defRPr sz="900" b="0"/>
+                      </a:pPr>
+                      <a:r>
+                        <a:t>-</a:t>
+                      </a:r>
+                    </a:p>
+                  </a:txBody>
+                  <a:tcPr/>
+                </a:tc>
+                <a:tc>
+                  <a:txBody>
+                    <a:bodyPr/>
+                    <a:lstStyle/>
+                    <a:p>
+                      <a:pPr algn="ctr">
+                        <a:defRPr sz="900" b="0"/>
+                      </a:pPr>
+                      <a:r>
+                        <a:t>-</a:t>
+                      </a:r>
+                    </a:p>
+                  </a:txBody>
+                  <a:tcPr/>
+                </a:tc>
+                <a:tc>
+                  <a:txBody>
+                    <a:bodyPr/>
+                    <a:lstStyle/>
+                    <a:p>
+                      <a:pPr algn="ctr">
+                        <a:defRPr sz="900" b="0"/>
+                      </a:pPr>
+                      <a:r>
+                        <a:t>-</a:t>
+                      </a:r>
+                    </a:p>
+                  </a:txBody>
+                  <a:tcPr/>
+                </a:tc>
+                <a:tc>
+                  <a:txBody>
+                    <a:bodyPr/>
+                    <a:lstStyle/>
+                    <a:p>
+                      <a:pPr algn="ctr">
+                        <a:defRPr sz="900" b="0"/>
+                      </a:pPr>
+                      <a:r>
+                        <a:t>0/45</a:t>
+                      </a:r>
+                    </a:p>
+                  </a:txBody>
+                  <a:tcPr/>
+                </a:tc>
+                <a:tc>
+                  <a:txBody>
+                    <a:bodyPr/>
+                    <a:lstStyle/>
+                    <a:p>
+                      <a:pPr algn="ctr">
+                        <a:defRPr sz="900" b="0"/>
+                      </a:pPr>
+                      <a:r>
+                        <a:t>0/45</a:t>
+                      </a:r>
+                    </a:p>
+                  </a:txBody>
+                  <a:tcPr/>
+                </a:tc>
+                <a:tc>
+                  <a:txBody>
+                    <a:bodyPr/>
+                    <a:lstStyle/>
+                    <a:p>
+                      <a:pPr algn="ctr">
+                        <a:defRPr sz="900" b="0"/>
+                      </a:pPr>
+                      <a:r>
+                        <a:t>-</a:t>
+                      </a:r>
+                    </a:p>
+                  </a:txBody>
+                  <a:tcPr/>
+                </a:tc>
+                <a:tc>
+                  <a:txBody>
+                    <a:bodyPr/>
+                    <a:lstStyle/>
+                    <a:p>
+                      <a:pPr algn="ctr">
+                        <a:defRPr sz="900" b="1">
+                          <a:solidFill>
+                            <a:srgbClr val="E11D48"/>
+                          </a:solidFill>
+                        </a:defRPr>
+                      </a:pPr>
+                      <a:r>
+                        <a:t>0.0%</a:t>
+                      </a:r>
+                    </a:p>
+                  </a:txBody>
+                  <a:tcPr/>
+                </a:tc>
+              </a:tr>
+              <a:tr h="512064">
+                <a:tc>
+                  <a:txBody>
+                    <a:bodyPr/>
+                    <a:lstStyle/>
+                    <a:p>
+                      <a:pPr algn="ctr">
+                        <a:defRPr sz="900" b="0"/>
+                      </a:pPr>
+                      <a:r>
+                        <a:t>7</a:t>
+                      </a:r>
+                    </a:p>
+                  </a:txBody>
+                  <a:tcPr/>
+                </a:tc>
+                <a:tc>
+                  <a:txBody>
+                    <a:bodyPr/>
+                    <a:lstStyle/>
+                    <a:p>
+                      <a:pPr algn="l">
+                        <a:defRPr sz="900" b="0"/>
+                      </a:pPr>
+                      <a:r>
+                        <a:t>Phạm Hùng Cường</a:t>
+                      </a:r>
+                    </a:p>
+                  </a:txBody>
+                  <a:tcPr/>
+                </a:tc>
+                <a:tc>
+                  <a:txBody>
+                    <a:bodyPr/>
+                    <a:lstStyle/>
+                    <a:p>
+                      <a:pPr algn="ctr">
+                        <a:defRPr sz="900" b="0"/>
+                      </a:pPr>
+                      <a:r>
+                        <a:t>1</a:t>
+                      </a:r>
+                    </a:p>
+                  </a:txBody>
+                  <a:tcPr/>
+                </a:tc>
+                <a:tc>
+                  <a:txBody>
+                    <a:bodyPr/>
+                    <a:lstStyle/>
+                    <a:p>
+                      <a:pPr algn="ctr">
+                        <a:defRPr sz="900" b="1">
+                          <a:solidFill>
+                            <a:srgbClr val="EE0033"/>
+                          </a:solidFill>
+                        </a:defRPr>
+                      </a:pPr>
+                      <a:r>
+                        <a:t>53</a:t>
+                      </a:r>
+                    </a:p>
+                  </a:txBody>
+                  <a:tcPr/>
+                </a:tc>
+                <a:tc>
+                  <a:txBody>
+                    <a:bodyPr/>
+                    <a:lstStyle/>
+                    <a:p>
+                      <a:pPr algn="ctr">
+                        <a:defRPr sz="900" b="1">
+                          <a:solidFill>
+                            <a:srgbClr val="EE0033"/>
+                          </a:solidFill>
+                        </a:defRPr>
+                      </a:pPr>
+                      <a:r>
+                        <a:t>11.95 Tỷ</a:t>
+                      </a:r>
+                    </a:p>
+                  </a:txBody>
+                  <a:tcPr/>
+                </a:tc>
+                <a:tc>
+                  <a:txBody>
+                    <a:bodyPr/>
+                    <a:lstStyle/>
+                    <a:p>
+                      <a:pPr algn="ctr">
+                        <a:defRPr sz="900" b="0"/>
+                      </a:pPr>
+                      <a:r>
+                        <a:t>0/16</a:t>
+                      </a:r>
+                    </a:p>
+                  </a:txBody>
+                  <a:tcPr/>
+                </a:tc>
+                <a:tc>
+                  <a:txBody>
+                    <a:bodyPr/>
+                    <a:lstStyle/>
+                    <a:p>
+                      <a:pPr algn="ctr">
+                        <a:defRPr sz="900" b="0"/>
+                      </a:pPr>
+                      <a:r>
+                        <a:t>0/1</a:t>
+                      </a:r>
+                    </a:p>
+                  </a:txBody>
+                  <a:tcPr/>
+                </a:tc>
+                <a:tc>
+                  <a:txBody>
+                    <a:bodyPr/>
+                    <a:lstStyle/>
+                    <a:p>
+                      <a:pPr algn="ctr">
+                        <a:defRPr sz="900" b="0"/>
+                      </a:pPr>
+                      <a:r>
+                        <a:t>0/1</a:t>
+                      </a:r>
+                    </a:p>
+                  </a:txBody>
+                  <a:tcPr/>
+                </a:tc>
+                <a:tc>
+                  <a:txBody>
+                    <a:bodyPr/>
+                    <a:lstStyle/>
+                    <a:p>
+                      <a:pPr algn="ctr">
+                        <a:defRPr sz="900" b="0"/>
+                      </a:pPr>
+                      <a:r>
+                        <a:t>0/25</a:t>
+                      </a:r>
+                    </a:p>
+                  </a:txBody>
+                  <a:tcPr/>
+                </a:tc>
+                <a:tc>
+                  <a:txBody>
+                    <a:bodyPr/>
+                    <a:lstStyle/>
+                    <a:p>
+                      <a:pPr algn="ctr">
+                        <a:defRPr sz="900" b="0"/>
+                      </a:pPr>
+                      <a:r>
+                        <a:t>0/25</a:t>
+                      </a:r>
+                    </a:p>
+                  </a:txBody>
+                  <a:tcPr/>
+                </a:tc>
+                <a:tc>
+                  <a:txBody>
+                    <a:bodyPr/>
+                    <a:lstStyle/>
+                    <a:p>
+                      <a:pPr algn="ctr">
+                        <a:defRPr sz="900" b="0"/>
+                      </a:pPr>
+                      <a:r>
+                        <a:t>-</a:t>
+                      </a:r>
+                    </a:p>
+                  </a:txBody>
+                  <a:tcPr/>
+                </a:tc>
+                <a:tc>
+                  <a:txBody>
+                    <a:bodyPr/>
+                    <a:lstStyle/>
+                    <a:p>
+                      <a:pPr algn="ctr">
+                        <a:defRPr sz="900" b="1">
+                          <a:solidFill>
+                            <a:srgbClr val="E11D48"/>
+                          </a:solidFill>
+                        </a:defRPr>
+                      </a:pPr>
+                      <a:r>
+                        <a:t>0.0%</a:t>
+                      </a:r>
+                    </a:p>
+                  </a:txBody>
+                  <a:tcPr/>
+                </a:tc>
+              </a:tr>
+              <a:tr h="512064">
+                <a:tc>
+                  <a:txBody>
+                    <a:bodyPr/>
+                    <a:lstStyle/>
+                    <a:p>
+                      <a:pPr algn="ctr">
+                        <a:defRPr sz="900" b="0"/>
+                      </a:pPr>
+                      <a:r>
+                        <a:t>8</a:t>
+                      </a:r>
+                    </a:p>
+                  </a:txBody>
+                  <a:tcPr/>
+                </a:tc>
+                <a:tc>
+                  <a:txBody>
+                    <a:bodyPr/>
+                    <a:lstStyle/>
+                    <a:p>
+                      <a:pPr algn="l">
+                        <a:defRPr sz="900" b="0"/>
+                      </a:pPr>
+                      <a:r>
+                        <a:t>Công ty Cổ Phần Xây Dựng Vũng Tàu</a:t>
+                      </a:r>
+                    </a:p>
+                  </a:txBody>
+                  <a:tcPr/>
+                </a:tc>
+                <a:tc>
+                  <a:txBody>
+                    <a:bodyPr/>
+                    <a:lstStyle/>
+                    <a:p>
+                      <a:pPr algn="ctr">
+                        <a:defRPr sz="900" b="0"/>
+                      </a:pPr>
+                      <a:r>
+                        <a:t>12</a:t>
+                      </a:r>
+                    </a:p>
+                  </a:txBody>
+                  <a:tcPr/>
+                </a:tc>
+                <a:tc>
+                  <a:txBody>
+                    <a:bodyPr/>
+                    <a:lstStyle/>
+                    <a:p>
+                      <a:pPr algn="ctr">
+                        <a:defRPr sz="900" b="1">
+                          <a:solidFill>
+                            <a:srgbClr val="EE0033"/>
+                          </a:solidFill>
+                        </a:defRPr>
+                      </a:pPr>
+                      <a:r>
+                        <a:t>442</a:t>
+                      </a:r>
+                    </a:p>
+                  </a:txBody>
+                  <a:tcPr/>
+                </a:tc>
+                <a:tc>
+                  <a:txBody>
+                    <a:bodyPr/>
+                    <a:lstStyle/>
+                    <a:p>
+                      <a:pPr algn="ctr">
+                        <a:defRPr sz="900" b="1">
+                          <a:solidFill>
+                            <a:srgbClr val="EE0033"/>
+                          </a:solidFill>
+                        </a:defRPr>
+                      </a:pPr>
+                      <a:r>
+                        <a:t>9.35 Tỷ</a:t>
+                      </a:r>
+                    </a:p>
+                  </a:txBody>
+                  <a:tcPr/>
+                </a:tc>
+                <a:tc>
+                  <a:txBody>
+                    <a:bodyPr/>
+                    <a:lstStyle/>
+                    <a:p>
+                      <a:pPr algn="ctr">
+                        <a:defRPr sz="900" b="0"/>
+                      </a:pPr>
+                      <a:r>
+                        <a:t>1/196</a:t>
+                      </a:r>
+                    </a:p>
+                  </a:txBody>
+                  <a:tcPr/>
+                </a:tc>
+                <a:tc>
+                  <a:txBody>
+                    <a:bodyPr/>
+                    <a:lstStyle/>
+                    <a:p>
+                      <a:pPr algn="ctr">
+                        <a:defRPr sz="900" b="0"/>
+                      </a:pPr>
+                      <a:r>
+                        <a:t>3/271</a:t>
+                      </a:r>
+                    </a:p>
+                  </a:txBody>
+                  <a:tcPr/>
+                </a:tc>
+                <a:tc>
+                  <a:txBody>
+                    <a:bodyPr/>
+                    <a:lstStyle/>
+                    <a:p>
+                      <a:pPr algn="ctr">
+                        <a:defRPr sz="900" b="0"/>
+                      </a:pPr>
+                      <a:r>
+                        <a:t>62/330</a:t>
+                      </a:r>
+                    </a:p>
+                  </a:txBody>
+                  <a:tcPr/>
+                </a:tc>
+                <a:tc>
+                  <a:txBody>
+                    <a:bodyPr/>
+                    <a:lstStyle/>
+                    <a:p>
+                      <a:pPr algn="ctr">
+                        <a:defRPr sz="900" b="0"/>
+                      </a:pPr>
+                      <a:r>
+                        <a:t>2/81</a:t>
+                      </a:r>
+                    </a:p>
+                  </a:txBody>
+                  <a:tcPr/>
+                </a:tc>
+                <a:tc>
+                  <a:txBody>
+                    <a:bodyPr/>
+                    <a:lstStyle/>
+                    <a:p>
+                      <a:pPr algn="ctr">
+                        <a:defRPr sz="900" b="0"/>
+                      </a:pPr>
+                      <a:r>
+                        <a:t>2/81</a:t>
+                      </a:r>
+                    </a:p>
+                  </a:txBody>
+                  <a:tcPr/>
+                </a:tc>
+                <a:tc>
+                  <a:txBody>
+                    <a:bodyPr/>
+                    <a:lstStyle/>
+                    <a:p>
+                      <a:pPr algn="ctr">
+                        <a:defRPr sz="900" b="0"/>
+                      </a:pPr>
+                      <a:r>
+                        <a:t>-</a:t>
+                      </a:r>
+                    </a:p>
+                  </a:txBody>
+                  <a:tcPr/>
+                </a:tc>
+                <a:tc>
+                  <a:txBody>
+                    <a:bodyPr/>
+                    <a:lstStyle/>
+                    <a:p>
+                      <a:pPr algn="ctr">
+                        <a:defRPr sz="900" b="1">
+                          <a:solidFill>
+                            <a:srgbClr val="E11D48"/>
+                          </a:solidFill>
+                        </a:defRPr>
+                      </a:pPr>
+                      <a:r>
+                        <a:t>7.3%</a:t>
+                      </a:r>
+                    </a:p>
+                  </a:txBody>
+                  <a:tcPr/>
+                </a:tc>
+              </a:tr>
+              <a:tr h="512064">
+                <a:tc>
+                  <a:txBody>
+                    <a:bodyPr/>
+                    <a:lstStyle/>
+                    <a:p>
+                      <a:pPr algn="ctr">
+                        <a:defRPr sz="1000" b="1"/>
+                      </a:pPr>
+                      <a:r>
+                        <a:t>--</a:t>
+                      </a:r>
+                    </a:p>
+                  </a:txBody>
+                  <a:tcPr>
+                    <a:solidFill>
+                      <a:srgbClr val="FEF2F2"/>
+                    </a:solidFill>
+                  </a:tcPr>
+                </a:tc>
+                <a:tc>
+                  <a:txBody>
+                    <a:bodyPr/>
+                    <a:lstStyle/>
+                    <a:p>
+                      <a:pPr algn="l">
+                        <a:defRPr sz="1000" b="1"/>
+                      </a:pPr>
+                      <a:r>
+                        <a:t>TỔNG TOP 8 ĐỐI TÁC TRỌNG ĐIỂM</a:t>
+                      </a:r>
+                    </a:p>
+                  </a:txBody>
+                  <a:tcPr>
+                    <a:solidFill>
+                      <a:srgbClr val="FEF2F2"/>
+                    </a:solidFill>
+                  </a:tcPr>
+                </a:tc>
+                <a:tc>
+                  <a:txBody>
+                    <a:bodyPr/>
+                    <a:lstStyle/>
+                    <a:p>
+                      <a:pPr algn="ctr">
+                        <a:defRPr sz="1000" b="1"/>
+                      </a:pPr>
+                      <a:r>
+                        <a:t>338</a:t>
+                      </a:r>
+                    </a:p>
+                  </a:txBody>
+                  <a:tcPr>
+                    <a:solidFill>
+                      <a:srgbClr val="FEF2F2"/>
+                    </a:solidFill>
+                  </a:tcPr>
                 </a:tc>
                 <a:tc>
                   <a:txBody>
@@ -4799,11 +6420,15 @@
                         </a:defRPr>
                       </a:pPr>
                       <a:r>
-                        <a:t>3,806</a:t>
-                      </a:r>
-                    </a:p>
-                  </a:txBody>
-                  <a:tcPr/>
+                        <a:t>9,895</a:t>
+                      </a:r>
+                    </a:p>
+                  </a:txBody>
+                  <a:tcPr>
+                    <a:solidFill>
+                      <a:srgbClr val="FEF2F2"/>
+                    </a:solidFill>
+                  </a:tcPr>
                 </a:tc>
                 <a:tc>
                   <a:txBody>
@@ -4818,1148 +6443,7 @@
                         </a:defRPr>
                       </a:pPr>
                       <a:r>
-                        <a:t>256.18 Tỷ</a:t>
-                      </a:r>
-                    </a:p>
-                  </a:txBody>
-                  <a:tcPr/>
-                </a:tc>
-                <a:tc>
-                  <a:txBody>
-                    <a:bodyPr/>
-                    <a:lstStyle/>
-                    <a:p>
-                      <a:pPr algn="ctr">
-                        <a:defRPr sz="1000" b="0"/>
-                      </a:pPr>
-                      <a:r>
-                        <a:t>5,541</a:t>
-                      </a:r>
-                    </a:p>
-                  </a:txBody>
-                  <a:tcPr/>
-                </a:tc>
-                <a:tc>
-                  <a:txBody>
-                    <a:bodyPr/>
-                    <a:lstStyle/>
-                    <a:p>
-                      <a:pPr algn="ctr">
-                        <a:defRPr sz="1000" b="0">
-                          <a:solidFill>
-                            <a:srgbClr val="10B981"/>
-                          </a:solidFill>
-                        </a:defRPr>
-                      </a:pPr>
-                      <a:r>
-                        <a:t>387</a:t>
-                      </a:r>
-                    </a:p>
-                  </a:txBody>
-                  <a:tcPr/>
-                </a:tc>
-                <a:tc>
-                  <a:txBody>
-                    <a:bodyPr/>
-                    <a:lstStyle/>
-                    <a:p>
-                      <a:pPr algn="ctr">
-                        <a:defRPr sz="1000" b="1">
-                          <a:solidFill>
-                            <a:srgbClr val="E11D48"/>
-                          </a:solidFill>
-                        </a:defRPr>
-                      </a:pPr>
-                      <a:r>
-                        <a:t>7.0%</a:t>
-                      </a:r>
-                    </a:p>
-                  </a:txBody>
-                  <a:tcPr/>
-                </a:tc>
-              </a:tr>
-              <a:tr h="512064">
-                <a:tc>
-                  <a:txBody>
-                    <a:bodyPr/>
-                    <a:lstStyle/>
-                    <a:p>
-                      <a:pPr algn="ctr">
-                        <a:defRPr sz="1000" b="0"/>
-                      </a:pPr>
-                      <a:r>
-                        <a:t>2</a:t>
-                      </a:r>
-                    </a:p>
-                  </a:txBody>
-                  <a:tcPr/>
-                </a:tc>
-                <a:tc>
-                  <a:txBody>
-                    <a:bodyPr/>
-                    <a:lstStyle/>
-                    <a:p>
-                      <a:pPr algn="l">
-                        <a:defRPr sz="1000" b="0"/>
-                      </a:pPr>
-                      <a:r>
-                        <a:t>Công ty CP Viễn thông ACT</a:t>
-                      </a:r>
-                    </a:p>
-                  </a:txBody>
-                  <a:tcPr/>
-                </a:tc>
-                <a:tc>
-                  <a:txBody>
-                    <a:bodyPr/>
-                    <a:lstStyle/>
-                    <a:p>
-                      <a:pPr algn="ctr">
-                        <a:defRPr sz="1000" b="0"/>
-                      </a:pPr>
-                      <a:r>
-                        <a:t>109</a:t>
-                      </a:r>
-                    </a:p>
-                  </a:txBody>
-                  <a:tcPr/>
-                </a:tc>
-                <a:tc>
-                  <a:txBody>
-                    <a:bodyPr/>
-                    <a:lstStyle/>
-                    <a:p>
-                      <a:pPr algn="ctr">
-                        <a:defRPr sz="1000" b="0"/>
-                      </a:pPr>
-                      <a:r>
-                        <a:t>3,748</a:t>
-                      </a:r>
-                    </a:p>
-                  </a:txBody>
-                  <a:tcPr/>
-                </a:tc>
-                <a:tc>
-                  <a:txBody>
-                    <a:bodyPr/>
-                    <a:lstStyle/>
-                    <a:p>
-                      <a:pPr algn="ctr">
-                        <a:defRPr sz="1000" b="1">
-                          <a:solidFill>
-                            <a:srgbClr val="EE0033"/>
-                          </a:solidFill>
-                        </a:defRPr>
-                      </a:pPr>
-                      <a:r>
-                        <a:t>3,499</a:t>
-                      </a:r>
-                    </a:p>
-                  </a:txBody>
-                  <a:tcPr/>
-                </a:tc>
-                <a:tc>
-                  <a:txBody>
-                    <a:bodyPr/>
-                    <a:lstStyle/>
-                    <a:p>
-                      <a:pPr algn="ctr">
-                        <a:defRPr sz="1000" b="1">
-                          <a:solidFill>
-                            <a:srgbClr val="EE0033"/>
-                          </a:solidFill>
-                        </a:defRPr>
-                      </a:pPr>
-                      <a:r>
-                        <a:t>176.92 Tỷ</a:t>
-                      </a:r>
-                    </a:p>
-                  </a:txBody>
-                  <a:tcPr/>
-                </a:tc>
-                <a:tc>
-                  <a:txBody>
-                    <a:bodyPr/>
-                    <a:lstStyle/>
-                    <a:p>
-                      <a:pPr algn="ctr">
-                        <a:defRPr sz="1000" b="0"/>
-                      </a:pPr>
-                      <a:r>
-                        <a:t>2,801</a:t>
-                      </a:r>
-                    </a:p>
-                  </a:txBody>
-                  <a:tcPr/>
-                </a:tc>
-                <a:tc>
-                  <a:txBody>
-                    <a:bodyPr/>
-                    <a:lstStyle/>
-                    <a:p>
-                      <a:pPr algn="ctr">
-                        <a:defRPr sz="1000" b="0">
-                          <a:solidFill>
-                            <a:srgbClr val="10B981"/>
-                          </a:solidFill>
-                        </a:defRPr>
-                      </a:pPr>
-                      <a:r>
-                        <a:t>235</a:t>
-                      </a:r>
-                    </a:p>
-                  </a:txBody>
-                  <a:tcPr/>
-                </a:tc>
-                <a:tc>
-                  <a:txBody>
-                    <a:bodyPr/>
-                    <a:lstStyle/>
-                    <a:p>
-                      <a:pPr algn="ctr">
-                        <a:defRPr sz="1000" b="1">
-                          <a:solidFill>
-                            <a:srgbClr val="E11D48"/>
-                          </a:solidFill>
-                        </a:defRPr>
-                      </a:pPr>
-                      <a:r>
-                        <a:t>8.4%</a:t>
-                      </a:r>
-                    </a:p>
-                  </a:txBody>
-                  <a:tcPr/>
-                </a:tc>
-              </a:tr>
-              <a:tr h="512064">
-                <a:tc>
-                  <a:txBody>
-                    <a:bodyPr/>
-                    <a:lstStyle/>
-                    <a:p>
-                      <a:pPr algn="ctr">
-                        <a:defRPr sz="1000" b="0"/>
-                      </a:pPr>
-                      <a:r>
-                        <a:t>3</a:t>
-                      </a:r>
-                    </a:p>
-                  </a:txBody>
-                  <a:tcPr/>
-                </a:tc>
-                <a:tc>
-                  <a:txBody>
-                    <a:bodyPr/>
-                    <a:lstStyle/>
-                    <a:p>
-                      <a:pPr algn="l">
-                        <a:defRPr sz="1000" b="0"/>
-                      </a:pPr>
-                      <a:r>
-                        <a:t>Công ty CP Phát Triển Dịch Vụ TLI</a:t>
-                      </a:r>
-                    </a:p>
-                  </a:txBody>
-                  <a:tcPr/>
-                </a:tc>
-                <a:tc>
-                  <a:txBody>
-                    <a:bodyPr/>
-                    <a:lstStyle/>
-                    <a:p>
-                      <a:pPr algn="ctr">
-                        <a:defRPr sz="1000" b="0"/>
-                      </a:pPr>
-                      <a:r>
-                        <a:t>1</a:t>
-                      </a:r>
-                    </a:p>
-                  </a:txBody>
-                  <a:tcPr/>
-                </a:tc>
-                <a:tc>
-                  <a:txBody>
-                    <a:bodyPr/>
-                    <a:lstStyle/>
-                    <a:p>
-                      <a:pPr algn="ctr">
-                        <a:defRPr sz="1000" b="0"/>
-                      </a:pPr>
-                      <a:r>
-                        <a:t>137</a:t>
-                      </a:r>
-                    </a:p>
-                  </a:txBody>
-                  <a:tcPr/>
-                </a:tc>
-                <a:tc>
-                  <a:txBody>
-                    <a:bodyPr/>
-                    <a:lstStyle/>
-                    <a:p>
-                      <a:pPr algn="ctr">
-                        <a:defRPr sz="1000" b="1">
-                          <a:solidFill>
-                            <a:srgbClr val="EE0033"/>
-                          </a:solidFill>
-                        </a:defRPr>
-                      </a:pPr>
-                      <a:r>
-                        <a:t>137</a:t>
-                      </a:r>
-                    </a:p>
-                  </a:txBody>
-                  <a:tcPr/>
-                </a:tc>
-                <a:tc>
-                  <a:txBody>
-                    <a:bodyPr/>
-                    <a:lstStyle/>
-                    <a:p>
-                      <a:pPr algn="ctr">
-                        <a:defRPr sz="1000" b="1">
-                          <a:solidFill>
-                            <a:srgbClr val="EE0033"/>
-                          </a:solidFill>
-                        </a:defRPr>
-                      </a:pPr>
-                      <a:r>
-                        <a:t>43.77 Tỷ</a:t>
-                      </a:r>
-                    </a:p>
-                  </a:txBody>
-                  <a:tcPr/>
-                </a:tc>
-                <a:tc>
-                  <a:txBody>
-                    <a:bodyPr/>
-                    <a:lstStyle/>
-                    <a:p>
-                      <a:pPr algn="ctr">
-                        <a:defRPr sz="1000" b="0"/>
-                      </a:pPr>
-                      <a:r>
-                        <a:t>110</a:t>
-                      </a:r>
-                    </a:p>
-                  </a:txBody>
-                  <a:tcPr/>
-                </a:tc>
-                <a:tc>
-                  <a:txBody>
-                    <a:bodyPr/>
-                    <a:lstStyle/>
-                    <a:p>
-                      <a:pPr algn="ctr">
-                        <a:defRPr sz="1000" b="0">
-                          <a:solidFill>
-                            <a:srgbClr val="10B981"/>
-                          </a:solidFill>
-                        </a:defRPr>
-                      </a:pPr>
-                      <a:r>
-                        <a:t>0</a:t>
-                      </a:r>
-                    </a:p>
-                  </a:txBody>
-                  <a:tcPr/>
-                </a:tc>
-                <a:tc>
-                  <a:txBody>
-                    <a:bodyPr/>
-                    <a:lstStyle/>
-                    <a:p>
-                      <a:pPr algn="ctr">
-                        <a:defRPr sz="1000" b="1">
-                          <a:solidFill>
-                            <a:srgbClr val="E11D48"/>
-                          </a:solidFill>
-                        </a:defRPr>
-                      </a:pPr>
-                      <a:r>
-                        <a:t>0.0%</a:t>
-                      </a:r>
-                    </a:p>
-                  </a:txBody>
-                  <a:tcPr/>
-                </a:tc>
-              </a:tr>
-              <a:tr h="512064">
-                <a:tc>
-                  <a:txBody>
-                    <a:bodyPr/>
-                    <a:lstStyle/>
-                    <a:p>
-                      <a:pPr algn="ctr">
-                        <a:defRPr sz="1000" b="0"/>
-                      </a:pPr>
-                      <a:r>
-                        <a:t>4</a:t>
-                      </a:r>
-                    </a:p>
-                  </a:txBody>
-                  <a:tcPr/>
-                </a:tc>
-                <a:tc>
-                  <a:txBody>
-                    <a:bodyPr/>
-                    <a:lstStyle/>
-                    <a:p>
-                      <a:pPr algn="l">
-                        <a:defRPr sz="1000" b="0"/>
-                      </a:pPr>
-                      <a:r>
-                        <a:t>Công ty TNHH Samaki Đông Dương</a:t>
-                      </a:r>
-                    </a:p>
-                  </a:txBody>
-                  <a:tcPr/>
-                </a:tc>
-                <a:tc>
-                  <a:txBody>
-                    <a:bodyPr/>
-                    <a:lstStyle/>
-                    <a:p>
-                      <a:pPr algn="ctr">
-                        <a:defRPr sz="1000" b="0"/>
-                      </a:pPr>
-                      <a:r>
-                        <a:t>1</a:t>
-                      </a:r>
-                    </a:p>
-                  </a:txBody>
-                  <a:tcPr/>
-                </a:tc>
-                <a:tc>
-                  <a:txBody>
-                    <a:bodyPr/>
-                    <a:lstStyle/>
-                    <a:p>
-                      <a:pPr algn="ctr">
-                        <a:defRPr sz="1000" b="0"/>
-                      </a:pPr>
-                      <a:r>
-                        <a:t>74</a:t>
-                      </a:r>
-                    </a:p>
-                  </a:txBody>
-                  <a:tcPr/>
-                </a:tc>
-                <a:tc>
-                  <a:txBody>
-                    <a:bodyPr/>
-                    <a:lstStyle/>
-                    <a:p>
-                      <a:pPr algn="ctr">
-                        <a:defRPr sz="1000" b="1">
-                          <a:solidFill>
-                            <a:srgbClr val="EE0033"/>
-                          </a:solidFill>
-                        </a:defRPr>
-                      </a:pPr>
-                      <a:r>
-                        <a:t>72</a:t>
-                      </a:r>
-                    </a:p>
-                  </a:txBody>
-                  <a:tcPr/>
-                </a:tc>
-                <a:tc>
-                  <a:txBody>
-                    <a:bodyPr/>
-                    <a:lstStyle/>
-                    <a:p>
-                      <a:pPr algn="ctr">
-                        <a:defRPr sz="1000" b="1">
-                          <a:solidFill>
-                            <a:srgbClr val="EE0033"/>
-                          </a:solidFill>
-                        </a:defRPr>
-                      </a:pPr>
-                      <a:r>
-                        <a:t>28.21 Tỷ</a:t>
-                      </a:r>
-                    </a:p>
-                  </a:txBody>
-                  <a:tcPr/>
-                </a:tc>
-                <a:tc>
-                  <a:txBody>
-                    <a:bodyPr/>
-                    <a:lstStyle/>
-                    <a:p>
-                      <a:pPr algn="ctr">
-                        <a:defRPr sz="1000" b="0"/>
-                      </a:pPr>
-                      <a:r>
-                        <a:t>108</a:t>
-                      </a:r>
-                    </a:p>
-                  </a:txBody>
-                  <a:tcPr/>
-                </a:tc>
-                <a:tc>
-                  <a:txBody>
-                    <a:bodyPr/>
-                    <a:lstStyle/>
-                    <a:p>
-                      <a:pPr algn="ctr">
-                        <a:defRPr sz="1000" b="0">
-                          <a:solidFill>
-                            <a:srgbClr val="10B981"/>
-                          </a:solidFill>
-                        </a:defRPr>
-                      </a:pPr>
-                      <a:r>
-                        <a:t>4</a:t>
-                      </a:r>
-                    </a:p>
-                  </a:txBody>
-                  <a:tcPr/>
-                </a:tc>
-                <a:tc>
-                  <a:txBody>
-                    <a:bodyPr/>
-                    <a:lstStyle/>
-                    <a:p>
-                      <a:pPr algn="ctr">
-                        <a:defRPr sz="1000" b="1">
-                          <a:solidFill>
-                            <a:srgbClr val="E11D48"/>
-                          </a:solidFill>
-                        </a:defRPr>
-                      </a:pPr>
-                      <a:r>
-                        <a:t>3.7%</a:t>
-                      </a:r>
-                    </a:p>
-                  </a:txBody>
-                  <a:tcPr/>
-                </a:tc>
-              </a:tr>
-              <a:tr h="512064">
-                <a:tc>
-                  <a:txBody>
-                    <a:bodyPr/>
-                    <a:lstStyle/>
-                    <a:p>
-                      <a:pPr algn="ctr">
-                        <a:defRPr sz="1000" b="0"/>
-                      </a:pPr>
-                      <a:r>
-                        <a:t>5</a:t>
-                      </a:r>
-                    </a:p>
-                  </a:txBody>
-                  <a:tcPr/>
-                </a:tc>
-                <a:tc>
-                  <a:txBody>
-                    <a:bodyPr/>
-                    <a:lstStyle/>
-                    <a:p>
-                      <a:pPr algn="l">
-                        <a:defRPr sz="1000" b="0"/>
-                      </a:pPr>
-                      <a:r>
-                        <a:t>Công Ty TNHH TMDV KT VT An Phát</a:t>
-                      </a:r>
-                    </a:p>
-                  </a:txBody>
-                  <a:tcPr/>
-                </a:tc>
-                <a:tc>
-                  <a:txBody>
-                    <a:bodyPr/>
-                    <a:lstStyle/>
-                    <a:p>
-                      <a:pPr algn="ctr">
-                        <a:defRPr sz="1000" b="0"/>
-                      </a:pPr>
-                      <a:r>
-                        <a:t>12</a:t>
-                      </a:r>
-                    </a:p>
-                  </a:txBody>
-                  <a:tcPr/>
-                </a:tc>
-                <a:tc>
-                  <a:txBody>
-                    <a:bodyPr/>
-                    <a:lstStyle/>
-                    <a:p>
-                      <a:pPr algn="ctr">
-                        <a:defRPr sz="1000" b="0"/>
-                      </a:pPr>
-                      <a:r>
-                        <a:t>1,904</a:t>
-                      </a:r>
-                    </a:p>
-                  </a:txBody>
-                  <a:tcPr/>
-                </a:tc>
-                <a:tc>
-                  <a:txBody>
-                    <a:bodyPr/>
-                    <a:lstStyle/>
-                    <a:p>
-                      <a:pPr algn="ctr">
-                        <a:defRPr sz="1000" b="1">
-                          <a:solidFill>
-                            <a:srgbClr val="EE0033"/>
-                          </a:solidFill>
-                        </a:defRPr>
-                      </a:pPr>
-                      <a:r>
-                        <a:t>1,868</a:t>
-                      </a:r>
-                    </a:p>
-                  </a:txBody>
-                  <a:tcPr/>
-                </a:tc>
-                <a:tc>
-                  <a:txBody>
-                    <a:bodyPr/>
-                    <a:lstStyle/>
-                    <a:p>
-                      <a:pPr algn="ctr">
-                        <a:defRPr sz="1000" b="1">
-                          <a:solidFill>
-                            <a:srgbClr val="EE0033"/>
-                          </a:solidFill>
-                        </a:defRPr>
-                      </a:pPr>
-                      <a:r>
-                        <a:t>18.35 Tỷ</a:t>
-                      </a:r>
-                    </a:p>
-                  </a:txBody>
-                  <a:tcPr/>
-                </a:tc>
-                <a:tc>
-                  <a:txBody>
-                    <a:bodyPr/>
-                    <a:lstStyle/>
-                    <a:p>
-                      <a:pPr algn="ctr">
-                        <a:defRPr sz="1000" b="0"/>
-                      </a:pPr>
-                      <a:r>
-                        <a:t>1,875</a:t>
-                      </a:r>
-                    </a:p>
-                  </a:txBody>
-                  <a:tcPr/>
-                </a:tc>
-                <a:tc>
-                  <a:txBody>
-                    <a:bodyPr/>
-                    <a:lstStyle/>
-                    <a:p>
-                      <a:pPr algn="ctr">
-                        <a:defRPr sz="1000" b="0">
-                          <a:solidFill>
-                            <a:srgbClr val="10B981"/>
-                          </a:solidFill>
-                        </a:defRPr>
-                      </a:pPr>
-                      <a:r>
-                        <a:t>42</a:t>
-                      </a:r>
-                    </a:p>
-                  </a:txBody>
-                  <a:tcPr/>
-                </a:tc>
-                <a:tc>
-                  <a:txBody>
-                    <a:bodyPr/>
-                    <a:lstStyle/>
-                    <a:p>
-                      <a:pPr algn="ctr">
-                        <a:defRPr sz="1000" b="1">
-                          <a:solidFill>
-                            <a:srgbClr val="E11D48"/>
-                          </a:solidFill>
-                        </a:defRPr>
-                      </a:pPr>
-                      <a:r>
-                        <a:t>2.2%</a:t>
-                      </a:r>
-                    </a:p>
-                  </a:txBody>
-                  <a:tcPr/>
-                </a:tc>
-              </a:tr>
-              <a:tr h="512064">
-                <a:tc>
-                  <a:txBody>
-                    <a:bodyPr/>
-                    <a:lstStyle/>
-                    <a:p>
-                      <a:pPr algn="ctr">
-                        <a:defRPr sz="1000" b="0"/>
-                      </a:pPr>
-                      <a:r>
-                        <a:t>6</a:t>
-                      </a:r>
-                    </a:p>
-                  </a:txBody>
-                  <a:tcPr/>
-                </a:tc>
-                <a:tc>
-                  <a:txBody>
-                    <a:bodyPr/>
-                    <a:lstStyle/>
-                    <a:p>
-                      <a:pPr algn="l">
-                        <a:defRPr sz="1000" b="0"/>
-                      </a:pPr>
-                      <a:r>
-                        <a:t>Cty TNHH TM &amp; VT Hồng Quang</a:t>
-                      </a:r>
-                    </a:p>
-                  </a:txBody>
-                  <a:tcPr/>
-                </a:tc>
-                <a:tc>
-                  <a:txBody>
-                    <a:bodyPr/>
-                    <a:lstStyle/>
-                    <a:p>
-                      <a:pPr algn="ctr">
-                        <a:defRPr sz="1000" b="0"/>
-                      </a:pPr>
-                      <a:r>
-                        <a:t>1</a:t>
-                      </a:r>
-                    </a:p>
-                  </a:txBody>
-                  <a:tcPr/>
-                </a:tc>
-                <a:tc>
-                  <a:txBody>
-                    <a:bodyPr/>
-                    <a:lstStyle/>
-                    <a:p>
-                      <a:pPr algn="ctr">
-                        <a:defRPr sz="1000" b="0"/>
-                      </a:pPr>
-                      <a:r>
-                        <a:t>48</a:t>
-                      </a:r>
-                    </a:p>
-                  </a:txBody>
-                  <a:tcPr/>
-                </a:tc>
-                <a:tc>
-                  <a:txBody>
-                    <a:bodyPr/>
-                    <a:lstStyle/>
-                    <a:p>
-                      <a:pPr algn="ctr">
-                        <a:defRPr sz="1000" b="1">
-                          <a:solidFill>
-                            <a:srgbClr val="EE0033"/>
-                          </a:solidFill>
-                        </a:defRPr>
-                      </a:pPr>
-                      <a:r>
-                        <a:t>48</a:t>
-                      </a:r>
-                    </a:p>
-                  </a:txBody>
-                  <a:tcPr/>
-                </a:tc>
-                <a:tc>
-                  <a:txBody>
-                    <a:bodyPr/>
-                    <a:lstStyle/>
-                    <a:p>
-                      <a:pPr algn="ctr">
-                        <a:defRPr sz="1000" b="1">
-                          <a:solidFill>
-                            <a:srgbClr val="EE0033"/>
-                          </a:solidFill>
-                        </a:defRPr>
-                      </a:pPr>
-                      <a:r>
-                        <a:t>17.17 Tỷ</a:t>
-                      </a:r>
-                    </a:p>
-                  </a:txBody>
-                  <a:tcPr/>
-                </a:tc>
-                <a:tc>
-                  <a:txBody>
-                    <a:bodyPr/>
-                    <a:lstStyle/>
-                    <a:p>
-                      <a:pPr algn="ctr">
-                        <a:defRPr sz="1000" b="0"/>
-                      </a:pPr>
-                      <a:r>
-                        <a:t>90</a:t>
-                      </a:r>
-                    </a:p>
-                  </a:txBody>
-                  <a:tcPr/>
-                </a:tc>
-                <a:tc>
-                  <a:txBody>
-                    <a:bodyPr/>
-                    <a:lstStyle/>
-                    <a:p>
-                      <a:pPr algn="ctr">
-                        <a:defRPr sz="1000" b="0">
-                          <a:solidFill>
-                            <a:srgbClr val="10B981"/>
-                          </a:solidFill>
-                        </a:defRPr>
-                      </a:pPr>
-                      <a:r>
-                        <a:t>0</a:t>
-                      </a:r>
-                    </a:p>
-                  </a:txBody>
-                  <a:tcPr/>
-                </a:tc>
-                <a:tc>
-                  <a:txBody>
-                    <a:bodyPr/>
-                    <a:lstStyle/>
-                    <a:p>
-                      <a:pPr algn="ctr">
-                        <a:defRPr sz="1000" b="1">
-                          <a:solidFill>
-                            <a:srgbClr val="E11D48"/>
-                          </a:solidFill>
-                        </a:defRPr>
-                      </a:pPr>
-                      <a:r>
-                        <a:t>0.0%</a:t>
-                      </a:r>
-                    </a:p>
-                  </a:txBody>
-                  <a:tcPr/>
-                </a:tc>
-              </a:tr>
-              <a:tr h="512064">
-                <a:tc>
-                  <a:txBody>
-                    <a:bodyPr/>
-                    <a:lstStyle/>
-                    <a:p>
-                      <a:pPr algn="ctr">
-                        <a:defRPr sz="1000" b="0"/>
-                      </a:pPr>
-                      <a:r>
-                        <a:t>7</a:t>
-                      </a:r>
-                    </a:p>
-                  </a:txBody>
-                  <a:tcPr/>
-                </a:tc>
-                <a:tc>
-                  <a:txBody>
-                    <a:bodyPr/>
-                    <a:lstStyle/>
-                    <a:p>
-                      <a:pPr algn="l">
-                        <a:defRPr sz="1000" b="0"/>
-                      </a:pPr>
-                      <a:r>
-                        <a:t>Phạm Hùng Cường</a:t>
-                      </a:r>
-                    </a:p>
-                  </a:txBody>
-                  <a:tcPr/>
-                </a:tc>
-                <a:tc>
-                  <a:txBody>
-                    <a:bodyPr/>
-                    <a:lstStyle/>
-                    <a:p>
-                      <a:pPr algn="ctr">
-                        <a:defRPr sz="1000" b="0"/>
-                      </a:pPr>
-                      <a:r>
-                        <a:t>1</a:t>
-                      </a:r>
-                    </a:p>
-                  </a:txBody>
-                  <a:tcPr/>
-                </a:tc>
-                <a:tc>
-                  <a:txBody>
-                    <a:bodyPr/>
-                    <a:lstStyle/>
-                    <a:p>
-                      <a:pPr algn="ctr">
-                        <a:defRPr sz="1000" b="0"/>
-                      </a:pPr>
-                      <a:r>
-                        <a:t>53</a:t>
-                      </a:r>
-                    </a:p>
-                  </a:txBody>
-                  <a:tcPr/>
-                </a:tc>
-                <a:tc>
-                  <a:txBody>
-                    <a:bodyPr/>
-                    <a:lstStyle/>
-                    <a:p>
-                      <a:pPr algn="ctr">
-                        <a:defRPr sz="1000" b="1">
-                          <a:solidFill>
-                            <a:srgbClr val="EE0033"/>
-                          </a:solidFill>
-                        </a:defRPr>
-                      </a:pPr>
-                      <a:r>
-                        <a:t>53</a:t>
-                      </a:r>
-                    </a:p>
-                  </a:txBody>
-                  <a:tcPr/>
-                </a:tc>
-                <a:tc>
-                  <a:txBody>
-                    <a:bodyPr/>
-                    <a:lstStyle/>
-                    <a:p>
-                      <a:pPr algn="ctr">
-                        <a:defRPr sz="1000" b="1">
-                          <a:solidFill>
-                            <a:srgbClr val="EE0033"/>
-                          </a:solidFill>
-                        </a:defRPr>
-                      </a:pPr>
-                      <a:r>
-                        <a:t>11.95 Tỷ</a:t>
-                      </a:r>
-                    </a:p>
-                  </a:txBody>
-                  <a:tcPr/>
-                </a:tc>
-                <a:tc>
-                  <a:txBody>
-                    <a:bodyPr/>
-                    <a:lstStyle/>
-                    <a:p>
-                      <a:pPr algn="ctr">
-                        <a:defRPr sz="1000" b="0"/>
-                      </a:pPr>
-                      <a:r>
-                        <a:t>68</a:t>
-                      </a:r>
-                    </a:p>
-                  </a:txBody>
-                  <a:tcPr/>
-                </a:tc>
-                <a:tc>
-                  <a:txBody>
-                    <a:bodyPr/>
-                    <a:lstStyle/>
-                    <a:p>
-                      <a:pPr algn="ctr">
-                        <a:defRPr sz="1000" b="0">
-                          <a:solidFill>
-                            <a:srgbClr val="10B981"/>
-                          </a:solidFill>
-                        </a:defRPr>
-                      </a:pPr>
-                      <a:r>
-                        <a:t>0</a:t>
-                      </a:r>
-                    </a:p>
-                  </a:txBody>
-                  <a:tcPr/>
-                </a:tc>
-                <a:tc>
-                  <a:txBody>
-                    <a:bodyPr/>
-                    <a:lstStyle/>
-                    <a:p>
-                      <a:pPr algn="ctr">
-                        <a:defRPr sz="1000" b="1">
-                          <a:solidFill>
-                            <a:srgbClr val="E11D48"/>
-                          </a:solidFill>
-                        </a:defRPr>
-                      </a:pPr>
-                      <a:r>
-                        <a:t>0.0%</a:t>
-                      </a:r>
-                    </a:p>
-                  </a:txBody>
-                  <a:tcPr/>
-                </a:tc>
-              </a:tr>
-              <a:tr h="512064">
-                <a:tc>
-                  <a:txBody>
-                    <a:bodyPr/>
-                    <a:lstStyle/>
-                    <a:p>
-                      <a:pPr algn="ctr">
-                        <a:defRPr sz="1000" b="0"/>
-                      </a:pPr>
-                      <a:r>
-                        <a:t>8</a:t>
-                      </a:r>
-                    </a:p>
-                  </a:txBody>
-                  <a:tcPr/>
-                </a:tc>
-                <a:tc>
-                  <a:txBody>
-                    <a:bodyPr/>
-                    <a:lstStyle/>
-                    <a:p>
-                      <a:pPr algn="l">
-                        <a:defRPr sz="1000" b="0"/>
-                      </a:pPr>
-                      <a:r>
-                        <a:t>Công ty Cổ Phần Xây Dựng Vũng Tàu</a:t>
-                      </a:r>
-                    </a:p>
-                  </a:txBody>
-                  <a:tcPr/>
-                </a:tc>
-                <a:tc>
-                  <a:txBody>
-                    <a:bodyPr/>
-                    <a:lstStyle/>
-                    <a:p>
-                      <a:pPr algn="ctr">
-                        <a:defRPr sz="1000" b="0"/>
-                      </a:pPr>
-                      <a:r>
-                        <a:t>12</a:t>
-                      </a:r>
-                    </a:p>
-                  </a:txBody>
-                  <a:tcPr/>
-                </a:tc>
-                <a:tc>
-                  <a:txBody>
-                    <a:bodyPr/>
-                    <a:lstStyle/>
-                    <a:p>
-                      <a:pPr algn="ctr">
-                        <a:defRPr sz="1000" b="0"/>
-                      </a:pPr>
-                      <a:r>
-                        <a:t>507</a:t>
-                      </a:r>
-                    </a:p>
-                  </a:txBody>
-                  <a:tcPr/>
-                </a:tc>
-                <a:tc>
-                  <a:txBody>
-                    <a:bodyPr/>
-                    <a:lstStyle/>
-                    <a:p>
-                      <a:pPr algn="ctr">
-                        <a:defRPr sz="1000" b="1">
-                          <a:solidFill>
-                            <a:srgbClr val="EE0033"/>
-                          </a:solidFill>
-                        </a:defRPr>
-                      </a:pPr>
-                      <a:r>
-                        <a:t>442</a:t>
-                      </a:r>
-                    </a:p>
-                  </a:txBody>
-                  <a:tcPr/>
-                </a:tc>
-                <a:tc>
-                  <a:txBody>
-                    <a:bodyPr/>
-                    <a:lstStyle/>
-                    <a:p>
-                      <a:pPr algn="ctr">
-                        <a:defRPr sz="1000" b="1">
-                          <a:solidFill>
-                            <a:srgbClr val="EE0033"/>
-                          </a:solidFill>
-                        </a:defRPr>
-                      </a:pPr>
-                      <a:r>
-                        <a:t>9.35 Tỷ</a:t>
-                      </a:r>
-                    </a:p>
-                  </a:txBody>
-                  <a:tcPr/>
-                </a:tc>
-                <a:tc>
-                  <a:txBody>
-                    <a:bodyPr/>
-                    <a:lstStyle/>
-                    <a:p>
-                      <a:pPr algn="ctr">
-                        <a:defRPr sz="1000" b="0"/>
-                      </a:pPr>
-                      <a:r>
-                        <a:t>959</a:t>
-                      </a:r>
-                    </a:p>
-                  </a:txBody>
-                  <a:tcPr/>
-                </a:tc>
-                <a:tc>
-                  <a:txBody>
-                    <a:bodyPr/>
-                    <a:lstStyle/>
-                    <a:p>
-                      <a:pPr algn="ctr">
-                        <a:defRPr sz="1000" b="0">
-                          <a:solidFill>
-                            <a:srgbClr val="10B981"/>
-                          </a:solidFill>
-                        </a:defRPr>
-                      </a:pPr>
-                      <a:r>
-                        <a:t>70</a:t>
-                      </a:r>
-                    </a:p>
-                  </a:txBody>
-                  <a:tcPr/>
-                </a:tc>
-                <a:tc>
-                  <a:txBody>
-                    <a:bodyPr/>
-                    <a:lstStyle/>
-                    <a:p>
-                      <a:pPr algn="ctr">
-                        <a:defRPr sz="1000" b="1">
-                          <a:solidFill>
-                            <a:srgbClr val="E11D48"/>
-                          </a:solidFill>
-                        </a:defRPr>
-                      </a:pPr>
-                      <a:r>
-                        <a:t>7.3%</a:t>
-                      </a:r>
-                    </a:p>
-                  </a:txBody>
-                  <a:tcPr/>
-                </a:tc>
-              </a:tr>
-              <a:tr h="512064">
-                <a:tc>
-                  <a:txBody>
-                    <a:bodyPr/>
-                    <a:lstStyle/>
-                    <a:p>
-                      <a:pPr algn="ctr">
-                        <a:defRPr sz="1100" b="1"/>
-                      </a:pPr>
-                      <a:r>
-                        <a:t>--</a:t>
+                        <a:t>561.90 Tỷ</a:t>
                       </a:r>
                     </a:p>
                   </a:txBody>
@@ -5974,11 +6458,11 @@
                     <a:bodyPr/>
                     <a:lstStyle/>
                     <a:p>
-                      <a:pPr algn="l">
-                        <a:defRPr sz="1100" b="1"/>
-                      </a:pPr>
-                      <a:r>
-                        <a:t>TỔNG TOP 8 ĐỐI TÁC TRỌNG ĐIỂM</a:t>
+                      <a:pPr algn="ctr">
+                        <a:defRPr sz="1000" b="1"/>
+                      </a:pPr>
+                      <a:r>
+                        <a:t>27/1.4K</a:t>
                       </a:r>
                     </a:p>
                   </a:txBody>
@@ -5994,10 +6478,10 @@
                     <a:lstStyle/>
                     <a:p>
                       <a:pPr algn="ctr">
-                        <a:defRPr sz="1100" b="1"/>
-                      </a:pPr>
-                      <a:r>
-                        <a:t>338</a:t>
+                        <a:defRPr sz="1000" b="1"/>
+                      </a:pPr>
+                      <a:r>
+                        <a:t>53/2.2K</a:t>
                       </a:r>
                     </a:p>
                   </a:txBody>
@@ -6013,10 +6497,10 @@
                     <a:lstStyle/>
                     <a:p>
                       <a:pPr algn="ctr">
-                        <a:defRPr sz="1100" b="1"/>
-                      </a:pPr>
-                      <a:r>
-                        <a:t>10,762</a:t>
+                        <a:defRPr sz="1000" b="1"/>
+                      </a:pPr>
+                      <a:r>
+                        <a:t>162/2.3K</a:t>
                       </a:r>
                     </a:p>
                   </a:txBody>
@@ -6032,14 +6516,10 @@
                     <a:lstStyle/>
                     <a:p>
                       <a:pPr algn="ctr">
-                        <a:defRPr sz="1100" b="1">
-                          <a:solidFill>
-                            <a:srgbClr val="EE0033"/>
-                          </a:solidFill>
-                        </a:defRPr>
-                      </a:pPr>
-                      <a:r>
-                        <a:t>9,895</a:t>
+                        <a:defRPr sz="1000" b="1"/>
+                      </a:pPr>
+                      <a:r>
+                        <a:t>176/2.7K</a:t>
                       </a:r>
                     </a:p>
                   </a:txBody>
@@ -6055,14 +6535,10 @@
                     <a:lstStyle/>
                     <a:p>
                       <a:pPr algn="ctr">
-                        <a:defRPr sz="1100" b="1">
-                          <a:solidFill>
-                            <a:srgbClr val="EE0033"/>
-                          </a:solidFill>
-                        </a:defRPr>
-                      </a:pPr>
-                      <a:r>
-                        <a:t>561.90 Tỷ</a:t>
+                        <a:defRPr sz="1000" b="1"/>
+                      </a:pPr>
+                      <a:r>
+                        <a:t>320/2.8K</a:t>
                       </a:r>
                     </a:p>
                   </a:txBody>
@@ -6078,10 +6554,10 @@
                     <a:lstStyle/>
                     <a:p>
                       <a:pPr algn="ctr">
-                        <a:defRPr sz="1100" b="1"/>
-                      </a:pPr>
-                      <a:r>
-                        <a:t>11,552</a:t>
+                        <a:defRPr sz="1000" b="1"/>
+                      </a:pPr>
+                      <a:r>
+                        <a:t>0/41</a:t>
                       </a:r>
                     </a:p>
                   </a:txBody>
@@ -6097,30 +6573,7 @@
                     <a:lstStyle/>
                     <a:p>
                       <a:pPr algn="ctr">
-                        <a:defRPr sz="1100" b="1">
-                          <a:solidFill>
-                            <a:srgbClr val="10B981"/>
-                          </a:solidFill>
-                        </a:defRPr>
-                      </a:pPr>
-                      <a:r>
-                        <a:t>738</a:t>
-                      </a:r>
-                    </a:p>
-                  </a:txBody>
-                  <a:tcPr>
-                    <a:solidFill>
-                      <a:srgbClr val="FEF2F2"/>
-                    </a:solidFill>
-                  </a:tcPr>
-                </a:tc>
-                <a:tc>
-                  <a:txBody>
-                    <a:bodyPr/>
-                    <a:lstStyle/>
-                    <a:p>
-                      <a:pPr algn="ctr">
-                        <a:defRPr sz="1100" b="1">
+                        <a:defRPr sz="1000" b="1">
                           <a:solidFill>
                             <a:srgbClr val="EE0033"/>
                           </a:solidFill>
@@ -6274,7 +6727,7 @@
               </a:defRPr>
             </a:pPr>
             <a:r>
-              <a:t>3. Theo dõi sát chỉ tiêu KPI Q = 'KHÔNG':</a:t>
+              <a:t>3. Theo dõi sát 6 chỉ tiêu KPI (KHVTT, NT BQLDA, BGTS BQLDA, NT SAP, BGTS SAP, VHKT):</a:t>
             </a:r>
           </a:p>
           <a:p>
@@ -6286,7 +6739,7 @@
               </a:defRPr>
             </a:pPr>
             <a:r>
-              <a:t>   → Định kỳ hàng tuần cập nhật tiến độ giải tỏa công nợ VTA lên hệ thống Dashboard Online.</a:t>
+              <a:t>   → Định kỳ hàng tuần cập nhật tiến độ giải tỏa công nợ VTA từng chỉ tiêu lên hệ thống Dashboard Online.</a:t>
             </a:r>
           </a:p>
           <a:p>

--- a/Bao_Cao_Viettel_Cong_No_VTA_Slide.pptx
+++ b/Bao_Cao_Viettel_Cong_No_VTA_Slide.pptx
@@ -10,6 +10,7 @@
     <p:sldId id="258" r:id="rId9"/>
     <p:sldId id="259" r:id="rId10"/>
     <p:sldId id="260" r:id="rId11"/>
+    <p:sldId id="261" r:id="rId12"/>
   </p:sldIdLst>
   <p:sldSz cx="12191695" cy="6858000" type="screen4x3"/>
   <p:notesSz cx="6858000" cy="9144000"/>
@@ -3191,7 +3192,7 @@
               </a:defRPr>
             </a:pPr>
             <a:r>
-              <a:t>Phân tích trọng tâm Công nợ Vật tư A (548.3 Tỷ VNĐ) &amp; Bảng Khoanh Vùng Chi Tiết Từng KPI Theo Đối Tác</a:t>
+              <a:t>Phân tích Công nợ VTA (548.3 Tỷ), Chi tiết KPI &amp; Phân tích chuyên sâu Kế hoạch Tháng 9 (Col J)</a:t>
             </a:r>
           </a:p>
         </p:txBody>
@@ -6621,6 +6622,1726 @@
         </p:nvSpPr>
         <p:spPr>
           <a:xfrm>
+            <a:off x="457200" y="365760"/>
+            <a:ext cx="11277295" cy="731520"/>
+          </a:xfrm>
+          <a:prstGeom prst="rect">
+            <a:avLst/>
+          </a:prstGeom>
+          <a:noFill/>
+        </p:spPr>
+        <p:txBody>
+          <a:bodyPr wrap="none">
+            <a:spAutoFit/>
+          </a:bodyPr>
+          <a:lstStyle/>
+          <a:p>
+            <a:pPr>
+              <a:defRPr sz="2000" b="1">
+                <a:solidFill>
+                  <a:srgbClr val="EE0033"/>
+                </a:solidFill>
+              </a:defRPr>
+            </a:pPr>
+            <a:r>
+              <a:t>SLIDE 5: PHÂN TÍCH CHUYÊN SÂU KẾ HOẠCH THÁNG 9 (CỘT J) THEO NHÀ THẦU</a:t>
+            </a:r>
+          </a:p>
+          <a:p>
+            <a:pPr>
+              <a:defRPr sz="1200">
+                <a:solidFill>
+                  <a:srgbClr val="64748B"/>
+                </a:solidFill>
+              </a:defRPr>
+            </a:pPr>
+            <a:r>
+              <a:t>Tập trung 4,972 Công trình / 257 Hợp đồng thuộc KH Tháng 9: Công nợ VTA (R), Tồn VTTB (L), Thu hồi (O), Cần nhập kho (P)</a:t>
+            </a:r>
+          </a:p>
+        </p:txBody>
+      </p:sp>
+      <p:graphicFrame>
+        <p:nvGraphicFramePr>
+          <p:cNvPr id="3" name="Table 2"/>
+          <p:cNvGraphicFramePr>
+            <a:graphicFrameLocks noGrp="1"/>
+          </p:cNvGraphicFramePr>
+          <p:nvPr/>
+        </p:nvGraphicFramePr>
+        <p:xfrm>
+          <a:off x="457200" y="1188720"/>
+          <a:ext cx="11277295" cy="5120640"/>
+        </p:xfrm>
+        <a:graphic>
+          <a:graphicData uri="http://schemas.openxmlformats.org/drawingml/2006/table">
+            <a:tbl>
+              <a:tblPr firstRow="1" bandRow="1">
+                <a:tableStyleId>{5C22544A-7EE6-4342-B048-85BDC9FD1C3A}</a:tableStyleId>
+              </a:tblPr>
+              <a:tblGrid>
+                <a:gridCol w="1253032"/>
+                <a:gridCol w="1253032"/>
+                <a:gridCol w="1253032"/>
+                <a:gridCol w="1253032"/>
+                <a:gridCol w="1253032"/>
+                <a:gridCol w="1253032"/>
+                <a:gridCol w="1253032"/>
+                <a:gridCol w="1253032"/>
+                <a:gridCol w="1253039"/>
+              </a:tblGrid>
+              <a:tr h="512064">
+                <a:tc>
+                  <a:txBody>
+                    <a:bodyPr/>
+                    <a:lstStyle/>
+                    <a:p>
+                      <a:pPr algn="ctr">
+                        <a:defRPr b="1" sz="1000">
+                          <a:solidFill>
+                            <a:srgbClr val="FFFFFF"/>
+                          </a:solidFill>
+                        </a:defRPr>
+                      </a:pPr>
+                      <a:r>
+                        <a:t>STT</a:t>
+                      </a:r>
+                    </a:p>
+                  </a:txBody>
+                  <a:tcPr>
+                    <a:solidFill>
+                      <a:srgbClr val="1E293B"/>
+                    </a:solidFill>
+                  </a:tcPr>
+                </a:tc>
+                <a:tc>
+                  <a:txBody>
+                    <a:bodyPr/>
+                    <a:lstStyle/>
+                    <a:p>
+                      <a:pPr algn="ctr">
+                        <a:defRPr b="1" sz="1000">
+                          <a:solidFill>
+                            <a:srgbClr val="FFFFFF"/>
+                          </a:solidFill>
+                        </a:defRPr>
+                      </a:pPr>
+                      <a:r>
+                        <a:t>Nhà Thầu Đối Tác</a:t>
+                      </a:r>
+                    </a:p>
+                  </a:txBody>
+                  <a:tcPr>
+                    <a:solidFill>
+                      <a:srgbClr val="1E293B"/>
+                    </a:solidFill>
+                  </a:tcPr>
+                </a:tc>
+                <a:tc>
+                  <a:txBody>
+                    <a:bodyPr/>
+                    <a:lstStyle/>
+                    <a:p>
+                      <a:pPr algn="ctr">
+                        <a:defRPr b="1" sz="1000">
+                          <a:solidFill>
+                            <a:srgbClr val="FFFFFF"/>
+                          </a:solidFill>
+                        </a:defRPr>
+                      </a:pPr>
+                      <a:r>
+                        <a:t>Số HĐ T9</a:t>
+                      </a:r>
+                    </a:p>
+                  </a:txBody>
+                  <a:tcPr>
+                    <a:solidFill>
+                      <a:srgbClr val="1E293B"/>
+                    </a:solidFill>
+                  </a:tcPr>
+                </a:tc>
+                <a:tc>
+                  <a:txBody>
+                    <a:bodyPr/>
+                    <a:lstStyle/>
+                    <a:p>
+                      <a:pPr algn="ctr">
+                        <a:defRPr b="1" sz="1000">
+                          <a:solidFill>
+                            <a:srgbClr val="FFFFFF"/>
+                          </a:solidFill>
+                        </a:defRPr>
+                      </a:pPr>
+                      <a:r>
+                        <a:t>CT KH T9 (Col J)</a:t>
+                      </a:r>
+                    </a:p>
+                  </a:txBody>
+                  <a:tcPr>
+                    <a:solidFill>
+                      <a:srgbClr val="1E293B"/>
+                    </a:solidFill>
+                  </a:tcPr>
+                </a:tc>
+                <a:tc>
+                  <a:txBody>
+                    <a:bodyPr/>
+                    <a:lstStyle/>
+                    <a:p>
+                      <a:pPr algn="ctr">
+                        <a:defRPr b="1" sz="1000">
+                          <a:solidFill>
+                            <a:srgbClr val="FFFFFF"/>
+                          </a:solidFill>
+                        </a:defRPr>
+                      </a:pPr>
+                      <a:r>
+                        <a:t>Công Nợ VTA R</a:t>
+                      </a:r>
+                    </a:p>
+                  </a:txBody>
+                  <a:tcPr>
+                    <a:solidFill>
+                      <a:srgbClr val="1E293B"/>
+                    </a:solidFill>
+                  </a:tcPr>
+                </a:tc>
+                <a:tc>
+                  <a:txBody>
+                    <a:bodyPr/>
+                    <a:lstStyle/>
+                    <a:p>
+                      <a:pPr algn="ctr">
+                        <a:defRPr b="1" sz="1000">
+                          <a:solidFill>
+                            <a:srgbClr val="FFFFFF"/>
+                          </a:solidFill>
+                        </a:defRPr>
+                      </a:pPr>
+                      <a:r>
+                        <a:t>Tồn VTTB L</a:t>
+                      </a:r>
+                    </a:p>
+                  </a:txBody>
+                  <a:tcPr>
+                    <a:solidFill>
+                      <a:srgbClr val="1E293B"/>
+                    </a:solidFill>
+                  </a:tcPr>
+                </a:tc>
+                <a:tc>
+                  <a:txBody>
+                    <a:bodyPr/>
+                    <a:lstStyle/>
+                    <a:p>
+                      <a:pPr algn="ctr">
+                        <a:defRPr b="1" sz="1000">
+                          <a:solidFill>
+                            <a:srgbClr val="FFFFFF"/>
+                          </a:solidFill>
+                        </a:defRPr>
+                      </a:pPr>
+                      <a:r>
+                        <a:t>Đã Thu Hồi O</a:t>
+                      </a:r>
+                    </a:p>
+                  </a:txBody>
+                  <a:tcPr>
+                    <a:solidFill>
+                      <a:srgbClr val="1E293B"/>
+                    </a:solidFill>
+                  </a:tcPr>
+                </a:tc>
+                <a:tc>
+                  <a:txBody>
+                    <a:bodyPr/>
+                    <a:lstStyle/>
+                    <a:p>
+                      <a:pPr algn="ctr">
+                        <a:defRPr b="1" sz="1000">
+                          <a:solidFill>
+                            <a:srgbClr val="FFFFFF"/>
+                          </a:solidFill>
+                        </a:defRPr>
+                      </a:pPr>
+                      <a:r>
+                        <a:t>Cần Nhập Kho P</a:t>
+                      </a:r>
+                    </a:p>
+                  </a:txBody>
+                  <a:tcPr>
+                    <a:solidFill>
+                      <a:srgbClr val="1E293B"/>
+                    </a:solidFill>
+                  </a:tcPr>
+                </a:tc>
+                <a:tc>
+                  <a:txBody>
+                    <a:bodyPr/>
+                    <a:lstStyle/>
+                    <a:p>
+                      <a:pPr algn="ctr">
+                        <a:defRPr b="1" sz="1000">
+                          <a:solidFill>
+                            <a:srgbClr val="FFFFFF"/>
+                          </a:solidFill>
+                        </a:defRPr>
+                      </a:pPr>
+                      <a:r>
+                        <a:t>% Giải Tỏa</a:t>
+                      </a:r>
+                    </a:p>
+                  </a:txBody>
+                  <a:tcPr>
+                    <a:solidFill>
+                      <a:srgbClr val="1E293B"/>
+                    </a:solidFill>
+                  </a:tcPr>
+                </a:tc>
+              </a:tr>
+              <a:tr h="512064">
+                <a:tc>
+                  <a:txBody>
+                    <a:bodyPr/>
+                    <a:lstStyle/>
+                    <a:p>
+                      <a:pPr algn="ctr">
+                        <a:defRPr sz="950" b="0"/>
+                      </a:pPr>
+                      <a:r>
+                        <a:t>1</a:t>
+                      </a:r>
+                    </a:p>
+                  </a:txBody>
+                  <a:tcPr/>
+                </a:tc>
+                <a:tc>
+                  <a:txBody>
+                    <a:bodyPr/>
+                    <a:lstStyle/>
+                    <a:p>
+                      <a:pPr algn="l">
+                        <a:defRPr sz="950" b="0"/>
+                      </a:pPr>
+                      <a:r>
+                        <a:t>Tổng công ty CP Công trình Viettel (VCC)</a:t>
+                      </a:r>
+                    </a:p>
+                  </a:txBody>
+                  <a:tcPr/>
+                </a:tc>
+                <a:tc>
+                  <a:txBody>
+                    <a:bodyPr/>
+                    <a:lstStyle/>
+                    <a:p>
+                      <a:pPr algn="ctr">
+                        <a:defRPr sz="950" b="0"/>
+                      </a:pPr>
+                      <a:r>
+                        <a:t>94</a:t>
+                      </a:r>
+                    </a:p>
+                  </a:txBody>
+                  <a:tcPr/>
+                </a:tc>
+                <a:tc>
+                  <a:txBody>
+                    <a:bodyPr/>
+                    <a:lstStyle/>
+                    <a:p>
+                      <a:pPr algn="ctr">
+                        <a:defRPr sz="950" b="1">
+                          <a:solidFill>
+                            <a:srgbClr val="EE0033"/>
+                          </a:solidFill>
+                        </a:defRPr>
+                      </a:pPr>
+                      <a:r>
+                        <a:t>1,944</a:t>
+                      </a:r>
+                    </a:p>
+                  </a:txBody>
+                  <a:tcPr/>
+                </a:tc>
+                <a:tc>
+                  <a:txBody>
+                    <a:bodyPr/>
+                    <a:lstStyle/>
+                    <a:p>
+                      <a:pPr algn="ctr">
+                        <a:defRPr sz="950" b="1">
+                          <a:solidFill>
+                            <a:srgbClr val="EE0033"/>
+                          </a:solidFill>
+                        </a:defRPr>
+                      </a:pPr>
+                      <a:r>
+                        <a:t>57.60 Tỷ</a:t>
+                      </a:r>
+                    </a:p>
+                  </a:txBody>
+                  <a:tcPr/>
+                </a:tc>
+                <a:tc>
+                  <a:txBody>
+                    <a:bodyPr/>
+                    <a:lstStyle/>
+                    <a:p>
+                      <a:pPr algn="ctr">
+                        <a:defRPr sz="950" b="0"/>
+                      </a:pPr>
+                      <a:r>
+                        <a:t>62.21 Tỷ</a:t>
+                      </a:r>
+                    </a:p>
+                  </a:txBody>
+                  <a:tcPr/>
+                </a:tc>
+                <a:tc>
+                  <a:txBody>
+                    <a:bodyPr/>
+                    <a:lstStyle/>
+                    <a:p>
+                      <a:pPr algn="ctr">
+                        <a:defRPr sz="950" b="0">
+                          <a:solidFill>
+                            <a:srgbClr val="10B981"/>
+                          </a:solidFill>
+                        </a:defRPr>
+                      </a:pPr>
+                      <a:r>
+                        <a:t>17.59 Tỷ</a:t>
+                      </a:r>
+                    </a:p>
+                  </a:txBody>
+                  <a:tcPr/>
+                </a:tc>
+                <a:tc>
+                  <a:txBody>
+                    <a:bodyPr/>
+                    <a:lstStyle/>
+                    <a:p>
+                      <a:pPr algn="ctr">
+                        <a:defRPr sz="950" b="0"/>
+                      </a:pPr>
+                      <a:r>
+                        <a:t>0.00 Tỷ</a:t>
+                      </a:r>
+                    </a:p>
+                  </a:txBody>
+                  <a:tcPr/>
+                </a:tc>
+                <a:tc>
+                  <a:txBody>
+                    <a:bodyPr/>
+                    <a:lstStyle/>
+                    <a:p>
+                      <a:pPr algn="ctr">
+                        <a:defRPr sz="950" b="1">
+                          <a:solidFill>
+                            <a:srgbClr val="E11D48"/>
+                          </a:solidFill>
+                        </a:defRPr>
+                      </a:pPr>
+                      <a:r>
+                        <a:t>28.3%</a:t>
+                      </a:r>
+                    </a:p>
+                  </a:txBody>
+                  <a:tcPr/>
+                </a:tc>
+              </a:tr>
+              <a:tr h="512064">
+                <a:tc>
+                  <a:txBody>
+                    <a:bodyPr/>
+                    <a:lstStyle/>
+                    <a:p>
+                      <a:pPr algn="ctr">
+                        <a:defRPr sz="950" b="0"/>
+                      </a:pPr>
+                      <a:r>
+                        <a:t>2</a:t>
+                      </a:r>
+                    </a:p>
+                  </a:txBody>
+                  <a:tcPr/>
+                </a:tc>
+                <a:tc>
+                  <a:txBody>
+                    <a:bodyPr/>
+                    <a:lstStyle/>
+                    <a:p>
+                      <a:pPr algn="l">
+                        <a:defRPr sz="950" b="0"/>
+                      </a:pPr>
+                      <a:r>
+                        <a:t>Công ty CP Viễn thông ACT</a:t>
+                      </a:r>
+                    </a:p>
+                  </a:txBody>
+                  <a:tcPr/>
+                </a:tc>
+                <a:tc>
+                  <a:txBody>
+                    <a:bodyPr/>
+                    <a:lstStyle/>
+                    <a:p>
+                      <a:pPr algn="ctr">
+                        <a:defRPr sz="950" b="0"/>
+                      </a:pPr>
+                      <a:r>
+                        <a:t>45</a:t>
+                      </a:r>
+                    </a:p>
+                  </a:txBody>
+                  <a:tcPr/>
+                </a:tc>
+                <a:tc>
+                  <a:txBody>
+                    <a:bodyPr/>
+                    <a:lstStyle/>
+                    <a:p>
+                      <a:pPr algn="ctr">
+                        <a:defRPr sz="950" b="1">
+                          <a:solidFill>
+                            <a:srgbClr val="EE0033"/>
+                          </a:solidFill>
+                        </a:defRPr>
+                      </a:pPr>
+                      <a:r>
+                        <a:t>550</a:t>
+                      </a:r>
+                    </a:p>
+                  </a:txBody>
+                  <a:tcPr/>
+                </a:tc>
+                <a:tc>
+                  <a:txBody>
+                    <a:bodyPr/>
+                    <a:lstStyle/>
+                    <a:p>
+                      <a:pPr algn="ctr">
+                        <a:defRPr sz="950" b="1">
+                          <a:solidFill>
+                            <a:srgbClr val="EE0033"/>
+                          </a:solidFill>
+                        </a:defRPr>
+                      </a:pPr>
+                      <a:r>
+                        <a:t>23.55 Tỷ</a:t>
+                      </a:r>
+                    </a:p>
+                  </a:txBody>
+                  <a:tcPr/>
+                </a:tc>
+                <a:tc>
+                  <a:txBody>
+                    <a:bodyPr/>
+                    <a:lstStyle/>
+                    <a:p>
+                      <a:pPr algn="ctr">
+                        <a:defRPr sz="950" b="0"/>
+                      </a:pPr>
+                      <a:r>
+                        <a:t>25.34 Tỷ</a:t>
+                      </a:r>
+                    </a:p>
+                  </a:txBody>
+                  <a:tcPr/>
+                </a:tc>
+                <a:tc>
+                  <a:txBody>
+                    <a:bodyPr/>
+                    <a:lstStyle/>
+                    <a:p>
+                      <a:pPr algn="ctr">
+                        <a:defRPr sz="950" b="0">
+                          <a:solidFill>
+                            <a:srgbClr val="10B981"/>
+                          </a:solidFill>
+                        </a:defRPr>
+                      </a:pPr>
+                      <a:r>
+                        <a:t>4.75 Tỷ</a:t>
+                      </a:r>
+                    </a:p>
+                  </a:txBody>
+                  <a:tcPr/>
+                </a:tc>
+                <a:tc>
+                  <a:txBody>
+                    <a:bodyPr/>
+                    <a:lstStyle/>
+                    <a:p>
+                      <a:pPr algn="ctr">
+                        <a:defRPr sz="950" b="0"/>
+                      </a:pPr>
+                      <a:r>
+                        <a:t>0.00 Tỷ</a:t>
+                      </a:r>
+                    </a:p>
+                  </a:txBody>
+                  <a:tcPr/>
+                </a:tc>
+                <a:tc>
+                  <a:txBody>
+                    <a:bodyPr/>
+                    <a:lstStyle/>
+                    <a:p>
+                      <a:pPr algn="ctr">
+                        <a:defRPr sz="950" b="1">
+                          <a:solidFill>
+                            <a:srgbClr val="E11D48"/>
+                          </a:solidFill>
+                        </a:defRPr>
+                      </a:pPr>
+                      <a:r>
+                        <a:t>18.7%</a:t>
+                      </a:r>
+                    </a:p>
+                  </a:txBody>
+                  <a:tcPr/>
+                </a:tc>
+              </a:tr>
+              <a:tr h="512064">
+                <a:tc>
+                  <a:txBody>
+                    <a:bodyPr/>
+                    <a:lstStyle/>
+                    <a:p>
+                      <a:pPr algn="ctr">
+                        <a:defRPr sz="950" b="0"/>
+                      </a:pPr>
+                      <a:r>
+                        <a:t>3</a:t>
+                      </a:r>
+                    </a:p>
+                  </a:txBody>
+                  <a:tcPr/>
+                </a:tc>
+                <a:tc>
+                  <a:txBody>
+                    <a:bodyPr/>
+                    <a:lstStyle/>
+                    <a:p>
+                      <a:pPr algn="l">
+                        <a:defRPr sz="950" b="0"/>
+                      </a:pPr>
+                      <a:r>
+                        <a:t>Công Ty TNHH TMDV KT VT An Phát</a:t>
+                      </a:r>
+                    </a:p>
+                  </a:txBody>
+                  <a:tcPr/>
+                </a:tc>
+                <a:tc>
+                  <a:txBody>
+                    <a:bodyPr/>
+                    <a:lstStyle/>
+                    <a:p>
+                      <a:pPr algn="ctr">
+                        <a:defRPr sz="950" b="0"/>
+                      </a:pPr>
+                      <a:r>
+                        <a:t>7</a:t>
+                      </a:r>
+                    </a:p>
+                  </a:txBody>
+                  <a:tcPr/>
+                </a:tc>
+                <a:tc>
+                  <a:txBody>
+                    <a:bodyPr/>
+                    <a:lstStyle/>
+                    <a:p>
+                      <a:pPr algn="ctr">
+                        <a:defRPr sz="950" b="1">
+                          <a:solidFill>
+                            <a:srgbClr val="EE0033"/>
+                          </a:solidFill>
+                        </a:defRPr>
+                      </a:pPr>
+                      <a:r>
+                        <a:t>789</a:t>
+                      </a:r>
+                    </a:p>
+                  </a:txBody>
+                  <a:tcPr/>
+                </a:tc>
+                <a:tc>
+                  <a:txBody>
+                    <a:bodyPr/>
+                    <a:lstStyle/>
+                    <a:p>
+                      <a:pPr algn="ctr">
+                        <a:defRPr sz="950" b="1">
+                          <a:solidFill>
+                            <a:srgbClr val="EE0033"/>
+                          </a:solidFill>
+                        </a:defRPr>
+                      </a:pPr>
+                      <a:r>
+                        <a:t>8.66 Tỷ</a:t>
+                      </a:r>
+                    </a:p>
+                  </a:txBody>
+                  <a:tcPr/>
+                </a:tc>
+                <a:tc>
+                  <a:txBody>
+                    <a:bodyPr/>
+                    <a:lstStyle/>
+                    <a:p>
+                      <a:pPr algn="ctr">
+                        <a:defRPr sz="950" b="0"/>
+                      </a:pPr>
+                      <a:r>
+                        <a:t>8.77 Tỷ</a:t>
+                      </a:r>
+                    </a:p>
+                  </a:txBody>
+                  <a:tcPr/>
+                </a:tc>
+                <a:tc>
+                  <a:txBody>
+                    <a:bodyPr/>
+                    <a:lstStyle/>
+                    <a:p>
+                      <a:pPr algn="ctr">
+                        <a:defRPr sz="950" b="0">
+                          <a:solidFill>
+                            <a:srgbClr val="10B981"/>
+                          </a:solidFill>
+                        </a:defRPr>
+                      </a:pPr>
+                      <a:r>
+                        <a:t>1.87 Tỷ</a:t>
+                      </a:r>
+                    </a:p>
+                  </a:txBody>
+                  <a:tcPr/>
+                </a:tc>
+                <a:tc>
+                  <a:txBody>
+                    <a:bodyPr/>
+                    <a:lstStyle/>
+                    <a:p>
+                      <a:pPr algn="ctr">
+                        <a:defRPr sz="950" b="0"/>
+                      </a:pPr>
+                      <a:r>
+                        <a:t>0.00 Tỷ</a:t>
+                      </a:r>
+                    </a:p>
+                  </a:txBody>
+                  <a:tcPr/>
+                </a:tc>
+                <a:tc>
+                  <a:txBody>
+                    <a:bodyPr/>
+                    <a:lstStyle/>
+                    <a:p>
+                      <a:pPr algn="ctr">
+                        <a:defRPr sz="950" b="1">
+                          <a:solidFill>
+                            <a:srgbClr val="E11D48"/>
+                          </a:solidFill>
+                        </a:defRPr>
+                      </a:pPr>
+                      <a:r>
+                        <a:t>21.3%</a:t>
+                      </a:r>
+                    </a:p>
+                  </a:txBody>
+                  <a:tcPr/>
+                </a:tc>
+              </a:tr>
+              <a:tr h="512064">
+                <a:tc>
+                  <a:txBody>
+                    <a:bodyPr/>
+                    <a:lstStyle/>
+                    <a:p>
+                      <a:pPr algn="ctr">
+                        <a:defRPr sz="950" b="0"/>
+                      </a:pPr>
+                      <a:r>
+                        <a:t>4</a:t>
+                      </a:r>
+                    </a:p>
+                  </a:txBody>
+                  <a:tcPr/>
+                </a:tc>
+                <a:tc>
+                  <a:txBody>
+                    <a:bodyPr/>
+                    <a:lstStyle/>
+                    <a:p>
+                      <a:pPr algn="l">
+                        <a:defRPr sz="950" b="0"/>
+                      </a:pPr>
+                      <a:r>
+                        <a:t>Phạm Hùng Cường</a:t>
+                      </a:r>
+                    </a:p>
+                  </a:txBody>
+                  <a:tcPr/>
+                </a:tc>
+                <a:tc>
+                  <a:txBody>
+                    <a:bodyPr/>
+                    <a:lstStyle/>
+                    <a:p>
+                      <a:pPr algn="ctr">
+                        <a:defRPr sz="950" b="0"/>
+                      </a:pPr>
+                      <a:r>
+                        <a:t>1</a:t>
+                      </a:r>
+                    </a:p>
+                  </a:txBody>
+                  <a:tcPr/>
+                </a:tc>
+                <a:tc>
+                  <a:txBody>
+                    <a:bodyPr/>
+                    <a:lstStyle/>
+                    <a:p>
+                      <a:pPr algn="ctr">
+                        <a:defRPr sz="950" b="1">
+                          <a:solidFill>
+                            <a:srgbClr val="EE0033"/>
+                          </a:solidFill>
+                        </a:defRPr>
+                      </a:pPr>
+                      <a:r>
+                        <a:t>27</a:t>
+                      </a:r>
+                    </a:p>
+                  </a:txBody>
+                  <a:tcPr/>
+                </a:tc>
+                <a:tc>
+                  <a:txBody>
+                    <a:bodyPr/>
+                    <a:lstStyle/>
+                    <a:p>
+                      <a:pPr algn="ctr">
+                        <a:defRPr sz="950" b="1">
+                          <a:solidFill>
+                            <a:srgbClr val="EE0033"/>
+                          </a:solidFill>
+                        </a:defRPr>
+                      </a:pPr>
+                      <a:r>
+                        <a:t>7.96 Tỷ</a:t>
+                      </a:r>
+                    </a:p>
+                  </a:txBody>
+                  <a:tcPr/>
+                </a:tc>
+                <a:tc>
+                  <a:txBody>
+                    <a:bodyPr/>
+                    <a:lstStyle/>
+                    <a:p>
+                      <a:pPr algn="ctr">
+                        <a:defRPr sz="950" b="0"/>
+                      </a:pPr>
+                      <a:r>
+                        <a:t>7.96 Tỷ</a:t>
+                      </a:r>
+                    </a:p>
+                  </a:txBody>
+                  <a:tcPr/>
+                </a:tc>
+                <a:tc>
+                  <a:txBody>
+                    <a:bodyPr/>
+                    <a:lstStyle/>
+                    <a:p>
+                      <a:pPr algn="ctr">
+                        <a:defRPr sz="950" b="0">
+                          <a:solidFill>
+                            <a:srgbClr val="10B981"/>
+                          </a:solidFill>
+                        </a:defRPr>
+                      </a:pPr>
+                      <a:r>
+                        <a:t>0.00 Tỷ</a:t>
+                      </a:r>
+                    </a:p>
+                  </a:txBody>
+                  <a:tcPr/>
+                </a:tc>
+                <a:tc>
+                  <a:txBody>
+                    <a:bodyPr/>
+                    <a:lstStyle/>
+                    <a:p>
+                      <a:pPr algn="ctr">
+                        <a:defRPr sz="950" b="0"/>
+                      </a:pPr>
+                      <a:r>
+                        <a:t>0.00 Tỷ</a:t>
+                      </a:r>
+                    </a:p>
+                  </a:txBody>
+                  <a:tcPr/>
+                </a:tc>
+                <a:tc>
+                  <a:txBody>
+                    <a:bodyPr/>
+                    <a:lstStyle/>
+                    <a:p>
+                      <a:pPr algn="ctr">
+                        <a:defRPr sz="950" b="1">
+                          <a:solidFill>
+                            <a:srgbClr val="E11D48"/>
+                          </a:solidFill>
+                        </a:defRPr>
+                      </a:pPr>
+                      <a:r>
+                        <a:t>0.0%</a:t>
+                      </a:r>
+                    </a:p>
+                  </a:txBody>
+                  <a:tcPr/>
+                </a:tc>
+              </a:tr>
+              <a:tr h="512064">
+                <a:tc>
+                  <a:txBody>
+                    <a:bodyPr/>
+                    <a:lstStyle/>
+                    <a:p>
+                      <a:pPr algn="ctr">
+                        <a:defRPr sz="950" b="0"/>
+                      </a:pPr>
+                      <a:r>
+                        <a:t>5</a:t>
+                      </a:r>
+                    </a:p>
+                  </a:txBody>
+                  <a:tcPr/>
+                </a:tc>
+                <a:tc>
+                  <a:txBody>
+                    <a:bodyPr/>
+                    <a:lstStyle/>
+                    <a:p>
+                      <a:pPr algn="l">
+                        <a:defRPr sz="950" b="0"/>
+                      </a:pPr>
+                      <a:r>
+                        <a:t>Công ty Cổ Phần Xây Dựng Vũng Tàu</a:t>
+                      </a:r>
+                    </a:p>
+                  </a:txBody>
+                  <a:tcPr/>
+                </a:tc>
+                <a:tc>
+                  <a:txBody>
+                    <a:bodyPr/>
+                    <a:lstStyle/>
+                    <a:p>
+                      <a:pPr algn="ctr">
+                        <a:defRPr sz="950" b="0"/>
+                      </a:pPr>
+                      <a:r>
+                        <a:t>10</a:t>
+                      </a:r>
+                    </a:p>
+                  </a:txBody>
+                  <a:tcPr/>
+                </a:tc>
+                <a:tc>
+                  <a:txBody>
+                    <a:bodyPr/>
+                    <a:lstStyle/>
+                    <a:p>
+                      <a:pPr algn="ctr">
+                        <a:defRPr sz="950" b="1">
+                          <a:solidFill>
+                            <a:srgbClr val="EE0033"/>
+                          </a:solidFill>
+                        </a:defRPr>
+                      </a:pPr>
+                      <a:r>
+                        <a:t>390</a:t>
+                      </a:r>
+                    </a:p>
+                  </a:txBody>
+                  <a:tcPr/>
+                </a:tc>
+                <a:tc>
+                  <a:txBody>
+                    <a:bodyPr/>
+                    <a:lstStyle/>
+                    <a:p>
+                      <a:pPr algn="ctr">
+                        <a:defRPr sz="950" b="1">
+                          <a:solidFill>
+                            <a:srgbClr val="EE0033"/>
+                          </a:solidFill>
+                        </a:defRPr>
+                      </a:pPr>
+                      <a:r>
+                        <a:t>7.42 Tỷ</a:t>
+                      </a:r>
+                    </a:p>
+                  </a:txBody>
+                  <a:tcPr/>
+                </a:tc>
+                <a:tc>
+                  <a:txBody>
+                    <a:bodyPr/>
+                    <a:lstStyle/>
+                    <a:p>
+                      <a:pPr algn="ctr">
+                        <a:defRPr sz="950" b="0"/>
+                      </a:pPr>
+                      <a:r>
+                        <a:t>8.14 Tỷ</a:t>
+                      </a:r>
+                    </a:p>
+                  </a:txBody>
+                  <a:tcPr/>
+                </a:tc>
+                <a:tc>
+                  <a:txBody>
+                    <a:bodyPr/>
+                    <a:lstStyle/>
+                    <a:p>
+                      <a:pPr algn="ctr">
+                        <a:defRPr sz="950" b="0">
+                          <a:solidFill>
+                            <a:srgbClr val="10B981"/>
+                          </a:solidFill>
+                        </a:defRPr>
+                      </a:pPr>
+                      <a:r>
+                        <a:t>1.64 Tỷ</a:t>
+                      </a:r>
+                    </a:p>
+                  </a:txBody>
+                  <a:tcPr/>
+                </a:tc>
+                <a:tc>
+                  <a:txBody>
+                    <a:bodyPr/>
+                    <a:lstStyle/>
+                    <a:p>
+                      <a:pPr algn="ctr">
+                        <a:defRPr sz="950" b="0"/>
+                      </a:pPr>
+                      <a:r>
+                        <a:t>0.00 Tỷ</a:t>
+                      </a:r>
+                    </a:p>
+                  </a:txBody>
+                  <a:tcPr/>
+                </a:tc>
+                <a:tc>
+                  <a:txBody>
+                    <a:bodyPr/>
+                    <a:lstStyle/>
+                    <a:p>
+                      <a:pPr algn="ctr">
+                        <a:defRPr sz="950" b="1">
+                          <a:solidFill>
+                            <a:srgbClr val="E11D48"/>
+                          </a:solidFill>
+                        </a:defRPr>
+                      </a:pPr>
+                      <a:r>
+                        <a:t>20.1%</a:t>
+                      </a:r>
+                    </a:p>
+                  </a:txBody>
+                  <a:tcPr/>
+                </a:tc>
+              </a:tr>
+              <a:tr h="512064">
+                <a:tc>
+                  <a:txBody>
+                    <a:bodyPr/>
+                    <a:lstStyle/>
+                    <a:p>
+                      <a:pPr algn="ctr">
+                        <a:defRPr sz="950" b="0"/>
+                      </a:pPr>
+                      <a:r>
+                        <a:t>6</a:t>
+                      </a:r>
+                    </a:p>
+                  </a:txBody>
+                  <a:tcPr/>
+                </a:tc>
+                <a:tc>
+                  <a:txBody>
+                    <a:bodyPr/>
+                    <a:lstStyle/>
+                    <a:p>
+                      <a:pPr algn="l">
+                        <a:defRPr sz="950" b="0"/>
+                      </a:pPr>
+                      <a:r>
+                        <a:t>Công ty CP PT CN Lam Sơn</a:t>
+                      </a:r>
+                    </a:p>
+                  </a:txBody>
+                  <a:tcPr/>
+                </a:tc>
+                <a:tc>
+                  <a:txBody>
+                    <a:bodyPr/>
+                    <a:lstStyle/>
+                    <a:p>
+                      <a:pPr algn="ctr">
+                        <a:defRPr sz="950" b="0"/>
+                      </a:pPr>
+                      <a:r>
+                        <a:t>7</a:t>
+                      </a:r>
+                    </a:p>
+                  </a:txBody>
+                  <a:tcPr/>
+                </a:tc>
+                <a:tc>
+                  <a:txBody>
+                    <a:bodyPr/>
+                    <a:lstStyle/>
+                    <a:p>
+                      <a:pPr algn="ctr">
+                        <a:defRPr sz="950" b="1">
+                          <a:solidFill>
+                            <a:srgbClr val="EE0033"/>
+                          </a:solidFill>
+                        </a:defRPr>
+                      </a:pPr>
+                      <a:r>
+                        <a:t>378</a:t>
+                      </a:r>
+                    </a:p>
+                  </a:txBody>
+                  <a:tcPr/>
+                </a:tc>
+                <a:tc>
+                  <a:txBody>
+                    <a:bodyPr/>
+                    <a:lstStyle/>
+                    <a:p>
+                      <a:pPr algn="ctr">
+                        <a:defRPr sz="950" b="1">
+                          <a:solidFill>
+                            <a:srgbClr val="EE0033"/>
+                          </a:solidFill>
+                        </a:defRPr>
+                      </a:pPr>
+                      <a:r>
+                        <a:t>6.14 Tỷ</a:t>
+                      </a:r>
+                    </a:p>
+                  </a:txBody>
+                  <a:tcPr/>
+                </a:tc>
+                <a:tc>
+                  <a:txBody>
+                    <a:bodyPr/>
+                    <a:lstStyle/>
+                    <a:p>
+                      <a:pPr algn="ctr">
+                        <a:defRPr sz="950" b="0"/>
+                      </a:pPr>
+                      <a:r>
+                        <a:t>6.14 Tỷ</a:t>
+                      </a:r>
+                    </a:p>
+                  </a:txBody>
+                  <a:tcPr/>
+                </a:tc>
+                <a:tc>
+                  <a:txBody>
+                    <a:bodyPr/>
+                    <a:lstStyle/>
+                    <a:p>
+                      <a:pPr algn="ctr">
+                        <a:defRPr sz="950" b="0">
+                          <a:solidFill>
+                            <a:srgbClr val="10B981"/>
+                          </a:solidFill>
+                        </a:defRPr>
+                      </a:pPr>
+                      <a:r>
+                        <a:t>1.61 Tỷ</a:t>
+                      </a:r>
+                    </a:p>
+                  </a:txBody>
+                  <a:tcPr/>
+                </a:tc>
+                <a:tc>
+                  <a:txBody>
+                    <a:bodyPr/>
+                    <a:lstStyle/>
+                    <a:p>
+                      <a:pPr algn="ctr">
+                        <a:defRPr sz="950" b="0"/>
+                      </a:pPr>
+                      <a:r>
+                        <a:t>0.00 Tỷ</a:t>
+                      </a:r>
+                    </a:p>
+                  </a:txBody>
+                  <a:tcPr/>
+                </a:tc>
+                <a:tc>
+                  <a:txBody>
+                    <a:bodyPr/>
+                    <a:lstStyle/>
+                    <a:p>
+                      <a:pPr algn="ctr">
+                        <a:defRPr sz="950" b="1">
+                          <a:solidFill>
+                            <a:srgbClr val="E11D48"/>
+                          </a:solidFill>
+                        </a:defRPr>
+                      </a:pPr>
+                      <a:r>
+                        <a:t>26.2%</a:t>
+                      </a:r>
+                    </a:p>
+                  </a:txBody>
+                  <a:tcPr/>
+                </a:tc>
+              </a:tr>
+              <a:tr h="512064">
+                <a:tc>
+                  <a:txBody>
+                    <a:bodyPr/>
+                    <a:lstStyle/>
+                    <a:p>
+                      <a:pPr algn="ctr">
+                        <a:defRPr sz="950" b="0"/>
+                      </a:pPr>
+                      <a:r>
+                        <a:t>7</a:t>
+                      </a:r>
+                    </a:p>
+                  </a:txBody>
+                  <a:tcPr/>
+                </a:tc>
+                <a:tc>
+                  <a:txBody>
+                    <a:bodyPr/>
+                    <a:lstStyle/>
+                    <a:p>
+                      <a:pPr algn="l">
+                        <a:defRPr sz="950" b="0"/>
+                      </a:pPr>
+                      <a:r>
+                        <a:t>Công Ty CP Công Nghệ &amp; TM Sài Gòn</a:t>
+                      </a:r>
+                    </a:p>
+                  </a:txBody>
+                  <a:tcPr/>
+                </a:tc>
+                <a:tc>
+                  <a:txBody>
+                    <a:bodyPr/>
+                    <a:lstStyle/>
+                    <a:p>
+                      <a:pPr algn="ctr">
+                        <a:defRPr sz="950" b="0"/>
+                      </a:pPr>
+                      <a:r>
+                        <a:t>19</a:t>
+                      </a:r>
+                    </a:p>
+                  </a:txBody>
+                  <a:tcPr/>
+                </a:tc>
+                <a:tc>
+                  <a:txBody>
+                    <a:bodyPr/>
+                    <a:lstStyle/>
+                    <a:p>
+                      <a:pPr algn="ctr">
+                        <a:defRPr sz="950" b="1">
+                          <a:solidFill>
+                            <a:srgbClr val="EE0033"/>
+                          </a:solidFill>
+                        </a:defRPr>
+                      </a:pPr>
+                      <a:r>
+                        <a:t>177</a:t>
+                      </a:r>
+                    </a:p>
+                  </a:txBody>
+                  <a:tcPr/>
+                </a:tc>
+                <a:tc>
+                  <a:txBody>
+                    <a:bodyPr/>
+                    <a:lstStyle/>
+                    <a:p>
+                      <a:pPr algn="ctr">
+                        <a:defRPr sz="950" b="1">
+                          <a:solidFill>
+                            <a:srgbClr val="EE0033"/>
+                          </a:solidFill>
+                        </a:defRPr>
+                      </a:pPr>
+                      <a:r>
+                        <a:t>4.53 Tỷ</a:t>
+                      </a:r>
+                    </a:p>
+                  </a:txBody>
+                  <a:tcPr/>
+                </a:tc>
+                <a:tc>
+                  <a:txBody>
+                    <a:bodyPr/>
+                    <a:lstStyle/>
+                    <a:p>
+                      <a:pPr algn="ctr">
+                        <a:defRPr sz="950" b="0"/>
+                      </a:pPr>
+                      <a:r>
+                        <a:t>4.71 Tỷ</a:t>
+                      </a:r>
+                    </a:p>
+                  </a:txBody>
+                  <a:tcPr/>
+                </a:tc>
+                <a:tc>
+                  <a:txBody>
+                    <a:bodyPr/>
+                    <a:lstStyle/>
+                    <a:p>
+                      <a:pPr algn="ctr">
+                        <a:defRPr sz="950" b="0">
+                          <a:solidFill>
+                            <a:srgbClr val="10B981"/>
+                          </a:solidFill>
+                        </a:defRPr>
+                      </a:pPr>
+                      <a:r>
+                        <a:t>0.79 Tỷ</a:t>
+                      </a:r>
+                    </a:p>
+                  </a:txBody>
+                  <a:tcPr/>
+                </a:tc>
+                <a:tc>
+                  <a:txBody>
+                    <a:bodyPr/>
+                    <a:lstStyle/>
+                    <a:p>
+                      <a:pPr algn="ctr">
+                        <a:defRPr sz="950" b="0"/>
+                      </a:pPr>
+                      <a:r>
+                        <a:t>0.00 Tỷ</a:t>
+                      </a:r>
+                    </a:p>
+                  </a:txBody>
+                  <a:tcPr/>
+                </a:tc>
+                <a:tc>
+                  <a:txBody>
+                    <a:bodyPr/>
+                    <a:lstStyle/>
+                    <a:p>
+                      <a:pPr algn="ctr">
+                        <a:defRPr sz="950" b="1">
+                          <a:solidFill>
+                            <a:srgbClr val="E11D48"/>
+                          </a:solidFill>
+                        </a:defRPr>
+                      </a:pPr>
+                      <a:r>
+                        <a:t>16.8%</a:t>
+                      </a:r>
+                    </a:p>
+                  </a:txBody>
+                  <a:tcPr/>
+                </a:tc>
+              </a:tr>
+              <a:tr h="512064">
+                <a:tc>
+                  <a:txBody>
+                    <a:bodyPr/>
+                    <a:lstStyle/>
+                    <a:p>
+                      <a:pPr algn="ctr">
+                        <a:defRPr sz="950" b="0"/>
+                      </a:pPr>
+                      <a:r>
+                        <a:t>8</a:t>
+                      </a:r>
+                    </a:p>
+                  </a:txBody>
+                  <a:tcPr/>
+                </a:tc>
+                <a:tc>
+                  <a:txBody>
+                    <a:bodyPr/>
+                    <a:lstStyle/>
+                    <a:p>
+                      <a:pPr algn="l">
+                        <a:defRPr sz="950" b="0"/>
+                      </a:pPr>
+                      <a:r>
+                        <a:t>CÔNG TY TNHH VIỄN THÔNG LONG HẢI</a:t>
+                      </a:r>
+                    </a:p>
+                  </a:txBody>
+                  <a:tcPr/>
+                </a:tc>
+                <a:tc>
+                  <a:txBody>
+                    <a:bodyPr/>
+                    <a:lstStyle/>
+                    <a:p>
+                      <a:pPr algn="ctr">
+                        <a:defRPr sz="950" b="0"/>
+                      </a:pPr>
+                      <a:r>
+                        <a:t>10</a:t>
+                      </a:r>
+                    </a:p>
+                  </a:txBody>
+                  <a:tcPr/>
+                </a:tc>
+                <a:tc>
+                  <a:txBody>
+                    <a:bodyPr/>
+                    <a:lstStyle/>
+                    <a:p>
+                      <a:pPr algn="ctr">
+                        <a:defRPr sz="950" b="1">
+                          <a:solidFill>
+                            <a:srgbClr val="EE0033"/>
+                          </a:solidFill>
+                        </a:defRPr>
+                      </a:pPr>
+                      <a:r>
+                        <a:t>152</a:t>
+                      </a:r>
+                    </a:p>
+                  </a:txBody>
+                  <a:tcPr/>
+                </a:tc>
+                <a:tc>
+                  <a:txBody>
+                    <a:bodyPr/>
+                    <a:lstStyle/>
+                    <a:p>
+                      <a:pPr algn="ctr">
+                        <a:defRPr sz="950" b="1">
+                          <a:solidFill>
+                            <a:srgbClr val="EE0033"/>
+                          </a:solidFill>
+                        </a:defRPr>
+                      </a:pPr>
+                      <a:r>
+                        <a:t>3.86 Tỷ</a:t>
+                      </a:r>
+                    </a:p>
+                  </a:txBody>
+                  <a:tcPr/>
+                </a:tc>
+                <a:tc>
+                  <a:txBody>
+                    <a:bodyPr/>
+                    <a:lstStyle/>
+                    <a:p>
+                      <a:pPr algn="ctr">
+                        <a:defRPr sz="950" b="0"/>
+                      </a:pPr>
+                      <a:r>
+                        <a:t>4.22 Tỷ</a:t>
+                      </a:r>
+                    </a:p>
+                  </a:txBody>
+                  <a:tcPr/>
+                </a:tc>
+                <a:tc>
+                  <a:txBody>
+                    <a:bodyPr/>
+                    <a:lstStyle/>
+                    <a:p>
+                      <a:pPr algn="ctr">
+                        <a:defRPr sz="950" b="0">
+                          <a:solidFill>
+                            <a:srgbClr val="10B981"/>
+                          </a:solidFill>
+                        </a:defRPr>
+                      </a:pPr>
+                      <a:r>
+                        <a:t>0.39 Tỷ</a:t>
+                      </a:r>
+                    </a:p>
+                  </a:txBody>
+                  <a:tcPr/>
+                </a:tc>
+                <a:tc>
+                  <a:txBody>
+                    <a:bodyPr/>
+                    <a:lstStyle/>
+                    <a:p>
+                      <a:pPr algn="ctr">
+                        <a:defRPr sz="950" b="0"/>
+                      </a:pPr>
+                      <a:r>
+                        <a:t>0.00 Tỷ</a:t>
+                      </a:r>
+                    </a:p>
+                  </a:txBody>
+                  <a:tcPr/>
+                </a:tc>
+                <a:tc>
+                  <a:txBody>
+                    <a:bodyPr/>
+                    <a:lstStyle/>
+                    <a:p>
+                      <a:pPr algn="ctr">
+                        <a:defRPr sz="950" b="1">
+                          <a:solidFill>
+                            <a:srgbClr val="E11D48"/>
+                          </a:solidFill>
+                        </a:defRPr>
+                      </a:pPr>
+                      <a:r>
+                        <a:t>9.2%</a:t>
+                      </a:r>
+                    </a:p>
+                  </a:txBody>
+                  <a:tcPr/>
+                </a:tc>
+              </a:tr>
+              <a:tr h="512064">
+                <a:tc>
+                  <a:txBody>
+                    <a:bodyPr/>
+                    <a:lstStyle/>
+                    <a:p>
+                      <a:pPr algn="ctr">
+                        <a:defRPr sz="1050" b="1"/>
+                      </a:pPr>
+                      <a:r>
+                        <a:t>--</a:t>
+                      </a:r>
+                    </a:p>
+                  </a:txBody>
+                  <a:tcPr>
+                    <a:solidFill>
+                      <a:srgbClr val="FEF2F2"/>
+                    </a:solidFill>
+                  </a:tcPr>
+                </a:tc>
+                <a:tc>
+                  <a:txBody>
+                    <a:bodyPr/>
+                    <a:lstStyle/>
+                    <a:p>
+                      <a:pPr algn="l">
+                        <a:defRPr sz="1050" b="1"/>
+                      </a:pPr>
+                      <a:r>
+                        <a:t>TỔNG KHÁCH HÀNG KH THÁNG 9</a:t>
+                      </a:r>
+                    </a:p>
+                  </a:txBody>
+                  <a:tcPr>
+                    <a:solidFill>
+                      <a:srgbClr val="FEF2F2"/>
+                    </a:solidFill>
+                  </a:tcPr>
+                </a:tc>
+                <a:tc>
+                  <a:txBody>
+                    <a:bodyPr/>
+                    <a:lstStyle/>
+                    <a:p>
+                      <a:pPr algn="ctr">
+                        <a:defRPr sz="1050" b="1"/>
+                      </a:pPr>
+                      <a:r>
+                        <a:t>257</a:t>
+                      </a:r>
+                    </a:p>
+                  </a:txBody>
+                  <a:tcPr>
+                    <a:solidFill>
+                      <a:srgbClr val="FEF2F2"/>
+                    </a:solidFill>
+                  </a:tcPr>
+                </a:tc>
+                <a:tc>
+                  <a:txBody>
+                    <a:bodyPr/>
+                    <a:lstStyle/>
+                    <a:p>
+                      <a:pPr algn="ctr">
+                        <a:defRPr sz="1050" b="1">
+                          <a:solidFill>
+                            <a:srgbClr val="EE0033"/>
+                          </a:solidFill>
+                        </a:defRPr>
+                      </a:pPr>
+                      <a:r>
+                        <a:t>4,972</a:t>
+                      </a:r>
+                    </a:p>
+                  </a:txBody>
+                  <a:tcPr>
+                    <a:solidFill>
+                      <a:srgbClr val="FEF2F2"/>
+                    </a:solidFill>
+                  </a:tcPr>
+                </a:tc>
+                <a:tc>
+                  <a:txBody>
+                    <a:bodyPr/>
+                    <a:lstStyle/>
+                    <a:p>
+                      <a:pPr algn="ctr">
+                        <a:defRPr sz="1050" b="1">
+                          <a:solidFill>
+                            <a:srgbClr val="EE0033"/>
+                          </a:solidFill>
+                        </a:defRPr>
+                      </a:pPr>
+                      <a:r>
+                        <a:t>135.32 Tỷ</a:t>
+                      </a:r>
+                    </a:p>
+                  </a:txBody>
+                  <a:tcPr>
+                    <a:solidFill>
+                      <a:srgbClr val="FEF2F2"/>
+                    </a:solidFill>
+                  </a:tcPr>
+                </a:tc>
+                <a:tc>
+                  <a:txBody>
+                    <a:bodyPr/>
+                    <a:lstStyle/>
+                    <a:p>
+                      <a:pPr algn="ctr">
+                        <a:defRPr sz="1050" b="1"/>
+                      </a:pPr>
+                      <a:r>
+                        <a:t>143.58 Tỷ</a:t>
+                      </a:r>
+                    </a:p>
+                  </a:txBody>
+                  <a:tcPr>
+                    <a:solidFill>
+                      <a:srgbClr val="FEF2F2"/>
+                    </a:solidFill>
+                  </a:tcPr>
+                </a:tc>
+                <a:tc>
+                  <a:txBody>
+                    <a:bodyPr/>
+                    <a:lstStyle/>
+                    <a:p>
+                      <a:pPr algn="ctr">
+                        <a:defRPr sz="1050" b="1">
+                          <a:solidFill>
+                            <a:srgbClr val="10B981"/>
+                          </a:solidFill>
+                        </a:defRPr>
+                      </a:pPr>
+                      <a:r>
+                        <a:t>32.76 Tỷ</a:t>
+                      </a:r>
+                    </a:p>
+                  </a:txBody>
+                  <a:tcPr>
+                    <a:solidFill>
+                      <a:srgbClr val="FEF2F2"/>
+                    </a:solidFill>
+                  </a:tcPr>
+                </a:tc>
+                <a:tc>
+                  <a:txBody>
+                    <a:bodyPr/>
+                    <a:lstStyle/>
+                    <a:p>
+                      <a:pPr algn="ctr">
+                        <a:defRPr sz="1050" b="1"/>
+                      </a:pPr>
+                      <a:r>
+                        <a:t>0.00 Tỷ</a:t>
+                      </a:r>
+                    </a:p>
+                  </a:txBody>
+                  <a:tcPr>
+                    <a:solidFill>
+                      <a:srgbClr val="FEF2F2"/>
+                    </a:solidFill>
+                  </a:tcPr>
+                </a:tc>
+                <a:tc>
+                  <a:txBody>
+                    <a:bodyPr/>
+                    <a:lstStyle/>
+                    <a:p>
+                      <a:pPr algn="ctr">
+                        <a:defRPr sz="1050" b="1">
+                          <a:solidFill>
+                            <a:srgbClr val="EE0033"/>
+                          </a:solidFill>
+                        </a:defRPr>
+                      </a:pPr>
+                      <a:r>
+                        <a:t>22.8%</a:t>
+                      </a:r>
+                    </a:p>
+                  </a:txBody>
+                  <a:tcPr>
+                    <a:solidFill>
+                      <a:srgbClr val="FEF2F2"/>
+                    </a:solidFill>
+                  </a:tcPr>
+                </a:tc>
+              </a:tr>
+            </a:tbl>
+          </a:graphicData>
+        </a:graphic>
+      </p:graphicFrame>
+    </p:spTree>
+  </p:cSld>
+  <p:clrMapOvr>
+    <a:masterClrMapping/>
+  </p:clrMapOvr>
+</p:sld>
+</file>
+
+<file path=ppt/slides/slide6.xml><?xml version="1.0" encoding="utf-8"?>
+<p:sld xmlns:a="http://schemas.openxmlformats.org/drawingml/2006/main" xmlns:p="http://schemas.openxmlformats.org/presentationml/2006/main" xmlns:r="http://schemas.openxmlformats.org/officeDocument/2006/relationships">
+  <p:cSld>
+    <p:spTree>
+      <p:nvGrpSpPr>
+        <p:cNvPr id="1" name=""/>
+        <p:cNvGrpSpPr/>
+        <p:nvPr/>
+      </p:nvGrpSpPr>
+      <p:grpSpPr/>
+      <p:sp>
+        <p:nvSpPr>
+          <p:cNvPr id="2" name="TextBox 1"/>
+          <p:cNvSpPr txBox="1"/>
+          <p:nvPr/>
+        </p:nvSpPr>
+        <p:spPr>
+          <a:xfrm>
             <a:off x="731520" y="457200"/>
             <a:ext cx="10728655" cy="914400"/>
           </a:xfrm>
@@ -6643,7 +8364,7 @@
               </a:defRPr>
             </a:pPr>
             <a:r>
-              <a:t>SLIDE 5: KẾ HOẠCH HÀNH ĐỘNG THU HỒI CÔNG NỢ VTA &amp; KPI</a:t>
+              <a:t>SLIDE 6: KẾ HOẠCH HÀNH ĐỘNG THU HỒI CÔNG NỢ VTA &amp; KH THÁNG 9</a:t>
             </a:r>
           </a:p>
         </p:txBody>
@@ -6679,7 +8400,7 @@
               </a:defRPr>
             </a:pPr>
             <a:r>
-              <a:t>1. Tập trung xử lý Top 2 Đối tác VCC &amp; ACT (Chiếm 79% nợ VTA):</a:t>
+              <a:t>1. Tập trung xử lý Top 2 Đối tác VCC &amp; ACT (Chiếm 79% nợ VTA &amp; 50% KH T9):</a:t>
             </a:r>
           </a:p>
           <a:p>
@@ -6703,7 +8424,7 @@
               </a:defRPr>
             </a:pPr>
             <a:r>
-              <a:t>2. Xử lý triệt để Hợp đồng Chi phí Ký trước 2025 (&lt; 2025):</a:t>
+              <a:t>2. Thực hiện quyết liệt Kế hoạch Tháng 9 (4,972 CT / 135.32 Tỷ VTA):</a:t>
             </a:r>
           </a:p>
           <a:p>
@@ -6715,7 +8436,7 @@
               </a:defRPr>
             </a:pPr>
             <a:r>
-              <a:t>   → Tạm dừng thanh toán các đợt tiếp theo cho đến khi hoàn thành quyết toán công nợ cũ.</a:t>
+              <a:t>   → Đẩy nhanh tiến độ giải tỏa 32.76 Tỷ thu hồi vật tư A và rà soát vật tư cần nhập kho (Col P).</a:t>
             </a:r>
           </a:p>
           <a:p>
@@ -6727,7 +8448,7 @@
               </a:defRPr>
             </a:pPr>
             <a:r>
-              <a:t>3. Theo dõi sát 6 chỉ tiêu KPI (KHVTT, NT BQLDA, BGTS BQLDA, NT SAP, BGTS SAP, VHKT):</a:t>
+              <a:t>3. Theo dõi chi tiết 6 chỉ tiêu KPI (KHVTT, NT BQLDA, BGTS BQLDA, NT SAP, BGTS SAP, VHKT):</a:t>
             </a:r>
           </a:p>
           <a:p>
@@ -6739,7 +8460,7 @@
               </a:defRPr>
             </a:pPr>
             <a:r>
-              <a:t>   → Định kỳ hàng tuần cập nhật tiến độ giải tỏa công nợ VTA từng chỉ tiêu lên hệ thống Dashboard Online.</a:t>
+              <a:t>   → Định kỳ hàng tuần cập nhật tiến độ từng chỉ tiêu lên hệ thống Dashboard Online.</a:t>
             </a:r>
           </a:p>
           <a:p>

--- a/Bao_Cao_Viettel_Cong_No_VTA_Slide.pptx
+++ b/Bao_Cao_Viettel_Cong_No_VTA_Slide.pptx
@@ -3192,7 +3192,7 @@
               </a:defRPr>
             </a:pPr>
             <a:r>
-              <a:t>Phân tích Công nợ VTA (548.3 Tỷ), Chi tiết KPI &amp; Phân tích chuyên sâu Kế hoạch Tháng 9 (Col J)</a:t>
+              <a:t>Phân tích Công nợ VTA (548.3 Tỷ), Chi tiết KPI &amp; Phân tích chuyên sâu Kế hoạch Tháng 9</a:t>
             </a:r>
           </a:p>
         </p:txBody>
@@ -6644,7 +6644,7 @@
               </a:defRPr>
             </a:pPr>
             <a:r>
-              <a:t>SLIDE 5: PHÂN TÍCH CHUYÊN SÂU KẾ HOẠCH THÁNG 9 (CỘT J) THEO NHÀ THẦU</a:t>
+              <a:t>SLIDE 5: PHÂN TÍCH CHUYÊN SÂU KẾ HOẠCH THÁNG 9 THEO NHÀ THẦU</a:t>
             </a:r>
           </a:p>
           <a:p>
@@ -6773,7 +6773,7 @@
                         </a:defRPr>
                       </a:pPr>
                       <a:r>
-                        <a:t>CT KH T9 (Col J)</a:t>
+                        <a:t>CT KH T9</a:t>
                       </a:r>
                     </a:p>
                   </a:txBody>
@@ -6796,7 +6796,7 @@
                         </a:defRPr>
                       </a:pPr>
                       <a:r>
-                        <a:t>Công Nợ VTA R</a:t>
+                        <a:t>Công Nợ VTA (Tỷ)</a:t>
                       </a:r>
                     </a:p>
                   </a:txBody>
@@ -6819,7 +6819,7 @@
                         </a:defRPr>
                       </a:pPr>
                       <a:r>
-                        <a:t>Tồn VTTB L</a:t>
+                        <a:t>Tồn VTTB (Tỷ)</a:t>
                       </a:r>
                     </a:p>
                   </a:txBody>
@@ -6842,7 +6842,7 @@
                         </a:defRPr>
                       </a:pPr>
                       <a:r>
-                        <a:t>Đã Thu Hồi O</a:t>
+                        <a:t>Đã Thu Hồi (Tỷ)</a:t>
                       </a:r>
                     </a:p>
                   </a:txBody>
@@ -6865,7 +6865,7 @@
                         </a:defRPr>
                       </a:pPr>
                       <a:r>
-                        <a:t>Cần Nhập Kho P</a:t>
+                        <a:t>Cần Nhập Kho (Tỷ)</a:t>
                       </a:r>
                     </a:p>
                   </a:txBody>
